--- a/2_probability theory for machine learning.pptx
+++ b/2_probability theory for machine learning.pptx
@@ -5,10 +5,10 @@
     <p:sldMasterId id="2147483648" r:id="rId4"/>
   </p:sldMasterIdLst>
   <p:notesMasterIdLst>
-    <p:notesMasterId r:id="rId56"/>
+    <p:notesMasterId r:id="rId58"/>
   </p:notesMasterIdLst>
   <p:handoutMasterIdLst>
-    <p:handoutMasterId r:id="rId57"/>
+    <p:handoutMasterId r:id="rId59"/>
   </p:handoutMasterIdLst>
   <p:sldIdLst>
     <p:sldId id="256" r:id="rId5"/>
@@ -16,52 +16,54 @@
     <p:sldId id="361" r:id="rId7"/>
     <p:sldId id="360" r:id="rId8"/>
     <p:sldId id="313" r:id="rId9"/>
-    <p:sldId id="270" r:id="rId10"/>
-    <p:sldId id="271" r:id="rId11"/>
-    <p:sldId id="273" r:id="rId12"/>
-    <p:sldId id="362" r:id="rId13"/>
-    <p:sldId id="272" r:id="rId14"/>
-    <p:sldId id="276" r:id="rId15"/>
-    <p:sldId id="306" r:id="rId16"/>
-    <p:sldId id="307" r:id="rId17"/>
-    <p:sldId id="303" r:id="rId18"/>
-    <p:sldId id="309" r:id="rId19"/>
-    <p:sldId id="310" r:id="rId20"/>
-    <p:sldId id="311" r:id="rId21"/>
-    <p:sldId id="312" r:id="rId22"/>
-    <p:sldId id="316" r:id="rId23"/>
-    <p:sldId id="308" r:id="rId24"/>
-    <p:sldId id="299" r:id="rId25"/>
-    <p:sldId id="363" r:id="rId26"/>
-    <p:sldId id="277" r:id="rId27"/>
-    <p:sldId id="364" r:id="rId28"/>
-    <p:sldId id="275" r:id="rId29"/>
-    <p:sldId id="279" r:id="rId30"/>
-    <p:sldId id="278" r:id="rId31"/>
-    <p:sldId id="280" r:id="rId32"/>
-    <p:sldId id="281" r:id="rId33"/>
-    <p:sldId id="282" r:id="rId34"/>
-    <p:sldId id="283" r:id="rId35"/>
-    <p:sldId id="284" r:id="rId36"/>
-    <p:sldId id="285" r:id="rId37"/>
-    <p:sldId id="286" r:id="rId38"/>
-    <p:sldId id="288" r:id="rId39"/>
-    <p:sldId id="305" r:id="rId40"/>
-    <p:sldId id="304" r:id="rId41"/>
-    <p:sldId id="287" r:id="rId42"/>
-    <p:sldId id="289" r:id="rId43"/>
-    <p:sldId id="290" r:id="rId44"/>
-    <p:sldId id="291" r:id="rId45"/>
-    <p:sldId id="292" r:id="rId46"/>
-    <p:sldId id="365" r:id="rId47"/>
-    <p:sldId id="293" r:id="rId48"/>
-    <p:sldId id="300" r:id="rId49"/>
-    <p:sldId id="368" r:id="rId50"/>
-    <p:sldId id="367" r:id="rId51"/>
-    <p:sldId id="302" r:id="rId52"/>
-    <p:sldId id="317" r:id="rId53"/>
-    <p:sldId id="301" r:id="rId54"/>
-    <p:sldId id="359" r:id="rId55"/>
+    <p:sldId id="369" r:id="rId10"/>
+    <p:sldId id="370" r:id="rId11"/>
+    <p:sldId id="270" r:id="rId12"/>
+    <p:sldId id="271" r:id="rId13"/>
+    <p:sldId id="273" r:id="rId14"/>
+    <p:sldId id="362" r:id="rId15"/>
+    <p:sldId id="272" r:id="rId16"/>
+    <p:sldId id="276" r:id="rId17"/>
+    <p:sldId id="306" r:id="rId18"/>
+    <p:sldId id="307" r:id="rId19"/>
+    <p:sldId id="303" r:id="rId20"/>
+    <p:sldId id="309" r:id="rId21"/>
+    <p:sldId id="310" r:id="rId22"/>
+    <p:sldId id="311" r:id="rId23"/>
+    <p:sldId id="312" r:id="rId24"/>
+    <p:sldId id="316" r:id="rId25"/>
+    <p:sldId id="308" r:id="rId26"/>
+    <p:sldId id="299" r:id="rId27"/>
+    <p:sldId id="363" r:id="rId28"/>
+    <p:sldId id="277" r:id="rId29"/>
+    <p:sldId id="364" r:id="rId30"/>
+    <p:sldId id="275" r:id="rId31"/>
+    <p:sldId id="279" r:id="rId32"/>
+    <p:sldId id="278" r:id="rId33"/>
+    <p:sldId id="280" r:id="rId34"/>
+    <p:sldId id="281" r:id="rId35"/>
+    <p:sldId id="282" r:id="rId36"/>
+    <p:sldId id="283" r:id="rId37"/>
+    <p:sldId id="284" r:id="rId38"/>
+    <p:sldId id="285" r:id="rId39"/>
+    <p:sldId id="286" r:id="rId40"/>
+    <p:sldId id="288" r:id="rId41"/>
+    <p:sldId id="305" r:id="rId42"/>
+    <p:sldId id="304" r:id="rId43"/>
+    <p:sldId id="287" r:id="rId44"/>
+    <p:sldId id="289" r:id="rId45"/>
+    <p:sldId id="290" r:id="rId46"/>
+    <p:sldId id="291" r:id="rId47"/>
+    <p:sldId id="292" r:id="rId48"/>
+    <p:sldId id="365" r:id="rId49"/>
+    <p:sldId id="293" r:id="rId50"/>
+    <p:sldId id="300" r:id="rId51"/>
+    <p:sldId id="368" r:id="rId52"/>
+    <p:sldId id="367" r:id="rId53"/>
+    <p:sldId id="302" r:id="rId54"/>
+    <p:sldId id="317" r:id="rId55"/>
+    <p:sldId id="301" r:id="rId56"/>
+    <p:sldId id="359" r:id="rId57"/>
   </p:sldIdLst>
   <p:sldSz cx="12188825" cy="6858000"/>
   <p:notesSz cx="6858000" cy="9144000"/>
@@ -836,6 +838,115 @@
   <p:cSld>
     <p:spTree>
       <p:nvGrpSpPr>
+        <p:cNvPr id="1" name="">
+          <a:extLst>
+            <a:ext uri="{FF2B5EF4-FFF2-40B4-BE49-F238E27FC236}">
+              <a16:creationId xmlns:a16="http://schemas.microsoft.com/office/drawing/2014/main" id="{31B49C03-7ED9-E18F-2704-FAAEAED141B3}"/>
+            </a:ext>
+          </a:extLst>
+        </p:cNvPr>
+        <p:cNvGrpSpPr/>
+        <p:nvPr/>
+      </p:nvGrpSpPr>
+      <p:grpSpPr>
+        <a:xfrm>
+          <a:off x="0" y="0"/>
+          <a:ext cx="0" cy="0"/>
+          <a:chOff x="0" y="0"/>
+          <a:chExt cx="0" cy="0"/>
+        </a:xfrm>
+      </p:grpSpPr>
+      <p:sp>
+        <p:nvSpPr>
+          <p:cNvPr id="2" name="슬라이드 이미지 개체 틀 1">
+            <a:extLst>
+              <a:ext uri="{FF2B5EF4-FFF2-40B4-BE49-F238E27FC236}">
+                <a16:creationId xmlns:a16="http://schemas.microsoft.com/office/drawing/2014/main" id="{CBA04D1D-D6EF-0A87-11EC-F8B7A52CC4D5}"/>
+              </a:ext>
+            </a:extLst>
+          </p:cNvPr>
+          <p:cNvSpPr>
+            <a:spLocks noGrp="1" noRot="1" noChangeAspect="1"/>
+          </p:cNvSpPr>
+          <p:nvPr>
+            <p:ph type="sldImg"/>
+          </p:nvPr>
+        </p:nvSpPr>
+        <p:spPr/>
+      </p:sp>
+      <p:sp>
+        <p:nvSpPr>
+          <p:cNvPr id="3" name="슬라이드 노트 개체 틀 2">
+            <a:extLst>
+              <a:ext uri="{FF2B5EF4-FFF2-40B4-BE49-F238E27FC236}">
+                <a16:creationId xmlns:a16="http://schemas.microsoft.com/office/drawing/2014/main" id="{B764788F-B000-9A16-1526-CBDD7B483BB3}"/>
+              </a:ext>
+            </a:extLst>
+          </p:cNvPr>
+          <p:cNvSpPr>
+            <a:spLocks noGrp="1"/>
+          </p:cNvSpPr>
+          <p:nvPr>
+            <p:ph type="body" idx="1"/>
+          </p:nvPr>
+        </p:nvSpPr>
+        <p:spPr/>
+        <p:txBody>
+          <a:bodyPr/>
+          <a:lstStyle/>
+          <a:p>
+            <a:endParaRPr lang="ko-KR" altLang="en-US" dirty="0"/>
+          </a:p>
+        </p:txBody>
+      </p:sp>
+      <p:sp>
+        <p:nvSpPr>
+          <p:cNvPr id="4" name="슬라이드 번호 개체 틀 3">
+            <a:extLst>
+              <a:ext uri="{FF2B5EF4-FFF2-40B4-BE49-F238E27FC236}">
+                <a16:creationId xmlns:a16="http://schemas.microsoft.com/office/drawing/2014/main" id="{925B442F-FF04-49E8-21D8-AED1C028C16A}"/>
+              </a:ext>
+            </a:extLst>
+          </p:cNvPr>
+          <p:cNvSpPr>
+            <a:spLocks noGrp="1"/>
+          </p:cNvSpPr>
+          <p:nvPr>
+            <p:ph type="sldNum" sz="quarter" idx="10"/>
+          </p:nvPr>
+        </p:nvSpPr>
+        <p:spPr/>
+        <p:txBody>
+          <a:bodyPr/>
+          <a:lstStyle/>
+          <a:p>
+            <a:pPr rtl="0"/>
+            <a:fld id="{5FB91549-43BF-425A-AF25-75262019208C}" type="slidenum">
+              <a:rPr lang="en-US" altLang="ko-KR" smtClean="0"/>
+              <a:t>11</a:t>
+            </a:fld>
+            <a:endParaRPr lang="ko-KR" altLang="en-US" dirty="0"/>
+          </a:p>
+        </p:txBody>
+      </p:sp>
+    </p:spTree>
+    <p:extLst>
+      <p:ext uri="{BB962C8B-B14F-4D97-AF65-F5344CB8AC3E}">
+        <p14:creationId xmlns:p14="http://schemas.microsoft.com/office/powerpoint/2010/main" val="936135126"/>
+      </p:ext>
+    </p:extLst>
+  </p:cSld>
+  <p:clrMapOvr>
+    <a:masterClrMapping/>
+  </p:clrMapOvr>
+</p:notes>
+</file>
+
+<file path=ppt/notesSlides/notesSlide11.xml><?xml version="1.0" encoding="utf-8"?>
+<p:notes xmlns:a="http://schemas.openxmlformats.org/drawingml/2006/main" xmlns:r="http://schemas.openxmlformats.org/officeDocument/2006/relationships" xmlns:p="http://schemas.openxmlformats.org/presentationml/2006/main">
+  <p:cSld>
+    <p:spTree>
+      <p:nvGrpSpPr>
         <p:cNvPr id="1" name=""/>
         <p:cNvGrpSpPr/>
         <p:nvPr/>
@@ -897,7 +1008,92 @@
             <a:pPr rtl="0"/>
             <a:fld id="{5FB91549-43BF-425A-AF25-75262019208C}" type="slidenum">
               <a:rPr lang="en-US" altLang="ko-KR" smtClean="0"/>
-              <a:t>11</a:t>
+              <a:t>12</a:t>
+            </a:fld>
+            <a:endParaRPr lang="ko-KR" altLang="en-US" dirty="0"/>
+          </a:p>
+        </p:txBody>
+      </p:sp>
+    </p:spTree>
+    <p:extLst>
+      <p:ext uri="{BB962C8B-B14F-4D97-AF65-F5344CB8AC3E}">
+        <p14:creationId xmlns:p14="http://schemas.microsoft.com/office/powerpoint/2010/main" val="2471172051"/>
+      </p:ext>
+    </p:extLst>
+  </p:cSld>
+  <p:clrMapOvr>
+    <a:masterClrMapping/>
+  </p:clrMapOvr>
+</p:notes>
+</file>
+
+<file path=ppt/notesSlides/notesSlide12.xml><?xml version="1.0" encoding="utf-8"?>
+<p:notes xmlns:a="http://schemas.openxmlformats.org/drawingml/2006/main" xmlns:r="http://schemas.openxmlformats.org/officeDocument/2006/relationships" xmlns:p="http://schemas.openxmlformats.org/presentationml/2006/main">
+  <p:cSld>
+    <p:spTree>
+      <p:nvGrpSpPr>
+        <p:cNvPr id="1" name=""/>
+        <p:cNvGrpSpPr/>
+        <p:nvPr/>
+      </p:nvGrpSpPr>
+      <p:grpSpPr>
+        <a:xfrm>
+          <a:off x="0" y="0"/>
+          <a:ext cx="0" cy="0"/>
+          <a:chOff x="0" y="0"/>
+          <a:chExt cx="0" cy="0"/>
+        </a:xfrm>
+      </p:grpSpPr>
+      <p:sp>
+        <p:nvSpPr>
+          <p:cNvPr id="2" name="슬라이드 이미지 개체 틀 1"/>
+          <p:cNvSpPr>
+            <a:spLocks noGrp="1" noRot="1" noChangeAspect="1"/>
+          </p:cNvSpPr>
+          <p:nvPr>
+            <p:ph type="sldImg"/>
+          </p:nvPr>
+        </p:nvSpPr>
+        <p:spPr/>
+      </p:sp>
+      <p:sp>
+        <p:nvSpPr>
+          <p:cNvPr id="3" name="슬라이드 노트 개체 틀 2"/>
+          <p:cNvSpPr>
+            <a:spLocks noGrp="1"/>
+          </p:cNvSpPr>
+          <p:nvPr>
+            <p:ph type="body" idx="1"/>
+          </p:nvPr>
+        </p:nvSpPr>
+        <p:spPr/>
+        <p:txBody>
+          <a:bodyPr/>
+          <a:lstStyle/>
+          <a:p>
+            <a:endParaRPr lang="ko-KR" altLang="en-US" dirty="0"/>
+          </a:p>
+        </p:txBody>
+      </p:sp>
+      <p:sp>
+        <p:nvSpPr>
+          <p:cNvPr id="4" name="슬라이드 번호 개체 틀 3"/>
+          <p:cNvSpPr>
+            <a:spLocks noGrp="1"/>
+          </p:cNvSpPr>
+          <p:nvPr>
+            <p:ph type="sldNum" sz="quarter" idx="10"/>
+          </p:nvPr>
+        </p:nvSpPr>
+        <p:spPr/>
+        <p:txBody>
+          <a:bodyPr/>
+          <a:lstStyle/>
+          <a:p>
+            <a:pPr rtl="0"/>
+            <a:fld id="{5FB91549-43BF-425A-AF25-75262019208C}" type="slidenum">
+              <a:rPr lang="en-US" altLang="ko-KR" smtClean="0"/>
+              <a:t>13</a:t>
             </a:fld>
             <a:endParaRPr lang="ko-KR" altLang="en-US" dirty="0"/>
           </a:p>
@@ -916,7 +1112,7 @@
 </p:notes>
 </file>
 
-<file path=ppt/notesSlides/notesSlide11.xml><?xml version="1.0" encoding="utf-8"?>
+<file path=ppt/notesSlides/notesSlide13.xml><?xml version="1.0" encoding="utf-8"?>
 <p:notes xmlns:a="http://schemas.openxmlformats.org/drawingml/2006/main" xmlns:r="http://schemas.openxmlformats.org/officeDocument/2006/relationships" xmlns:p="http://schemas.openxmlformats.org/presentationml/2006/main">
   <p:cSld>
     <p:spTree>
@@ -1006,7 +1202,7 @@
             <a:pPr rtl="0"/>
             <a:fld id="{5FB91549-43BF-425A-AF25-75262019208C}" type="slidenum">
               <a:rPr lang="en-US" altLang="ko-KR" smtClean="0"/>
-              <a:t>12</a:t>
+              <a:t>14</a:t>
             </a:fld>
             <a:endParaRPr lang="ko-KR" altLang="en-US" dirty="0"/>
           </a:p>
@@ -1025,7 +1221,7 @@
 </p:notes>
 </file>
 
-<file path=ppt/notesSlides/notesSlide12.xml><?xml version="1.0" encoding="utf-8"?>
+<file path=ppt/notesSlides/notesSlide14.xml><?xml version="1.0" encoding="utf-8"?>
 <p:notes xmlns:a="http://schemas.openxmlformats.org/drawingml/2006/main" xmlns:r="http://schemas.openxmlformats.org/officeDocument/2006/relationships" xmlns:p="http://schemas.openxmlformats.org/presentationml/2006/main">
   <p:cSld>
     <p:spTree>
@@ -1115,7 +1311,7 @@
             <a:pPr rtl="0"/>
             <a:fld id="{5FB91549-43BF-425A-AF25-75262019208C}" type="slidenum">
               <a:rPr lang="en-US" altLang="ko-KR" smtClean="0"/>
-              <a:t>13</a:t>
+              <a:t>15</a:t>
             </a:fld>
             <a:endParaRPr lang="ko-KR" altLang="en-US" dirty="0"/>
           </a:p>
@@ -1134,7 +1330,7 @@
 </p:notes>
 </file>
 
-<file path=ppt/notesSlides/notesSlide13.xml><?xml version="1.0" encoding="utf-8"?>
+<file path=ppt/notesSlides/notesSlide15.xml><?xml version="1.0" encoding="utf-8"?>
 <p:notes xmlns:a="http://schemas.openxmlformats.org/drawingml/2006/main" xmlns:r="http://schemas.openxmlformats.org/officeDocument/2006/relationships" xmlns:p="http://schemas.openxmlformats.org/presentationml/2006/main">
   <p:cSld>
     <p:spTree>
@@ -1224,7 +1420,7 @@
             <a:pPr rtl="0"/>
             <a:fld id="{5FB91549-43BF-425A-AF25-75262019208C}" type="slidenum">
               <a:rPr lang="en-US" altLang="ko-KR" smtClean="0"/>
-              <a:t>14</a:t>
+              <a:t>16</a:t>
             </a:fld>
             <a:endParaRPr lang="ko-KR" altLang="en-US" dirty="0"/>
           </a:p>
@@ -1243,7 +1439,7 @@
 </p:notes>
 </file>
 
-<file path=ppt/notesSlides/notesSlide14.xml><?xml version="1.0" encoding="utf-8"?>
+<file path=ppt/notesSlides/notesSlide16.xml><?xml version="1.0" encoding="utf-8"?>
 <p:notes xmlns:a="http://schemas.openxmlformats.org/drawingml/2006/main" xmlns:r="http://schemas.openxmlformats.org/officeDocument/2006/relationships" xmlns:p="http://schemas.openxmlformats.org/presentationml/2006/main">
   <p:cSld>
     <p:spTree>
@@ -1333,7 +1529,7 @@
             <a:pPr rtl="0"/>
             <a:fld id="{5FB91549-43BF-425A-AF25-75262019208C}" type="slidenum">
               <a:rPr lang="en-US" altLang="ko-KR" smtClean="0"/>
-              <a:t>15</a:t>
+              <a:t>17</a:t>
             </a:fld>
             <a:endParaRPr lang="ko-KR" altLang="en-US" dirty="0"/>
           </a:p>
@@ -1352,7 +1548,7 @@
 </p:notes>
 </file>
 
-<file path=ppt/notesSlides/notesSlide15.xml><?xml version="1.0" encoding="utf-8"?>
+<file path=ppt/notesSlides/notesSlide17.xml><?xml version="1.0" encoding="utf-8"?>
 <p:notes xmlns:a="http://schemas.openxmlformats.org/drawingml/2006/main" xmlns:r="http://schemas.openxmlformats.org/officeDocument/2006/relationships" xmlns:p="http://schemas.openxmlformats.org/presentationml/2006/main">
   <p:cSld>
     <p:spTree>
@@ -1442,7 +1638,7 @@
             <a:pPr rtl="0"/>
             <a:fld id="{5FB91549-43BF-425A-AF25-75262019208C}" type="slidenum">
               <a:rPr lang="en-US" altLang="ko-KR" smtClean="0"/>
-              <a:t>16</a:t>
+              <a:t>18</a:t>
             </a:fld>
             <a:endParaRPr lang="ko-KR" altLang="en-US" dirty="0"/>
           </a:p>
@@ -1461,7 +1657,7 @@
 </p:notes>
 </file>
 
-<file path=ppt/notesSlides/notesSlide16.xml><?xml version="1.0" encoding="utf-8"?>
+<file path=ppt/notesSlides/notesSlide18.xml><?xml version="1.0" encoding="utf-8"?>
 <p:notes xmlns:a="http://schemas.openxmlformats.org/drawingml/2006/main" xmlns:r="http://schemas.openxmlformats.org/officeDocument/2006/relationships" xmlns:p="http://schemas.openxmlformats.org/presentationml/2006/main">
   <p:cSld>
     <p:spTree>
@@ -1551,7 +1747,7 @@
             <a:pPr rtl="0"/>
             <a:fld id="{5FB91549-43BF-425A-AF25-75262019208C}" type="slidenum">
               <a:rPr lang="en-US" altLang="ko-KR" smtClean="0"/>
-              <a:t>17</a:t>
+              <a:t>19</a:t>
             </a:fld>
             <a:endParaRPr lang="ko-KR" altLang="en-US" dirty="0"/>
           </a:p>
@@ -1570,7 +1766,7 @@
 </p:notes>
 </file>
 
-<file path=ppt/notesSlides/notesSlide17.xml><?xml version="1.0" encoding="utf-8"?>
+<file path=ppt/notesSlides/notesSlide19.xml><?xml version="1.0" encoding="utf-8"?>
 <p:notes xmlns:a="http://schemas.openxmlformats.org/drawingml/2006/main" xmlns:r="http://schemas.openxmlformats.org/officeDocument/2006/relationships" xmlns:p="http://schemas.openxmlformats.org/presentationml/2006/main">
   <p:cSld>
     <p:spTree>
@@ -1660,7 +1856,7 @@
             <a:pPr rtl="0"/>
             <a:fld id="{5FB91549-43BF-425A-AF25-75262019208C}" type="slidenum">
               <a:rPr lang="en-US" altLang="ko-KR" smtClean="0"/>
-              <a:t>18</a:t>
+              <a:t>20</a:t>
             </a:fld>
             <a:endParaRPr lang="ko-KR" altLang="en-US" dirty="0"/>
           </a:p>
@@ -1670,224 +1866,6 @@
     <p:extLst>
       <p:ext uri="{BB962C8B-B14F-4D97-AF65-F5344CB8AC3E}">
         <p14:creationId xmlns:p14="http://schemas.microsoft.com/office/powerpoint/2010/main" val="1537694472"/>
-      </p:ext>
-    </p:extLst>
-  </p:cSld>
-  <p:clrMapOvr>
-    <a:masterClrMapping/>
-  </p:clrMapOvr>
-</p:notes>
-</file>
-
-<file path=ppt/notesSlides/notesSlide18.xml><?xml version="1.0" encoding="utf-8"?>
-<p:notes xmlns:a="http://schemas.openxmlformats.org/drawingml/2006/main" xmlns:r="http://schemas.openxmlformats.org/officeDocument/2006/relationships" xmlns:p="http://schemas.openxmlformats.org/presentationml/2006/main">
-  <p:cSld>
-    <p:spTree>
-      <p:nvGrpSpPr>
-        <p:cNvPr id="1" name="">
-          <a:extLst>
-            <a:ext uri="{FF2B5EF4-FFF2-40B4-BE49-F238E27FC236}">
-              <a16:creationId xmlns:a16="http://schemas.microsoft.com/office/drawing/2014/main" id="{BDD22411-9270-E6DB-FEBE-D46F8926B454}"/>
-            </a:ext>
-          </a:extLst>
-        </p:cNvPr>
-        <p:cNvGrpSpPr/>
-        <p:nvPr/>
-      </p:nvGrpSpPr>
-      <p:grpSpPr>
-        <a:xfrm>
-          <a:off x="0" y="0"/>
-          <a:ext cx="0" cy="0"/>
-          <a:chOff x="0" y="0"/>
-          <a:chExt cx="0" cy="0"/>
-        </a:xfrm>
-      </p:grpSpPr>
-      <p:sp>
-        <p:nvSpPr>
-          <p:cNvPr id="2" name="슬라이드 이미지 개체 틀 1">
-            <a:extLst>
-              <a:ext uri="{FF2B5EF4-FFF2-40B4-BE49-F238E27FC236}">
-                <a16:creationId xmlns:a16="http://schemas.microsoft.com/office/drawing/2014/main" id="{E956ED2C-BF78-CEC5-FBBC-5DC4A6079330}"/>
-              </a:ext>
-            </a:extLst>
-          </p:cNvPr>
-          <p:cNvSpPr>
-            <a:spLocks noGrp="1" noRot="1" noChangeAspect="1"/>
-          </p:cNvSpPr>
-          <p:nvPr>
-            <p:ph type="sldImg"/>
-          </p:nvPr>
-        </p:nvSpPr>
-        <p:spPr/>
-      </p:sp>
-      <p:sp>
-        <p:nvSpPr>
-          <p:cNvPr id="3" name="슬라이드 노트 개체 틀 2">
-            <a:extLst>
-              <a:ext uri="{FF2B5EF4-FFF2-40B4-BE49-F238E27FC236}">
-                <a16:creationId xmlns:a16="http://schemas.microsoft.com/office/drawing/2014/main" id="{257732F5-3792-F895-162D-C2AD0B405ACF}"/>
-              </a:ext>
-            </a:extLst>
-          </p:cNvPr>
-          <p:cNvSpPr>
-            <a:spLocks noGrp="1"/>
-          </p:cNvSpPr>
-          <p:nvPr>
-            <p:ph type="body" idx="1"/>
-          </p:nvPr>
-        </p:nvSpPr>
-        <p:spPr/>
-        <p:txBody>
-          <a:bodyPr/>
-          <a:lstStyle/>
-          <a:p>
-            <a:endParaRPr lang="ko-KR" altLang="en-US" dirty="0"/>
-          </a:p>
-        </p:txBody>
-      </p:sp>
-      <p:sp>
-        <p:nvSpPr>
-          <p:cNvPr id="4" name="슬라이드 번호 개체 틀 3">
-            <a:extLst>
-              <a:ext uri="{FF2B5EF4-FFF2-40B4-BE49-F238E27FC236}">
-                <a16:creationId xmlns:a16="http://schemas.microsoft.com/office/drawing/2014/main" id="{4885A7E7-5426-4348-9A86-EB4EE258192D}"/>
-              </a:ext>
-            </a:extLst>
-          </p:cNvPr>
-          <p:cNvSpPr>
-            <a:spLocks noGrp="1"/>
-          </p:cNvSpPr>
-          <p:nvPr>
-            <p:ph type="sldNum" sz="quarter" idx="10"/>
-          </p:nvPr>
-        </p:nvSpPr>
-        <p:spPr/>
-        <p:txBody>
-          <a:bodyPr/>
-          <a:lstStyle/>
-          <a:p>
-            <a:pPr rtl="0"/>
-            <a:fld id="{5FB91549-43BF-425A-AF25-75262019208C}" type="slidenum">
-              <a:rPr lang="en-US" altLang="ko-KR" smtClean="0"/>
-              <a:t>19</a:t>
-            </a:fld>
-            <a:endParaRPr lang="ko-KR" altLang="en-US" dirty="0"/>
-          </a:p>
-        </p:txBody>
-      </p:sp>
-    </p:spTree>
-    <p:extLst>
-      <p:ext uri="{BB962C8B-B14F-4D97-AF65-F5344CB8AC3E}">
-        <p14:creationId xmlns:p14="http://schemas.microsoft.com/office/powerpoint/2010/main" val="1148398195"/>
-      </p:ext>
-    </p:extLst>
-  </p:cSld>
-  <p:clrMapOvr>
-    <a:masterClrMapping/>
-  </p:clrMapOvr>
-</p:notes>
-</file>
-
-<file path=ppt/notesSlides/notesSlide19.xml><?xml version="1.0" encoding="utf-8"?>
-<p:notes xmlns:a="http://schemas.openxmlformats.org/drawingml/2006/main" xmlns:r="http://schemas.openxmlformats.org/officeDocument/2006/relationships" xmlns:p="http://schemas.openxmlformats.org/presentationml/2006/main">
-  <p:cSld>
-    <p:spTree>
-      <p:nvGrpSpPr>
-        <p:cNvPr id="1" name="">
-          <a:extLst>
-            <a:ext uri="{FF2B5EF4-FFF2-40B4-BE49-F238E27FC236}">
-              <a16:creationId xmlns:a16="http://schemas.microsoft.com/office/drawing/2014/main" id="{D99E121C-7738-75D6-0814-6A4E7CB08D21}"/>
-            </a:ext>
-          </a:extLst>
-        </p:cNvPr>
-        <p:cNvGrpSpPr/>
-        <p:nvPr/>
-      </p:nvGrpSpPr>
-      <p:grpSpPr>
-        <a:xfrm>
-          <a:off x="0" y="0"/>
-          <a:ext cx="0" cy="0"/>
-          <a:chOff x="0" y="0"/>
-          <a:chExt cx="0" cy="0"/>
-        </a:xfrm>
-      </p:grpSpPr>
-      <p:sp>
-        <p:nvSpPr>
-          <p:cNvPr id="2" name="슬라이드 이미지 개체 틀 1">
-            <a:extLst>
-              <a:ext uri="{FF2B5EF4-FFF2-40B4-BE49-F238E27FC236}">
-                <a16:creationId xmlns:a16="http://schemas.microsoft.com/office/drawing/2014/main" id="{637A3E81-B9FA-E91D-7C38-C8ED94736AAA}"/>
-              </a:ext>
-            </a:extLst>
-          </p:cNvPr>
-          <p:cNvSpPr>
-            <a:spLocks noGrp="1" noRot="1" noChangeAspect="1"/>
-          </p:cNvSpPr>
-          <p:nvPr>
-            <p:ph type="sldImg"/>
-          </p:nvPr>
-        </p:nvSpPr>
-        <p:spPr/>
-      </p:sp>
-      <p:sp>
-        <p:nvSpPr>
-          <p:cNvPr id="3" name="슬라이드 노트 개체 틀 2">
-            <a:extLst>
-              <a:ext uri="{FF2B5EF4-FFF2-40B4-BE49-F238E27FC236}">
-                <a16:creationId xmlns:a16="http://schemas.microsoft.com/office/drawing/2014/main" id="{7901535F-59A7-36A0-5D62-31F70F03580F}"/>
-              </a:ext>
-            </a:extLst>
-          </p:cNvPr>
-          <p:cNvSpPr>
-            <a:spLocks noGrp="1"/>
-          </p:cNvSpPr>
-          <p:nvPr>
-            <p:ph type="body" idx="1"/>
-          </p:nvPr>
-        </p:nvSpPr>
-        <p:spPr/>
-        <p:txBody>
-          <a:bodyPr/>
-          <a:lstStyle/>
-          <a:p>
-            <a:endParaRPr lang="ko-KR" altLang="en-US" dirty="0"/>
-          </a:p>
-        </p:txBody>
-      </p:sp>
-      <p:sp>
-        <p:nvSpPr>
-          <p:cNvPr id="4" name="슬라이드 번호 개체 틀 3">
-            <a:extLst>
-              <a:ext uri="{FF2B5EF4-FFF2-40B4-BE49-F238E27FC236}">
-                <a16:creationId xmlns:a16="http://schemas.microsoft.com/office/drawing/2014/main" id="{2F52A0D9-A0EE-C08B-64CD-FA00E4A03FC2}"/>
-              </a:ext>
-            </a:extLst>
-          </p:cNvPr>
-          <p:cNvSpPr>
-            <a:spLocks noGrp="1"/>
-          </p:cNvSpPr>
-          <p:nvPr>
-            <p:ph type="sldNum" sz="quarter" idx="10"/>
-          </p:nvPr>
-        </p:nvSpPr>
-        <p:spPr/>
-        <p:txBody>
-          <a:bodyPr/>
-          <a:lstStyle/>
-          <a:p>
-            <a:pPr rtl="0"/>
-            <a:fld id="{5FB91549-43BF-425A-AF25-75262019208C}" type="slidenum">
-              <a:rPr lang="en-US" altLang="ko-KR" smtClean="0"/>
-              <a:t>20</a:t>
-            </a:fld>
-            <a:endParaRPr lang="ko-KR" altLang="en-US" dirty="0"/>
-          </a:p>
-        </p:txBody>
-      </p:sp>
-    </p:spTree>
-    <p:extLst>
-      <p:ext uri="{BB962C8B-B14F-4D97-AF65-F5344CB8AC3E}">
-        <p14:creationId xmlns:p14="http://schemas.microsoft.com/office/powerpoint/2010/main" val="2063969376"/>
       </p:ext>
     </p:extLst>
   </p:cSld>
@@ -2014,6 +1992,224 @@
         <p:cNvPr id="1" name="">
           <a:extLst>
             <a:ext uri="{FF2B5EF4-FFF2-40B4-BE49-F238E27FC236}">
+              <a16:creationId xmlns:a16="http://schemas.microsoft.com/office/drawing/2014/main" id="{BDD22411-9270-E6DB-FEBE-D46F8926B454}"/>
+            </a:ext>
+          </a:extLst>
+        </p:cNvPr>
+        <p:cNvGrpSpPr/>
+        <p:nvPr/>
+      </p:nvGrpSpPr>
+      <p:grpSpPr>
+        <a:xfrm>
+          <a:off x="0" y="0"/>
+          <a:ext cx="0" cy="0"/>
+          <a:chOff x="0" y="0"/>
+          <a:chExt cx="0" cy="0"/>
+        </a:xfrm>
+      </p:grpSpPr>
+      <p:sp>
+        <p:nvSpPr>
+          <p:cNvPr id="2" name="슬라이드 이미지 개체 틀 1">
+            <a:extLst>
+              <a:ext uri="{FF2B5EF4-FFF2-40B4-BE49-F238E27FC236}">
+                <a16:creationId xmlns:a16="http://schemas.microsoft.com/office/drawing/2014/main" id="{E956ED2C-BF78-CEC5-FBBC-5DC4A6079330}"/>
+              </a:ext>
+            </a:extLst>
+          </p:cNvPr>
+          <p:cNvSpPr>
+            <a:spLocks noGrp="1" noRot="1" noChangeAspect="1"/>
+          </p:cNvSpPr>
+          <p:nvPr>
+            <p:ph type="sldImg"/>
+          </p:nvPr>
+        </p:nvSpPr>
+        <p:spPr/>
+      </p:sp>
+      <p:sp>
+        <p:nvSpPr>
+          <p:cNvPr id="3" name="슬라이드 노트 개체 틀 2">
+            <a:extLst>
+              <a:ext uri="{FF2B5EF4-FFF2-40B4-BE49-F238E27FC236}">
+                <a16:creationId xmlns:a16="http://schemas.microsoft.com/office/drawing/2014/main" id="{257732F5-3792-F895-162D-C2AD0B405ACF}"/>
+              </a:ext>
+            </a:extLst>
+          </p:cNvPr>
+          <p:cNvSpPr>
+            <a:spLocks noGrp="1"/>
+          </p:cNvSpPr>
+          <p:nvPr>
+            <p:ph type="body" idx="1"/>
+          </p:nvPr>
+        </p:nvSpPr>
+        <p:spPr/>
+        <p:txBody>
+          <a:bodyPr/>
+          <a:lstStyle/>
+          <a:p>
+            <a:endParaRPr lang="ko-KR" altLang="en-US" dirty="0"/>
+          </a:p>
+        </p:txBody>
+      </p:sp>
+      <p:sp>
+        <p:nvSpPr>
+          <p:cNvPr id="4" name="슬라이드 번호 개체 틀 3">
+            <a:extLst>
+              <a:ext uri="{FF2B5EF4-FFF2-40B4-BE49-F238E27FC236}">
+                <a16:creationId xmlns:a16="http://schemas.microsoft.com/office/drawing/2014/main" id="{4885A7E7-5426-4348-9A86-EB4EE258192D}"/>
+              </a:ext>
+            </a:extLst>
+          </p:cNvPr>
+          <p:cNvSpPr>
+            <a:spLocks noGrp="1"/>
+          </p:cNvSpPr>
+          <p:nvPr>
+            <p:ph type="sldNum" sz="quarter" idx="10"/>
+          </p:nvPr>
+        </p:nvSpPr>
+        <p:spPr/>
+        <p:txBody>
+          <a:bodyPr/>
+          <a:lstStyle/>
+          <a:p>
+            <a:pPr rtl="0"/>
+            <a:fld id="{5FB91549-43BF-425A-AF25-75262019208C}" type="slidenum">
+              <a:rPr lang="en-US" altLang="ko-KR" smtClean="0"/>
+              <a:t>21</a:t>
+            </a:fld>
+            <a:endParaRPr lang="ko-KR" altLang="en-US" dirty="0"/>
+          </a:p>
+        </p:txBody>
+      </p:sp>
+    </p:spTree>
+    <p:extLst>
+      <p:ext uri="{BB962C8B-B14F-4D97-AF65-F5344CB8AC3E}">
+        <p14:creationId xmlns:p14="http://schemas.microsoft.com/office/powerpoint/2010/main" val="1148398195"/>
+      </p:ext>
+    </p:extLst>
+  </p:cSld>
+  <p:clrMapOvr>
+    <a:masterClrMapping/>
+  </p:clrMapOvr>
+</p:notes>
+</file>
+
+<file path=ppt/notesSlides/notesSlide21.xml><?xml version="1.0" encoding="utf-8"?>
+<p:notes xmlns:a="http://schemas.openxmlformats.org/drawingml/2006/main" xmlns:r="http://schemas.openxmlformats.org/officeDocument/2006/relationships" xmlns:p="http://schemas.openxmlformats.org/presentationml/2006/main">
+  <p:cSld>
+    <p:spTree>
+      <p:nvGrpSpPr>
+        <p:cNvPr id="1" name="">
+          <a:extLst>
+            <a:ext uri="{FF2B5EF4-FFF2-40B4-BE49-F238E27FC236}">
+              <a16:creationId xmlns:a16="http://schemas.microsoft.com/office/drawing/2014/main" id="{D99E121C-7738-75D6-0814-6A4E7CB08D21}"/>
+            </a:ext>
+          </a:extLst>
+        </p:cNvPr>
+        <p:cNvGrpSpPr/>
+        <p:nvPr/>
+      </p:nvGrpSpPr>
+      <p:grpSpPr>
+        <a:xfrm>
+          <a:off x="0" y="0"/>
+          <a:ext cx="0" cy="0"/>
+          <a:chOff x="0" y="0"/>
+          <a:chExt cx="0" cy="0"/>
+        </a:xfrm>
+      </p:grpSpPr>
+      <p:sp>
+        <p:nvSpPr>
+          <p:cNvPr id="2" name="슬라이드 이미지 개체 틀 1">
+            <a:extLst>
+              <a:ext uri="{FF2B5EF4-FFF2-40B4-BE49-F238E27FC236}">
+                <a16:creationId xmlns:a16="http://schemas.microsoft.com/office/drawing/2014/main" id="{637A3E81-B9FA-E91D-7C38-C8ED94736AAA}"/>
+              </a:ext>
+            </a:extLst>
+          </p:cNvPr>
+          <p:cNvSpPr>
+            <a:spLocks noGrp="1" noRot="1" noChangeAspect="1"/>
+          </p:cNvSpPr>
+          <p:nvPr>
+            <p:ph type="sldImg"/>
+          </p:nvPr>
+        </p:nvSpPr>
+        <p:spPr/>
+      </p:sp>
+      <p:sp>
+        <p:nvSpPr>
+          <p:cNvPr id="3" name="슬라이드 노트 개체 틀 2">
+            <a:extLst>
+              <a:ext uri="{FF2B5EF4-FFF2-40B4-BE49-F238E27FC236}">
+                <a16:creationId xmlns:a16="http://schemas.microsoft.com/office/drawing/2014/main" id="{7901535F-59A7-36A0-5D62-31F70F03580F}"/>
+              </a:ext>
+            </a:extLst>
+          </p:cNvPr>
+          <p:cNvSpPr>
+            <a:spLocks noGrp="1"/>
+          </p:cNvSpPr>
+          <p:nvPr>
+            <p:ph type="body" idx="1"/>
+          </p:nvPr>
+        </p:nvSpPr>
+        <p:spPr/>
+        <p:txBody>
+          <a:bodyPr/>
+          <a:lstStyle/>
+          <a:p>
+            <a:endParaRPr lang="ko-KR" altLang="en-US" dirty="0"/>
+          </a:p>
+        </p:txBody>
+      </p:sp>
+      <p:sp>
+        <p:nvSpPr>
+          <p:cNvPr id="4" name="슬라이드 번호 개체 틀 3">
+            <a:extLst>
+              <a:ext uri="{FF2B5EF4-FFF2-40B4-BE49-F238E27FC236}">
+                <a16:creationId xmlns:a16="http://schemas.microsoft.com/office/drawing/2014/main" id="{2F52A0D9-A0EE-C08B-64CD-FA00E4A03FC2}"/>
+              </a:ext>
+            </a:extLst>
+          </p:cNvPr>
+          <p:cNvSpPr>
+            <a:spLocks noGrp="1"/>
+          </p:cNvSpPr>
+          <p:nvPr>
+            <p:ph type="sldNum" sz="quarter" idx="10"/>
+          </p:nvPr>
+        </p:nvSpPr>
+        <p:spPr/>
+        <p:txBody>
+          <a:bodyPr/>
+          <a:lstStyle/>
+          <a:p>
+            <a:pPr rtl="0"/>
+            <a:fld id="{5FB91549-43BF-425A-AF25-75262019208C}" type="slidenum">
+              <a:rPr lang="en-US" altLang="ko-KR" smtClean="0"/>
+              <a:t>22</a:t>
+            </a:fld>
+            <a:endParaRPr lang="ko-KR" altLang="en-US" dirty="0"/>
+          </a:p>
+        </p:txBody>
+      </p:sp>
+    </p:spTree>
+    <p:extLst>
+      <p:ext uri="{BB962C8B-B14F-4D97-AF65-F5344CB8AC3E}">
+        <p14:creationId xmlns:p14="http://schemas.microsoft.com/office/powerpoint/2010/main" val="2063969376"/>
+      </p:ext>
+    </p:extLst>
+  </p:cSld>
+  <p:clrMapOvr>
+    <a:masterClrMapping/>
+  </p:clrMapOvr>
+</p:notes>
+</file>
+
+<file path=ppt/notesSlides/notesSlide22.xml><?xml version="1.0" encoding="utf-8"?>
+<p:notes xmlns:a="http://schemas.openxmlformats.org/drawingml/2006/main" xmlns:r="http://schemas.openxmlformats.org/officeDocument/2006/relationships" xmlns:p="http://schemas.openxmlformats.org/presentationml/2006/main">
+  <p:cSld>
+    <p:spTree>
+      <p:nvGrpSpPr>
+        <p:cNvPr id="1" name="">
+          <a:extLst>
+            <a:ext uri="{FF2B5EF4-FFF2-40B4-BE49-F238E27FC236}">
               <a16:creationId xmlns:a16="http://schemas.microsoft.com/office/drawing/2014/main" id="{48E11AD0-4C3D-624F-60D5-D6B10979AFDE}"/>
             </a:ext>
           </a:extLst>
@@ -2096,7 +2292,7 @@
             <a:pPr rtl="0"/>
             <a:fld id="{5FB91549-43BF-425A-AF25-75262019208C}" type="slidenum">
               <a:rPr lang="en-US" altLang="ko-KR" smtClean="0"/>
-              <a:t>21</a:t>
+              <a:t>23</a:t>
             </a:fld>
             <a:endParaRPr lang="ko-KR" altLang="en-US" dirty="0"/>
           </a:p>
@@ -2115,7 +2311,7 @@
 </p:notes>
 </file>
 
-<file path=ppt/notesSlides/notesSlide21.xml><?xml version="1.0" encoding="utf-8"?>
+<file path=ppt/notesSlides/notesSlide23.xml><?xml version="1.0" encoding="utf-8"?>
 <p:notes xmlns:a="http://schemas.openxmlformats.org/drawingml/2006/main" xmlns:r="http://schemas.openxmlformats.org/officeDocument/2006/relationships" xmlns:p="http://schemas.openxmlformats.org/presentationml/2006/main">
   <p:cSld>
     <p:spTree>
@@ -2205,7 +2401,7 @@
             <a:pPr rtl="0"/>
             <a:fld id="{5FB91549-43BF-425A-AF25-75262019208C}" type="slidenum">
               <a:rPr lang="en-US" altLang="ko-KR" smtClean="0"/>
-              <a:t>22</a:t>
+              <a:t>24</a:t>
             </a:fld>
             <a:endParaRPr lang="ko-KR" altLang="en-US" dirty="0"/>
           </a:p>
@@ -2215,200 +2411,6 @@
     <p:extLst>
       <p:ext uri="{BB962C8B-B14F-4D97-AF65-F5344CB8AC3E}">
         <p14:creationId xmlns:p14="http://schemas.microsoft.com/office/powerpoint/2010/main" val="2992897003"/>
-      </p:ext>
-    </p:extLst>
-  </p:cSld>
-  <p:clrMapOvr>
-    <a:masterClrMapping/>
-  </p:clrMapOvr>
-</p:notes>
-</file>
-
-<file path=ppt/notesSlides/notesSlide22.xml><?xml version="1.0" encoding="utf-8"?>
-<p:notes xmlns:a="http://schemas.openxmlformats.org/drawingml/2006/main" xmlns:r="http://schemas.openxmlformats.org/officeDocument/2006/relationships" xmlns:p="http://schemas.openxmlformats.org/presentationml/2006/main">
-  <p:cSld>
-    <p:spTree>
-      <p:nvGrpSpPr>
-        <p:cNvPr id="1" name=""/>
-        <p:cNvGrpSpPr/>
-        <p:nvPr/>
-      </p:nvGrpSpPr>
-      <p:grpSpPr>
-        <a:xfrm>
-          <a:off x="0" y="0"/>
-          <a:ext cx="0" cy="0"/>
-          <a:chOff x="0" y="0"/>
-          <a:chExt cx="0" cy="0"/>
-        </a:xfrm>
-      </p:grpSpPr>
-      <p:sp>
-        <p:nvSpPr>
-          <p:cNvPr id="2" name="슬라이드 이미지 개체 틀 1"/>
-          <p:cNvSpPr>
-            <a:spLocks noGrp="1" noRot="1" noChangeAspect="1"/>
-          </p:cNvSpPr>
-          <p:nvPr>
-            <p:ph type="sldImg"/>
-          </p:nvPr>
-        </p:nvSpPr>
-        <p:spPr/>
-      </p:sp>
-      <p:sp>
-        <p:nvSpPr>
-          <p:cNvPr id="3" name="슬라이드 노트 개체 틀 2"/>
-          <p:cNvSpPr>
-            <a:spLocks noGrp="1"/>
-          </p:cNvSpPr>
-          <p:nvPr>
-            <p:ph type="body" idx="1"/>
-          </p:nvPr>
-        </p:nvSpPr>
-        <p:spPr/>
-        <p:txBody>
-          <a:bodyPr/>
-          <a:lstStyle/>
-          <a:p>
-            <a:endParaRPr lang="ko-KR" altLang="en-US" dirty="0"/>
-          </a:p>
-        </p:txBody>
-      </p:sp>
-      <p:sp>
-        <p:nvSpPr>
-          <p:cNvPr id="4" name="슬라이드 번호 개체 틀 3"/>
-          <p:cNvSpPr>
-            <a:spLocks noGrp="1"/>
-          </p:cNvSpPr>
-          <p:nvPr>
-            <p:ph type="sldNum" sz="quarter" idx="10"/>
-          </p:nvPr>
-        </p:nvSpPr>
-        <p:spPr/>
-        <p:txBody>
-          <a:bodyPr/>
-          <a:lstStyle/>
-          <a:p>
-            <a:pPr rtl="0"/>
-            <a:fld id="{5FB91549-43BF-425A-AF25-75262019208C}" type="slidenum">
-              <a:rPr lang="en-US" altLang="ko-KR" smtClean="0"/>
-              <a:t>23</a:t>
-            </a:fld>
-            <a:endParaRPr lang="ko-KR" altLang="en-US" dirty="0"/>
-          </a:p>
-        </p:txBody>
-      </p:sp>
-    </p:spTree>
-    <p:extLst>
-      <p:ext uri="{BB962C8B-B14F-4D97-AF65-F5344CB8AC3E}">
-        <p14:creationId xmlns:p14="http://schemas.microsoft.com/office/powerpoint/2010/main" val="1570280327"/>
-      </p:ext>
-    </p:extLst>
-  </p:cSld>
-  <p:clrMapOvr>
-    <a:masterClrMapping/>
-  </p:clrMapOvr>
-</p:notes>
-</file>
-
-<file path=ppt/notesSlides/notesSlide23.xml><?xml version="1.0" encoding="utf-8"?>
-<p:notes xmlns:a="http://schemas.openxmlformats.org/drawingml/2006/main" xmlns:r="http://schemas.openxmlformats.org/officeDocument/2006/relationships" xmlns:p="http://schemas.openxmlformats.org/presentationml/2006/main">
-  <p:cSld>
-    <p:spTree>
-      <p:nvGrpSpPr>
-        <p:cNvPr id="1" name="">
-          <a:extLst>
-            <a:ext uri="{FF2B5EF4-FFF2-40B4-BE49-F238E27FC236}">
-              <a16:creationId xmlns:a16="http://schemas.microsoft.com/office/drawing/2014/main" id="{0B000713-FD03-D49C-FBF0-0EF02047A611}"/>
-            </a:ext>
-          </a:extLst>
-        </p:cNvPr>
-        <p:cNvGrpSpPr/>
-        <p:nvPr/>
-      </p:nvGrpSpPr>
-      <p:grpSpPr>
-        <a:xfrm>
-          <a:off x="0" y="0"/>
-          <a:ext cx="0" cy="0"/>
-          <a:chOff x="0" y="0"/>
-          <a:chExt cx="0" cy="0"/>
-        </a:xfrm>
-      </p:grpSpPr>
-      <p:sp>
-        <p:nvSpPr>
-          <p:cNvPr id="2" name="슬라이드 이미지 개체 틀 1">
-            <a:extLst>
-              <a:ext uri="{FF2B5EF4-FFF2-40B4-BE49-F238E27FC236}">
-                <a16:creationId xmlns:a16="http://schemas.microsoft.com/office/drawing/2014/main" id="{6A6B0937-21B6-B13F-3650-F4F6DF3C2502}"/>
-              </a:ext>
-            </a:extLst>
-          </p:cNvPr>
-          <p:cNvSpPr>
-            <a:spLocks noGrp="1" noRot="1" noChangeAspect="1"/>
-          </p:cNvSpPr>
-          <p:nvPr>
-            <p:ph type="sldImg"/>
-          </p:nvPr>
-        </p:nvSpPr>
-        <p:spPr/>
-      </p:sp>
-      <p:sp>
-        <p:nvSpPr>
-          <p:cNvPr id="3" name="슬라이드 노트 개체 틀 2">
-            <a:extLst>
-              <a:ext uri="{FF2B5EF4-FFF2-40B4-BE49-F238E27FC236}">
-                <a16:creationId xmlns:a16="http://schemas.microsoft.com/office/drawing/2014/main" id="{E8BD0767-8F2A-2DCC-2223-4167581932DA}"/>
-              </a:ext>
-            </a:extLst>
-          </p:cNvPr>
-          <p:cNvSpPr>
-            <a:spLocks noGrp="1"/>
-          </p:cNvSpPr>
-          <p:nvPr>
-            <p:ph type="body" idx="1"/>
-          </p:nvPr>
-        </p:nvSpPr>
-        <p:spPr/>
-        <p:txBody>
-          <a:bodyPr/>
-          <a:lstStyle/>
-          <a:p>
-            <a:endParaRPr lang="ko-KR" altLang="en-US" dirty="0"/>
-          </a:p>
-        </p:txBody>
-      </p:sp>
-      <p:sp>
-        <p:nvSpPr>
-          <p:cNvPr id="4" name="슬라이드 번호 개체 틀 3">
-            <a:extLst>
-              <a:ext uri="{FF2B5EF4-FFF2-40B4-BE49-F238E27FC236}">
-                <a16:creationId xmlns:a16="http://schemas.microsoft.com/office/drawing/2014/main" id="{8FFE6568-4A54-77FA-F9F1-1AE7B4089E8B}"/>
-              </a:ext>
-            </a:extLst>
-          </p:cNvPr>
-          <p:cNvSpPr>
-            <a:spLocks noGrp="1"/>
-          </p:cNvSpPr>
-          <p:nvPr>
-            <p:ph type="sldNum" sz="quarter" idx="10"/>
-          </p:nvPr>
-        </p:nvSpPr>
-        <p:spPr/>
-        <p:txBody>
-          <a:bodyPr/>
-          <a:lstStyle/>
-          <a:p>
-            <a:pPr rtl="0"/>
-            <a:fld id="{5FB91549-43BF-425A-AF25-75262019208C}" type="slidenum">
-              <a:rPr lang="en-US" altLang="ko-KR" smtClean="0"/>
-              <a:t>24</a:t>
-            </a:fld>
-            <a:endParaRPr lang="ko-KR" altLang="en-US" dirty="0"/>
-          </a:p>
-        </p:txBody>
-      </p:sp>
-    </p:spTree>
-    <p:extLst>
-      <p:ext uri="{BB962C8B-B14F-4D97-AF65-F5344CB8AC3E}">
-        <p14:creationId xmlns:p14="http://schemas.microsoft.com/office/powerpoint/2010/main" val="2345004677"/>
       </p:ext>
     </p:extLst>
   </p:cSld>
@@ -2493,7 +2495,7 @@
     </p:spTree>
     <p:extLst>
       <p:ext uri="{BB962C8B-B14F-4D97-AF65-F5344CB8AC3E}">
-        <p14:creationId xmlns:p14="http://schemas.microsoft.com/office/powerpoint/2010/main" val="417236646"/>
+        <p14:creationId xmlns:p14="http://schemas.microsoft.com/office/powerpoint/2010/main" val="1570280327"/>
       </p:ext>
     </p:extLst>
   </p:cSld>
@@ -2508,7 +2510,13 @@
   <p:cSld>
     <p:spTree>
       <p:nvGrpSpPr>
-        <p:cNvPr id="1" name=""/>
+        <p:cNvPr id="1" name="">
+          <a:extLst>
+            <a:ext uri="{FF2B5EF4-FFF2-40B4-BE49-F238E27FC236}">
+              <a16:creationId xmlns:a16="http://schemas.microsoft.com/office/drawing/2014/main" id="{0B000713-FD03-D49C-FBF0-0EF02047A611}"/>
+            </a:ext>
+          </a:extLst>
+        </p:cNvPr>
         <p:cNvGrpSpPr/>
         <p:nvPr/>
       </p:nvGrpSpPr>
@@ -2522,7 +2530,13 @@
       </p:grpSpPr>
       <p:sp>
         <p:nvSpPr>
-          <p:cNvPr id="2" name="슬라이드 이미지 개체 틀 1"/>
+          <p:cNvPr id="2" name="슬라이드 이미지 개체 틀 1">
+            <a:extLst>
+              <a:ext uri="{FF2B5EF4-FFF2-40B4-BE49-F238E27FC236}">
+                <a16:creationId xmlns:a16="http://schemas.microsoft.com/office/drawing/2014/main" id="{6A6B0937-21B6-B13F-3650-F4F6DF3C2502}"/>
+              </a:ext>
+            </a:extLst>
+          </p:cNvPr>
           <p:cNvSpPr>
             <a:spLocks noGrp="1" noRot="1" noChangeAspect="1"/>
           </p:cNvSpPr>
@@ -2534,7 +2548,13 @@
       </p:sp>
       <p:sp>
         <p:nvSpPr>
-          <p:cNvPr id="3" name="슬라이드 노트 개체 틀 2"/>
+          <p:cNvPr id="3" name="슬라이드 노트 개체 틀 2">
+            <a:extLst>
+              <a:ext uri="{FF2B5EF4-FFF2-40B4-BE49-F238E27FC236}">
+                <a16:creationId xmlns:a16="http://schemas.microsoft.com/office/drawing/2014/main" id="{E8BD0767-8F2A-2DCC-2223-4167581932DA}"/>
+              </a:ext>
+            </a:extLst>
+          </p:cNvPr>
           <p:cNvSpPr>
             <a:spLocks noGrp="1"/>
           </p:cNvSpPr>
@@ -2553,7 +2573,13 @@
       </p:sp>
       <p:sp>
         <p:nvSpPr>
-          <p:cNvPr id="4" name="슬라이드 번호 개체 틀 3"/>
+          <p:cNvPr id="4" name="슬라이드 번호 개체 틀 3">
+            <a:extLst>
+              <a:ext uri="{FF2B5EF4-FFF2-40B4-BE49-F238E27FC236}">
+                <a16:creationId xmlns:a16="http://schemas.microsoft.com/office/drawing/2014/main" id="{8FFE6568-4A54-77FA-F9F1-1AE7B4089E8B}"/>
+              </a:ext>
+            </a:extLst>
+          </p:cNvPr>
           <p:cNvSpPr>
             <a:spLocks noGrp="1"/>
           </p:cNvSpPr>
@@ -2578,7 +2604,7 @@
     </p:spTree>
     <p:extLst>
       <p:ext uri="{BB962C8B-B14F-4D97-AF65-F5344CB8AC3E}">
-        <p14:creationId xmlns:p14="http://schemas.microsoft.com/office/powerpoint/2010/main" val="1859854746"/>
+        <p14:creationId xmlns:p14="http://schemas.microsoft.com/office/powerpoint/2010/main" val="2345004677"/>
       </p:ext>
     </p:extLst>
   </p:cSld>
@@ -2663,7 +2689,7 @@
     </p:spTree>
     <p:extLst>
       <p:ext uri="{BB962C8B-B14F-4D97-AF65-F5344CB8AC3E}">
-        <p14:creationId xmlns:p14="http://schemas.microsoft.com/office/powerpoint/2010/main" val="1742991105"/>
+        <p14:creationId xmlns:p14="http://schemas.microsoft.com/office/powerpoint/2010/main" val="417236646"/>
       </p:ext>
     </p:extLst>
   </p:cSld>
@@ -2748,7 +2774,7 @@
     </p:spTree>
     <p:extLst>
       <p:ext uri="{BB962C8B-B14F-4D97-AF65-F5344CB8AC3E}">
-        <p14:creationId xmlns:p14="http://schemas.microsoft.com/office/powerpoint/2010/main" val="2175324035"/>
+        <p14:creationId xmlns:p14="http://schemas.microsoft.com/office/powerpoint/2010/main" val="1859854746"/>
       </p:ext>
     </p:extLst>
   </p:cSld>
@@ -2833,7 +2859,7 @@
     </p:spTree>
     <p:extLst>
       <p:ext uri="{BB962C8B-B14F-4D97-AF65-F5344CB8AC3E}">
-        <p14:creationId xmlns:p14="http://schemas.microsoft.com/office/powerpoint/2010/main" val="2021159295"/>
+        <p14:creationId xmlns:p14="http://schemas.microsoft.com/office/powerpoint/2010/main" val="1742991105"/>
       </p:ext>
     </p:extLst>
   </p:cSld>
@@ -2918,7 +2944,7 @@
     </p:spTree>
     <p:extLst>
       <p:ext uri="{BB962C8B-B14F-4D97-AF65-F5344CB8AC3E}">
-        <p14:creationId xmlns:p14="http://schemas.microsoft.com/office/powerpoint/2010/main" val="4132765165"/>
+        <p14:creationId xmlns:p14="http://schemas.microsoft.com/office/powerpoint/2010/main" val="2175324035"/>
       </p:ext>
     </p:extLst>
   </p:cSld>
@@ -3112,7 +3138,7 @@
     </p:spTree>
     <p:extLst>
       <p:ext uri="{BB962C8B-B14F-4D97-AF65-F5344CB8AC3E}">
-        <p14:creationId xmlns:p14="http://schemas.microsoft.com/office/powerpoint/2010/main" val="1828566528"/>
+        <p14:creationId xmlns:p14="http://schemas.microsoft.com/office/powerpoint/2010/main" val="2021159295"/>
       </p:ext>
     </p:extLst>
   </p:cSld>
@@ -3197,7 +3223,7 @@
     </p:spTree>
     <p:extLst>
       <p:ext uri="{BB962C8B-B14F-4D97-AF65-F5344CB8AC3E}">
-        <p14:creationId xmlns:p14="http://schemas.microsoft.com/office/powerpoint/2010/main" val="2141981757"/>
+        <p14:creationId xmlns:p14="http://schemas.microsoft.com/office/powerpoint/2010/main" val="4132765165"/>
       </p:ext>
     </p:extLst>
   </p:cSld>
@@ -3282,7 +3308,7 @@
     </p:spTree>
     <p:extLst>
       <p:ext uri="{BB962C8B-B14F-4D97-AF65-F5344CB8AC3E}">
-        <p14:creationId xmlns:p14="http://schemas.microsoft.com/office/powerpoint/2010/main" val="962921618"/>
+        <p14:creationId xmlns:p14="http://schemas.microsoft.com/office/powerpoint/2010/main" val="1828566528"/>
       </p:ext>
     </p:extLst>
   </p:cSld>
@@ -3367,7 +3393,7 @@
     </p:spTree>
     <p:extLst>
       <p:ext uri="{BB962C8B-B14F-4D97-AF65-F5344CB8AC3E}">
-        <p14:creationId xmlns:p14="http://schemas.microsoft.com/office/powerpoint/2010/main" val="437175133"/>
+        <p14:creationId xmlns:p14="http://schemas.microsoft.com/office/powerpoint/2010/main" val="2141981757"/>
       </p:ext>
     </p:extLst>
   </p:cSld>
@@ -3452,7 +3478,7 @@
     </p:spTree>
     <p:extLst>
       <p:ext uri="{BB962C8B-B14F-4D97-AF65-F5344CB8AC3E}">
-        <p14:creationId xmlns:p14="http://schemas.microsoft.com/office/powerpoint/2010/main" val="749910473"/>
+        <p14:creationId xmlns:p14="http://schemas.microsoft.com/office/powerpoint/2010/main" val="962921618"/>
       </p:ext>
     </p:extLst>
   </p:cSld>
@@ -3467,13 +3493,7 @@
   <p:cSld>
     <p:spTree>
       <p:nvGrpSpPr>
-        <p:cNvPr id="1" name="">
-          <a:extLst>
-            <a:ext uri="{FF2B5EF4-FFF2-40B4-BE49-F238E27FC236}">
-              <a16:creationId xmlns:a16="http://schemas.microsoft.com/office/drawing/2014/main" id="{61B6F7BB-F0AD-4DAF-9FC7-AB22B8195451}"/>
-            </a:ext>
-          </a:extLst>
-        </p:cNvPr>
+        <p:cNvPr id="1" name=""/>
         <p:cNvGrpSpPr/>
         <p:nvPr/>
       </p:nvGrpSpPr>
@@ -3487,13 +3507,7 @@
       </p:grpSpPr>
       <p:sp>
         <p:nvSpPr>
-          <p:cNvPr id="2" name="슬라이드 이미지 개체 틀 1">
-            <a:extLst>
-              <a:ext uri="{FF2B5EF4-FFF2-40B4-BE49-F238E27FC236}">
-                <a16:creationId xmlns:a16="http://schemas.microsoft.com/office/drawing/2014/main" id="{3CF8231D-BFAF-ED2F-4D76-6AAA07BFAE6C}"/>
-              </a:ext>
-            </a:extLst>
-          </p:cNvPr>
+          <p:cNvPr id="2" name="슬라이드 이미지 개체 틀 1"/>
           <p:cNvSpPr>
             <a:spLocks noGrp="1" noRot="1" noChangeAspect="1"/>
           </p:cNvSpPr>
@@ -3505,13 +3519,7 @@
       </p:sp>
       <p:sp>
         <p:nvSpPr>
-          <p:cNvPr id="3" name="슬라이드 노트 개체 틀 2">
-            <a:extLst>
-              <a:ext uri="{FF2B5EF4-FFF2-40B4-BE49-F238E27FC236}">
-                <a16:creationId xmlns:a16="http://schemas.microsoft.com/office/drawing/2014/main" id="{355D4824-F3C3-47FE-8282-3E9B0860235F}"/>
-              </a:ext>
-            </a:extLst>
-          </p:cNvPr>
+          <p:cNvPr id="3" name="슬라이드 노트 개체 틀 2"/>
           <p:cNvSpPr>
             <a:spLocks noGrp="1"/>
           </p:cNvSpPr>
@@ -3530,13 +3538,7 @@
       </p:sp>
       <p:sp>
         <p:nvSpPr>
-          <p:cNvPr id="4" name="슬라이드 번호 개체 틀 3">
-            <a:extLst>
-              <a:ext uri="{FF2B5EF4-FFF2-40B4-BE49-F238E27FC236}">
-                <a16:creationId xmlns:a16="http://schemas.microsoft.com/office/drawing/2014/main" id="{51669B45-2404-4D36-0865-E80A334FD487}"/>
-              </a:ext>
-            </a:extLst>
-          </p:cNvPr>
+          <p:cNvPr id="4" name="슬라이드 번호 개체 틀 3"/>
           <p:cNvSpPr>
             <a:spLocks noGrp="1"/>
           </p:cNvSpPr>
@@ -3561,7 +3563,7 @@
     </p:spTree>
     <p:extLst>
       <p:ext uri="{BB962C8B-B14F-4D97-AF65-F5344CB8AC3E}">
-        <p14:creationId xmlns:p14="http://schemas.microsoft.com/office/powerpoint/2010/main" val="160666583"/>
+        <p14:creationId xmlns:p14="http://schemas.microsoft.com/office/powerpoint/2010/main" val="437175133"/>
       </p:ext>
     </p:extLst>
   </p:cSld>
@@ -3637,7 +3639,7 @@
             <a:pPr rtl="0"/>
             <a:fld id="{5FB91549-43BF-425A-AF25-75262019208C}" type="slidenum">
               <a:rPr lang="en-US" altLang="ko-KR" smtClean="0"/>
-              <a:t>38</a:t>
+              <a:t>37</a:t>
             </a:fld>
             <a:endParaRPr lang="ko-KR" altLang="en-US" dirty="0"/>
           </a:p>
@@ -3646,7 +3648,7 @@
     </p:spTree>
     <p:extLst>
       <p:ext uri="{BB962C8B-B14F-4D97-AF65-F5344CB8AC3E}">
-        <p14:creationId xmlns:p14="http://schemas.microsoft.com/office/powerpoint/2010/main" val="2317580753"/>
+        <p14:creationId xmlns:p14="http://schemas.microsoft.com/office/powerpoint/2010/main" val="749910473"/>
       </p:ext>
     </p:extLst>
   </p:cSld>
@@ -3661,7 +3663,13 @@
   <p:cSld>
     <p:spTree>
       <p:nvGrpSpPr>
-        <p:cNvPr id="1" name=""/>
+        <p:cNvPr id="1" name="">
+          <a:extLst>
+            <a:ext uri="{FF2B5EF4-FFF2-40B4-BE49-F238E27FC236}">
+              <a16:creationId xmlns:a16="http://schemas.microsoft.com/office/drawing/2014/main" id="{61B6F7BB-F0AD-4DAF-9FC7-AB22B8195451}"/>
+            </a:ext>
+          </a:extLst>
+        </p:cNvPr>
         <p:cNvGrpSpPr/>
         <p:nvPr/>
       </p:nvGrpSpPr>
@@ -3675,7 +3683,13 @@
       </p:grpSpPr>
       <p:sp>
         <p:nvSpPr>
-          <p:cNvPr id="2" name="슬라이드 이미지 개체 틀 1"/>
+          <p:cNvPr id="2" name="슬라이드 이미지 개체 틀 1">
+            <a:extLst>
+              <a:ext uri="{FF2B5EF4-FFF2-40B4-BE49-F238E27FC236}">
+                <a16:creationId xmlns:a16="http://schemas.microsoft.com/office/drawing/2014/main" id="{3CF8231D-BFAF-ED2F-4D76-6AAA07BFAE6C}"/>
+              </a:ext>
+            </a:extLst>
+          </p:cNvPr>
           <p:cNvSpPr>
             <a:spLocks noGrp="1" noRot="1" noChangeAspect="1"/>
           </p:cNvSpPr>
@@ -3687,7 +3701,13 @@
       </p:sp>
       <p:sp>
         <p:nvSpPr>
-          <p:cNvPr id="3" name="슬라이드 노트 개체 틀 2"/>
+          <p:cNvPr id="3" name="슬라이드 노트 개체 틀 2">
+            <a:extLst>
+              <a:ext uri="{FF2B5EF4-FFF2-40B4-BE49-F238E27FC236}">
+                <a16:creationId xmlns:a16="http://schemas.microsoft.com/office/drawing/2014/main" id="{355D4824-F3C3-47FE-8282-3E9B0860235F}"/>
+              </a:ext>
+            </a:extLst>
+          </p:cNvPr>
           <p:cNvSpPr>
             <a:spLocks noGrp="1"/>
           </p:cNvSpPr>
@@ -3706,7 +3726,13 @@
       </p:sp>
       <p:sp>
         <p:nvSpPr>
-          <p:cNvPr id="4" name="슬라이드 번호 개체 틀 3"/>
+          <p:cNvPr id="4" name="슬라이드 번호 개체 틀 3">
+            <a:extLst>
+              <a:ext uri="{FF2B5EF4-FFF2-40B4-BE49-F238E27FC236}">
+                <a16:creationId xmlns:a16="http://schemas.microsoft.com/office/drawing/2014/main" id="{51669B45-2404-4D36-0865-E80A334FD487}"/>
+              </a:ext>
+            </a:extLst>
+          </p:cNvPr>
           <p:cNvSpPr>
             <a:spLocks noGrp="1"/>
           </p:cNvSpPr>
@@ -3722,7 +3748,7 @@
             <a:pPr rtl="0"/>
             <a:fld id="{5FB91549-43BF-425A-AF25-75262019208C}" type="slidenum">
               <a:rPr lang="en-US" altLang="ko-KR" smtClean="0"/>
-              <a:t>39</a:t>
+              <a:t>38</a:t>
             </a:fld>
             <a:endParaRPr lang="ko-KR" altLang="en-US" dirty="0"/>
           </a:p>
@@ -3731,7 +3757,7 @@
     </p:spTree>
     <p:extLst>
       <p:ext uri="{BB962C8B-B14F-4D97-AF65-F5344CB8AC3E}">
-        <p14:creationId xmlns:p14="http://schemas.microsoft.com/office/powerpoint/2010/main" val="138035271"/>
+        <p14:creationId xmlns:p14="http://schemas.microsoft.com/office/powerpoint/2010/main" val="160666583"/>
       </p:ext>
     </p:extLst>
   </p:cSld>
@@ -3816,7 +3842,7 @@
     </p:spTree>
     <p:extLst>
       <p:ext uri="{BB962C8B-B14F-4D97-AF65-F5344CB8AC3E}">
-        <p14:creationId xmlns:p14="http://schemas.microsoft.com/office/powerpoint/2010/main" val="3169080756"/>
+        <p14:creationId xmlns:p14="http://schemas.microsoft.com/office/powerpoint/2010/main" val="2317580753"/>
       </p:ext>
     </p:extLst>
   </p:cSld>
@@ -3901,7 +3927,7 @@
     </p:spTree>
     <p:extLst>
       <p:ext uri="{BB962C8B-B14F-4D97-AF65-F5344CB8AC3E}">
-        <p14:creationId xmlns:p14="http://schemas.microsoft.com/office/powerpoint/2010/main" val="1857798542"/>
+        <p14:creationId xmlns:p14="http://schemas.microsoft.com/office/powerpoint/2010/main" val="138035271"/>
       </p:ext>
     </p:extLst>
   </p:cSld>
@@ -4095,7 +4121,7 @@
     </p:spTree>
     <p:extLst>
       <p:ext uri="{BB962C8B-B14F-4D97-AF65-F5344CB8AC3E}">
-        <p14:creationId xmlns:p14="http://schemas.microsoft.com/office/powerpoint/2010/main" val="2482291043"/>
+        <p14:creationId xmlns:p14="http://schemas.microsoft.com/office/powerpoint/2010/main" val="3169080756"/>
       </p:ext>
     </p:extLst>
   </p:cSld>
@@ -4110,13 +4136,7 @@
   <p:cSld>
     <p:spTree>
       <p:nvGrpSpPr>
-        <p:cNvPr id="1" name="">
-          <a:extLst>
-            <a:ext uri="{FF2B5EF4-FFF2-40B4-BE49-F238E27FC236}">
-              <a16:creationId xmlns:a16="http://schemas.microsoft.com/office/drawing/2014/main" id="{27515D09-9630-A0FD-FC35-81F7718CF881}"/>
-            </a:ext>
-          </a:extLst>
-        </p:cNvPr>
+        <p:cNvPr id="1" name=""/>
         <p:cNvGrpSpPr/>
         <p:nvPr/>
       </p:nvGrpSpPr>
@@ -4130,13 +4150,7 @@
       </p:grpSpPr>
       <p:sp>
         <p:nvSpPr>
-          <p:cNvPr id="2" name="슬라이드 이미지 개체 틀 1">
-            <a:extLst>
-              <a:ext uri="{FF2B5EF4-FFF2-40B4-BE49-F238E27FC236}">
-                <a16:creationId xmlns:a16="http://schemas.microsoft.com/office/drawing/2014/main" id="{7CDB0427-9D47-D5BB-6BC3-909D99355BED}"/>
-              </a:ext>
-            </a:extLst>
-          </p:cNvPr>
+          <p:cNvPr id="2" name="슬라이드 이미지 개체 틀 1"/>
           <p:cNvSpPr>
             <a:spLocks noGrp="1" noRot="1" noChangeAspect="1"/>
           </p:cNvSpPr>
@@ -4148,13 +4162,7 @@
       </p:sp>
       <p:sp>
         <p:nvSpPr>
-          <p:cNvPr id="3" name="슬라이드 노트 개체 틀 2">
-            <a:extLst>
-              <a:ext uri="{FF2B5EF4-FFF2-40B4-BE49-F238E27FC236}">
-                <a16:creationId xmlns:a16="http://schemas.microsoft.com/office/drawing/2014/main" id="{3E112FA0-4D0B-3533-41B3-61991C3974D9}"/>
-              </a:ext>
-            </a:extLst>
-          </p:cNvPr>
+          <p:cNvPr id="3" name="슬라이드 노트 개체 틀 2"/>
           <p:cNvSpPr>
             <a:spLocks noGrp="1"/>
           </p:cNvSpPr>
@@ -4173,13 +4181,7 @@
       </p:sp>
       <p:sp>
         <p:nvSpPr>
-          <p:cNvPr id="4" name="슬라이드 번호 개체 틀 3">
-            <a:extLst>
-              <a:ext uri="{FF2B5EF4-FFF2-40B4-BE49-F238E27FC236}">
-                <a16:creationId xmlns:a16="http://schemas.microsoft.com/office/drawing/2014/main" id="{0B8D6190-EF8A-6106-9D3E-ABF957FE32C9}"/>
-              </a:ext>
-            </a:extLst>
-          </p:cNvPr>
+          <p:cNvPr id="4" name="슬라이드 번호 개체 틀 3"/>
           <p:cNvSpPr>
             <a:spLocks noGrp="1"/>
           </p:cNvSpPr>
@@ -4204,7 +4206,7 @@
     </p:spTree>
     <p:extLst>
       <p:ext uri="{BB962C8B-B14F-4D97-AF65-F5344CB8AC3E}">
-        <p14:creationId xmlns:p14="http://schemas.microsoft.com/office/powerpoint/2010/main" val="1934735137"/>
+        <p14:creationId xmlns:p14="http://schemas.microsoft.com/office/powerpoint/2010/main" val="1857798542"/>
       </p:ext>
     </p:extLst>
   </p:cSld>
@@ -4289,6 +4291,200 @@
     </p:spTree>
     <p:extLst>
       <p:ext uri="{BB962C8B-B14F-4D97-AF65-F5344CB8AC3E}">
+        <p14:creationId xmlns:p14="http://schemas.microsoft.com/office/powerpoint/2010/main" val="2482291043"/>
+      </p:ext>
+    </p:extLst>
+  </p:cSld>
+  <p:clrMapOvr>
+    <a:masterClrMapping/>
+  </p:clrMapOvr>
+</p:notes>
+</file>
+
+<file path=ppt/notesSlides/notesSlide43.xml><?xml version="1.0" encoding="utf-8"?>
+<p:notes xmlns:a="http://schemas.openxmlformats.org/drawingml/2006/main" xmlns:r="http://schemas.openxmlformats.org/officeDocument/2006/relationships" xmlns:p="http://schemas.openxmlformats.org/presentationml/2006/main">
+  <p:cSld>
+    <p:spTree>
+      <p:nvGrpSpPr>
+        <p:cNvPr id="1" name="">
+          <a:extLst>
+            <a:ext uri="{FF2B5EF4-FFF2-40B4-BE49-F238E27FC236}">
+              <a16:creationId xmlns:a16="http://schemas.microsoft.com/office/drawing/2014/main" id="{27515D09-9630-A0FD-FC35-81F7718CF881}"/>
+            </a:ext>
+          </a:extLst>
+        </p:cNvPr>
+        <p:cNvGrpSpPr/>
+        <p:nvPr/>
+      </p:nvGrpSpPr>
+      <p:grpSpPr>
+        <a:xfrm>
+          <a:off x="0" y="0"/>
+          <a:ext cx="0" cy="0"/>
+          <a:chOff x="0" y="0"/>
+          <a:chExt cx="0" cy="0"/>
+        </a:xfrm>
+      </p:grpSpPr>
+      <p:sp>
+        <p:nvSpPr>
+          <p:cNvPr id="2" name="슬라이드 이미지 개체 틀 1">
+            <a:extLst>
+              <a:ext uri="{FF2B5EF4-FFF2-40B4-BE49-F238E27FC236}">
+                <a16:creationId xmlns:a16="http://schemas.microsoft.com/office/drawing/2014/main" id="{7CDB0427-9D47-D5BB-6BC3-909D99355BED}"/>
+              </a:ext>
+            </a:extLst>
+          </p:cNvPr>
+          <p:cNvSpPr>
+            <a:spLocks noGrp="1" noRot="1" noChangeAspect="1"/>
+          </p:cNvSpPr>
+          <p:nvPr>
+            <p:ph type="sldImg"/>
+          </p:nvPr>
+        </p:nvSpPr>
+        <p:spPr/>
+      </p:sp>
+      <p:sp>
+        <p:nvSpPr>
+          <p:cNvPr id="3" name="슬라이드 노트 개체 틀 2">
+            <a:extLst>
+              <a:ext uri="{FF2B5EF4-FFF2-40B4-BE49-F238E27FC236}">
+                <a16:creationId xmlns:a16="http://schemas.microsoft.com/office/drawing/2014/main" id="{3E112FA0-4D0B-3533-41B3-61991C3974D9}"/>
+              </a:ext>
+            </a:extLst>
+          </p:cNvPr>
+          <p:cNvSpPr>
+            <a:spLocks noGrp="1"/>
+          </p:cNvSpPr>
+          <p:nvPr>
+            <p:ph type="body" idx="1"/>
+          </p:nvPr>
+        </p:nvSpPr>
+        <p:spPr/>
+        <p:txBody>
+          <a:bodyPr/>
+          <a:lstStyle/>
+          <a:p>
+            <a:endParaRPr lang="ko-KR" altLang="en-US" dirty="0"/>
+          </a:p>
+        </p:txBody>
+      </p:sp>
+      <p:sp>
+        <p:nvSpPr>
+          <p:cNvPr id="4" name="슬라이드 번호 개체 틀 3">
+            <a:extLst>
+              <a:ext uri="{FF2B5EF4-FFF2-40B4-BE49-F238E27FC236}">
+                <a16:creationId xmlns:a16="http://schemas.microsoft.com/office/drawing/2014/main" id="{0B8D6190-EF8A-6106-9D3E-ABF957FE32C9}"/>
+              </a:ext>
+            </a:extLst>
+          </p:cNvPr>
+          <p:cNvSpPr>
+            <a:spLocks noGrp="1"/>
+          </p:cNvSpPr>
+          <p:nvPr>
+            <p:ph type="sldNum" sz="quarter" idx="10"/>
+          </p:nvPr>
+        </p:nvSpPr>
+        <p:spPr/>
+        <p:txBody>
+          <a:bodyPr/>
+          <a:lstStyle/>
+          <a:p>
+            <a:pPr rtl="0"/>
+            <a:fld id="{5FB91549-43BF-425A-AF25-75262019208C}" type="slidenum">
+              <a:rPr lang="en-US" altLang="ko-KR" smtClean="0"/>
+              <a:t>45</a:t>
+            </a:fld>
+            <a:endParaRPr lang="ko-KR" altLang="en-US" dirty="0"/>
+          </a:p>
+        </p:txBody>
+      </p:sp>
+    </p:spTree>
+    <p:extLst>
+      <p:ext uri="{BB962C8B-B14F-4D97-AF65-F5344CB8AC3E}">
+        <p14:creationId xmlns:p14="http://schemas.microsoft.com/office/powerpoint/2010/main" val="1934735137"/>
+      </p:ext>
+    </p:extLst>
+  </p:cSld>
+  <p:clrMapOvr>
+    <a:masterClrMapping/>
+  </p:clrMapOvr>
+</p:notes>
+</file>
+
+<file path=ppt/notesSlides/notesSlide44.xml><?xml version="1.0" encoding="utf-8"?>
+<p:notes xmlns:a="http://schemas.openxmlformats.org/drawingml/2006/main" xmlns:r="http://schemas.openxmlformats.org/officeDocument/2006/relationships" xmlns:p="http://schemas.openxmlformats.org/presentationml/2006/main">
+  <p:cSld>
+    <p:spTree>
+      <p:nvGrpSpPr>
+        <p:cNvPr id="1" name=""/>
+        <p:cNvGrpSpPr/>
+        <p:nvPr/>
+      </p:nvGrpSpPr>
+      <p:grpSpPr>
+        <a:xfrm>
+          <a:off x="0" y="0"/>
+          <a:ext cx="0" cy="0"/>
+          <a:chOff x="0" y="0"/>
+          <a:chExt cx="0" cy="0"/>
+        </a:xfrm>
+      </p:grpSpPr>
+      <p:sp>
+        <p:nvSpPr>
+          <p:cNvPr id="2" name="슬라이드 이미지 개체 틀 1"/>
+          <p:cNvSpPr>
+            <a:spLocks noGrp="1" noRot="1" noChangeAspect="1"/>
+          </p:cNvSpPr>
+          <p:nvPr>
+            <p:ph type="sldImg"/>
+          </p:nvPr>
+        </p:nvSpPr>
+        <p:spPr/>
+      </p:sp>
+      <p:sp>
+        <p:nvSpPr>
+          <p:cNvPr id="3" name="슬라이드 노트 개체 틀 2"/>
+          <p:cNvSpPr>
+            <a:spLocks noGrp="1"/>
+          </p:cNvSpPr>
+          <p:nvPr>
+            <p:ph type="body" idx="1"/>
+          </p:nvPr>
+        </p:nvSpPr>
+        <p:spPr/>
+        <p:txBody>
+          <a:bodyPr/>
+          <a:lstStyle/>
+          <a:p>
+            <a:endParaRPr lang="ko-KR" altLang="en-US" dirty="0"/>
+          </a:p>
+        </p:txBody>
+      </p:sp>
+      <p:sp>
+        <p:nvSpPr>
+          <p:cNvPr id="4" name="슬라이드 번호 개체 틀 3"/>
+          <p:cNvSpPr>
+            <a:spLocks noGrp="1"/>
+          </p:cNvSpPr>
+          <p:nvPr>
+            <p:ph type="sldNum" sz="quarter" idx="10"/>
+          </p:nvPr>
+        </p:nvSpPr>
+        <p:spPr/>
+        <p:txBody>
+          <a:bodyPr/>
+          <a:lstStyle/>
+          <a:p>
+            <a:pPr rtl="0"/>
+            <a:fld id="{5FB91549-43BF-425A-AF25-75262019208C}" type="slidenum">
+              <a:rPr lang="en-US" altLang="ko-KR" smtClean="0"/>
+              <a:t>46</a:t>
+            </a:fld>
+            <a:endParaRPr lang="ko-KR" altLang="en-US" dirty="0"/>
+          </a:p>
+        </p:txBody>
+      </p:sp>
+    </p:spTree>
+    <p:extLst>
+      <p:ext uri="{BB962C8B-B14F-4D97-AF65-F5344CB8AC3E}">
         <p14:creationId xmlns:p14="http://schemas.microsoft.com/office/powerpoint/2010/main" val="3336535934"/>
       </p:ext>
     </p:extLst>
@@ -4299,7 +4495,7 @@
 </p:notes>
 </file>
 
-<file path=ppt/notesSlides/notesSlide43.xml><?xml version="1.0" encoding="utf-8"?>
+<file path=ppt/notesSlides/notesSlide45.xml><?xml version="1.0" encoding="utf-8"?>
 <p:notes xmlns:a="http://schemas.openxmlformats.org/drawingml/2006/main" xmlns:r="http://schemas.openxmlformats.org/officeDocument/2006/relationships" xmlns:p="http://schemas.openxmlformats.org/presentationml/2006/main">
   <p:cSld>
     <p:spTree>
@@ -4389,7 +4585,7 @@
             <a:pPr rtl="0"/>
             <a:fld id="{5FB91549-43BF-425A-AF25-75262019208C}" type="slidenum">
               <a:rPr lang="en-US" altLang="ko-KR" smtClean="0"/>
-              <a:t>45</a:t>
+              <a:t>47</a:t>
             </a:fld>
             <a:endParaRPr lang="ko-KR" altLang="en-US" dirty="0"/>
           </a:p>
@@ -4408,7 +4604,7 @@
 </p:notes>
 </file>
 
-<file path=ppt/notesSlides/notesSlide44.xml><?xml version="1.0" encoding="utf-8"?>
+<file path=ppt/notesSlides/notesSlide46.xml><?xml version="1.0" encoding="utf-8"?>
 <p:notes xmlns:a="http://schemas.openxmlformats.org/drawingml/2006/main" xmlns:r="http://schemas.openxmlformats.org/officeDocument/2006/relationships" xmlns:p="http://schemas.openxmlformats.org/presentationml/2006/main">
   <p:cSld>
     <p:spTree>
@@ -4498,7 +4694,7 @@
             <a:pPr rtl="0"/>
             <a:fld id="{5FB91549-43BF-425A-AF25-75262019208C}" type="slidenum">
               <a:rPr lang="en-US" altLang="ko-KR" smtClean="0"/>
-              <a:t>46</a:t>
+              <a:t>48</a:t>
             </a:fld>
             <a:endParaRPr lang="ko-KR" altLang="en-US" dirty="0"/>
           </a:p>
@@ -4517,7 +4713,7 @@
 </p:notes>
 </file>
 
-<file path=ppt/notesSlides/notesSlide45.xml><?xml version="1.0" encoding="utf-8"?>
+<file path=ppt/notesSlides/notesSlide47.xml><?xml version="1.0" encoding="utf-8"?>
 <p:notes xmlns:a="http://schemas.openxmlformats.org/drawingml/2006/main" xmlns:r="http://schemas.openxmlformats.org/officeDocument/2006/relationships" xmlns:p="http://schemas.openxmlformats.org/presentationml/2006/main">
   <p:cSld>
     <p:spTree>
@@ -4607,7 +4803,7 @@
             <a:pPr rtl="0"/>
             <a:fld id="{5FB91549-43BF-425A-AF25-75262019208C}" type="slidenum">
               <a:rPr lang="en-US" altLang="ko-KR" smtClean="0"/>
-              <a:t>47</a:t>
+              <a:t>49</a:t>
             </a:fld>
             <a:endParaRPr lang="ko-KR" altLang="en-US" dirty="0"/>
           </a:p>
@@ -4626,7 +4822,7 @@
 </p:notes>
 </file>
 
-<file path=ppt/notesSlides/notesSlide46.xml><?xml version="1.0" encoding="utf-8"?>
+<file path=ppt/notesSlides/notesSlide48.xml><?xml version="1.0" encoding="utf-8"?>
 <p:notes xmlns:a="http://schemas.openxmlformats.org/drawingml/2006/main" xmlns:r="http://schemas.openxmlformats.org/officeDocument/2006/relationships" xmlns:p="http://schemas.openxmlformats.org/presentationml/2006/main">
   <p:cSld>
     <p:spTree>
@@ -4716,7 +4912,7 @@
             <a:pPr rtl="0"/>
             <a:fld id="{5FB91549-43BF-425A-AF25-75262019208C}" type="slidenum">
               <a:rPr lang="en-US" altLang="ko-KR" smtClean="0"/>
-              <a:t>48</a:t>
+              <a:t>50</a:t>
             </a:fld>
             <a:endParaRPr lang="ko-KR" altLang="en-US" dirty="0"/>
           </a:p>
@@ -4735,7 +4931,7 @@
 </p:notes>
 </file>
 
-<file path=ppt/notesSlides/notesSlide47.xml><?xml version="1.0" encoding="utf-8"?>
+<file path=ppt/notesSlides/notesSlide49.xml><?xml version="1.0" encoding="utf-8"?>
 <p:notes xmlns:a="http://schemas.openxmlformats.org/drawingml/2006/main" xmlns:r="http://schemas.openxmlformats.org/officeDocument/2006/relationships" xmlns:p="http://schemas.openxmlformats.org/presentationml/2006/main">
   <p:cSld>
     <p:spTree>
@@ -4825,7 +5021,7 @@
             <a:pPr rtl="0"/>
             <a:fld id="{5FB91549-43BF-425A-AF25-75262019208C}" type="slidenum">
               <a:rPr lang="en-US" altLang="ko-KR" smtClean="0"/>
-              <a:t>49</a:t>
+              <a:t>51</a:t>
             </a:fld>
             <a:endParaRPr lang="ko-KR" altLang="en-US" dirty="0"/>
           </a:p>
@@ -4844,7 +5040,116 @@
 </p:notes>
 </file>
 
-<file path=ppt/notesSlides/notesSlide48.xml><?xml version="1.0" encoding="utf-8"?>
+<file path=ppt/notesSlides/notesSlide5.xml><?xml version="1.0" encoding="utf-8"?>
+<p:notes xmlns:a="http://schemas.openxmlformats.org/drawingml/2006/main" xmlns:r="http://schemas.openxmlformats.org/officeDocument/2006/relationships" xmlns:p="http://schemas.openxmlformats.org/presentationml/2006/main">
+  <p:cSld>
+    <p:spTree>
+      <p:nvGrpSpPr>
+        <p:cNvPr id="1" name="">
+          <a:extLst>
+            <a:ext uri="{FF2B5EF4-FFF2-40B4-BE49-F238E27FC236}">
+              <a16:creationId xmlns:a16="http://schemas.microsoft.com/office/drawing/2014/main" id="{6EBD64F1-E5C4-6358-593C-A9CA28483FB5}"/>
+            </a:ext>
+          </a:extLst>
+        </p:cNvPr>
+        <p:cNvGrpSpPr/>
+        <p:nvPr/>
+      </p:nvGrpSpPr>
+      <p:grpSpPr>
+        <a:xfrm>
+          <a:off x="0" y="0"/>
+          <a:ext cx="0" cy="0"/>
+          <a:chOff x="0" y="0"/>
+          <a:chExt cx="0" cy="0"/>
+        </a:xfrm>
+      </p:grpSpPr>
+      <p:sp>
+        <p:nvSpPr>
+          <p:cNvPr id="2" name="슬라이드 이미지 개체 틀 1">
+            <a:extLst>
+              <a:ext uri="{FF2B5EF4-FFF2-40B4-BE49-F238E27FC236}">
+                <a16:creationId xmlns:a16="http://schemas.microsoft.com/office/drawing/2014/main" id="{B0C1DBD8-0BBF-5360-FF60-6547827679E1}"/>
+              </a:ext>
+            </a:extLst>
+          </p:cNvPr>
+          <p:cNvSpPr>
+            <a:spLocks noGrp="1" noRot="1" noChangeAspect="1"/>
+          </p:cNvSpPr>
+          <p:nvPr>
+            <p:ph type="sldImg"/>
+          </p:nvPr>
+        </p:nvSpPr>
+        <p:spPr/>
+      </p:sp>
+      <p:sp>
+        <p:nvSpPr>
+          <p:cNvPr id="3" name="슬라이드 노트 개체 틀 2">
+            <a:extLst>
+              <a:ext uri="{FF2B5EF4-FFF2-40B4-BE49-F238E27FC236}">
+                <a16:creationId xmlns:a16="http://schemas.microsoft.com/office/drawing/2014/main" id="{DFD4DA56-C4FA-DEDD-AC32-D35ACFC9914B}"/>
+              </a:ext>
+            </a:extLst>
+          </p:cNvPr>
+          <p:cNvSpPr>
+            <a:spLocks noGrp="1"/>
+          </p:cNvSpPr>
+          <p:nvPr>
+            <p:ph type="body" idx="1"/>
+          </p:nvPr>
+        </p:nvSpPr>
+        <p:spPr/>
+        <p:txBody>
+          <a:bodyPr/>
+          <a:lstStyle/>
+          <a:p>
+            <a:endParaRPr lang="ko-KR" altLang="en-US" dirty="0"/>
+          </a:p>
+        </p:txBody>
+      </p:sp>
+      <p:sp>
+        <p:nvSpPr>
+          <p:cNvPr id="4" name="슬라이드 번호 개체 틀 3">
+            <a:extLst>
+              <a:ext uri="{FF2B5EF4-FFF2-40B4-BE49-F238E27FC236}">
+                <a16:creationId xmlns:a16="http://schemas.microsoft.com/office/drawing/2014/main" id="{4051D40D-3E45-9FEE-32E1-052BF2B765D6}"/>
+              </a:ext>
+            </a:extLst>
+          </p:cNvPr>
+          <p:cNvSpPr>
+            <a:spLocks noGrp="1"/>
+          </p:cNvSpPr>
+          <p:nvPr>
+            <p:ph type="sldNum" sz="quarter" idx="10"/>
+          </p:nvPr>
+        </p:nvSpPr>
+        <p:spPr/>
+        <p:txBody>
+          <a:bodyPr/>
+          <a:lstStyle/>
+          <a:p>
+            <a:pPr rtl="0"/>
+            <a:fld id="{5FB91549-43BF-425A-AF25-75262019208C}" type="slidenum">
+              <a:rPr lang="en-US" altLang="ko-KR" smtClean="0"/>
+              <a:t>6</a:t>
+            </a:fld>
+            <a:endParaRPr lang="ko-KR" altLang="en-US" dirty="0"/>
+          </a:p>
+        </p:txBody>
+      </p:sp>
+    </p:spTree>
+    <p:extLst>
+      <p:ext uri="{BB962C8B-B14F-4D97-AF65-F5344CB8AC3E}">
+        <p14:creationId xmlns:p14="http://schemas.microsoft.com/office/powerpoint/2010/main" val="1583478502"/>
+      </p:ext>
+    </p:extLst>
+  </p:cSld>
+  <p:clrMapOvr>
+    <a:masterClrMapping/>
+  </p:clrMapOvr>
+</p:notes>
+</file>
+
+<file path=ppt/notesSlides/notesSlide50.xml><?xml version="1.0" encoding="utf-8"?>
 <p:notes xmlns:a="http://schemas.openxmlformats.org/drawingml/2006/main" xmlns:r="http://schemas.openxmlformats.org/officeDocument/2006/relationships" xmlns:p="http://schemas.openxmlformats.org/presentationml/2006/main">
   <p:cSld>
     <p:spTree>
@@ -4934,7 +5239,7 @@
             <a:pPr rtl="0"/>
             <a:fld id="{5FB91549-43BF-425A-AF25-75262019208C}" type="slidenum">
               <a:rPr lang="en-US" altLang="ko-KR" smtClean="0"/>
-              <a:t>50</a:t>
+              <a:t>52</a:t>
             </a:fld>
             <a:endParaRPr lang="ko-KR" altLang="en-US" dirty="0"/>
           </a:p>
@@ -4953,7 +5258,7 @@
 </p:notes>
 </file>
 
-<file path=ppt/notesSlides/notesSlide49.xml><?xml version="1.0" encoding="utf-8"?>
+<file path=ppt/notesSlides/notesSlide51.xml><?xml version="1.0" encoding="utf-8"?>
 <p:notes xmlns:a="http://schemas.openxmlformats.org/drawingml/2006/main" xmlns:r="http://schemas.openxmlformats.org/officeDocument/2006/relationships" xmlns:p="http://schemas.openxmlformats.org/presentationml/2006/main">
   <p:cSld>
     <p:spTree>
@@ -5043,7 +5348,7 @@
             <a:pPr rtl="0"/>
             <a:fld id="{5FB91549-43BF-425A-AF25-75262019208C}" type="slidenum">
               <a:rPr lang="en-US" altLang="ko-KR" smtClean="0"/>
-              <a:t>51</a:t>
+              <a:t>53</a:t>
             </a:fld>
             <a:endParaRPr lang="ko-KR" altLang="en-US" dirty="0"/>
           </a:p>
@@ -5053,91 +5358,6 @@
     <p:extLst>
       <p:ext uri="{BB962C8B-B14F-4D97-AF65-F5344CB8AC3E}">
         <p14:creationId xmlns:p14="http://schemas.microsoft.com/office/powerpoint/2010/main" val="444248567"/>
-      </p:ext>
-    </p:extLst>
-  </p:cSld>
-  <p:clrMapOvr>
-    <a:masterClrMapping/>
-  </p:clrMapOvr>
-</p:notes>
-</file>
-
-<file path=ppt/notesSlides/notesSlide5.xml><?xml version="1.0" encoding="utf-8"?>
-<p:notes xmlns:a="http://schemas.openxmlformats.org/drawingml/2006/main" xmlns:r="http://schemas.openxmlformats.org/officeDocument/2006/relationships" xmlns:p="http://schemas.openxmlformats.org/presentationml/2006/main">
-  <p:cSld>
-    <p:spTree>
-      <p:nvGrpSpPr>
-        <p:cNvPr id="1" name=""/>
-        <p:cNvGrpSpPr/>
-        <p:nvPr/>
-      </p:nvGrpSpPr>
-      <p:grpSpPr>
-        <a:xfrm>
-          <a:off x="0" y="0"/>
-          <a:ext cx="0" cy="0"/>
-          <a:chOff x="0" y="0"/>
-          <a:chExt cx="0" cy="0"/>
-        </a:xfrm>
-      </p:grpSpPr>
-      <p:sp>
-        <p:nvSpPr>
-          <p:cNvPr id="2" name="슬라이드 이미지 개체 틀 1"/>
-          <p:cNvSpPr>
-            <a:spLocks noGrp="1" noRot="1" noChangeAspect="1"/>
-          </p:cNvSpPr>
-          <p:nvPr>
-            <p:ph type="sldImg"/>
-          </p:nvPr>
-        </p:nvSpPr>
-        <p:spPr/>
-      </p:sp>
-      <p:sp>
-        <p:nvSpPr>
-          <p:cNvPr id="3" name="슬라이드 노트 개체 틀 2"/>
-          <p:cNvSpPr>
-            <a:spLocks noGrp="1"/>
-          </p:cNvSpPr>
-          <p:nvPr>
-            <p:ph type="body" idx="1"/>
-          </p:nvPr>
-        </p:nvSpPr>
-        <p:spPr/>
-        <p:txBody>
-          <a:bodyPr/>
-          <a:lstStyle/>
-          <a:p>
-            <a:endParaRPr lang="ko-KR" altLang="en-US" dirty="0"/>
-          </a:p>
-        </p:txBody>
-      </p:sp>
-      <p:sp>
-        <p:nvSpPr>
-          <p:cNvPr id="4" name="슬라이드 번호 개체 틀 3"/>
-          <p:cNvSpPr>
-            <a:spLocks noGrp="1"/>
-          </p:cNvSpPr>
-          <p:nvPr>
-            <p:ph type="sldNum" sz="quarter" idx="10"/>
-          </p:nvPr>
-        </p:nvSpPr>
-        <p:spPr/>
-        <p:txBody>
-          <a:bodyPr/>
-          <a:lstStyle/>
-          <a:p>
-            <a:pPr rtl="0"/>
-            <a:fld id="{5FB91549-43BF-425A-AF25-75262019208C}" type="slidenum">
-              <a:rPr lang="en-US" altLang="ko-KR" smtClean="0"/>
-              <a:t>6</a:t>
-            </a:fld>
-            <a:endParaRPr lang="ko-KR" altLang="en-US" dirty="0"/>
-          </a:p>
-        </p:txBody>
-      </p:sp>
-    </p:spTree>
-    <p:extLst>
-      <p:ext uri="{BB962C8B-B14F-4D97-AF65-F5344CB8AC3E}">
-        <p14:creationId xmlns:p14="http://schemas.microsoft.com/office/powerpoint/2010/main" val="1911418281"/>
       </p:ext>
     </p:extLst>
   </p:cSld>
@@ -5152,7 +5372,13 @@
   <p:cSld>
     <p:spTree>
       <p:nvGrpSpPr>
-        <p:cNvPr id="1" name=""/>
+        <p:cNvPr id="1" name="">
+          <a:extLst>
+            <a:ext uri="{FF2B5EF4-FFF2-40B4-BE49-F238E27FC236}">
+              <a16:creationId xmlns:a16="http://schemas.microsoft.com/office/drawing/2014/main" id="{EE4538BF-5238-8DEC-113F-F8CF98C9DE1B}"/>
+            </a:ext>
+          </a:extLst>
+        </p:cNvPr>
         <p:cNvGrpSpPr/>
         <p:nvPr/>
       </p:nvGrpSpPr>
@@ -5166,7 +5392,13 @@
       </p:grpSpPr>
       <p:sp>
         <p:nvSpPr>
-          <p:cNvPr id="2" name="슬라이드 이미지 개체 틀 1"/>
+          <p:cNvPr id="2" name="슬라이드 이미지 개체 틀 1">
+            <a:extLst>
+              <a:ext uri="{FF2B5EF4-FFF2-40B4-BE49-F238E27FC236}">
+                <a16:creationId xmlns:a16="http://schemas.microsoft.com/office/drawing/2014/main" id="{A5D7386D-E89C-B77A-3543-D4E6998EB30F}"/>
+              </a:ext>
+            </a:extLst>
+          </p:cNvPr>
           <p:cNvSpPr>
             <a:spLocks noGrp="1" noRot="1" noChangeAspect="1"/>
           </p:cNvSpPr>
@@ -5178,7 +5410,13 @@
       </p:sp>
       <p:sp>
         <p:nvSpPr>
-          <p:cNvPr id="3" name="슬라이드 노트 개체 틀 2"/>
+          <p:cNvPr id="3" name="슬라이드 노트 개체 틀 2">
+            <a:extLst>
+              <a:ext uri="{FF2B5EF4-FFF2-40B4-BE49-F238E27FC236}">
+                <a16:creationId xmlns:a16="http://schemas.microsoft.com/office/drawing/2014/main" id="{BECD18C3-1948-D230-233A-234193B99A5F}"/>
+              </a:ext>
+            </a:extLst>
+          </p:cNvPr>
           <p:cNvSpPr>
             <a:spLocks noGrp="1"/>
           </p:cNvSpPr>
@@ -5197,7 +5435,13 @@
       </p:sp>
       <p:sp>
         <p:nvSpPr>
-          <p:cNvPr id="4" name="슬라이드 번호 개체 틀 3"/>
+          <p:cNvPr id="4" name="슬라이드 번호 개체 틀 3">
+            <a:extLst>
+              <a:ext uri="{FF2B5EF4-FFF2-40B4-BE49-F238E27FC236}">
+                <a16:creationId xmlns:a16="http://schemas.microsoft.com/office/drawing/2014/main" id="{B1C1789C-50D5-F748-0E68-73492ACABC5C}"/>
+              </a:ext>
+            </a:extLst>
+          </p:cNvPr>
           <p:cNvSpPr>
             <a:spLocks noGrp="1"/>
           </p:cNvSpPr>
@@ -5222,7 +5466,7 @@
     </p:spTree>
     <p:extLst>
       <p:ext uri="{BB962C8B-B14F-4D97-AF65-F5344CB8AC3E}">
-        <p14:creationId xmlns:p14="http://schemas.microsoft.com/office/powerpoint/2010/main" val="3736020816"/>
+        <p14:creationId xmlns:p14="http://schemas.microsoft.com/office/powerpoint/2010/main" val="4140883731"/>
       </p:ext>
     </p:extLst>
   </p:cSld>
@@ -5307,7 +5551,7 @@
     </p:spTree>
     <p:extLst>
       <p:ext uri="{BB962C8B-B14F-4D97-AF65-F5344CB8AC3E}">
-        <p14:creationId xmlns:p14="http://schemas.microsoft.com/office/powerpoint/2010/main" val="402355766"/>
+        <p14:creationId xmlns:p14="http://schemas.microsoft.com/office/powerpoint/2010/main" val="1911418281"/>
       </p:ext>
     </p:extLst>
   </p:cSld>
@@ -5322,13 +5566,7 @@
   <p:cSld>
     <p:spTree>
       <p:nvGrpSpPr>
-        <p:cNvPr id="1" name="">
-          <a:extLst>
-            <a:ext uri="{FF2B5EF4-FFF2-40B4-BE49-F238E27FC236}">
-              <a16:creationId xmlns:a16="http://schemas.microsoft.com/office/drawing/2014/main" id="{31B49C03-7ED9-E18F-2704-FAAEAED141B3}"/>
-            </a:ext>
-          </a:extLst>
-        </p:cNvPr>
+        <p:cNvPr id="1" name=""/>
         <p:cNvGrpSpPr/>
         <p:nvPr/>
       </p:nvGrpSpPr>
@@ -5342,13 +5580,7 @@
       </p:grpSpPr>
       <p:sp>
         <p:nvSpPr>
-          <p:cNvPr id="2" name="슬라이드 이미지 개체 틀 1">
-            <a:extLst>
-              <a:ext uri="{FF2B5EF4-FFF2-40B4-BE49-F238E27FC236}">
-                <a16:creationId xmlns:a16="http://schemas.microsoft.com/office/drawing/2014/main" id="{CBA04D1D-D6EF-0A87-11EC-F8B7A52CC4D5}"/>
-              </a:ext>
-            </a:extLst>
-          </p:cNvPr>
+          <p:cNvPr id="2" name="슬라이드 이미지 개체 틀 1"/>
           <p:cNvSpPr>
             <a:spLocks noGrp="1" noRot="1" noChangeAspect="1"/>
           </p:cNvSpPr>
@@ -5360,13 +5592,7 @@
       </p:sp>
       <p:sp>
         <p:nvSpPr>
-          <p:cNvPr id="3" name="슬라이드 노트 개체 틀 2">
-            <a:extLst>
-              <a:ext uri="{FF2B5EF4-FFF2-40B4-BE49-F238E27FC236}">
-                <a16:creationId xmlns:a16="http://schemas.microsoft.com/office/drawing/2014/main" id="{B764788F-B000-9A16-1526-CBDD7B483BB3}"/>
-              </a:ext>
-            </a:extLst>
-          </p:cNvPr>
+          <p:cNvPr id="3" name="슬라이드 노트 개체 틀 2"/>
           <p:cNvSpPr>
             <a:spLocks noGrp="1"/>
           </p:cNvSpPr>
@@ -5385,13 +5611,7 @@
       </p:sp>
       <p:sp>
         <p:nvSpPr>
-          <p:cNvPr id="4" name="슬라이드 번호 개체 틀 3">
-            <a:extLst>
-              <a:ext uri="{FF2B5EF4-FFF2-40B4-BE49-F238E27FC236}">
-                <a16:creationId xmlns:a16="http://schemas.microsoft.com/office/drawing/2014/main" id="{925B442F-FF04-49E8-21D8-AED1C028C16A}"/>
-              </a:ext>
-            </a:extLst>
-          </p:cNvPr>
+          <p:cNvPr id="4" name="슬라이드 번호 개체 틀 3"/>
           <p:cNvSpPr>
             <a:spLocks noGrp="1"/>
           </p:cNvSpPr>
@@ -5416,7 +5636,7 @@
     </p:spTree>
     <p:extLst>
       <p:ext uri="{BB962C8B-B14F-4D97-AF65-F5344CB8AC3E}">
-        <p14:creationId xmlns:p14="http://schemas.microsoft.com/office/powerpoint/2010/main" val="936135126"/>
+        <p14:creationId xmlns:p14="http://schemas.microsoft.com/office/powerpoint/2010/main" val="3736020816"/>
       </p:ext>
     </p:extLst>
   </p:cSld>
@@ -5501,7 +5721,7 @@
     </p:spTree>
     <p:extLst>
       <p:ext uri="{BB962C8B-B14F-4D97-AF65-F5344CB8AC3E}">
-        <p14:creationId xmlns:p14="http://schemas.microsoft.com/office/powerpoint/2010/main" val="2471172051"/>
+        <p14:creationId xmlns:p14="http://schemas.microsoft.com/office/powerpoint/2010/main" val="402355766"/>
       </p:ext>
     </p:extLst>
   </p:cSld>
@@ -9216,6 +9436,921 @@
       </p:sp>
       <p:sp>
         <p:nvSpPr>
+          <p:cNvPr id="2" name="직사각형 1"/>
+          <p:cNvSpPr/>
+          <p:nvPr/>
+        </p:nvSpPr>
+        <p:spPr>
+          <a:xfrm>
+            <a:off x="769168" y="1843950"/>
+            <a:ext cx="11017224" cy="3170099"/>
+          </a:xfrm>
+          <a:prstGeom prst="rect">
+            <a:avLst/>
+          </a:prstGeom>
+        </p:spPr>
+        <p:txBody>
+          <a:bodyPr wrap="square">
+            <a:spAutoFit/>
+          </a:bodyPr>
+          <a:lstStyle/>
+          <a:p>
+            <a:pPr marL="457200" indent="-457200">
+              <a:lnSpc>
+                <a:spcPct val="200000"/>
+              </a:lnSpc>
+              <a:buFont typeface="Wingdings" panose="05000000000000000000" pitchFamily="2" charset="2"/>
+              <a:buChar char="§"/>
+            </a:pPr>
+            <a:r>
+              <a:rPr lang="ko-KR" altLang="en-US" sz="2000" b="1" dirty="0">
+                <a:solidFill>
+                  <a:srgbClr val="313131"/>
+                </a:solidFill>
+                <a:latin typeface="PT Sans"/>
+              </a:rPr>
+              <a:t>확률변수</a:t>
+            </a:r>
+            <a:r>
+              <a:rPr lang="en-US" altLang="ko-KR" sz="2000" b="1" dirty="0">
+                <a:solidFill>
+                  <a:srgbClr val="313131"/>
+                </a:solidFill>
+                <a:latin typeface="PT Sans"/>
+              </a:rPr>
+              <a:t>(Random variable)</a:t>
+            </a:r>
+            <a:r>
+              <a:rPr lang="ko-KR" altLang="en-US" sz="2000" b="1" dirty="0">
+                <a:solidFill>
+                  <a:srgbClr val="313131"/>
+                </a:solidFill>
+                <a:latin typeface="PT Sans"/>
+              </a:rPr>
+              <a:t>의</a:t>
+            </a:r>
+            <a:r>
+              <a:rPr lang="en-US" altLang="ko-KR" sz="2000" b="1" dirty="0">
+                <a:solidFill>
+                  <a:srgbClr val="313131"/>
+                </a:solidFill>
+                <a:latin typeface="PT Sans"/>
+              </a:rPr>
+              <a:t> </a:t>
+            </a:r>
+            <a:r>
+              <a:rPr lang="ko-KR" altLang="en-US" sz="2000" b="1" dirty="0">
+                <a:solidFill>
+                  <a:srgbClr val="313131"/>
+                </a:solidFill>
+                <a:latin typeface="PT Sans"/>
+              </a:rPr>
+              <a:t>분포를 알 수 있다면 모든 것을 알 수 있다</a:t>
+            </a:r>
+            <a:r>
+              <a:rPr lang="en-US" altLang="ko-KR" sz="2000" b="1" dirty="0">
+                <a:solidFill>
+                  <a:srgbClr val="313131"/>
+                </a:solidFill>
+                <a:latin typeface="PT Sans"/>
+              </a:rPr>
+              <a:t>.</a:t>
+            </a:r>
+          </a:p>
+          <a:p>
+            <a:pPr marL="457200" indent="-457200">
+              <a:lnSpc>
+                <a:spcPct val="200000"/>
+              </a:lnSpc>
+              <a:buFont typeface="Wingdings" panose="05000000000000000000" pitchFamily="2" charset="2"/>
+              <a:buChar char="§"/>
+            </a:pPr>
+            <a:r>
+              <a:rPr lang="ko-KR" altLang="en-US" sz="2000" b="1" dirty="0">
+                <a:solidFill>
+                  <a:srgbClr val="313131"/>
+                </a:solidFill>
+                <a:latin typeface="PT Sans"/>
+              </a:rPr>
+              <a:t>우리는 모집단의 확률변수</a:t>
+            </a:r>
+            <a:r>
+              <a:rPr lang="en-US" altLang="ko-KR" sz="2000" b="1" dirty="0">
+                <a:solidFill>
+                  <a:srgbClr val="313131"/>
+                </a:solidFill>
+                <a:latin typeface="PT Sans"/>
+              </a:rPr>
+              <a:t>(</a:t>
+            </a:r>
+            <a:r>
+              <a:rPr lang="ko-KR" altLang="en-US" sz="2000" b="1" dirty="0">
+                <a:solidFill>
+                  <a:srgbClr val="313131"/>
+                </a:solidFill>
+                <a:latin typeface="PT Sans"/>
+              </a:rPr>
+              <a:t>키</a:t>
+            </a:r>
+            <a:r>
+              <a:rPr lang="en-US" altLang="ko-KR" sz="2000" b="1" dirty="0">
+                <a:solidFill>
+                  <a:srgbClr val="313131"/>
+                </a:solidFill>
+                <a:latin typeface="PT Sans"/>
+              </a:rPr>
+              <a:t>, </a:t>
+            </a:r>
+            <a:r>
+              <a:rPr lang="ko-KR" altLang="en-US" sz="2000" b="1" dirty="0">
+                <a:solidFill>
+                  <a:srgbClr val="313131"/>
+                </a:solidFill>
+                <a:latin typeface="PT Sans"/>
+              </a:rPr>
+              <a:t>나이</a:t>
+            </a:r>
+            <a:r>
+              <a:rPr lang="en-US" altLang="ko-KR" sz="2000" b="1" dirty="0">
+                <a:solidFill>
+                  <a:srgbClr val="313131"/>
+                </a:solidFill>
+                <a:latin typeface="PT Sans"/>
+              </a:rPr>
+              <a:t>, </a:t>
+            </a:r>
+            <a:r>
+              <a:rPr lang="ko-KR" altLang="en-US" sz="2000" b="1" dirty="0">
+                <a:solidFill>
+                  <a:srgbClr val="313131"/>
+                </a:solidFill>
+                <a:latin typeface="PT Sans"/>
+              </a:rPr>
+              <a:t>소득</a:t>
+            </a:r>
+            <a:r>
+              <a:rPr lang="en-US" altLang="ko-KR" sz="2000" b="1" dirty="0">
+                <a:solidFill>
+                  <a:srgbClr val="313131"/>
+                </a:solidFill>
+                <a:latin typeface="PT Sans"/>
+              </a:rPr>
+              <a:t>, </a:t>
+            </a:r>
+            <a:r>
+              <a:rPr lang="ko-KR" altLang="en-US" sz="2000" b="1" dirty="0">
+                <a:solidFill>
+                  <a:srgbClr val="313131"/>
+                </a:solidFill>
+                <a:latin typeface="PT Sans"/>
+              </a:rPr>
+              <a:t>등등의 </a:t>
+            </a:r>
+            <a:r>
+              <a:rPr lang="en-US" altLang="ko-KR" sz="2000" b="1" dirty="0">
+                <a:solidFill>
+                  <a:srgbClr val="313131"/>
+                </a:solidFill>
+                <a:latin typeface="PT Sans"/>
+              </a:rPr>
+              <a:t>parameter)</a:t>
+            </a:r>
+            <a:r>
+              <a:rPr lang="ko-KR" altLang="en-US" sz="2000" b="1" dirty="0">
+                <a:solidFill>
+                  <a:srgbClr val="313131"/>
+                </a:solidFill>
+                <a:latin typeface="PT Sans"/>
+              </a:rPr>
+              <a:t>의 분포를 전수조사를 하지 않으면 알 수가 없기 때문에 </a:t>
+            </a:r>
+            <a:r>
+              <a:rPr lang="en-US" altLang="ko-KR" sz="2000" b="1" dirty="0">
+                <a:solidFill>
+                  <a:srgbClr val="313131"/>
+                </a:solidFill>
+                <a:latin typeface="PT Sans"/>
+              </a:rPr>
+              <a:t>Sampling</a:t>
+            </a:r>
+            <a:r>
+              <a:rPr lang="ko-KR" altLang="en-US" sz="2000" b="1" dirty="0">
+                <a:solidFill>
+                  <a:srgbClr val="313131"/>
+                </a:solidFill>
+                <a:latin typeface="PT Sans"/>
+              </a:rPr>
+              <a:t>을 통해</a:t>
+            </a:r>
+            <a:r>
+              <a:rPr lang="en-US" altLang="ko-KR" sz="2000" b="1" dirty="0">
+                <a:solidFill>
+                  <a:srgbClr val="313131"/>
+                </a:solidFill>
+                <a:latin typeface="PT Sans"/>
+              </a:rPr>
+              <a:t>,</a:t>
+            </a:r>
+          </a:p>
+          <a:p>
+            <a:pPr marL="457200" indent="-457200">
+              <a:lnSpc>
+                <a:spcPct val="200000"/>
+              </a:lnSpc>
+              <a:buFont typeface="Wingdings" panose="05000000000000000000" pitchFamily="2" charset="2"/>
+              <a:buChar char="§"/>
+            </a:pPr>
+            <a:r>
+              <a:rPr lang="en-US" altLang="ko-KR" sz="2000" b="1" dirty="0">
+                <a:solidFill>
+                  <a:srgbClr val="313131"/>
+                </a:solidFill>
+                <a:latin typeface="PT Sans"/>
+              </a:rPr>
+              <a:t>Sample</a:t>
+            </a:r>
+            <a:r>
+              <a:rPr lang="ko-KR" altLang="en-US" sz="2000" b="1" dirty="0">
+                <a:solidFill>
+                  <a:srgbClr val="313131"/>
+                </a:solidFill>
+                <a:latin typeface="PT Sans"/>
+              </a:rPr>
+              <a:t>의 확률변수의 분포를 알고 모집단의 확률변수를 추정</a:t>
+            </a:r>
+            <a:r>
+              <a:rPr lang="en-US" altLang="ko-KR" sz="2000" b="1" dirty="0">
+                <a:solidFill>
+                  <a:srgbClr val="313131"/>
+                </a:solidFill>
+                <a:latin typeface="PT Sans"/>
+              </a:rPr>
+              <a:t>(Inference)</a:t>
+            </a:r>
+            <a:r>
+              <a:rPr lang="ko-KR" altLang="en-US" sz="2000" b="1" dirty="0">
+                <a:solidFill>
+                  <a:srgbClr val="313131"/>
+                </a:solidFill>
+                <a:latin typeface="PT Sans"/>
+              </a:rPr>
+              <a:t>할 뿐이다</a:t>
+            </a:r>
+            <a:r>
+              <a:rPr lang="en-US" altLang="ko-KR" sz="2000" b="1" dirty="0">
+                <a:solidFill>
+                  <a:srgbClr val="313131"/>
+                </a:solidFill>
+                <a:latin typeface="PT Sans"/>
+              </a:rPr>
+              <a:t>.</a:t>
+            </a:r>
+          </a:p>
+          <a:p>
+            <a:pPr marL="457200" indent="-457200">
+              <a:lnSpc>
+                <a:spcPct val="200000"/>
+              </a:lnSpc>
+              <a:buFont typeface="Wingdings" panose="05000000000000000000" pitchFamily="2" charset="2"/>
+              <a:buChar char="§"/>
+            </a:pPr>
+            <a:r>
+              <a:rPr lang="ko-KR" altLang="en-US" sz="2000" b="1" dirty="0">
+                <a:solidFill>
+                  <a:srgbClr val="313131"/>
+                </a:solidFill>
+                <a:latin typeface="PT Sans"/>
+              </a:rPr>
+              <a:t>따라서 확률 분포</a:t>
+            </a:r>
+            <a:r>
+              <a:rPr lang="en-US" altLang="ko-KR" sz="2000" b="1" dirty="0">
+                <a:solidFill>
+                  <a:srgbClr val="313131"/>
+                </a:solidFill>
+                <a:latin typeface="PT Sans"/>
+              </a:rPr>
+              <a:t>(Probability Distribution of random variable)</a:t>
+            </a:r>
+            <a:r>
+              <a:rPr lang="ko-KR" altLang="en-US" sz="2000" b="1" dirty="0">
+                <a:solidFill>
+                  <a:srgbClr val="313131"/>
+                </a:solidFill>
+                <a:latin typeface="PT Sans"/>
+              </a:rPr>
+              <a:t>의 종류</a:t>
+            </a:r>
+            <a:r>
+              <a:rPr lang="en-US" altLang="ko-KR" sz="2000" b="1" dirty="0">
+                <a:solidFill>
+                  <a:srgbClr val="313131"/>
+                </a:solidFill>
+                <a:latin typeface="PT Sans"/>
+              </a:rPr>
+              <a:t>?</a:t>
+            </a:r>
+          </a:p>
+        </p:txBody>
+      </p:sp>
+      <p:sp>
+        <p:nvSpPr>
+          <p:cNvPr id="3" name="직사각형 2">
+            <a:extLst>
+              <a:ext uri="{FF2B5EF4-FFF2-40B4-BE49-F238E27FC236}">
+                <a16:creationId xmlns:a16="http://schemas.microsoft.com/office/drawing/2014/main" id="{DD557313-FC0D-740B-56FB-FCDB49BCBF61}"/>
+              </a:ext>
+            </a:extLst>
+          </p:cNvPr>
+          <p:cNvSpPr/>
+          <p:nvPr/>
+        </p:nvSpPr>
+        <p:spPr>
+          <a:xfrm>
+            <a:off x="765820" y="764704"/>
+            <a:ext cx="3985386" cy="523220"/>
+          </a:xfrm>
+          <a:prstGeom prst="rect">
+            <a:avLst/>
+          </a:prstGeom>
+        </p:spPr>
+        <p:txBody>
+          <a:bodyPr wrap="none">
+            <a:spAutoFit/>
+          </a:bodyPr>
+          <a:lstStyle/>
+          <a:p>
+            <a:r>
+              <a:rPr lang="ko-KR" altLang="en-US" sz="2800" b="1" dirty="0">
+                <a:solidFill>
+                  <a:srgbClr val="313131"/>
+                </a:solidFill>
+                <a:latin typeface="PT Sans"/>
+              </a:rPr>
+              <a:t>확률변수를</a:t>
+            </a:r>
+            <a:r>
+              <a:rPr lang="en-US" altLang="ko-KR" sz="2800" b="1" dirty="0">
+                <a:solidFill>
+                  <a:srgbClr val="313131"/>
+                </a:solidFill>
+                <a:latin typeface="PT Sans"/>
+              </a:rPr>
+              <a:t> </a:t>
+            </a:r>
+            <a:r>
+              <a:rPr lang="ko-KR" altLang="en-US" sz="2800" b="1" dirty="0">
+                <a:solidFill>
+                  <a:srgbClr val="313131"/>
+                </a:solidFill>
+                <a:latin typeface="PT Sans"/>
+              </a:rPr>
+              <a:t>모두</a:t>
+            </a:r>
+            <a:r>
+              <a:rPr lang="en-US" altLang="ko-KR" sz="2800" b="1" dirty="0">
+                <a:solidFill>
+                  <a:srgbClr val="313131"/>
+                </a:solidFill>
+                <a:latin typeface="PT Sans"/>
+              </a:rPr>
+              <a:t> </a:t>
+            </a:r>
+            <a:r>
+              <a:rPr lang="ko-KR" altLang="en-US" sz="2800" b="1" dirty="0">
+                <a:solidFill>
+                  <a:srgbClr val="313131"/>
+                </a:solidFill>
+                <a:latin typeface="PT Sans"/>
+              </a:rPr>
+              <a:t>알려면</a:t>
+            </a:r>
+            <a:endParaRPr lang="en-US" altLang="ko-KR" sz="2800" b="1" dirty="0">
+              <a:solidFill>
+                <a:srgbClr val="313131"/>
+              </a:solidFill>
+              <a:latin typeface="PT Sans"/>
+            </a:endParaRPr>
+          </a:p>
+        </p:txBody>
+      </p:sp>
+    </p:spTree>
+    <p:extLst>
+      <p:ext uri="{BB962C8B-B14F-4D97-AF65-F5344CB8AC3E}">
+        <p14:creationId xmlns:p14="http://schemas.microsoft.com/office/powerpoint/2010/main" val="2486728205"/>
+      </p:ext>
+    </p:extLst>
+  </p:cSld>
+  <p:clrMapOvr>
+    <a:masterClrMapping/>
+  </p:clrMapOvr>
+  <mc:AlternateContent xmlns:mc="http://schemas.openxmlformats.org/markup-compatibility/2006" xmlns:p14="http://schemas.microsoft.com/office/powerpoint/2010/main">
+    <mc:Choice Requires="p14">
+      <p:transition spd="med" p14:dur="700">
+        <p:fade/>
+      </p:transition>
+    </mc:Choice>
+    <mc:Fallback xmlns="">
+      <p:transition spd="med">
+        <p:fade/>
+      </p:transition>
+    </mc:Fallback>
+  </mc:AlternateContent>
+</p:sld>
+</file>
+
+<file path=ppt/slides/slide11.xml><?xml version="1.0" encoding="utf-8"?>
+<p:sld xmlns:a="http://schemas.openxmlformats.org/drawingml/2006/main" xmlns:r="http://schemas.openxmlformats.org/officeDocument/2006/relationships" xmlns:p="http://schemas.openxmlformats.org/presentationml/2006/main">
+  <p:cSld>
+    <p:spTree>
+      <p:nvGrpSpPr>
+        <p:cNvPr id="1" name="">
+          <a:extLst>
+            <a:ext uri="{FF2B5EF4-FFF2-40B4-BE49-F238E27FC236}">
+              <a16:creationId xmlns:a16="http://schemas.microsoft.com/office/drawing/2014/main" id="{CC21F737-4D84-A348-6FE1-9D35471CA013}"/>
+            </a:ext>
+          </a:extLst>
+        </p:cNvPr>
+        <p:cNvGrpSpPr/>
+        <p:nvPr/>
+      </p:nvGrpSpPr>
+      <p:grpSpPr>
+        <a:xfrm>
+          <a:off x="0" y="0"/>
+          <a:ext cx="0" cy="0"/>
+          <a:chOff x="0" y="0"/>
+          <a:chExt cx="0" cy="0"/>
+        </a:xfrm>
+      </p:grpSpPr>
+      <p:sp>
+        <p:nvSpPr>
+          <p:cNvPr id="3" name="직사각형 2">
+            <a:extLst>
+              <a:ext uri="{FF2B5EF4-FFF2-40B4-BE49-F238E27FC236}">
+                <a16:creationId xmlns:a16="http://schemas.microsoft.com/office/drawing/2014/main" id="{ABF54B44-AEF4-5A91-28A0-B7F04F80476A}"/>
+              </a:ext>
+            </a:extLst>
+          </p:cNvPr>
+          <p:cNvSpPr/>
+          <p:nvPr/>
+        </p:nvSpPr>
+        <p:spPr>
+          <a:xfrm>
+            <a:off x="598421" y="2204864"/>
+            <a:ext cx="8136904" cy="674850"/>
+          </a:xfrm>
+          <a:prstGeom prst="rect">
+            <a:avLst/>
+          </a:prstGeom>
+          <a:solidFill>
+            <a:schemeClr val="bg1">
+              <a:lumMod val="85000"/>
+            </a:schemeClr>
+          </a:solidFill>
+          <a:ln>
+            <a:noFill/>
+          </a:ln>
+        </p:spPr>
+        <p:style>
+          <a:lnRef idx="2">
+            <a:schemeClr val="accent1">
+              <a:shade val="15000"/>
+            </a:schemeClr>
+          </a:lnRef>
+          <a:fillRef idx="1">
+            <a:schemeClr val="accent1"/>
+          </a:fillRef>
+          <a:effectRef idx="0">
+            <a:schemeClr val="accent1"/>
+          </a:effectRef>
+          <a:fontRef idx="minor">
+            <a:schemeClr val="lt1"/>
+          </a:fontRef>
+        </p:style>
+        <p:txBody>
+          <a:bodyPr rtlCol="0" anchor="ctr"/>
+          <a:lstStyle/>
+          <a:p>
+            <a:pPr algn="ctr"/>
+            <a:endParaRPr lang="ko-KR" altLang="en-US" dirty="0"/>
+          </a:p>
+        </p:txBody>
+      </p:sp>
+      <p:sp>
+        <p:nvSpPr>
+          <p:cNvPr id="8" name="슬라이드 번호 개체 틀 7">
+            <a:extLst>
+              <a:ext uri="{FF2B5EF4-FFF2-40B4-BE49-F238E27FC236}">
+                <a16:creationId xmlns:a16="http://schemas.microsoft.com/office/drawing/2014/main" id="{5419A402-6026-8725-BF04-5D3962A63264}"/>
+              </a:ext>
+            </a:extLst>
+          </p:cNvPr>
+          <p:cNvSpPr>
+            <a:spLocks noGrp="1"/>
+          </p:cNvSpPr>
+          <p:nvPr>
+            <p:ph type="sldNum" sz="quarter" idx="12"/>
+          </p:nvPr>
+        </p:nvSpPr>
+        <p:spPr/>
+        <p:txBody>
+          <a:bodyPr/>
+          <a:lstStyle/>
+          <a:p>
+            <a:pPr rtl="0"/>
+            <a:fld id="{A3F31473-23EB-4724-8B59-FE6D21D89FA4}" type="slidenum">
+              <a:rPr lang="en-US" altLang="ko-KR" noProof="0" smtClean="0"/>
+              <a:t>11</a:t>
+            </a:fld>
+            <a:endParaRPr lang="en-US" altLang="ko-KR" noProof="0" dirty="0"/>
+          </a:p>
+        </p:txBody>
+      </p:sp>
+      <p:sp>
+        <p:nvSpPr>
+          <p:cNvPr id="2" name="TextBox 1">
+            <a:extLst>
+              <a:ext uri="{FF2B5EF4-FFF2-40B4-BE49-F238E27FC236}">
+                <a16:creationId xmlns:a16="http://schemas.microsoft.com/office/drawing/2014/main" id="{566A1178-92B0-2653-5C2D-55676F0F0DEC}"/>
+              </a:ext>
+            </a:extLst>
+          </p:cNvPr>
+          <p:cNvSpPr txBox="1"/>
+          <p:nvPr/>
+        </p:nvSpPr>
+        <p:spPr>
+          <a:xfrm>
+            <a:off x="1629916" y="147612"/>
+            <a:ext cx="8928992" cy="5891998"/>
+          </a:xfrm>
+          <a:prstGeom prst="rect">
+            <a:avLst/>
+          </a:prstGeom>
+          <a:noFill/>
+        </p:spPr>
+        <p:txBody>
+          <a:bodyPr wrap="square" rtlCol="0">
+            <a:spAutoFit/>
+          </a:bodyPr>
+          <a:lstStyle/>
+          <a:p>
+            <a:pPr>
+              <a:lnSpc>
+                <a:spcPct val="200000"/>
+              </a:lnSpc>
+              <a:spcBef>
+                <a:spcPts val="600"/>
+              </a:spcBef>
+            </a:pPr>
+            <a:r>
+              <a:rPr lang="ko-KR" altLang="en-US" sz="4000" b="1" dirty="0">
+                <a:latin typeface="한컴 말랑말랑 Bold" panose="020F0803000000000000" pitchFamily="50" charset="-127"/>
+                <a:ea typeface="한컴 말랑말랑 Bold" panose="020F0803000000000000" pitchFamily="50" charset="-127"/>
+              </a:rPr>
+              <a:t>목차</a:t>
+            </a:r>
+            <a:endParaRPr lang="en-US" altLang="ko-KR" sz="4000" b="1" dirty="0">
+              <a:latin typeface="한컴 말랑말랑 Bold" panose="020F0803000000000000" pitchFamily="50" charset="-127"/>
+              <a:ea typeface="한컴 말랑말랑 Bold" panose="020F0803000000000000" pitchFamily="50" charset="-127"/>
+            </a:endParaRPr>
+          </a:p>
+          <a:p>
+            <a:pPr marL="514350" indent="-514350">
+              <a:lnSpc>
+                <a:spcPct val="200000"/>
+              </a:lnSpc>
+              <a:spcBef>
+                <a:spcPts val="600"/>
+              </a:spcBef>
+              <a:buAutoNum type="arabicPeriod"/>
+            </a:pPr>
+            <a:r>
+              <a:rPr lang="ko-KR" altLang="en-US" sz="2000" b="1" dirty="0">
+                <a:latin typeface="한컴 말랑말랑 Bold" panose="020F0803000000000000" pitchFamily="50" charset="-127"/>
+                <a:ea typeface="한컴 말랑말랑 Bold" panose="020F0803000000000000" pitchFamily="50" charset="-127"/>
+              </a:rPr>
+              <a:t>확률 변수</a:t>
+            </a:r>
+            <a:r>
+              <a:rPr lang="en-US" altLang="ko-KR" sz="2000" b="1" dirty="0">
+                <a:latin typeface="한컴 말랑말랑 Bold" panose="020F0803000000000000" pitchFamily="50" charset="-127"/>
+                <a:ea typeface="한컴 말랑말랑 Bold" panose="020F0803000000000000" pitchFamily="50" charset="-127"/>
+              </a:rPr>
+              <a:t>(Random Variable)</a:t>
+            </a:r>
+          </a:p>
+          <a:p>
+            <a:pPr marL="514350" indent="-514350">
+              <a:lnSpc>
+                <a:spcPct val="200000"/>
+              </a:lnSpc>
+              <a:spcBef>
+                <a:spcPts val="600"/>
+              </a:spcBef>
+              <a:buAutoNum type="arabicPeriod"/>
+            </a:pPr>
+            <a:r>
+              <a:rPr lang="ko-KR" altLang="en-US" b="1" dirty="0">
+                <a:latin typeface="한컴 말랑말랑 Bold" panose="020F0803000000000000" pitchFamily="50" charset="-127"/>
+                <a:ea typeface="한컴 말랑말랑 Bold" panose="020F0803000000000000" pitchFamily="50" charset="-127"/>
+              </a:rPr>
+              <a:t>이산형</a:t>
+            </a:r>
+            <a:r>
+              <a:rPr lang="en-US" altLang="ko-KR" b="1" dirty="0">
+                <a:latin typeface="한컴 말랑말랑 Bold" panose="020F0803000000000000" pitchFamily="50" charset="-127"/>
+                <a:ea typeface="한컴 말랑말랑 Bold" panose="020F0803000000000000" pitchFamily="50" charset="-127"/>
+              </a:rPr>
+              <a:t>(Discrete)</a:t>
+            </a:r>
+            <a:r>
+              <a:rPr lang="ko-KR" altLang="en-US" b="1" dirty="0">
+                <a:latin typeface="한컴 말랑말랑 Bold" panose="020F0803000000000000" pitchFamily="50" charset="-127"/>
+                <a:ea typeface="한컴 말랑말랑 Bold" panose="020F0803000000000000" pitchFamily="50" charset="-127"/>
+              </a:rPr>
+              <a:t>과 연속형</a:t>
+            </a:r>
+            <a:r>
+              <a:rPr lang="en-US" altLang="ko-KR" b="1" dirty="0">
+                <a:latin typeface="한컴 말랑말랑 Bold" panose="020F0803000000000000" pitchFamily="50" charset="-127"/>
+                <a:ea typeface="한컴 말랑말랑 Bold" panose="020F0803000000000000" pitchFamily="50" charset="-127"/>
+              </a:rPr>
+              <a:t>(Continuous) </a:t>
+            </a:r>
+            <a:r>
+              <a:rPr lang="ko-KR" altLang="en-US" b="1" dirty="0">
+                <a:latin typeface="한컴 말랑말랑 Bold" panose="020F0803000000000000" pitchFamily="50" charset="-127"/>
+                <a:ea typeface="한컴 말랑말랑 Bold" panose="020F0803000000000000" pitchFamily="50" charset="-127"/>
+              </a:rPr>
+              <a:t>확률변수</a:t>
+            </a:r>
+            <a:endParaRPr lang="en-US" altLang="ko-KR" b="1" dirty="0">
+              <a:latin typeface="한컴 말랑말랑 Bold" panose="020F0803000000000000" pitchFamily="50" charset="-127"/>
+              <a:ea typeface="한컴 말랑말랑 Bold" panose="020F0803000000000000" pitchFamily="50" charset="-127"/>
+            </a:endParaRPr>
+          </a:p>
+          <a:p>
+            <a:pPr marL="971550" lvl="1" indent="-514350">
+              <a:lnSpc>
+                <a:spcPct val="200000"/>
+              </a:lnSpc>
+              <a:spcBef>
+                <a:spcPts val="600"/>
+              </a:spcBef>
+              <a:buAutoNum type="arabicPeriod"/>
+            </a:pPr>
+            <a:r>
+              <a:rPr lang="ko-KR" altLang="en-US" b="1" dirty="0">
+                <a:latin typeface="한컴 말랑말랑 Bold" panose="020F0803000000000000" pitchFamily="50" charset="-127"/>
+                <a:ea typeface="한컴 말랑말랑 Bold" panose="020F0803000000000000" pitchFamily="50" charset="-127"/>
+              </a:rPr>
+              <a:t>분산과</a:t>
+            </a:r>
+            <a:r>
+              <a:rPr lang="en-US" altLang="ko-KR" b="1" dirty="0">
+                <a:latin typeface="한컴 말랑말랑 Bold" panose="020F0803000000000000" pitchFamily="50" charset="-127"/>
+                <a:ea typeface="한컴 말랑말랑 Bold" panose="020F0803000000000000" pitchFamily="50" charset="-127"/>
+              </a:rPr>
+              <a:t> </a:t>
+            </a:r>
+            <a:r>
+              <a:rPr lang="ko-KR" altLang="en-US" b="1" dirty="0">
+                <a:latin typeface="한컴 말랑말랑 Bold" panose="020F0803000000000000" pitchFamily="50" charset="-127"/>
+                <a:ea typeface="한컴 말랑말랑 Bold" panose="020F0803000000000000" pitchFamily="50" charset="-127"/>
+              </a:rPr>
+              <a:t>편향</a:t>
+            </a:r>
+            <a:r>
+              <a:rPr lang="en-US" altLang="ko-KR" b="1" dirty="0">
+                <a:latin typeface="한컴 말랑말랑 Bold" panose="020F0803000000000000" pitchFamily="50" charset="-127"/>
+                <a:ea typeface="한컴 말랑말랑 Bold" panose="020F0803000000000000" pitchFamily="50" charset="-127"/>
+              </a:rPr>
+              <a:t>(Variance &amp; Bias)</a:t>
+            </a:r>
+          </a:p>
+          <a:p>
+            <a:pPr marL="514350" indent="-514350">
+              <a:lnSpc>
+                <a:spcPct val="200000"/>
+              </a:lnSpc>
+              <a:spcBef>
+                <a:spcPts val="600"/>
+              </a:spcBef>
+              <a:buAutoNum type="arabicPeriod"/>
+            </a:pPr>
+            <a:r>
+              <a:rPr lang="ko-KR" altLang="en-US" sz="2000" b="1" dirty="0" err="1">
+                <a:latin typeface="한컴 말랑말랑 Bold" panose="020F0803000000000000" pitchFamily="50" charset="-127"/>
+                <a:ea typeface="한컴 말랑말랑 Bold" panose="020F0803000000000000" pitchFamily="50" charset="-127"/>
+              </a:rPr>
+              <a:t>기대값</a:t>
+            </a:r>
+            <a:r>
+              <a:rPr lang="en-US" altLang="ko-KR" sz="2000" b="1" dirty="0">
+                <a:latin typeface="한컴 말랑말랑 Bold" panose="020F0803000000000000" pitchFamily="50" charset="-127"/>
+                <a:ea typeface="한컴 말랑말랑 Bold" panose="020F0803000000000000" pitchFamily="50" charset="-127"/>
+              </a:rPr>
+              <a:t>(Expectation)</a:t>
+            </a:r>
+            <a:r>
+              <a:rPr lang="ko-KR" altLang="en-US" sz="2000" b="1" dirty="0">
+                <a:latin typeface="한컴 말랑말랑 Bold" panose="020F0803000000000000" pitchFamily="50" charset="-127"/>
+                <a:ea typeface="한컴 말랑말랑 Bold" panose="020F0803000000000000" pitchFamily="50" charset="-127"/>
+              </a:rPr>
+              <a:t>과 분산</a:t>
+            </a:r>
+            <a:r>
+              <a:rPr lang="en-US" altLang="ko-KR" sz="2000" b="1" dirty="0">
+                <a:latin typeface="한컴 말랑말랑 Bold" panose="020F0803000000000000" pitchFamily="50" charset="-127"/>
+                <a:ea typeface="한컴 말랑말랑 Bold" panose="020F0803000000000000" pitchFamily="50" charset="-127"/>
+              </a:rPr>
+              <a:t>(variance)</a:t>
+            </a:r>
+          </a:p>
+          <a:p>
+            <a:pPr marL="514350" indent="-514350">
+              <a:lnSpc>
+                <a:spcPct val="200000"/>
+              </a:lnSpc>
+              <a:spcBef>
+                <a:spcPts val="600"/>
+              </a:spcBef>
+              <a:buAutoNum type="arabicPeriod"/>
+            </a:pPr>
+            <a:r>
+              <a:rPr lang="ko-KR" altLang="en-US" sz="2000" b="1" dirty="0">
+                <a:latin typeface="한컴 말랑말랑 Bold" panose="020F0803000000000000" pitchFamily="50" charset="-127"/>
+                <a:ea typeface="한컴 말랑말랑 Bold" panose="020F0803000000000000" pitchFamily="50" charset="-127"/>
+              </a:rPr>
+              <a:t>확률</a:t>
+            </a:r>
+            <a:r>
+              <a:rPr lang="en-US" altLang="ko-KR" sz="2000" b="1" dirty="0">
+                <a:latin typeface="한컴 말랑말랑 Bold" panose="020F0803000000000000" pitchFamily="50" charset="-127"/>
+                <a:ea typeface="한컴 말랑말랑 Bold" panose="020F0803000000000000" pitchFamily="50" charset="-127"/>
+              </a:rPr>
+              <a:t> </a:t>
+            </a:r>
+            <a:r>
+              <a:rPr lang="ko-KR" altLang="en-US" sz="2000" b="1" dirty="0">
+                <a:latin typeface="한컴 말랑말랑 Bold" panose="020F0803000000000000" pitchFamily="50" charset="-127"/>
+                <a:ea typeface="한컴 말랑말랑 Bold" panose="020F0803000000000000" pitchFamily="50" charset="-127"/>
+              </a:rPr>
+              <a:t>분포</a:t>
+            </a:r>
+            <a:r>
+              <a:rPr lang="en-US" altLang="ko-KR" sz="2000" b="1" dirty="0">
+                <a:latin typeface="한컴 말랑말랑 Bold" panose="020F0803000000000000" pitchFamily="50" charset="-127"/>
+                <a:ea typeface="한컴 말랑말랑 Bold" panose="020F0803000000000000" pitchFamily="50" charset="-127"/>
+              </a:rPr>
+              <a:t>(Random Distribution)</a:t>
+            </a:r>
+          </a:p>
+          <a:p>
+            <a:pPr marL="971550" lvl="1" indent="-514350">
+              <a:lnSpc>
+                <a:spcPct val="200000"/>
+              </a:lnSpc>
+              <a:spcBef>
+                <a:spcPts val="600"/>
+              </a:spcBef>
+              <a:buAutoNum type="arabicPeriod"/>
+            </a:pPr>
+            <a:r>
+              <a:rPr lang="ko-KR" altLang="en-US" b="1" dirty="0">
+                <a:latin typeface="한컴 말랑말랑 Bold" panose="020F0803000000000000" pitchFamily="50" charset="-127"/>
+                <a:ea typeface="한컴 말랑말랑 Bold" panose="020F0803000000000000" pitchFamily="50" charset="-127"/>
+              </a:rPr>
+              <a:t>베르누이분포</a:t>
+            </a:r>
+            <a:r>
+              <a:rPr lang="en-US" altLang="ko-KR" b="1" dirty="0">
+                <a:latin typeface="한컴 말랑말랑 Bold" panose="020F0803000000000000" pitchFamily="50" charset="-127"/>
+                <a:ea typeface="한컴 말랑말랑 Bold" panose="020F0803000000000000" pitchFamily="50" charset="-127"/>
+              </a:rPr>
+              <a:t>, </a:t>
+            </a:r>
+            <a:r>
+              <a:rPr lang="ko-KR" altLang="en-US" b="1" dirty="0">
+                <a:latin typeface="한컴 말랑말랑 Bold" panose="020F0803000000000000" pitchFamily="50" charset="-127"/>
+                <a:ea typeface="한컴 말랑말랑 Bold" panose="020F0803000000000000" pitchFamily="50" charset="-127"/>
+              </a:rPr>
+              <a:t>이항분포</a:t>
+            </a:r>
+            <a:r>
+              <a:rPr lang="en-US" altLang="ko-KR" b="1" dirty="0">
+                <a:latin typeface="한컴 말랑말랑 Bold" panose="020F0803000000000000" pitchFamily="50" charset="-127"/>
+                <a:ea typeface="한컴 말랑말랑 Bold" panose="020F0803000000000000" pitchFamily="50" charset="-127"/>
+              </a:rPr>
+              <a:t>, </a:t>
+            </a:r>
+            <a:r>
+              <a:rPr lang="ko-KR" altLang="en-US" b="1" dirty="0">
+                <a:latin typeface="한컴 말랑말랑 Bold" panose="020F0803000000000000" pitchFamily="50" charset="-127"/>
+                <a:ea typeface="한컴 말랑말랑 Bold" panose="020F0803000000000000" pitchFamily="50" charset="-127"/>
+              </a:rPr>
+              <a:t>정규분포</a:t>
+            </a:r>
+            <a:endParaRPr lang="en-US" altLang="ko-KR" b="1" dirty="0">
+              <a:latin typeface="한컴 말랑말랑 Bold" panose="020F0803000000000000" pitchFamily="50" charset="-127"/>
+              <a:ea typeface="한컴 말랑말랑 Bold" panose="020F0803000000000000" pitchFamily="50" charset="-127"/>
+            </a:endParaRPr>
+          </a:p>
+          <a:p>
+            <a:pPr marL="514350" indent="-514350">
+              <a:lnSpc>
+                <a:spcPct val="200000"/>
+              </a:lnSpc>
+              <a:spcBef>
+                <a:spcPts val="600"/>
+              </a:spcBef>
+              <a:buAutoNum type="arabicPeriod"/>
+            </a:pPr>
+            <a:r>
+              <a:rPr lang="ko-KR" altLang="en-US" sz="2000" b="1" dirty="0">
+                <a:latin typeface="한컴 말랑말랑 Bold" panose="020F0803000000000000" pitchFamily="50" charset="-127"/>
+                <a:ea typeface="한컴 말랑말랑 Bold" panose="020F0803000000000000" pitchFamily="50" charset="-127"/>
+              </a:rPr>
+              <a:t>조건부 확률</a:t>
+            </a:r>
+            <a:r>
+              <a:rPr lang="en-US" altLang="ko-KR" sz="2000" b="1" dirty="0">
+                <a:latin typeface="한컴 말랑말랑 Bold" panose="020F0803000000000000" pitchFamily="50" charset="-127"/>
+                <a:ea typeface="한컴 말랑말랑 Bold" panose="020F0803000000000000" pitchFamily="50" charset="-127"/>
+              </a:rPr>
+              <a:t>(Conditional Probability)</a:t>
+            </a:r>
+          </a:p>
+        </p:txBody>
+      </p:sp>
+    </p:spTree>
+    <p:extLst>
+      <p:ext uri="{BB962C8B-B14F-4D97-AF65-F5344CB8AC3E}">
+        <p14:creationId xmlns:p14="http://schemas.microsoft.com/office/powerpoint/2010/main" val="1332821853"/>
+      </p:ext>
+    </p:extLst>
+  </p:cSld>
+  <p:clrMapOvr>
+    <a:masterClrMapping/>
+  </p:clrMapOvr>
+  <mc:AlternateContent xmlns:mc="http://schemas.openxmlformats.org/markup-compatibility/2006" xmlns:p14="http://schemas.microsoft.com/office/powerpoint/2010/main">
+    <mc:Choice Requires="p14">
+      <p:transition spd="med" p14:dur="700">
+        <p:fade/>
+      </p:transition>
+    </mc:Choice>
+    <mc:Fallback xmlns="">
+      <p:transition spd="med">
+        <p:fade/>
+      </p:transition>
+    </mc:Fallback>
+  </mc:AlternateContent>
+</p:sld>
+</file>
+
+<file path=ppt/slides/slide12.xml><?xml version="1.0" encoding="utf-8"?>
+<p:sld xmlns:a="http://schemas.openxmlformats.org/drawingml/2006/main" xmlns:r="http://schemas.openxmlformats.org/officeDocument/2006/relationships" xmlns:p="http://schemas.openxmlformats.org/presentationml/2006/main">
+  <p:cSld>
+    <p:spTree>
+      <p:nvGrpSpPr>
+        <p:cNvPr id="1" name=""/>
+        <p:cNvGrpSpPr/>
+        <p:nvPr/>
+      </p:nvGrpSpPr>
+      <p:grpSpPr>
+        <a:xfrm>
+          <a:off x="0" y="0"/>
+          <a:ext cx="0" cy="0"/>
+          <a:chOff x="0" y="0"/>
+          <a:chExt cx="0" cy="0"/>
+        </a:xfrm>
+      </p:grpSpPr>
+      <p:sp>
+        <p:nvSpPr>
+          <p:cNvPr id="8" name="슬라이드 번호 개체 틀 7"/>
+          <p:cNvSpPr>
+            <a:spLocks noGrp="1"/>
+          </p:cNvSpPr>
+          <p:nvPr>
+            <p:ph type="sldNum" sz="quarter" idx="12"/>
+          </p:nvPr>
+        </p:nvSpPr>
+        <p:spPr/>
+        <p:txBody>
+          <a:bodyPr/>
+          <a:lstStyle/>
+          <a:p>
+            <a:pPr rtl="0"/>
+            <a:fld id="{A3F31473-23EB-4724-8B59-FE6D21D89FA4}" type="slidenum">
+              <a:rPr lang="en-US" altLang="ko-KR" noProof="0" smtClean="0"/>
+              <a:t>12</a:t>
+            </a:fld>
+            <a:endParaRPr lang="en-US" altLang="ko-KR" noProof="0" dirty="0"/>
+          </a:p>
+        </p:txBody>
+      </p:sp>
+      <p:sp>
+        <p:nvSpPr>
           <p:cNvPr id="10" name="직사각형 9"/>
           <p:cNvSpPr/>
           <p:nvPr/>
@@ -9587,7 +10722,7 @@
 </p:sld>
 </file>
 
-<file path=ppt/slides/slide11.xml><?xml version="1.0" encoding="utf-8"?>
+<file path=ppt/slides/slide13.xml><?xml version="1.0" encoding="utf-8"?>
 <p:sld xmlns:a="http://schemas.openxmlformats.org/drawingml/2006/main" xmlns:r="http://schemas.openxmlformats.org/officeDocument/2006/relationships" xmlns:p="http://schemas.openxmlformats.org/presentationml/2006/main">
   <p:cSld>
     <p:spTree>
@@ -9622,7 +10757,7 @@
             <a:pPr rtl="0"/>
             <a:fld id="{A3F31473-23EB-4724-8B59-FE6D21D89FA4}" type="slidenum">
               <a:rPr lang="en-US" altLang="ko-KR" noProof="0" smtClean="0"/>
-              <a:t>11</a:t>
+              <a:t>13</a:t>
             </a:fld>
             <a:endParaRPr lang="en-US" altLang="ko-KR" noProof="0" dirty="0"/>
           </a:p>
@@ -9865,7 +11000,7 @@
 </p:sld>
 </file>
 
-<file path=ppt/slides/slide12.xml><?xml version="1.0" encoding="utf-8"?>
+<file path=ppt/slides/slide14.xml><?xml version="1.0" encoding="utf-8"?>
 <p:sld xmlns:a="http://schemas.openxmlformats.org/drawingml/2006/main" xmlns:r="http://schemas.openxmlformats.org/officeDocument/2006/relationships" xmlns:p="http://schemas.openxmlformats.org/presentationml/2006/main">
   <p:cSld>
     <p:spTree>
@@ -9912,7 +11047,7 @@
             <a:pPr rtl="0"/>
             <a:fld id="{A3F31473-23EB-4724-8B59-FE6D21D89FA4}" type="slidenum">
               <a:rPr lang="en-US" altLang="ko-KR" noProof="0" smtClean="0"/>
-              <a:t>12</a:t>
+              <a:t>14</a:t>
             </a:fld>
             <a:endParaRPr lang="en-US" altLang="ko-KR" noProof="0" dirty="0"/>
           </a:p>
@@ -10172,7 +11307,7 @@
 </p:sld>
 </file>
 
-<file path=ppt/slides/slide13.xml><?xml version="1.0" encoding="utf-8"?>
+<file path=ppt/slides/slide15.xml><?xml version="1.0" encoding="utf-8"?>
 <p:sld xmlns:a="http://schemas.openxmlformats.org/drawingml/2006/main" xmlns:r="http://schemas.openxmlformats.org/officeDocument/2006/relationships" xmlns:p="http://schemas.openxmlformats.org/presentationml/2006/main">
   <p:cSld>
     <p:spTree>
@@ -10219,7 +11354,7 @@
             <a:pPr rtl="0"/>
             <a:fld id="{A3F31473-23EB-4724-8B59-FE6D21D89FA4}" type="slidenum">
               <a:rPr lang="en-US" altLang="ko-KR" noProof="0" smtClean="0"/>
-              <a:t>13</a:t>
+              <a:t>15</a:t>
             </a:fld>
             <a:endParaRPr lang="en-US" altLang="ko-KR" noProof="0" dirty="0"/>
           </a:p>
@@ -10474,7 +11609,7 @@
 </p:sld>
 </file>
 
-<file path=ppt/slides/slide14.xml><?xml version="1.0" encoding="utf-8"?>
+<file path=ppt/slides/slide16.xml><?xml version="1.0" encoding="utf-8"?>
 <p:sld xmlns:a="http://schemas.openxmlformats.org/drawingml/2006/main" xmlns:r="http://schemas.openxmlformats.org/officeDocument/2006/relationships" xmlns:p="http://schemas.openxmlformats.org/presentationml/2006/main">
   <p:cSld>
     <p:spTree>
@@ -10521,7 +11656,7 @@
             <a:pPr rtl="0"/>
             <a:fld id="{A3F31473-23EB-4724-8B59-FE6D21D89FA4}" type="slidenum">
               <a:rPr lang="en-US" altLang="ko-KR" noProof="0" smtClean="0"/>
-              <a:t>14</a:t>
+              <a:t>16</a:t>
             </a:fld>
             <a:endParaRPr lang="en-US" altLang="ko-KR" noProof="0" dirty="0"/>
           </a:p>
@@ -10752,7 +11887,7 @@
 </p:sld>
 </file>
 
-<file path=ppt/slides/slide15.xml><?xml version="1.0" encoding="utf-8"?>
+<file path=ppt/slides/slide17.xml><?xml version="1.0" encoding="utf-8"?>
 <p:sld xmlns:a="http://schemas.openxmlformats.org/drawingml/2006/main" xmlns:r="http://schemas.openxmlformats.org/officeDocument/2006/relationships" xmlns:p="http://schemas.openxmlformats.org/presentationml/2006/main">
   <p:cSld>
     <p:spTree>
@@ -10799,14 +11934,14 @@
             <a:pPr rtl="0"/>
             <a:fld id="{A3F31473-23EB-4724-8B59-FE6D21D89FA4}" type="slidenum">
               <a:rPr lang="en-US" altLang="ko-KR" noProof="0" smtClean="0"/>
-              <a:t>15</a:t>
+              <a:t>17</a:t>
             </a:fld>
             <a:endParaRPr lang="en-US" altLang="ko-KR" noProof="0" dirty="0"/>
           </a:p>
         </p:txBody>
       </p:sp>
-      <mc:AlternateContent xmlns:mc="http://schemas.openxmlformats.org/markup-compatibility/2006">
-        <mc:Choice xmlns:a14="http://schemas.microsoft.com/office/drawing/2010/main" Requires="a14">
+      <mc:AlternateContent xmlns:mc="http://schemas.openxmlformats.org/markup-compatibility/2006" xmlns:a14="http://schemas.microsoft.com/office/drawing/2010/main">
+        <mc:Choice Requires="a14">
           <p:sp>
             <p:nvSpPr>
               <p:cNvPr id="4" name="TextBox 3">
@@ -10946,6 +12081,7 @@
                 </a:endParaRPr>
               </a:p>
               <a:p>
+                <a:pPr/>
                 <a14:m>
                   <m:oMathPara xmlns:m="http://schemas.openxmlformats.org/officeDocument/2006/math">
                     <m:oMathParaPr>
@@ -10953,37 +12089,49 @@
                     </m:oMathParaPr>
                     <m:oMath xmlns:m="http://schemas.openxmlformats.org/officeDocument/2006/math">
                       <m:r>
-                        <a:rPr lang="ko-KR" altLang="en-US" sz="1600" i="1"/>
+                        <a:rPr lang="ko-KR" altLang="en-US" sz="1600" i="1">
+                          <a:latin typeface="Cambria Math" panose="02040503050406030204" pitchFamily="18" charset="0"/>
+                        </a:rPr>
                         <m:t>𝑓</m:t>
                       </m:r>
                       <m:d>
                         <m:dPr>
                           <m:ctrlPr>
-                            <a:rPr lang="ko-KR" altLang="en-US" sz="1600" i="1"/>
+                            <a:rPr lang="ko-KR" altLang="en-US" sz="1600" i="1">
+                              <a:latin typeface="Cambria Math" panose="02040503050406030204" pitchFamily="18" charset="0"/>
+                            </a:rPr>
                           </m:ctrlPr>
                         </m:dPr>
                         <m:e>
                           <m:r>
-                            <a:rPr lang="ko-KR" altLang="en-US" sz="1600" i="1"/>
+                            <a:rPr lang="ko-KR" altLang="en-US" sz="1600" i="1">
+                              <a:latin typeface="Cambria Math" panose="02040503050406030204" pitchFamily="18" charset="0"/>
+                            </a:rPr>
                             <m:t>𝑥</m:t>
                           </m:r>
                         </m:e>
                       </m:d>
                       <m:r>
-                        <a:rPr lang="en-US" altLang="ko-KR" sz="1600"/>
+                        <a:rPr lang="en-US" altLang="ko-KR" sz="1600">
+                          <a:latin typeface="Cambria Math" panose="02040503050406030204" pitchFamily="18" charset="0"/>
+                        </a:rPr>
                         <m:t>=</m:t>
                       </m:r>
                       <m:limLow>
                         <m:limLowPr>
                           <m:ctrlPr>
-                            <a:rPr lang="ko-KR" altLang="en-US" sz="1600" i="1"/>
+                            <a:rPr lang="ko-KR" altLang="en-US" sz="1600" i="1">
+                              <a:latin typeface="Cambria Math" panose="02040503050406030204" pitchFamily="18" charset="0"/>
+                            </a:rPr>
                           </m:ctrlPr>
                         </m:limLowPr>
                         <m:e>
                           <m:func>
                             <m:funcPr>
                               <m:ctrlPr>
-                                <a:rPr lang="ko-KR" altLang="en-US" sz="1600" i="1"/>
+                                <a:rPr lang="ko-KR" altLang="en-US" sz="1600" i="1">
+                                  <a:latin typeface="Cambria Math" panose="02040503050406030204" pitchFamily="18" charset="0"/>
+                                </a:rPr>
                               </m:ctrlPr>
                             </m:funcPr>
                             <m:fName>
@@ -10991,7 +12139,9 @@
                                 <m:rPr>
                                   <m:sty m:val="p"/>
                                 </m:rPr>
-                                <a:rPr lang="en-US" altLang="ko-KR" sz="1600"/>
+                                <a:rPr lang="en-US" altLang="ko-KR" sz="1600">
+                                  <a:latin typeface="Cambria Math" panose="02040503050406030204" pitchFamily="18" charset="0"/>
+                                </a:rPr>
                                 <m:t>lim</m:t>
                               </m:r>
                             </m:fName>
@@ -11003,19 +12153,27 @@
                             <m:rPr>
                               <m:sty m:val="p"/>
                             </m:rPr>
-                            <a:rPr lang="en-US" altLang="ko-KR" sz="1600"/>
+                            <a:rPr lang="en-US" altLang="ko-KR" sz="1600">
+                              <a:latin typeface="Cambria Math" panose="02040503050406030204" pitchFamily="18" charset="0"/>
+                            </a:rPr>
                             <m:t>Δ</m:t>
                           </m:r>
                           <m:r>
-                            <a:rPr lang="ko-KR" altLang="en-US" sz="1600" i="1"/>
+                            <a:rPr lang="ko-KR" altLang="en-US" sz="1600" i="1">
+                              <a:latin typeface="Cambria Math" panose="02040503050406030204" pitchFamily="18" charset="0"/>
+                            </a:rPr>
                             <m:t>𝑥</m:t>
                           </m:r>
                           <m:r>
-                            <a:rPr lang="ko-KR" altLang="en-US" sz="1600"/>
+                            <a:rPr lang="ko-KR" altLang="en-US" sz="1600">
+                              <a:latin typeface="Cambria Math" panose="02040503050406030204" pitchFamily="18" charset="0"/>
+                            </a:rPr>
                             <m:t>→</m:t>
                           </m:r>
                           <m:r>
-                            <a:rPr lang="en-US" altLang="ko-KR" sz="1600"/>
+                            <a:rPr lang="en-US" altLang="ko-KR" sz="1600">
+                              <a:latin typeface="Cambria Math" panose="02040503050406030204" pitchFamily="18" charset="0"/>
+                            </a:rPr>
                             <m:t>0</m:t>
                           </m:r>
                         </m:lim>
@@ -11023,54 +12181,76 @@
                       <m:f>
                         <m:fPr>
                           <m:ctrlPr>
-                            <a:rPr lang="ko-KR" altLang="en-US" sz="1600" i="1"/>
+                            <a:rPr lang="ko-KR" altLang="en-US" sz="1600" i="1">
+                              <a:latin typeface="Cambria Math" panose="02040503050406030204" pitchFamily="18" charset="0"/>
+                            </a:rPr>
                           </m:ctrlPr>
                         </m:fPr>
                         <m:num>
                           <m:r>
-                            <a:rPr lang="ko-KR" altLang="en-US" sz="1600" i="1"/>
+                            <a:rPr lang="ko-KR" altLang="en-US" sz="1600" i="1">
+                              <a:latin typeface="Cambria Math" panose="02040503050406030204" pitchFamily="18" charset="0"/>
+                            </a:rPr>
                             <m:t>𝑃</m:t>
                           </m:r>
                           <m:d>
                             <m:dPr>
                               <m:ctrlPr>
-                                <a:rPr lang="ko-KR" altLang="en-US" sz="1600" i="1"/>
+                                <a:rPr lang="ko-KR" altLang="en-US" sz="1600" i="1">
+                                  <a:latin typeface="Cambria Math" panose="02040503050406030204" pitchFamily="18" charset="0"/>
+                                </a:rPr>
                               </m:ctrlPr>
                             </m:dPr>
                             <m:e>
                               <m:r>
-                                <a:rPr lang="ko-KR" altLang="en-US" sz="1600" i="1"/>
+                                <a:rPr lang="ko-KR" altLang="en-US" sz="1600" i="1">
+                                  <a:latin typeface="Cambria Math" panose="02040503050406030204" pitchFamily="18" charset="0"/>
+                                </a:rPr>
                                 <m:t>𝑥</m:t>
                               </m:r>
                               <m:r>
-                                <a:rPr lang="ko-KR" altLang="en-US" sz="1600"/>
+                                <a:rPr lang="ko-KR" altLang="en-US" sz="1600">
+                                  <a:latin typeface="Cambria Math" panose="02040503050406030204" pitchFamily="18" charset="0"/>
+                                </a:rPr>
                                 <m:t>≤</m:t>
                               </m:r>
                               <m:r>
-                                <a:rPr lang="ko-KR" altLang="en-US" sz="1600" i="1"/>
+                                <a:rPr lang="ko-KR" altLang="en-US" sz="1600" i="1">
+                                  <a:latin typeface="Cambria Math" panose="02040503050406030204" pitchFamily="18" charset="0"/>
+                                </a:rPr>
                                 <m:t>𝑋</m:t>
                               </m:r>
                               <m:r>
-                                <a:rPr lang="ko-KR" altLang="en-US" sz="1600"/>
+                                <a:rPr lang="ko-KR" altLang="en-US" sz="1600">
+                                  <a:latin typeface="Cambria Math" panose="02040503050406030204" pitchFamily="18" charset="0"/>
+                                </a:rPr>
                                 <m:t>≤</m:t>
                               </m:r>
                               <m:r>
-                                <a:rPr lang="ko-KR" altLang="en-US" sz="1600" i="1"/>
+                                <a:rPr lang="ko-KR" altLang="en-US" sz="1600" i="1">
+                                  <a:latin typeface="Cambria Math" panose="02040503050406030204" pitchFamily="18" charset="0"/>
+                                </a:rPr>
                                 <m:t>𝑥</m:t>
                               </m:r>
                               <m:r>
-                                <a:rPr lang="en-US" altLang="ko-KR" sz="1600"/>
+                                <a:rPr lang="en-US" altLang="ko-KR" sz="1600">
+                                  <a:latin typeface="Cambria Math" panose="02040503050406030204" pitchFamily="18" charset="0"/>
+                                </a:rPr>
                                 <m:t>+</m:t>
                               </m:r>
                               <m:r>
                                 <m:rPr>
                                   <m:sty m:val="p"/>
                                 </m:rPr>
-                                <a:rPr lang="en-US" altLang="ko-KR" sz="1600"/>
+                                <a:rPr lang="en-US" altLang="ko-KR" sz="1600">
+                                  <a:latin typeface="Cambria Math" panose="02040503050406030204" pitchFamily="18" charset="0"/>
+                                </a:rPr>
                                 <m:t>Δ</m:t>
                               </m:r>
                               <m:r>
-                                <a:rPr lang="ko-KR" altLang="en-US" sz="1600" i="1"/>
+                                <a:rPr lang="ko-KR" altLang="en-US" sz="1600" i="1">
+                                  <a:latin typeface="Cambria Math" panose="02040503050406030204" pitchFamily="18" charset="0"/>
+                                </a:rPr>
                                 <m:t>𝑥</m:t>
                               </m:r>
                             </m:e>
@@ -11081,11 +12261,15 @@
                             <m:rPr>
                               <m:sty m:val="p"/>
                             </m:rPr>
-                            <a:rPr lang="en-US" altLang="ko-KR" sz="1600"/>
+                            <a:rPr lang="en-US" altLang="ko-KR" sz="1600">
+                              <a:latin typeface="Cambria Math" panose="02040503050406030204" pitchFamily="18" charset="0"/>
+                            </a:rPr>
                             <m:t>Δ</m:t>
                           </m:r>
                           <m:r>
-                            <a:rPr lang="ko-KR" altLang="en-US" sz="1600" i="1"/>
+                            <a:rPr lang="ko-KR" altLang="en-US" sz="1600" i="1">
+                              <a:latin typeface="Cambria Math" panose="02040503050406030204" pitchFamily="18" charset="0"/>
+                            </a:rPr>
                             <m:t>𝑥</m:t>
                           </m:r>
                         </m:den>
@@ -11156,7 +12340,7 @@
             </p:txBody>
           </p:sp>
         </mc:Choice>
-        <mc:Fallback>
+        <mc:Fallback xmlns="">
           <p:sp>
             <p:nvSpPr>
               <p:cNvPr id="4" name="TextBox 3">
@@ -11321,7 +12505,7 @@
 </p:sld>
 </file>
 
-<file path=ppt/slides/slide16.xml><?xml version="1.0" encoding="utf-8"?>
+<file path=ppt/slides/slide18.xml><?xml version="1.0" encoding="utf-8"?>
 <p:sld xmlns:a="http://schemas.openxmlformats.org/drawingml/2006/main" xmlns:r="http://schemas.openxmlformats.org/officeDocument/2006/relationships" xmlns:p="http://schemas.openxmlformats.org/presentationml/2006/main">
   <p:cSld>
     <p:spTree>
@@ -11368,7 +12552,7 @@
             <a:pPr rtl="0"/>
             <a:fld id="{A3F31473-23EB-4724-8B59-FE6D21D89FA4}" type="slidenum">
               <a:rPr lang="en-US" altLang="ko-KR" noProof="0" smtClean="0"/>
-              <a:t>16</a:t>
+              <a:t>18</a:t>
             </a:fld>
             <a:endParaRPr lang="en-US" altLang="ko-KR" noProof="0" dirty="0"/>
           </a:p>
@@ -11674,7 +12858,7 @@
 </p:sld>
 </file>
 
-<file path=ppt/slides/slide17.xml><?xml version="1.0" encoding="utf-8"?>
+<file path=ppt/slides/slide19.xml><?xml version="1.0" encoding="utf-8"?>
 <p:sld xmlns:a="http://schemas.openxmlformats.org/drawingml/2006/main" xmlns:r="http://schemas.openxmlformats.org/officeDocument/2006/relationships" xmlns:p="http://schemas.openxmlformats.org/presentationml/2006/main">
   <p:cSld>
     <p:spTree>
@@ -11721,7 +12905,7 @@
             <a:pPr rtl="0"/>
             <a:fld id="{A3F31473-23EB-4724-8B59-FE6D21D89FA4}" type="slidenum">
               <a:rPr lang="en-US" altLang="ko-KR" noProof="0" smtClean="0"/>
-              <a:t>17</a:t>
+              <a:t>19</a:t>
             </a:fld>
             <a:endParaRPr lang="en-US" altLang="ko-KR" noProof="0" dirty="0"/>
           </a:p>
@@ -12233,7 +13417,232 @@
 </p:sld>
 </file>
 
-<file path=ppt/slides/slide18.xml><?xml version="1.0" encoding="utf-8"?>
+<file path=ppt/slides/slide2.xml><?xml version="1.0" encoding="utf-8"?>
+<p:sld xmlns:a="http://schemas.openxmlformats.org/drawingml/2006/main" xmlns:r="http://schemas.openxmlformats.org/officeDocument/2006/relationships" xmlns:p="http://schemas.openxmlformats.org/presentationml/2006/main">
+  <p:cSld>
+    <p:spTree>
+      <p:nvGrpSpPr>
+        <p:cNvPr id="1" name="">
+          <a:extLst>
+            <a:ext uri="{FF2B5EF4-FFF2-40B4-BE49-F238E27FC236}">
+              <a16:creationId xmlns:a16="http://schemas.microsoft.com/office/drawing/2014/main" id="{7690E2C1-BB1A-4FCC-4EBC-8B540F598F5F}"/>
+            </a:ext>
+          </a:extLst>
+        </p:cNvPr>
+        <p:cNvGrpSpPr/>
+        <p:nvPr/>
+      </p:nvGrpSpPr>
+      <p:grpSpPr>
+        <a:xfrm>
+          <a:off x="0" y="0"/>
+          <a:ext cx="0" cy="0"/>
+          <a:chOff x="0" y="0"/>
+          <a:chExt cx="0" cy="0"/>
+        </a:xfrm>
+      </p:grpSpPr>
+      <p:sp>
+        <p:nvSpPr>
+          <p:cNvPr id="8" name="슬라이드 번호 개체 틀 7">
+            <a:extLst>
+              <a:ext uri="{FF2B5EF4-FFF2-40B4-BE49-F238E27FC236}">
+                <a16:creationId xmlns:a16="http://schemas.microsoft.com/office/drawing/2014/main" id="{4EF241B0-03F6-4174-6351-DEA7C3022824}"/>
+              </a:ext>
+            </a:extLst>
+          </p:cNvPr>
+          <p:cNvSpPr>
+            <a:spLocks noGrp="1"/>
+          </p:cNvSpPr>
+          <p:nvPr>
+            <p:ph type="sldNum" sz="quarter" idx="12"/>
+          </p:nvPr>
+        </p:nvSpPr>
+        <p:spPr/>
+        <p:txBody>
+          <a:bodyPr/>
+          <a:lstStyle/>
+          <a:p>
+            <a:pPr rtl="0"/>
+            <a:fld id="{A3F31473-23EB-4724-8B59-FE6D21D89FA4}" type="slidenum">
+              <a:rPr lang="en-US" altLang="ko-KR" noProof="0" smtClean="0"/>
+              <a:t>2</a:t>
+            </a:fld>
+            <a:endParaRPr lang="en-US" altLang="ko-KR" noProof="0" dirty="0"/>
+          </a:p>
+        </p:txBody>
+      </p:sp>
+      <p:sp>
+        <p:nvSpPr>
+          <p:cNvPr id="3" name="TextBox 2">
+            <a:extLst>
+              <a:ext uri="{FF2B5EF4-FFF2-40B4-BE49-F238E27FC236}">
+                <a16:creationId xmlns:a16="http://schemas.microsoft.com/office/drawing/2014/main" id="{9969E69D-4C2D-C812-DDC5-4721F324AC9B}"/>
+              </a:ext>
+            </a:extLst>
+          </p:cNvPr>
+          <p:cNvSpPr txBox="1"/>
+          <p:nvPr/>
+        </p:nvSpPr>
+        <p:spPr>
+          <a:xfrm>
+            <a:off x="5014292" y="1772816"/>
+            <a:ext cx="6840760" cy="1779718"/>
+          </a:xfrm>
+          <a:prstGeom prst="rect">
+            <a:avLst/>
+          </a:prstGeom>
+          <a:noFill/>
+        </p:spPr>
+        <p:txBody>
+          <a:bodyPr wrap="square">
+            <a:spAutoFit/>
+          </a:bodyPr>
+          <a:lstStyle/>
+          <a:p>
+            <a:pPr marL="285750" indent="-285750">
+              <a:lnSpc>
+                <a:spcPct val="250000"/>
+              </a:lnSpc>
+              <a:buFont typeface="Wingdings" panose="05000000000000000000" pitchFamily="2" charset="2"/>
+              <a:buChar char="v"/>
+            </a:pPr>
+            <a:r>
+              <a:rPr lang="ko-KR" altLang="en-US" sz="2400" dirty="0">
+                <a:latin typeface="한컴 말랑말랑 Bold" panose="020F0803000000000000" pitchFamily="50" charset="-127"/>
+                <a:ea typeface="한컴 말랑말랑 Bold" panose="020F0803000000000000" pitchFamily="50" charset="-127"/>
+              </a:rPr>
+              <a:t> 신은 주사위를 던진다</a:t>
+            </a:r>
+            <a:r>
+              <a:rPr lang="en-US" altLang="ko-KR" sz="2400" dirty="0">
+                <a:latin typeface="한컴 말랑말랑 Bold" panose="020F0803000000000000" pitchFamily="50" charset="-127"/>
+                <a:ea typeface="한컴 말랑말랑 Bold" panose="020F0803000000000000" pitchFamily="50" charset="-127"/>
+              </a:rPr>
+              <a:t>.</a:t>
+            </a:r>
+          </a:p>
+          <a:p>
+            <a:pPr marL="285750" indent="-285750">
+              <a:lnSpc>
+                <a:spcPct val="250000"/>
+              </a:lnSpc>
+              <a:buFont typeface="Wingdings" panose="05000000000000000000" pitchFamily="2" charset="2"/>
+              <a:buChar char="v"/>
+            </a:pPr>
+            <a:r>
+              <a:rPr lang="en-US" altLang="ko-KR" sz="2400" dirty="0">
+                <a:latin typeface="한컴 말랑말랑 Bold" panose="020F0803000000000000" pitchFamily="50" charset="-127"/>
+                <a:ea typeface="한컴 말랑말랑 Bold" panose="020F0803000000000000" pitchFamily="50" charset="-127"/>
+              </a:rPr>
+              <a:t> </a:t>
+            </a:r>
+            <a:r>
+              <a:rPr lang="ko-KR" altLang="en-US" sz="2400" dirty="0">
+                <a:latin typeface="한컴 말랑말랑 Bold" panose="020F0803000000000000" pitchFamily="50" charset="-127"/>
+                <a:ea typeface="한컴 말랑말랑 Bold" panose="020F0803000000000000" pitchFamily="50" charset="-127"/>
+              </a:rPr>
+              <a:t>확률과</a:t>
+            </a:r>
+            <a:r>
+              <a:rPr lang="en-US" altLang="ko-KR" sz="2400" dirty="0">
+                <a:latin typeface="한컴 말랑말랑 Bold" panose="020F0803000000000000" pitchFamily="50" charset="-127"/>
+                <a:ea typeface="한컴 말랑말랑 Bold" panose="020F0803000000000000" pitchFamily="50" charset="-127"/>
+              </a:rPr>
+              <a:t> </a:t>
+            </a:r>
+            <a:r>
+              <a:rPr lang="ko-KR" altLang="en-US" sz="2400" dirty="0">
+                <a:latin typeface="한컴 말랑말랑 Bold" panose="020F0803000000000000" pitchFamily="50" charset="-127"/>
+                <a:ea typeface="한컴 말랑말랑 Bold" panose="020F0803000000000000" pitchFamily="50" charset="-127"/>
+              </a:rPr>
+              <a:t>놀라움은 반비례한다</a:t>
+            </a:r>
+            <a:r>
+              <a:rPr lang="en-US" altLang="ko-KR" sz="2400" dirty="0">
+                <a:latin typeface="한컴 말랑말랑 Bold" panose="020F0803000000000000" pitchFamily="50" charset="-127"/>
+                <a:ea typeface="한컴 말랑말랑 Bold" panose="020F0803000000000000" pitchFamily="50" charset="-127"/>
+              </a:rPr>
+              <a:t>.</a:t>
+            </a:r>
+            <a:endParaRPr lang="ko-KR" altLang="en-US" sz="2400" dirty="0">
+              <a:latin typeface="한컴 말랑말랑 Bold" panose="020F0803000000000000" pitchFamily="50" charset="-127"/>
+              <a:ea typeface="한컴 말랑말랑 Bold" panose="020F0803000000000000" pitchFamily="50" charset="-127"/>
+            </a:endParaRPr>
+          </a:p>
+        </p:txBody>
+      </p:sp>
+      <p:pic>
+        <p:nvPicPr>
+          <p:cNvPr id="13314" name="Picture 2">
+            <a:extLst>
+              <a:ext uri="{FF2B5EF4-FFF2-40B4-BE49-F238E27FC236}">
+                <a16:creationId xmlns:a16="http://schemas.microsoft.com/office/drawing/2014/main" id="{890AE170-3683-EFA7-B712-EC521F94052E}"/>
+              </a:ext>
+            </a:extLst>
+          </p:cNvPr>
+          <p:cNvPicPr>
+            <a:picLocks noChangeAspect="1" noChangeArrowheads="1"/>
+          </p:cNvPicPr>
+          <p:nvPr/>
+        </p:nvPicPr>
+        <p:blipFill>
+          <a:blip r:embed="rId3">
+            <a:extLst>
+              <a:ext uri="{28A0092B-C50C-407E-A947-70E740481C1C}">
+                <a14:useLocalDpi xmlns:a14="http://schemas.microsoft.com/office/drawing/2010/main" val="0"/>
+              </a:ext>
+            </a:extLst>
+          </a:blip>
+          <a:srcRect/>
+          <a:stretch>
+            <a:fillRect/>
+          </a:stretch>
+        </p:blipFill>
+        <p:spPr bwMode="auto">
+          <a:xfrm>
+            <a:off x="477788" y="586522"/>
+            <a:ext cx="3960440" cy="5940660"/>
+          </a:xfrm>
+          <a:prstGeom prst="rect">
+            <a:avLst/>
+          </a:prstGeom>
+          <a:noFill/>
+          <a:extLst>
+            <a:ext uri="{909E8E84-426E-40DD-AFC4-6F175D3DCCD1}">
+              <a14:hiddenFill xmlns:a14="http://schemas.microsoft.com/office/drawing/2010/main">
+                <a:solidFill>
+                  <a:srgbClr val="FFFFFF"/>
+                </a:solidFill>
+              </a14:hiddenFill>
+            </a:ext>
+          </a:extLst>
+        </p:spPr>
+      </p:pic>
+    </p:spTree>
+    <p:extLst>
+      <p:ext uri="{BB962C8B-B14F-4D97-AF65-F5344CB8AC3E}">
+        <p14:creationId xmlns:p14="http://schemas.microsoft.com/office/powerpoint/2010/main" val="810907724"/>
+      </p:ext>
+    </p:extLst>
+  </p:cSld>
+  <p:clrMapOvr>
+    <a:masterClrMapping/>
+  </p:clrMapOvr>
+  <mc:AlternateContent xmlns:mc="http://schemas.openxmlformats.org/markup-compatibility/2006" xmlns:p14="http://schemas.microsoft.com/office/powerpoint/2010/main">
+    <mc:Choice Requires="p14">
+      <p:transition spd="med" p14:dur="700">
+        <p:fade/>
+      </p:transition>
+    </mc:Choice>
+    <mc:Fallback xmlns="">
+      <p:transition spd="med">
+        <p:fade/>
+      </p:transition>
+    </mc:Fallback>
+  </mc:AlternateContent>
+</p:sld>
+</file>
+
+<file path=ppt/slides/slide20.xml><?xml version="1.0" encoding="utf-8"?>
 <p:sld xmlns:a="http://schemas.openxmlformats.org/drawingml/2006/main" xmlns:r="http://schemas.openxmlformats.org/officeDocument/2006/relationships" xmlns:p="http://schemas.openxmlformats.org/presentationml/2006/main">
   <p:cSld>
     <p:spTree>
@@ -12280,7 +13689,7 @@
             <a:pPr rtl="0"/>
             <a:fld id="{A3F31473-23EB-4724-8B59-FE6D21D89FA4}" type="slidenum">
               <a:rPr lang="en-US" altLang="ko-KR" noProof="0" smtClean="0"/>
-              <a:t>18</a:t>
+              <a:t>20</a:t>
             </a:fld>
             <a:endParaRPr lang="en-US" altLang="ko-KR" noProof="0" dirty="0"/>
           </a:p>
@@ -12838,7 +14247,7 @@
 </p:sld>
 </file>
 
-<file path=ppt/slides/slide19.xml><?xml version="1.0" encoding="utf-8"?>
+<file path=ppt/slides/slide21.xml><?xml version="1.0" encoding="utf-8"?>
 <p:sld xmlns:a="http://schemas.openxmlformats.org/drawingml/2006/main" xmlns:r="http://schemas.openxmlformats.org/officeDocument/2006/relationships" xmlns:p="http://schemas.openxmlformats.org/presentationml/2006/main">
   <p:cSld>
     <p:spTree>
@@ -12885,7 +14294,7 @@
             <a:pPr rtl="0"/>
             <a:fld id="{A3F31473-23EB-4724-8B59-FE6D21D89FA4}" type="slidenum">
               <a:rPr lang="en-US" altLang="ko-KR" noProof="0" smtClean="0"/>
-              <a:t>19</a:t>
+              <a:t>21</a:t>
             </a:fld>
             <a:endParaRPr lang="en-US" altLang="ko-KR" noProof="0" dirty="0"/>
           </a:p>
@@ -13256,232 +14665,7 @@
 </p:sld>
 </file>
 
-<file path=ppt/slides/slide2.xml><?xml version="1.0" encoding="utf-8"?>
-<p:sld xmlns:a="http://schemas.openxmlformats.org/drawingml/2006/main" xmlns:r="http://schemas.openxmlformats.org/officeDocument/2006/relationships" xmlns:p="http://schemas.openxmlformats.org/presentationml/2006/main">
-  <p:cSld>
-    <p:spTree>
-      <p:nvGrpSpPr>
-        <p:cNvPr id="1" name="">
-          <a:extLst>
-            <a:ext uri="{FF2B5EF4-FFF2-40B4-BE49-F238E27FC236}">
-              <a16:creationId xmlns:a16="http://schemas.microsoft.com/office/drawing/2014/main" id="{7690E2C1-BB1A-4FCC-4EBC-8B540F598F5F}"/>
-            </a:ext>
-          </a:extLst>
-        </p:cNvPr>
-        <p:cNvGrpSpPr/>
-        <p:nvPr/>
-      </p:nvGrpSpPr>
-      <p:grpSpPr>
-        <a:xfrm>
-          <a:off x="0" y="0"/>
-          <a:ext cx="0" cy="0"/>
-          <a:chOff x="0" y="0"/>
-          <a:chExt cx="0" cy="0"/>
-        </a:xfrm>
-      </p:grpSpPr>
-      <p:sp>
-        <p:nvSpPr>
-          <p:cNvPr id="8" name="슬라이드 번호 개체 틀 7">
-            <a:extLst>
-              <a:ext uri="{FF2B5EF4-FFF2-40B4-BE49-F238E27FC236}">
-                <a16:creationId xmlns:a16="http://schemas.microsoft.com/office/drawing/2014/main" id="{4EF241B0-03F6-4174-6351-DEA7C3022824}"/>
-              </a:ext>
-            </a:extLst>
-          </p:cNvPr>
-          <p:cNvSpPr>
-            <a:spLocks noGrp="1"/>
-          </p:cNvSpPr>
-          <p:nvPr>
-            <p:ph type="sldNum" sz="quarter" idx="12"/>
-          </p:nvPr>
-        </p:nvSpPr>
-        <p:spPr/>
-        <p:txBody>
-          <a:bodyPr/>
-          <a:lstStyle/>
-          <a:p>
-            <a:pPr rtl="0"/>
-            <a:fld id="{A3F31473-23EB-4724-8B59-FE6D21D89FA4}" type="slidenum">
-              <a:rPr lang="en-US" altLang="ko-KR" noProof="0" smtClean="0"/>
-              <a:t>2</a:t>
-            </a:fld>
-            <a:endParaRPr lang="en-US" altLang="ko-KR" noProof="0" dirty="0"/>
-          </a:p>
-        </p:txBody>
-      </p:sp>
-      <p:sp>
-        <p:nvSpPr>
-          <p:cNvPr id="3" name="TextBox 2">
-            <a:extLst>
-              <a:ext uri="{FF2B5EF4-FFF2-40B4-BE49-F238E27FC236}">
-                <a16:creationId xmlns:a16="http://schemas.microsoft.com/office/drawing/2014/main" id="{9969E69D-4C2D-C812-DDC5-4721F324AC9B}"/>
-              </a:ext>
-            </a:extLst>
-          </p:cNvPr>
-          <p:cNvSpPr txBox="1"/>
-          <p:nvPr/>
-        </p:nvSpPr>
-        <p:spPr>
-          <a:xfrm>
-            <a:off x="5014292" y="1772816"/>
-            <a:ext cx="6840760" cy="1779718"/>
-          </a:xfrm>
-          <a:prstGeom prst="rect">
-            <a:avLst/>
-          </a:prstGeom>
-          <a:noFill/>
-        </p:spPr>
-        <p:txBody>
-          <a:bodyPr wrap="square">
-            <a:spAutoFit/>
-          </a:bodyPr>
-          <a:lstStyle/>
-          <a:p>
-            <a:pPr marL="285750" indent="-285750">
-              <a:lnSpc>
-                <a:spcPct val="250000"/>
-              </a:lnSpc>
-              <a:buFont typeface="Wingdings" panose="05000000000000000000" pitchFamily="2" charset="2"/>
-              <a:buChar char="v"/>
-            </a:pPr>
-            <a:r>
-              <a:rPr lang="ko-KR" altLang="en-US" sz="2400" dirty="0">
-                <a:latin typeface="한컴 말랑말랑 Bold" panose="020F0803000000000000" pitchFamily="50" charset="-127"/>
-                <a:ea typeface="한컴 말랑말랑 Bold" panose="020F0803000000000000" pitchFamily="50" charset="-127"/>
-              </a:rPr>
-              <a:t> 신은 주사위를 던진다</a:t>
-            </a:r>
-            <a:r>
-              <a:rPr lang="en-US" altLang="ko-KR" sz="2400" dirty="0">
-                <a:latin typeface="한컴 말랑말랑 Bold" panose="020F0803000000000000" pitchFamily="50" charset="-127"/>
-                <a:ea typeface="한컴 말랑말랑 Bold" panose="020F0803000000000000" pitchFamily="50" charset="-127"/>
-              </a:rPr>
-              <a:t>.</a:t>
-            </a:r>
-          </a:p>
-          <a:p>
-            <a:pPr marL="285750" indent="-285750">
-              <a:lnSpc>
-                <a:spcPct val="250000"/>
-              </a:lnSpc>
-              <a:buFont typeface="Wingdings" panose="05000000000000000000" pitchFamily="2" charset="2"/>
-              <a:buChar char="v"/>
-            </a:pPr>
-            <a:r>
-              <a:rPr lang="en-US" altLang="ko-KR" sz="2400" dirty="0">
-                <a:latin typeface="한컴 말랑말랑 Bold" panose="020F0803000000000000" pitchFamily="50" charset="-127"/>
-                <a:ea typeface="한컴 말랑말랑 Bold" panose="020F0803000000000000" pitchFamily="50" charset="-127"/>
-              </a:rPr>
-              <a:t> </a:t>
-            </a:r>
-            <a:r>
-              <a:rPr lang="ko-KR" altLang="en-US" sz="2400" dirty="0">
-                <a:latin typeface="한컴 말랑말랑 Bold" panose="020F0803000000000000" pitchFamily="50" charset="-127"/>
-                <a:ea typeface="한컴 말랑말랑 Bold" panose="020F0803000000000000" pitchFamily="50" charset="-127"/>
-              </a:rPr>
-              <a:t>확률과</a:t>
-            </a:r>
-            <a:r>
-              <a:rPr lang="en-US" altLang="ko-KR" sz="2400" dirty="0">
-                <a:latin typeface="한컴 말랑말랑 Bold" panose="020F0803000000000000" pitchFamily="50" charset="-127"/>
-                <a:ea typeface="한컴 말랑말랑 Bold" panose="020F0803000000000000" pitchFamily="50" charset="-127"/>
-              </a:rPr>
-              <a:t> </a:t>
-            </a:r>
-            <a:r>
-              <a:rPr lang="ko-KR" altLang="en-US" sz="2400" dirty="0">
-                <a:latin typeface="한컴 말랑말랑 Bold" panose="020F0803000000000000" pitchFamily="50" charset="-127"/>
-                <a:ea typeface="한컴 말랑말랑 Bold" panose="020F0803000000000000" pitchFamily="50" charset="-127"/>
-              </a:rPr>
-              <a:t>놀라움은 반비례한다</a:t>
-            </a:r>
-            <a:r>
-              <a:rPr lang="en-US" altLang="ko-KR" sz="2400" dirty="0">
-                <a:latin typeface="한컴 말랑말랑 Bold" panose="020F0803000000000000" pitchFamily="50" charset="-127"/>
-                <a:ea typeface="한컴 말랑말랑 Bold" panose="020F0803000000000000" pitchFamily="50" charset="-127"/>
-              </a:rPr>
-              <a:t>.</a:t>
-            </a:r>
-            <a:endParaRPr lang="ko-KR" altLang="en-US" sz="2400" dirty="0">
-              <a:latin typeface="한컴 말랑말랑 Bold" panose="020F0803000000000000" pitchFamily="50" charset="-127"/>
-              <a:ea typeface="한컴 말랑말랑 Bold" panose="020F0803000000000000" pitchFamily="50" charset="-127"/>
-            </a:endParaRPr>
-          </a:p>
-        </p:txBody>
-      </p:sp>
-      <p:pic>
-        <p:nvPicPr>
-          <p:cNvPr id="13314" name="Picture 2">
-            <a:extLst>
-              <a:ext uri="{FF2B5EF4-FFF2-40B4-BE49-F238E27FC236}">
-                <a16:creationId xmlns:a16="http://schemas.microsoft.com/office/drawing/2014/main" id="{890AE170-3683-EFA7-B712-EC521F94052E}"/>
-              </a:ext>
-            </a:extLst>
-          </p:cNvPr>
-          <p:cNvPicPr>
-            <a:picLocks noChangeAspect="1" noChangeArrowheads="1"/>
-          </p:cNvPicPr>
-          <p:nvPr/>
-        </p:nvPicPr>
-        <p:blipFill>
-          <a:blip r:embed="rId3">
-            <a:extLst>
-              <a:ext uri="{28A0092B-C50C-407E-A947-70E740481C1C}">
-                <a14:useLocalDpi xmlns:a14="http://schemas.microsoft.com/office/drawing/2010/main" val="0"/>
-              </a:ext>
-            </a:extLst>
-          </a:blip>
-          <a:srcRect/>
-          <a:stretch>
-            <a:fillRect/>
-          </a:stretch>
-        </p:blipFill>
-        <p:spPr bwMode="auto">
-          <a:xfrm>
-            <a:off x="477788" y="586522"/>
-            <a:ext cx="3960440" cy="5940660"/>
-          </a:xfrm>
-          <a:prstGeom prst="rect">
-            <a:avLst/>
-          </a:prstGeom>
-          <a:noFill/>
-          <a:extLst>
-            <a:ext uri="{909E8E84-426E-40DD-AFC4-6F175D3DCCD1}">
-              <a14:hiddenFill xmlns:a14="http://schemas.microsoft.com/office/drawing/2010/main">
-                <a:solidFill>
-                  <a:srgbClr val="FFFFFF"/>
-                </a:solidFill>
-              </a14:hiddenFill>
-            </a:ext>
-          </a:extLst>
-        </p:spPr>
-      </p:pic>
-    </p:spTree>
-    <p:extLst>
-      <p:ext uri="{BB962C8B-B14F-4D97-AF65-F5344CB8AC3E}">
-        <p14:creationId xmlns:p14="http://schemas.microsoft.com/office/powerpoint/2010/main" val="810907724"/>
-      </p:ext>
-    </p:extLst>
-  </p:cSld>
-  <p:clrMapOvr>
-    <a:masterClrMapping/>
-  </p:clrMapOvr>
-  <mc:AlternateContent xmlns:mc="http://schemas.openxmlformats.org/markup-compatibility/2006" xmlns:p14="http://schemas.microsoft.com/office/powerpoint/2010/main">
-    <mc:Choice Requires="p14">
-      <p:transition spd="med" p14:dur="700">
-        <p:fade/>
-      </p:transition>
-    </mc:Choice>
-    <mc:Fallback xmlns="">
-      <p:transition spd="med">
-        <p:fade/>
-      </p:transition>
-    </mc:Fallback>
-  </mc:AlternateContent>
-</p:sld>
-</file>
-
-<file path=ppt/slides/slide20.xml><?xml version="1.0" encoding="utf-8"?>
+<file path=ppt/slides/slide22.xml><?xml version="1.0" encoding="utf-8"?>
 <p:sld xmlns:a="http://schemas.openxmlformats.org/drawingml/2006/main" xmlns:r="http://schemas.openxmlformats.org/officeDocument/2006/relationships" xmlns:p="http://schemas.openxmlformats.org/presentationml/2006/main">
   <p:cSld>
     <p:spTree>
@@ -13528,7 +14712,7 @@
             <a:pPr rtl="0"/>
             <a:fld id="{A3F31473-23EB-4724-8B59-FE6D21D89FA4}" type="slidenum">
               <a:rPr lang="en-US" altLang="ko-KR" noProof="0" smtClean="0"/>
-              <a:t>20</a:t>
+              <a:t>22</a:t>
             </a:fld>
             <a:endParaRPr lang="en-US" altLang="ko-KR" noProof="0" dirty="0"/>
           </a:p>
@@ -13700,7 +14884,7 @@
 </p:sld>
 </file>
 
-<file path=ppt/slides/slide21.xml><?xml version="1.0" encoding="utf-8"?>
+<file path=ppt/slides/slide23.xml><?xml version="1.0" encoding="utf-8"?>
 <p:sld xmlns:a="http://schemas.openxmlformats.org/drawingml/2006/main" xmlns:r="http://schemas.openxmlformats.org/officeDocument/2006/relationships" xmlns:p="http://schemas.openxmlformats.org/presentationml/2006/main">
   <p:cSld>
     <p:spTree>
@@ -13747,7 +14931,7 @@
             <a:pPr rtl="0"/>
             <a:fld id="{A3F31473-23EB-4724-8B59-FE6D21D89FA4}" type="slidenum">
               <a:rPr lang="en-US" altLang="ko-KR" noProof="0" smtClean="0"/>
-              <a:t>21</a:t>
+              <a:t>23</a:t>
             </a:fld>
             <a:endParaRPr lang="en-US" altLang="ko-KR" noProof="0" dirty="0"/>
           </a:p>
@@ -13989,7 +15173,7 @@
 </p:sld>
 </file>
 
-<file path=ppt/slides/slide22.xml><?xml version="1.0" encoding="utf-8"?>
+<file path=ppt/slides/slide24.xml><?xml version="1.0" encoding="utf-8"?>
 <p:sld xmlns:a="http://schemas.openxmlformats.org/drawingml/2006/main" xmlns:r="http://schemas.openxmlformats.org/officeDocument/2006/relationships" xmlns:p="http://schemas.openxmlformats.org/presentationml/2006/main">
   <p:cSld>
     <p:spTree>
@@ -14090,7 +15274,7 @@
             <a:pPr rtl="0"/>
             <a:fld id="{A3F31473-23EB-4724-8B59-FE6D21D89FA4}" type="slidenum">
               <a:rPr lang="en-US" altLang="ko-KR" noProof="0" smtClean="0"/>
-              <a:t>22</a:t>
+              <a:t>24</a:t>
             </a:fld>
             <a:endParaRPr lang="en-US" altLang="ko-KR" noProof="0" dirty="0"/>
           </a:p>
@@ -14438,7 +15622,7 @@
 </p:sld>
 </file>
 
-<file path=ppt/slides/slide23.xml><?xml version="1.0" encoding="utf-8"?>
+<file path=ppt/slides/slide25.xml><?xml version="1.0" encoding="utf-8"?>
 <p:sld xmlns:a="http://schemas.openxmlformats.org/drawingml/2006/main" xmlns:r="http://schemas.openxmlformats.org/officeDocument/2006/relationships" xmlns:p="http://schemas.openxmlformats.org/presentationml/2006/main">
   <p:cSld>
     <p:spTree>
@@ -14473,7 +15657,7 @@
             <a:pPr rtl="0"/>
             <a:fld id="{A3F31473-23EB-4724-8B59-FE6D21D89FA4}" type="slidenum">
               <a:rPr lang="en-US" altLang="ko-KR" noProof="0" smtClean="0"/>
-              <a:t>23</a:t>
+              <a:t>25</a:t>
             </a:fld>
             <a:endParaRPr lang="en-US" altLang="ko-KR" noProof="0" dirty="0"/>
           </a:p>
@@ -15188,7 +16372,7 @@
 </p:sld>
 </file>
 
-<file path=ppt/slides/slide24.xml><?xml version="1.0" encoding="utf-8"?>
+<file path=ppt/slides/slide26.xml><?xml version="1.0" encoding="utf-8"?>
 <p:sld xmlns:a="http://schemas.openxmlformats.org/drawingml/2006/main" xmlns:r="http://schemas.openxmlformats.org/officeDocument/2006/relationships" xmlns:p="http://schemas.openxmlformats.org/presentationml/2006/main">
   <p:cSld>
     <p:spTree>
@@ -15289,7 +16473,7 @@
             <a:pPr rtl="0"/>
             <a:fld id="{A3F31473-23EB-4724-8B59-FE6D21D89FA4}" type="slidenum">
               <a:rPr lang="en-US" altLang="ko-KR" noProof="0" smtClean="0"/>
-              <a:t>24</a:t>
+              <a:t>26</a:t>
             </a:fld>
             <a:endParaRPr lang="en-US" altLang="ko-KR" noProof="0" dirty="0"/>
           </a:p>
@@ -15637,7 +16821,7 @@
 </p:sld>
 </file>
 
-<file path=ppt/slides/slide25.xml><?xml version="1.0" encoding="utf-8"?>
+<file path=ppt/slides/slide27.xml><?xml version="1.0" encoding="utf-8"?>
 <p:sld xmlns:a="http://schemas.openxmlformats.org/drawingml/2006/main" xmlns:r="http://schemas.openxmlformats.org/officeDocument/2006/relationships" xmlns:p="http://schemas.openxmlformats.org/presentationml/2006/main">
   <p:cSld>
     <p:spTree>
@@ -15672,7 +16856,7 @@
             <a:pPr rtl="0"/>
             <a:fld id="{A3F31473-23EB-4724-8B59-FE6D21D89FA4}" type="slidenum">
               <a:rPr lang="en-US" altLang="ko-KR" noProof="0" smtClean="0"/>
-              <a:t>25</a:t>
+              <a:t>27</a:t>
             </a:fld>
             <a:endParaRPr lang="en-US" altLang="ko-KR" noProof="0" dirty="0"/>
           </a:p>
@@ -15786,7 +16970,7 @@
 </p:sld>
 </file>
 
-<file path=ppt/slides/slide26.xml><?xml version="1.0" encoding="utf-8"?>
+<file path=ppt/slides/slide28.xml><?xml version="1.0" encoding="utf-8"?>
 <p:sld xmlns:a="http://schemas.openxmlformats.org/drawingml/2006/main" xmlns:r="http://schemas.openxmlformats.org/officeDocument/2006/relationships" xmlns:p="http://schemas.openxmlformats.org/presentationml/2006/main">
   <p:cSld>
     <p:spTree>
@@ -15821,7 +17005,7 @@
             <a:pPr rtl="0"/>
             <a:fld id="{A3F31473-23EB-4724-8B59-FE6D21D89FA4}" type="slidenum">
               <a:rPr lang="en-US" altLang="ko-KR" noProof="0" smtClean="0"/>
-              <a:t>26</a:t>
+              <a:t>28</a:t>
             </a:fld>
             <a:endParaRPr lang="en-US" altLang="ko-KR" noProof="0" dirty="0"/>
           </a:p>
@@ -15910,7 +17094,7 @@
 </p:sld>
 </file>
 
-<file path=ppt/slides/slide27.xml><?xml version="1.0" encoding="utf-8"?>
+<file path=ppt/slides/slide29.xml><?xml version="1.0" encoding="utf-8"?>
 <p:sld xmlns:a="http://schemas.openxmlformats.org/drawingml/2006/main" xmlns:r="http://schemas.openxmlformats.org/officeDocument/2006/relationships" xmlns:p="http://schemas.openxmlformats.org/presentationml/2006/main">
   <p:cSld>
     <p:spTree>
@@ -15945,7 +17129,7 @@
             <a:pPr rtl="0"/>
             <a:fld id="{A3F31473-23EB-4724-8B59-FE6D21D89FA4}" type="slidenum">
               <a:rPr lang="en-US" altLang="ko-KR" noProof="0" smtClean="0"/>
-              <a:t>27</a:t>
+              <a:t>29</a:t>
             </a:fld>
             <a:endParaRPr lang="en-US" altLang="ko-KR" noProof="0" dirty="0"/>
           </a:p>
@@ -16545,7 +17729,456 @@
 </p:sld>
 </file>
 
-<file path=ppt/slides/slide28.xml><?xml version="1.0" encoding="utf-8"?>
+<file path=ppt/slides/slide3.xml><?xml version="1.0" encoding="utf-8"?>
+<p:sld xmlns:a="http://schemas.openxmlformats.org/drawingml/2006/main" xmlns:r="http://schemas.openxmlformats.org/officeDocument/2006/relationships" xmlns:p="http://schemas.openxmlformats.org/presentationml/2006/main">
+  <p:cSld>
+    <p:spTree>
+      <p:nvGrpSpPr>
+        <p:cNvPr id="1" name="">
+          <a:extLst>
+            <a:ext uri="{FF2B5EF4-FFF2-40B4-BE49-F238E27FC236}">
+              <a16:creationId xmlns:a16="http://schemas.microsoft.com/office/drawing/2014/main" id="{C6226249-DF82-F305-751E-127F3A71C29B}"/>
+            </a:ext>
+          </a:extLst>
+        </p:cNvPr>
+        <p:cNvGrpSpPr/>
+        <p:nvPr/>
+      </p:nvGrpSpPr>
+      <p:grpSpPr>
+        <a:xfrm>
+          <a:off x="0" y="0"/>
+          <a:ext cx="0" cy="0"/>
+          <a:chOff x="0" y="0"/>
+          <a:chExt cx="0" cy="0"/>
+        </a:xfrm>
+      </p:grpSpPr>
+      <p:sp>
+        <p:nvSpPr>
+          <p:cNvPr id="3" name="직사각형 2">
+            <a:extLst>
+              <a:ext uri="{FF2B5EF4-FFF2-40B4-BE49-F238E27FC236}">
+                <a16:creationId xmlns:a16="http://schemas.microsoft.com/office/drawing/2014/main" id="{65A9C867-CB37-476A-DE58-40E42281C49F}"/>
+              </a:ext>
+            </a:extLst>
+          </p:cNvPr>
+          <p:cNvSpPr/>
+          <p:nvPr/>
+        </p:nvSpPr>
+        <p:spPr>
+          <a:xfrm>
+            <a:off x="598421" y="1484784"/>
+            <a:ext cx="8136904" cy="674850"/>
+          </a:xfrm>
+          <a:prstGeom prst="rect">
+            <a:avLst/>
+          </a:prstGeom>
+          <a:solidFill>
+            <a:schemeClr val="bg1">
+              <a:lumMod val="85000"/>
+            </a:schemeClr>
+          </a:solidFill>
+          <a:ln>
+            <a:noFill/>
+          </a:ln>
+        </p:spPr>
+        <p:style>
+          <a:lnRef idx="2">
+            <a:schemeClr val="accent1">
+              <a:shade val="15000"/>
+            </a:schemeClr>
+          </a:lnRef>
+          <a:fillRef idx="1">
+            <a:schemeClr val="accent1"/>
+          </a:fillRef>
+          <a:effectRef idx="0">
+            <a:schemeClr val="accent1"/>
+          </a:effectRef>
+          <a:fontRef idx="minor">
+            <a:schemeClr val="lt1"/>
+          </a:fontRef>
+        </p:style>
+        <p:txBody>
+          <a:bodyPr rtlCol="0" anchor="ctr"/>
+          <a:lstStyle/>
+          <a:p>
+            <a:pPr algn="ctr"/>
+            <a:endParaRPr lang="ko-KR" altLang="en-US" dirty="0"/>
+          </a:p>
+        </p:txBody>
+      </p:sp>
+      <p:sp>
+        <p:nvSpPr>
+          <p:cNvPr id="8" name="슬라이드 번호 개체 틀 7">
+            <a:extLst>
+              <a:ext uri="{FF2B5EF4-FFF2-40B4-BE49-F238E27FC236}">
+                <a16:creationId xmlns:a16="http://schemas.microsoft.com/office/drawing/2014/main" id="{78B211BD-7338-379D-8BC3-3149D048B4DD}"/>
+              </a:ext>
+            </a:extLst>
+          </p:cNvPr>
+          <p:cNvSpPr>
+            <a:spLocks noGrp="1"/>
+          </p:cNvSpPr>
+          <p:nvPr>
+            <p:ph type="sldNum" sz="quarter" idx="12"/>
+          </p:nvPr>
+        </p:nvSpPr>
+        <p:spPr/>
+        <p:txBody>
+          <a:bodyPr/>
+          <a:lstStyle/>
+          <a:p>
+            <a:pPr rtl="0"/>
+            <a:fld id="{A3F31473-23EB-4724-8B59-FE6D21D89FA4}" type="slidenum">
+              <a:rPr lang="en-US" altLang="ko-KR" noProof="0" smtClean="0"/>
+              <a:t>3</a:t>
+            </a:fld>
+            <a:endParaRPr lang="en-US" altLang="ko-KR" noProof="0" dirty="0"/>
+          </a:p>
+        </p:txBody>
+      </p:sp>
+      <p:sp>
+        <p:nvSpPr>
+          <p:cNvPr id="2" name="TextBox 1">
+            <a:extLst>
+              <a:ext uri="{FF2B5EF4-FFF2-40B4-BE49-F238E27FC236}">
+                <a16:creationId xmlns:a16="http://schemas.microsoft.com/office/drawing/2014/main" id="{86786082-2314-C632-A520-B7C165520AFC}"/>
+              </a:ext>
+            </a:extLst>
+          </p:cNvPr>
+          <p:cNvSpPr txBox="1"/>
+          <p:nvPr/>
+        </p:nvSpPr>
+        <p:spPr>
+          <a:xfrm>
+            <a:off x="1629916" y="147612"/>
+            <a:ext cx="8928992" cy="5891998"/>
+          </a:xfrm>
+          <a:prstGeom prst="rect">
+            <a:avLst/>
+          </a:prstGeom>
+          <a:noFill/>
+        </p:spPr>
+        <p:txBody>
+          <a:bodyPr wrap="square" rtlCol="0">
+            <a:spAutoFit/>
+          </a:bodyPr>
+          <a:lstStyle/>
+          <a:p>
+            <a:pPr>
+              <a:lnSpc>
+                <a:spcPct val="200000"/>
+              </a:lnSpc>
+              <a:spcBef>
+                <a:spcPts val="600"/>
+              </a:spcBef>
+            </a:pPr>
+            <a:r>
+              <a:rPr lang="ko-KR" altLang="en-US" sz="4000" b="1" dirty="0">
+                <a:latin typeface="한컴 말랑말랑 Bold" panose="020F0803000000000000" pitchFamily="50" charset="-127"/>
+                <a:ea typeface="한컴 말랑말랑 Bold" panose="020F0803000000000000" pitchFamily="50" charset="-127"/>
+              </a:rPr>
+              <a:t>목차</a:t>
+            </a:r>
+            <a:endParaRPr lang="en-US" altLang="ko-KR" sz="4000" b="1" dirty="0">
+              <a:latin typeface="한컴 말랑말랑 Bold" panose="020F0803000000000000" pitchFamily="50" charset="-127"/>
+              <a:ea typeface="한컴 말랑말랑 Bold" panose="020F0803000000000000" pitchFamily="50" charset="-127"/>
+            </a:endParaRPr>
+          </a:p>
+          <a:p>
+            <a:pPr marL="514350" indent="-514350">
+              <a:lnSpc>
+                <a:spcPct val="200000"/>
+              </a:lnSpc>
+              <a:spcBef>
+                <a:spcPts val="600"/>
+              </a:spcBef>
+              <a:buAutoNum type="arabicPeriod"/>
+            </a:pPr>
+            <a:r>
+              <a:rPr lang="ko-KR" altLang="en-US" sz="2000" b="1" dirty="0">
+                <a:latin typeface="한컴 말랑말랑 Bold" panose="020F0803000000000000" pitchFamily="50" charset="-127"/>
+                <a:ea typeface="한컴 말랑말랑 Bold" panose="020F0803000000000000" pitchFamily="50" charset="-127"/>
+              </a:rPr>
+              <a:t>확률 변수</a:t>
+            </a:r>
+            <a:r>
+              <a:rPr lang="en-US" altLang="ko-KR" sz="2000" b="1" dirty="0">
+                <a:latin typeface="한컴 말랑말랑 Bold" panose="020F0803000000000000" pitchFamily="50" charset="-127"/>
+                <a:ea typeface="한컴 말랑말랑 Bold" panose="020F0803000000000000" pitchFamily="50" charset="-127"/>
+              </a:rPr>
+              <a:t>(Random Variable)</a:t>
+            </a:r>
+          </a:p>
+          <a:p>
+            <a:pPr marL="514350" indent="-514350">
+              <a:lnSpc>
+                <a:spcPct val="200000"/>
+              </a:lnSpc>
+              <a:spcBef>
+                <a:spcPts val="600"/>
+              </a:spcBef>
+              <a:buAutoNum type="arabicPeriod"/>
+            </a:pPr>
+            <a:r>
+              <a:rPr lang="ko-KR" altLang="en-US" b="1" dirty="0">
+                <a:latin typeface="한컴 말랑말랑 Bold" panose="020F0803000000000000" pitchFamily="50" charset="-127"/>
+                <a:ea typeface="한컴 말랑말랑 Bold" panose="020F0803000000000000" pitchFamily="50" charset="-127"/>
+              </a:rPr>
+              <a:t>이산형</a:t>
+            </a:r>
+            <a:r>
+              <a:rPr lang="en-US" altLang="ko-KR" b="1" dirty="0">
+                <a:latin typeface="한컴 말랑말랑 Bold" panose="020F0803000000000000" pitchFamily="50" charset="-127"/>
+                <a:ea typeface="한컴 말랑말랑 Bold" panose="020F0803000000000000" pitchFamily="50" charset="-127"/>
+              </a:rPr>
+              <a:t>(Discrete)</a:t>
+            </a:r>
+            <a:r>
+              <a:rPr lang="ko-KR" altLang="en-US" b="1" dirty="0">
+                <a:latin typeface="한컴 말랑말랑 Bold" panose="020F0803000000000000" pitchFamily="50" charset="-127"/>
+                <a:ea typeface="한컴 말랑말랑 Bold" panose="020F0803000000000000" pitchFamily="50" charset="-127"/>
+              </a:rPr>
+              <a:t>과 연속형</a:t>
+            </a:r>
+            <a:r>
+              <a:rPr lang="en-US" altLang="ko-KR" b="1" dirty="0">
+                <a:latin typeface="한컴 말랑말랑 Bold" panose="020F0803000000000000" pitchFamily="50" charset="-127"/>
+                <a:ea typeface="한컴 말랑말랑 Bold" panose="020F0803000000000000" pitchFamily="50" charset="-127"/>
+              </a:rPr>
+              <a:t>(Continuous) </a:t>
+            </a:r>
+            <a:r>
+              <a:rPr lang="ko-KR" altLang="en-US" b="1" dirty="0">
+                <a:latin typeface="한컴 말랑말랑 Bold" panose="020F0803000000000000" pitchFamily="50" charset="-127"/>
+                <a:ea typeface="한컴 말랑말랑 Bold" panose="020F0803000000000000" pitchFamily="50" charset="-127"/>
+              </a:rPr>
+              <a:t>확률변수</a:t>
+            </a:r>
+            <a:endParaRPr lang="en-US" altLang="ko-KR" b="1" dirty="0">
+              <a:latin typeface="한컴 말랑말랑 Bold" panose="020F0803000000000000" pitchFamily="50" charset="-127"/>
+              <a:ea typeface="한컴 말랑말랑 Bold" panose="020F0803000000000000" pitchFamily="50" charset="-127"/>
+            </a:endParaRPr>
+          </a:p>
+          <a:p>
+            <a:pPr marL="971550" lvl="1" indent="-514350">
+              <a:lnSpc>
+                <a:spcPct val="200000"/>
+              </a:lnSpc>
+              <a:spcBef>
+                <a:spcPts val="600"/>
+              </a:spcBef>
+              <a:buAutoNum type="arabicPeriod"/>
+            </a:pPr>
+            <a:r>
+              <a:rPr lang="ko-KR" altLang="en-US" b="1" dirty="0">
+                <a:latin typeface="한컴 말랑말랑 Bold" panose="020F0803000000000000" pitchFamily="50" charset="-127"/>
+                <a:ea typeface="한컴 말랑말랑 Bold" panose="020F0803000000000000" pitchFamily="50" charset="-127"/>
+              </a:rPr>
+              <a:t>분산과</a:t>
+            </a:r>
+            <a:r>
+              <a:rPr lang="en-US" altLang="ko-KR" b="1" dirty="0">
+                <a:latin typeface="한컴 말랑말랑 Bold" panose="020F0803000000000000" pitchFamily="50" charset="-127"/>
+                <a:ea typeface="한컴 말랑말랑 Bold" panose="020F0803000000000000" pitchFamily="50" charset="-127"/>
+              </a:rPr>
+              <a:t> </a:t>
+            </a:r>
+            <a:r>
+              <a:rPr lang="ko-KR" altLang="en-US" b="1" dirty="0">
+                <a:latin typeface="한컴 말랑말랑 Bold" panose="020F0803000000000000" pitchFamily="50" charset="-127"/>
+                <a:ea typeface="한컴 말랑말랑 Bold" panose="020F0803000000000000" pitchFamily="50" charset="-127"/>
+              </a:rPr>
+              <a:t>편향</a:t>
+            </a:r>
+            <a:r>
+              <a:rPr lang="en-US" altLang="ko-KR" b="1" dirty="0">
+                <a:latin typeface="한컴 말랑말랑 Bold" panose="020F0803000000000000" pitchFamily="50" charset="-127"/>
+                <a:ea typeface="한컴 말랑말랑 Bold" panose="020F0803000000000000" pitchFamily="50" charset="-127"/>
+              </a:rPr>
+              <a:t>(Variance &amp; Bias)</a:t>
+            </a:r>
+          </a:p>
+          <a:p>
+            <a:pPr marL="514350" indent="-514350">
+              <a:lnSpc>
+                <a:spcPct val="200000"/>
+              </a:lnSpc>
+              <a:spcBef>
+                <a:spcPts val="600"/>
+              </a:spcBef>
+              <a:buAutoNum type="arabicPeriod"/>
+            </a:pPr>
+            <a:r>
+              <a:rPr lang="ko-KR" altLang="en-US" sz="2000" b="1" dirty="0" err="1">
+                <a:latin typeface="한컴 말랑말랑 Bold" panose="020F0803000000000000" pitchFamily="50" charset="-127"/>
+                <a:ea typeface="한컴 말랑말랑 Bold" panose="020F0803000000000000" pitchFamily="50" charset="-127"/>
+              </a:rPr>
+              <a:t>기대값</a:t>
+            </a:r>
+            <a:r>
+              <a:rPr lang="en-US" altLang="ko-KR" sz="2000" b="1" dirty="0">
+                <a:latin typeface="한컴 말랑말랑 Bold" panose="020F0803000000000000" pitchFamily="50" charset="-127"/>
+                <a:ea typeface="한컴 말랑말랑 Bold" panose="020F0803000000000000" pitchFamily="50" charset="-127"/>
+              </a:rPr>
+              <a:t>(Expectation)</a:t>
+            </a:r>
+            <a:r>
+              <a:rPr lang="ko-KR" altLang="en-US" sz="2000" b="1" dirty="0">
+                <a:latin typeface="한컴 말랑말랑 Bold" panose="020F0803000000000000" pitchFamily="50" charset="-127"/>
+                <a:ea typeface="한컴 말랑말랑 Bold" panose="020F0803000000000000" pitchFamily="50" charset="-127"/>
+              </a:rPr>
+              <a:t>과 분산</a:t>
+            </a:r>
+            <a:r>
+              <a:rPr lang="en-US" altLang="ko-KR" sz="2000" b="1" dirty="0">
+                <a:latin typeface="한컴 말랑말랑 Bold" panose="020F0803000000000000" pitchFamily="50" charset="-127"/>
+                <a:ea typeface="한컴 말랑말랑 Bold" panose="020F0803000000000000" pitchFamily="50" charset="-127"/>
+              </a:rPr>
+              <a:t>(variance)</a:t>
+            </a:r>
+          </a:p>
+          <a:p>
+            <a:pPr marL="514350" indent="-514350">
+              <a:lnSpc>
+                <a:spcPct val="200000"/>
+              </a:lnSpc>
+              <a:spcBef>
+                <a:spcPts val="600"/>
+              </a:spcBef>
+              <a:buAutoNum type="arabicPeriod"/>
+            </a:pPr>
+            <a:r>
+              <a:rPr lang="ko-KR" altLang="en-US" sz="2000" b="1" dirty="0">
+                <a:latin typeface="한컴 말랑말랑 Bold" panose="020F0803000000000000" pitchFamily="50" charset="-127"/>
+                <a:ea typeface="한컴 말랑말랑 Bold" panose="020F0803000000000000" pitchFamily="50" charset="-127"/>
+              </a:rPr>
+              <a:t>확률</a:t>
+            </a:r>
+            <a:r>
+              <a:rPr lang="en-US" altLang="ko-KR" sz="2000" b="1" dirty="0">
+                <a:latin typeface="한컴 말랑말랑 Bold" panose="020F0803000000000000" pitchFamily="50" charset="-127"/>
+                <a:ea typeface="한컴 말랑말랑 Bold" panose="020F0803000000000000" pitchFamily="50" charset="-127"/>
+              </a:rPr>
+              <a:t> </a:t>
+            </a:r>
+            <a:r>
+              <a:rPr lang="ko-KR" altLang="en-US" sz="2000" b="1" dirty="0">
+                <a:latin typeface="한컴 말랑말랑 Bold" panose="020F0803000000000000" pitchFamily="50" charset="-127"/>
+                <a:ea typeface="한컴 말랑말랑 Bold" panose="020F0803000000000000" pitchFamily="50" charset="-127"/>
+              </a:rPr>
+              <a:t>분포</a:t>
+            </a:r>
+            <a:r>
+              <a:rPr lang="en-US" altLang="ko-KR" sz="2000" b="1" dirty="0">
+                <a:latin typeface="한컴 말랑말랑 Bold" panose="020F0803000000000000" pitchFamily="50" charset="-127"/>
+                <a:ea typeface="한컴 말랑말랑 Bold" panose="020F0803000000000000" pitchFamily="50" charset="-127"/>
+              </a:rPr>
+              <a:t>(Random Distribution)</a:t>
+            </a:r>
+          </a:p>
+          <a:p>
+            <a:pPr marL="971550" lvl="1" indent="-514350">
+              <a:lnSpc>
+                <a:spcPct val="200000"/>
+              </a:lnSpc>
+              <a:spcBef>
+                <a:spcPts val="600"/>
+              </a:spcBef>
+              <a:buAutoNum type="arabicPeriod"/>
+            </a:pPr>
+            <a:r>
+              <a:rPr lang="ko-KR" altLang="en-US" b="1" dirty="0">
+                <a:latin typeface="한컴 말랑말랑 Bold" panose="020F0803000000000000" pitchFamily="50" charset="-127"/>
+                <a:ea typeface="한컴 말랑말랑 Bold" panose="020F0803000000000000" pitchFamily="50" charset="-127"/>
+              </a:rPr>
+              <a:t>베르누이분포</a:t>
+            </a:r>
+            <a:r>
+              <a:rPr lang="en-US" altLang="ko-KR" b="1" dirty="0">
+                <a:latin typeface="한컴 말랑말랑 Bold" panose="020F0803000000000000" pitchFamily="50" charset="-127"/>
+                <a:ea typeface="한컴 말랑말랑 Bold" panose="020F0803000000000000" pitchFamily="50" charset="-127"/>
+              </a:rPr>
+              <a:t>, </a:t>
+            </a:r>
+            <a:r>
+              <a:rPr lang="ko-KR" altLang="en-US" b="1" dirty="0">
+                <a:latin typeface="한컴 말랑말랑 Bold" panose="020F0803000000000000" pitchFamily="50" charset="-127"/>
+                <a:ea typeface="한컴 말랑말랑 Bold" panose="020F0803000000000000" pitchFamily="50" charset="-127"/>
+              </a:rPr>
+              <a:t>이항분포</a:t>
+            </a:r>
+            <a:r>
+              <a:rPr lang="en-US" altLang="ko-KR" b="1" dirty="0">
+                <a:latin typeface="한컴 말랑말랑 Bold" panose="020F0803000000000000" pitchFamily="50" charset="-127"/>
+                <a:ea typeface="한컴 말랑말랑 Bold" panose="020F0803000000000000" pitchFamily="50" charset="-127"/>
+              </a:rPr>
+              <a:t>, </a:t>
+            </a:r>
+            <a:r>
+              <a:rPr lang="ko-KR" altLang="en-US" b="1" dirty="0">
+                <a:latin typeface="한컴 말랑말랑 Bold" panose="020F0803000000000000" pitchFamily="50" charset="-127"/>
+                <a:ea typeface="한컴 말랑말랑 Bold" panose="020F0803000000000000" pitchFamily="50" charset="-127"/>
+              </a:rPr>
+              <a:t>정규분포</a:t>
+            </a:r>
+            <a:endParaRPr lang="en-US" altLang="ko-KR" b="1" dirty="0">
+              <a:latin typeface="한컴 말랑말랑 Bold" panose="020F0803000000000000" pitchFamily="50" charset="-127"/>
+              <a:ea typeface="한컴 말랑말랑 Bold" panose="020F0803000000000000" pitchFamily="50" charset="-127"/>
+            </a:endParaRPr>
+          </a:p>
+          <a:p>
+            <a:pPr marL="514350" indent="-514350">
+              <a:lnSpc>
+                <a:spcPct val="200000"/>
+              </a:lnSpc>
+              <a:spcBef>
+                <a:spcPts val="600"/>
+              </a:spcBef>
+              <a:buAutoNum type="arabicPeriod"/>
+            </a:pPr>
+            <a:r>
+              <a:rPr lang="ko-KR" altLang="en-US" sz="2000" b="1" dirty="0">
+                <a:latin typeface="한컴 말랑말랑 Bold" panose="020F0803000000000000" pitchFamily="50" charset="-127"/>
+                <a:ea typeface="한컴 말랑말랑 Bold" panose="020F0803000000000000" pitchFamily="50" charset="-127"/>
+              </a:rPr>
+              <a:t>조건부 확률</a:t>
+            </a:r>
+            <a:r>
+              <a:rPr lang="en-US" altLang="ko-KR" sz="2000" b="1" dirty="0">
+                <a:latin typeface="한컴 말랑말랑 Bold" panose="020F0803000000000000" pitchFamily="50" charset="-127"/>
+                <a:ea typeface="한컴 말랑말랑 Bold" panose="020F0803000000000000" pitchFamily="50" charset="-127"/>
+              </a:rPr>
+              <a:t>(Conditional Probability)</a:t>
+            </a:r>
+          </a:p>
+        </p:txBody>
+      </p:sp>
+    </p:spTree>
+    <p:extLst>
+      <p:ext uri="{BB962C8B-B14F-4D97-AF65-F5344CB8AC3E}">
+        <p14:creationId xmlns:p14="http://schemas.microsoft.com/office/powerpoint/2010/main" val="2194691769"/>
+      </p:ext>
+    </p:extLst>
+  </p:cSld>
+  <p:clrMapOvr>
+    <a:masterClrMapping/>
+  </p:clrMapOvr>
+  <mc:AlternateContent xmlns:mc="http://schemas.openxmlformats.org/markup-compatibility/2006" xmlns:p14="http://schemas.microsoft.com/office/powerpoint/2010/main">
+    <mc:Choice Requires="p14">
+      <p:transition spd="med" p14:dur="700">
+        <p:fade/>
+      </p:transition>
+    </mc:Choice>
+    <mc:Fallback xmlns="">
+      <p:transition spd="med">
+        <p:fade/>
+      </p:transition>
+    </mc:Fallback>
+  </mc:AlternateContent>
+</p:sld>
+</file>
+
+<file path=ppt/slides/slide30.xml><?xml version="1.0" encoding="utf-8"?>
 <p:sld xmlns:a="http://schemas.openxmlformats.org/drawingml/2006/main" xmlns:r="http://schemas.openxmlformats.org/officeDocument/2006/relationships" xmlns:p="http://schemas.openxmlformats.org/presentationml/2006/main">
   <p:cSld>
     <p:spTree>
@@ -16580,7 +18213,7 @@
             <a:pPr rtl="0"/>
             <a:fld id="{A3F31473-23EB-4724-8B59-FE6D21D89FA4}" type="slidenum">
               <a:rPr lang="en-US" altLang="ko-KR" noProof="0" smtClean="0"/>
-              <a:t>28</a:t>
+              <a:t>30</a:t>
             </a:fld>
             <a:endParaRPr lang="en-US" altLang="ko-KR" noProof="0" dirty="0"/>
           </a:p>
@@ -16635,7 +18268,7 @@
 </p:sld>
 </file>
 
-<file path=ppt/slides/slide29.xml><?xml version="1.0" encoding="utf-8"?>
+<file path=ppt/slides/slide31.xml><?xml version="1.0" encoding="utf-8"?>
 <p:sld xmlns:a="http://schemas.openxmlformats.org/drawingml/2006/main" xmlns:r="http://schemas.openxmlformats.org/officeDocument/2006/relationships" xmlns:p="http://schemas.openxmlformats.org/presentationml/2006/main">
   <p:cSld>
     <p:spTree>
@@ -16670,7 +18303,7 @@
             <a:pPr rtl="0"/>
             <a:fld id="{A3F31473-23EB-4724-8B59-FE6D21D89FA4}" type="slidenum">
               <a:rPr lang="en-US" altLang="ko-KR" noProof="0" smtClean="0"/>
-              <a:t>29</a:t>
+              <a:t>31</a:t>
             </a:fld>
             <a:endParaRPr lang="en-US" altLang="ko-KR" noProof="0" dirty="0"/>
           </a:p>
@@ -17094,456 +18727,7 @@
 </p:sld>
 </file>
 
-<file path=ppt/slides/slide3.xml><?xml version="1.0" encoding="utf-8"?>
-<p:sld xmlns:a="http://schemas.openxmlformats.org/drawingml/2006/main" xmlns:r="http://schemas.openxmlformats.org/officeDocument/2006/relationships" xmlns:p="http://schemas.openxmlformats.org/presentationml/2006/main">
-  <p:cSld>
-    <p:spTree>
-      <p:nvGrpSpPr>
-        <p:cNvPr id="1" name="">
-          <a:extLst>
-            <a:ext uri="{FF2B5EF4-FFF2-40B4-BE49-F238E27FC236}">
-              <a16:creationId xmlns:a16="http://schemas.microsoft.com/office/drawing/2014/main" id="{C6226249-DF82-F305-751E-127F3A71C29B}"/>
-            </a:ext>
-          </a:extLst>
-        </p:cNvPr>
-        <p:cNvGrpSpPr/>
-        <p:nvPr/>
-      </p:nvGrpSpPr>
-      <p:grpSpPr>
-        <a:xfrm>
-          <a:off x="0" y="0"/>
-          <a:ext cx="0" cy="0"/>
-          <a:chOff x="0" y="0"/>
-          <a:chExt cx="0" cy="0"/>
-        </a:xfrm>
-      </p:grpSpPr>
-      <p:sp>
-        <p:nvSpPr>
-          <p:cNvPr id="3" name="직사각형 2">
-            <a:extLst>
-              <a:ext uri="{FF2B5EF4-FFF2-40B4-BE49-F238E27FC236}">
-                <a16:creationId xmlns:a16="http://schemas.microsoft.com/office/drawing/2014/main" id="{65A9C867-CB37-476A-DE58-40E42281C49F}"/>
-              </a:ext>
-            </a:extLst>
-          </p:cNvPr>
-          <p:cNvSpPr/>
-          <p:nvPr/>
-        </p:nvSpPr>
-        <p:spPr>
-          <a:xfrm>
-            <a:off x="598421" y="1484784"/>
-            <a:ext cx="8136904" cy="674850"/>
-          </a:xfrm>
-          <a:prstGeom prst="rect">
-            <a:avLst/>
-          </a:prstGeom>
-          <a:solidFill>
-            <a:schemeClr val="bg1">
-              <a:lumMod val="85000"/>
-            </a:schemeClr>
-          </a:solidFill>
-          <a:ln>
-            <a:noFill/>
-          </a:ln>
-        </p:spPr>
-        <p:style>
-          <a:lnRef idx="2">
-            <a:schemeClr val="accent1">
-              <a:shade val="15000"/>
-            </a:schemeClr>
-          </a:lnRef>
-          <a:fillRef idx="1">
-            <a:schemeClr val="accent1"/>
-          </a:fillRef>
-          <a:effectRef idx="0">
-            <a:schemeClr val="accent1"/>
-          </a:effectRef>
-          <a:fontRef idx="minor">
-            <a:schemeClr val="lt1"/>
-          </a:fontRef>
-        </p:style>
-        <p:txBody>
-          <a:bodyPr rtlCol="0" anchor="ctr"/>
-          <a:lstStyle/>
-          <a:p>
-            <a:pPr algn="ctr"/>
-            <a:endParaRPr lang="ko-KR" altLang="en-US" dirty="0"/>
-          </a:p>
-        </p:txBody>
-      </p:sp>
-      <p:sp>
-        <p:nvSpPr>
-          <p:cNvPr id="8" name="슬라이드 번호 개체 틀 7">
-            <a:extLst>
-              <a:ext uri="{FF2B5EF4-FFF2-40B4-BE49-F238E27FC236}">
-                <a16:creationId xmlns:a16="http://schemas.microsoft.com/office/drawing/2014/main" id="{78B211BD-7338-379D-8BC3-3149D048B4DD}"/>
-              </a:ext>
-            </a:extLst>
-          </p:cNvPr>
-          <p:cNvSpPr>
-            <a:spLocks noGrp="1"/>
-          </p:cNvSpPr>
-          <p:nvPr>
-            <p:ph type="sldNum" sz="quarter" idx="12"/>
-          </p:nvPr>
-        </p:nvSpPr>
-        <p:spPr/>
-        <p:txBody>
-          <a:bodyPr/>
-          <a:lstStyle/>
-          <a:p>
-            <a:pPr rtl="0"/>
-            <a:fld id="{A3F31473-23EB-4724-8B59-FE6D21D89FA4}" type="slidenum">
-              <a:rPr lang="en-US" altLang="ko-KR" noProof="0" smtClean="0"/>
-              <a:t>3</a:t>
-            </a:fld>
-            <a:endParaRPr lang="en-US" altLang="ko-KR" noProof="0" dirty="0"/>
-          </a:p>
-        </p:txBody>
-      </p:sp>
-      <p:sp>
-        <p:nvSpPr>
-          <p:cNvPr id="2" name="TextBox 1">
-            <a:extLst>
-              <a:ext uri="{FF2B5EF4-FFF2-40B4-BE49-F238E27FC236}">
-                <a16:creationId xmlns:a16="http://schemas.microsoft.com/office/drawing/2014/main" id="{86786082-2314-C632-A520-B7C165520AFC}"/>
-              </a:ext>
-            </a:extLst>
-          </p:cNvPr>
-          <p:cNvSpPr txBox="1"/>
-          <p:nvPr/>
-        </p:nvSpPr>
-        <p:spPr>
-          <a:xfrm>
-            <a:off x="1629916" y="147612"/>
-            <a:ext cx="8928992" cy="5891998"/>
-          </a:xfrm>
-          <a:prstGeom prst="rect">
-            <a:avLst/>
-          </a:prstGeom>
-          <a:noFill/>
-        </p:spPr>
-        <p:txBody>
-          <a:bodyPr wrap="square" rtlCol="0">
-            <a:spAutoFit/>
-          </a:bodyPr>
-          <a:lstStyle/>
-          <a:p>
-            <a:pPr>
-              <a:lnSpc>
-                <a:spcPct val="200000"/>
-              </a:lnSpc>
-              <a:spcBef>
-                <a:spcPts val="600"/>
-              </a:spcBef>
-            </a:pPr>
-            <a:r>
-              <a:rPr lang="ko-KR" altLang="en-US" sz="4000" b="1" dirty="0">
-                <a:latin typeface="한컴 말랑말랑 Bold" panose="020F0803000000000000" pitchFamily="50" charset="-127"/>
-                <a:ea typeface="한컴 말랑말랑 Bold" panose="020F0803000000000000" pitchFamily="50" charset="-127"/>
-              </a:rPr>
-              <a:t>목차</a:t>
-            </a:r>
-            <a:endParaRPr lang="en-US" altLang="ko-KR" sz="4000" b="1" dirty="0">
-              <a:latin typeface="한컴 말랑말랑 Bold" panose="020F0803000000000000" pitchFamily="50" charset="-127"/>
-              <a:ea typeface="한컴 말랑말랑 Bold" panose="020F0803000000000000" pitchFamily="50" charset="-127"/>
-            </a:endParaRPr>
-          </a:p>
-          <a:p>
-            <a:pPr marL="514350" indent="-514350">
-              <a:lnSpc>
-                <a:spcPct val="200000"/>
-              </a:lnSpc>
-              <a:spcBef>
-                <a:spcPts val="600"/>
-              </a:spcBef>
-              <a:buAutoNum type="arabicPeriod"/>
-            </a:pPr>
-            <a:r>
-              <a:rPr lang="ko-KR" altLang="en-US" sz="2000" b="1" dirty="0">
-                <a:latin typeface="한컴 말랑말랑 Bold" panose="020F0803000000000000" pitchFamily="50" charset="-127"/>
-                <a:ea typeface="한컴 말랑말랑 Bold" panose="020F0803000000000000" pitchFamily="50" charset="-127"/>
-              </a:rPr>
-              <a:t>확률 변수</a:t>
-            </a:r>
-            <a:r>
-              <a:rPr lang="en-US" altLang="ko-KR" sz="2000" b="1" dirty="0">
-                <a:latin typeface="한컴 말랑말랑 Bold" panose="020F0803000000000000" pitchFamily="50" charset="-127"/>
-                <a:ea typeface="한컴 말랑말랑 Bold" panose="020F0803000000000000" pitchFamily="50" charset="-127"/>
-              </a:rPr>
-              <a:t>(Random Variable)</a:t>
-            </a:r>
-          </a:p>
-          <a:p>
-            <a:pPr marL="514350" indent="-514350">
-              <a:lnSpc>
-                <a:spcPct val="200000"/>
-              </a:lnSpc>
-              <a:spcBef>
-                <a:spcPts val="600"/>
-              </a:spcBef>
-              <a:buAutoNum type="arabicPeriod"/>
-            </a:pPr>
-            <a:r>
-              <a:rPr lang="ko-KR" altLang="en-US" b="1" dirty="0">
-                <a:latin typeface="한컴 말랑말랑 Bold" panose="020F0803000000000000" pitchFamily="50" charset="-127"/>
-                <a:ea typeface="한컴 말랑말랑 Bold" panose="020F0803000000000000" pitchFamily="50" charset="-127"/>
-              </a:rPr>
-              <a:t>이산형</a:t>
-            </a:r>
-            <a:r>
-              <a:rPr lang="en-US" altLang="ko-KR" b="1" dirty="0">
-                <a:latin typeface="한컴 말랑말랑 Bold" panose="020F0803000000000000" pitchFamily="50" charset="-127"/>
-                <a:ea typeface="한컴 말랑말랑 Bold" panose="020F0803000000000000" pitchFamily="50" charset="-127"/>
-              </a:rPr>
-              <a:t>(Discrete)</a:t>
-            </a:r>
-            <a:r>
-              <a:rPr lang="ko-KR" altLang="en-US" b="1" dirty="0">
-                <a:latin typeface="한컴 말랑말랑 Bold" panose="020F0803000000000000" pitchFamily="50" charset="-127"/>
-                <a:ea typeface="한컴 말랑말랑 Bold" panose="020F0803000000000000" pitchFamily="50" charset="-127"/>
-              </a:rPr>
-              <a:t>과 연속형</a:t>
-            </a:r>
-            <a:r>
-              <a:rPr lang="en-US" altLang="ko-KR" b="1" dirty="0">
-                <a:latin typeface="한컴 말랑말랑 Bold" panose="020F0803000000000000" pitchFamily="50" charset="-127"/>
-                <a:ea typeface="한컴 말랑말랑 Bold" panose="020F0803000000000000" pitchFamily="50" charset="-127"/>
-              </a:rPr>
-              <a:t>(Continuous) </a:t>
-            </a:r>
-            <a:r>
-              <a:rPr lang="ko-KR" altLang="en-US" b="1" dirty="0">
-                <a:latin typeface="한컴 말랑말랑 Bold" panose="020F0803000000000000" pitchFamily="50" charset="-127"/>
-                <a:ea typeface="한컴 말랑말랑 Bold" panose="020F0803000000000000" pitchFamily="50" charset="-127"/>
-              </a:rPr>
-              <a:t>확률변수</a:t>
-            </a:r>
-            <a:endParaRPr lang="en-US" altLang="ko-KR" b="1" dirty="0">
-              <a:latin typeface="한컴 말랑말랑 Bold" panose="020F0803000000000000" pitchFamily="50" charset="-127"/>
-              <a:ea typeface="한컴 말랑말랑 Bold" panose="020F0803000000000000" pitchFamily="50" charset="-127"/>
-            </a:endParaRPr>
-          </a:p>
-          <a:p>
-            <a:pPr marL="971550" lvl="1" indent="-514350">
-              <a:lnSpc>
-                <a:spcPct val="200000"/>
-              </a:lnSpc>
-              <a:spcBef>
-                <a:spcPts val="600"/>
-              </a:spcBef>
-              <a:buAutoNum type="arabicPeriod"/>
-            </a:pPr>
-            <a:r>
-              <a:rPr lang="ko-KR" altLang="en-US" b="1" dirty="0">
-                <a:latin typeface="한컴 말랑말랑 Bold" panose="020F0803000000000000" pitchFamily="50" charset="-127"/>
-                <a:ea typeface="한컴 말랑말랑 Bold" panose="020F0803000000000000" pitchFamily="50" charset="-127"/>
-              </a:rPr>
-              <a:t>분산과</a:t>
-            </a:r>
-            <a:r>
-              <a:rPr lang="en-US" altLang="ko-KR" b="1" dirty="0">
-                <a:latin typeface="한컴 말랑말랑 Bold" panose="020F0803000000000000" pitchFamily="50" charset="-127"/>
-                <a:ea typeface="한컴 말랑말랑 Bold" panose="020F0803000000000000" pitchFamily="50" charset="-127"/>
-              </a:rPr>
-              <a:t> </a:t>
-            </a:r>
-            <a:r>
-              <a:rPr lang="ko-KR" altLang="en-US" b="1" dirty="0">
-                <a:latin typeface="한컴 말랑말랑 Bold" panose="020F0803000000000000" pitchFamily="50" charset="-127"/>
-                <a:ea typeface="한컴 말랑말랑 Bold" panose="020F0803000000000000" pitchFamily="50" charset="-127"/>
-              </a:rPr>
-              <a:t>편향</a:t>
-            </a:r>
-            <a:r>
-              <a:rPr lang="en-US" altLang="ko-KR" b="1" dirty="0">
-                <a:latin typeface="한컴 말랑말랑 Bold" panose="020F0803000000000000" pitchFamily="50" charset="-127"/>
-                <a:ea typeface="한컴 말랑말랑 Bold" panose="020F0803000000000000" pitchFamily="50" charset="-127"/>
-              </a:rPr>
-              <a:t>(Variance &amp; Bias)</a:t>
-            </a:r>
-          </a:p>
-          <a:p>
-            <a:pPr marL="514350" indent="-514350">
-              <a:lnSpc>
-                <a:spcPct val="200000"/>
-              </a:lnSpc>
-              <a:spcBef>
-                <a:spcPts val="600"/>
-              </a:spcBef>
-              <a:buAutoNum type="arabicPeriod"/>
-            </a:pPr>
-            <a:r>
-              <a:rPr lang="ko-KR" altLang="en-US" sz="2000" b="1" dirty="0" err="1">
-                <a:latin typeface="한컴 말랑말랑 Bold" panose="020F0803000000000000" pitchFamily="50" charset="-127"/>
-                <a:ea typeface="한컴 말랑말랑 Bold" panose="020F0803000000000000" pitchFamily="50" charset="-127"/>
-              </a:rPr>
-              <a:t>기대값</a:t>
-            </a:r>
-            <a:r>
-              <a:rPr lang="en-US" altLang="ko-KR" sz="2000" b="1" dirty="0">
-                <a:latin typeface="한컴 말랑말랑 Bold" panose="020F0803000000000000" pitchFamily="50" charset="-127"/>
-                <a:ea typeface="한컴 말랑말랑 Bold" panose="020F0803000000000000" pitchFamily="50" charset="-127"/>
-              </a:rPr>
-              <a:t>(Expectation)</a:t>
-            </a:r>
-            <a:r>
-              <a:rPr lang="ko-KR" altLang="en-US" sz="2000" b="1" dirty="0">
-                <a:latin typeface="한컴 말랑말랑 Bold" panose="020F0803000000000000" pitchFamily="50" charset="-127"/>
-                <a:ea typeface="한컴 말랑말랑 Bold" panose="020F0803000000000000" pitchFamily="50" charset="-127"/>
-              </a:rPr>
-              <a:t>과 분산</a:t>
-            </a:r>
-            <a:r>
-              <a:rPr lang="en-US" altLang="ko-KR" sz="2000" b="1" dirty="0">
-                <a:latin typeface="한컴 말랑말랑 Bold" panose="020F0803000000000000" pitchFamily="50" charset="-127"/>
-                <a:ea typeface="한컴 말랑말랑 Bold" panose="020F0803000000000000" pitchFamily="50" charset="-127"/>
-              </a:rPr>
-              <a:t>(variance)</a:t>
-            </a:r>
-          </a:p>
-          <a:p>
-            <a:pPr marL="514350" indent="-514350">
-              <a:lnSpc>
-                <a:spcPct val="200000"/>
-              </a:lnSpc>
-              <a:spcBef>
-                <a:spcPts val="600"/>
-              </a:spcBef>
-              <a:buAutoNum type="arabicPeriod"/>
-            </a:pPr>
-            <a:r>
-              <a:rPr lang="ko-KR" altLang="en-US" sz="2000" b="1" dirty="0">
-                <a:latin typeface="한컴 말랑말랑 Bold" panose="020F0803000000000000" pitchFamily="50" charset="-127"/>
-                <a:ea typeface="한컴 말랑말랑 Bold" panose="020F0803000000000000" pitchFamily="50" charset="-127"/>
-              </a:rPr>
-              <a:t>확률</a:t>
-            </a:r>
-            <a:r>
-              <a:rPr lang="en-US" altLang="ko-KR" sz="2000" b="1" dirty="0">
-                <a:latin typeface="한컴 말랑말랑 Bold" panose="020F0803000000000000" pitchFamily="50" charset="-127"/>
-                <a:ea typeface="한컴 말랑말랑 Bold" panose="020F0803000000000000" pitchFamily="50" charset="-127"/>
-              </a:rPr>
-              <a:t> </a:t>
-            </a:r>
-            <a:r>
-              <a:rPr lang="ko-KR" altLang="en-US" sz="2000" b="1" dirty="0">
-                <a:latin typeface="한컴 말랑말랑 Bold" panose="020F0803000000000000" pitchFamily="50" charset="-127"/>
-                <a:ea typeface="한컴 말랑말랑 Bold" panose="020F0803000000000000" pitchFamily="50" charset="-127"/>
-              </a:rPr>
-              <a:t>분포</a:t>
-            </a:r>
-            <a:r>
-              <a:rPr lang="en-US" altLang="ko-KR" sz="2000" b="1" dirty="0">
-                <a:latin typeface="한컴 말랑말랑 Bold" panose="020F0803000000000000" pitchFamily="50" charset="-127"/>
-                <a:ea typeface="한컴 말랑말랑 Bold" panose="020F0803000000000000" pitchFamily="50" charset="-127"/>
-              </a:rPr>
-              <a:t>(Random Distribution)</a:t>
-            </a:r>
-          </a:p>
-          <a:p>
-            <a:pPr marL="971550" lvl="1" indent="-514350">
-              <a:lnSpc>
-                <a:spcPct val="200000"/>
-              </a:lnSpc>
-              <a:spcBef>
-                <a:spcPts val="600"/>
-              </a:spcBef>
-              <a:buAutoNum type="arabicPeriod"/>
-            </a:pPr>
-            <a:r>
-              <a:rPr lang="ko-KR" altLang="en-US" b="1" dirty="0">
-                <a:latin typeface="한컴 말랑말랑 Bold" panose="020F0803000000000000" pitchFamily="50" charset="-127"/>
-                <a:ea typeface="한컴 말랑말랑 Bold" panose="020F0803000000000000" pitchFamily="50" charset="-127"/>
-              </a:rPr>
-              <a:t>베르누이분포</a:t>
-            </a:r>
-            <a:r>
-              <a:rPr lang="en-US" altLang="ko-KR" b="1" dirty="0">
-                <a:latin typeface="한컴 말랑말랑 Bold" panose="020F0803000000000000" pitchFamily="50" charset="-127"/>
-                <a:ea typeface="한컴 말랑말랑 Bold" panose="020F0803000000000000" pitchFamily="50" charset="-127"/>
-              </a:rPr>
-              <a:t>, </a:t>
-            </a:r>
-            <a:r>
-              <a:rPr lang="ko-KR" altLang="en-US" b="1" dirty="0">
-                <a:latin typeface="한컴 말랑말랑 Bold" panose="020F0803000000000000" pitchFamily="50" charset="-127"/>
-                <a:ea typeface="한컴 말랑말랑 Bold" panose="020F0803000000000000" pitchFamily="50" charset="-127"/>
-              </a:rPr>
-              <a:t>이항분포</a:t>
-            </a:r>
-            <a:r>
-              <a:rPr lang="en-US" altLang="ko-KR" b="1" dirty="0">
-                <a:latin typeface="한컴 말랑말랑 Bold" panose="020F0803000000000000" pitchFamily="50" charset="-127"/>
-                <a:ea typeface="한컴 말랑말랑 Bold" panose="020F0803000000000000" pitchFamily="50" charset="-127"/>
-              </a:rPr>
-              <a:t>, </a:t>
-            </a:r>
-            <a:r>
-              <a:rPr lang="ko-KR" altLang="en-US" b="1" dirty="0">
-                <a:latin typeface="한컴 말랑말랑 Bold" panose="020F0803000000000000" pitchFamily="50" charset="-127"/>
-                <a:ea typeface="한컴 말랑말랑 Bold" panose="020F0803000000000000" pitchFamily="50" charset="-127"/>
-              </a:rPr>
-              <a:t>정규분포</a:t>
-            </a:r>
-            <a:endParaRPr lang="en-US" altLang="ko-KR" b="1" dirty="0">
-              <a:latin typeface="한컴 말랑말랑 Bold" panose="020F0803000000000000" pitchFamily="50" charset="-127"/>
-              <a:ea typeface="한컴 말랑말랑 Bold" panose="020F0803000000000000" pitchFamily="50" charset="-127"/>
-            </a:endParaRPr>
-          </a:p>
-          <a:p>
-            <a:pPr marL="514350" indent="-514350">
-              <a:lnSpc>
-                <a:spcPct val="200000"/>
-              </a:lnSpc>
-              <a:spcBef>
-                <a:spcPts val="600"/>
-              </a:spcBef>
-              <a:buAutoNum type="arabicPeriod"/>
-            </a:pPr>
-            <a:r>
-              <a:rPr lang="ko-KR" altLang="en-US" sz="2000" b="1" dirty="0">
-                <a:latin typeface="한컴 말랑말랑 Bold" panose="020F0803000000000000" pitchFamily="50" charset="-127"/>
-                <a:ea typeface="한컴 말랑말랑 Bold" panose="020F0803000000000000" pitchFamily="50" charset="-127"/>
-              </a:rPr>
-              <a:t>조건부 확률</a:t>
-            </a:r>
-            <a:r>
-              <a:rPr lang="en-US" altLang="ko-KR" sz="2000" b="1" dirty="0">
-                <a:latin typeface="한컴 말랑말랑 Bold" panose="020F0803000000000000" pitchFamily="50" charset="-127"/>
-                <a:ea typeface="한컴 말랑말랑 Bold" panose="020F0803000000000000" pitchFamily="50" charset="-127"/>
-              </a:rPr>
-              <a:t>(Conditional Probability)</a:t>
-            </a:r>
-          </a:p>
-        </p:txBody>
-      </p:sp>
-    </p:spTree>
-    <p:extLst>
-      <p:ext uri="{BB962C8B-B14F-4D97-AF65-F5344CB8AC3E}">
-        <p14:creationId xmlns:p14="http://schemas.microsoft.com/office/powerpoint/2010/main" val="2194691769"/>
-      </p:ext>
-    </p:extLst>
-  </p:cSld>
-  <p:clrMapOvr>
-    <a:masterClrMapping/>
-  </p:clrMapOvr>
-  <mc:AlternateContent xmlns:mc="http://schemas.openxmlformats.org/markup-compatibility/2006" xmlns:p14="http://schemas.microsoft.com/office/powerpoint/2010/main">
-    <mc:Choice Requires="p14">
-      <p:transition spd="med" p14:dur="700">
-        <p:fade/>
-      </p:transition>
-    </mc:Choice>
-    <mc:Fallback xmlns="">
-      <p:transition spd="med">
-        <p:fade/>
-      </p:transition>
-    </mc:Fallback>
-  </mc:AlternateContent>
-</p:sld>
-</file>
-
-<file path=ppt/slides/slide30.xml><?xml version="1.0" encoding="utf-8"?>
+<file path=ppt/slides/slide32.xml><?xml version="1.0" encoding="utf-8"?>
 <p:sld xmlns:a="http://schemas.openxmlformats.org/drawingml/2006/main" xmlns:r="http://schemas.openxmlformats.org/officeDocument/2006/relationships" xmlns:p="http://schemas.openxmlformats.org/presentationml/2006/main">
   <p:cSld>
     <p:spTree>
@@ -17578,7 +18762,7 @@
             <a:pPr rtl="0"/>
             <a:fld id="{A3F31473-23EB-4724-8B59-FE6D21D89FA4}" type="slidenum">
               <a:rPr lang="en-US" altLang="ko-KR" noProof="0" smtClean="0"/>
-              <a:t>30</a:t>
+              <a:t>32</a:t>
             </a:fld>
             <a:endParaRPr lang="en-US" altLang="ko-KR" noProof="0" dirty="0"/>
           </a:p>
@@ -17657,7 +18841,7 @@
 </p:sld>
 </file>
 
-<file path=ppt/slides/slide31.xml><?xml version="1.0" encoding="utf-8"?>
+<file path=ppt/slides/slide33.xml><?xml version="1.0" encoding="utf-8"?>
 <p:sld xmlns:a="http://schemas.openxmlformats.org/drawingml/2006/main" xmlns:r="http://schemas.openxmlformats.org/officeDocument/2006/relationships" xmlns:p="http://schemas.openxmlformats.org/presentationml/2006/main">
   <p:cSld>
     <p:spTree>
@@ -17692,7 +18876,7 @@
             <a:pPr rtl="0"/>
             <a:fld id="{A3F31473-23EB-4724-8B59-FE6D21D89FA4}" type="slidenum">
               <a:rPr lang="en-US" altLang="ko-KR" noProof="0" smtClean="0"/>
-              <a:t>31</a:t>
+              <a:t>33</a:t>
             </a:fld>
             <a:endParaRPr lang="en-US" altLang="ko-KR" noProof="0" dirty="0"/>
           </a:p>
@@ -17937,7 +19121,7 @@
 </p:sld>
 </file>
 
-<file path=ppt/slides/slide32.xml><?xml version="1.0" encoding="utf-8"?>
+<file path=ppt/slides/slide34.xml><?xml version="1.0" encoding="utf-8"?>
 <p:sld xmlns:a="http://schemas.openxmlformats.org/drawingml/2006/main" xmlns:r="http://schemas.openxmlformats.org/officeDocument/2006/relationships" xmlns:p="http://schemas.openxmlformats.org/presentationml/2006/main">
   <p:cSld>
     <p:spTree>
@@ -17972,7 +19156,7 @@
             <a:pPr rtl="0"/>
             <a:fld id="{A3F31473-23EB-4724-8B59-FE6D21D89FA4}" type="slidenum">
               <a:rPr lang="en-US" altLang="ko-KR" noProof="0" smtClean="0"/>
-              <a:t>32</a:t>
+              <a:t>34</a:t>
             </a:fld>
             <a:endParaRPr lang="en-US" altLang="ko-KR" noProof="0" dirty="0"/>
           </a:p>
@@ -18061,7 +19245,7 @@
 </p:sld>
 </file>
 
-<file path=ppt/slides/slide33.xml><?xml version="1.0" encoding="utf-8"?>
+<file path=ppt/slides/slide35.xml><?xml version="1.0" encoding="utf-8"?>
 <p:sld xmlns:a="http://schemas.openxmlformats.org/drawingml/2006/main" xmlns:r="http://schemas.openxmlformats.org/officeDocument/2006/relationships" xmlns:p="http://schemas.openxmlformats.org/presentationml/2006/main">
   <p:cSld>
     <p:spTree>
@@ -18096,7 +19280,7 @@
             <a:pPr rtl="0"/>
             <a:fld id="{A3F31473-23EB-4724-8B59-FE6D21D89FA4}" type="slidenum">
               <a:rPr lang="en-US" altLang="ko-KR" noProof="0" smtClean="0"/>
-              <a:t>33</a:t>
+              <a:t>35</a:t>
             </a:fld>
             <a:endParaRPr lang="en-US" altLang="ko-KR" noProof="0" dirty="0"/>
           </a:p>
@@ -18151,7 +19335,7 @@
 </p:sld>
 </file>
 
-<file path=ppt/slides/slide34.xml><?xml version="1.0" encoding="utf-8"?>
+<file path=ppt/slides/slide36.xml><?xml version="1.0" encoding="utf-8"?>
 <p:sld xmlns:a="http://schemas.openxmlformats.org/drawingml/2006/main" xmlns:r="http://schemas.openxmlformats.org/officeDocument/2006/relationships" xmlns:p="http://schemas.openxmlformats.org/presentationml/2006/main">
   <p:cSld>
     <p:spTree>
@@ -18186,7 +19370,7 @@
             <a:pPr rtl="0"/>
             <a:fld id="{A3F31473-23EB-4724-8B59-FE6D21D89FA4}" type="slidenum">
               <a:rPr lang="en-US" altLang="ko-KR" noProof="0" smtClean="0"/>
-              <a:t>34</a:t>
+              <a:t>36</a:t>
             </a:fld>
             <a:endParaRPr lang="en-US" altLang="ko-KR" noProof="0" dirty="0"/>
           </a:p>
@@ -18241,7 +19425,7 @@
 </p:sld>
 </file>
 
-<file path=ppt/slides/slide35.xml><?xml version="1.0" encoding="utf-8"?>
+<file path=ppt/slides/slide37.xml><?xml version="1.0" encoding="utf-8"?>
 <p:sld xmlns:a="http://schemas.openxmlformats.org/drawingml/2006/main" xmlns:r="http://schemas.openxmlformats.org/officeDocument/2006/relationships" xmlns:p="http://schemas.openxmlformats.org/presentationml/2006/main">
   <p:cSld>
     <p:spTree>
@@ -18276,7 +19460,7 @@
             <a:pPr rtl="0"/>
             <a:fld id="{A3F31473-23EB-4724-8B59-FE6D21D89FA4}" type="slidenum">
               <a:rPr lang="en-US" altLang="ko-KR" noProof="0" smtClean="0"/>
-              <a:t>35</a:t>
+              <a:t>37</a:t>
             </a:fld>
             <a:endParaRPr lang="en-US" altLang="ko-KR" noProof="0" dirty="0"/>
           </a:p>
@@ -18522,7 +19706,7 @@
 </p:sld>
 </file>
 
-<file path=ppt/slides/slide36.xml><?xml version="1.0" encoding="utf-8"?>
+<file path=ppt/slides/slide38.xml><?xml version="1.0" encoding="utf-8"?>
 <p:sld xmlns:a="http://schemas.openxmlformats.org/drawingml/2006/main" xmlns:r="http://schemas.openxmlformats.org/officeDocument/2006/relationships" xmlns:p="http://schemas.openxmlformats.org/presentationml/2006/main">
   <p:cSld>
     <p:spTree>
@@ -18569,7 +19753,7 @@
             <a:pPr rtl="0"/>
             <a:fld id="{A3F31473-23EB-4724-8B59-FE6D21D89FA4}" type="slidenum">
               <a:rPr lang="en-US" altLang="ko-KR" noProof="0" smtClean="0"/>
-              <a:t>36</a:t>
+              <a:t>38</a:t>
             </a:fld>
             <a:endParaRPr lang="en-US" altLang="ko-KR" noProof="0" dirty="0"/>
           </a:p>
@@ -19055,7 +20239,7 @@
 </p:sld>
 </file>
 
-<file path=ppt/slides/slide37.xml><?xml version="1.0" encoding="utf-8"?>
+<file path=ppt/slides/slide39.xml><?xml version="1.0" encoding="utf-8"?>
 <p:sld xmlns:a="http://schemas.openxmlformats.org/drawingml/2006/main" xmlns:r="http://schemas.openxmlformats.org/officeDocument/2006/relationships" xmlns:p="http://schemas.openxmlformats.org/presentationml/2006/main">
   <p:cSld>
     <p:spTree>
@@ -19096,7 +20280,7 @@
             <a:pPr rtl="0"/>
             <a:fld id="{A3F31473-23EB-4724-8B59-FE6D21D89FA4}" type="slidenum">
               <a:rPr lang="en-US" altLang="ko-KR" noProof="0" smtClean="0"/>
-              <a:t>37</a:t>
+              <a:t>39</a:t>
             </a:fld>
             <a:endParaRPr lang="en-US" altLang="ko-KR" noProof="0" dirty="0"/>
           </a:p>
@@ -19221,7 +20405,7 @@
 </p:sld>
 </file>
 
-<file path=ppt/slides/slide38.xml><?xml version="1.0" encoding="utf-8"?>
+<file path=ppt/slides/slide4.xml><?xml version="1.0" encoding="utf-8"?>
 <p:sld xmlns:a="http://schemas.openxmlformats.org/drawingml/2006/main" xmlns:r="http://schemas.openxmlformats.org/officeDocument/2006/relationships" xmlns:p="http://schemas.openxmlformats.org/presentationml/2006/main">
   <p:cSld>
     <p:spTree>
@@ -19240,6 +20424,156 @@
       </p:grpSpPr>
       <p:sp>
         <p:nvSpPr>
+          <p:cNvPr id="4" name="슬라이드 번호 개체 틀 3">
+            <a:extLst>
+              <a:ext uri="{FF2B5EF4-FFF2-40B4-BE49-F238E27FC236}">
+                <a16:creationId xmlns:a16="http://schemas.microsoft.com/office/drawing/2014/main" id="{60746B46-6FD0-13D0-FF25-E75F16257F7A}"/>
+              </a:ext>
+            </a:extLst>
+          </p:cNvPr>
+          <p:cNvSpPr>
+            <a:spLocks noGrp="1"/>
+          </p:cNvSpPr>
+          <p:nvPr>
+            <p:ph type="sldNum" sz="quarter" idx="12"/>
+          </p:nvPr>
+        </p:nvSpPr>
+        <p:spPr/>
+        <p:txBody>
+          <a:bodyPr/>
+          <a:lstStyle/>
+          <a:p>
+            <a:pPr rtl="0"/>
+            <a:fld id="{A3F31473-23EB-4724-8B59-FE6D21D89FA4}" type="slidenum">
+              <a:rPr lang="en-US" altLang="ko-KR" noProof="0" smtClean="0"/>
+              <a:t>4</a:t>
+            </a:fld>
+            <a:endParaRPr lang="en-US" altLang="ko-KR" noProof="0" dirty="0"/>
+          </a:p>
+        </p:txBody>
+      </p:sp>
+      <p:pic>
+        <p:nvPicPr>
+          <p:cNvPr id="7" name="그림 6">
+            <a:extLst>
+              <a:ext uri="{FF2B5EF4-FFF2-40B4-BE49-F238E27FC236}">
+                <a16:creationId xmlns:a16="http://schemas.microsoft.com/office/drawing/2014/main" id="{4EB6B37E-3E6C-5B69-5427-E7ED1A35857A}"/>
+              </a:ext>
+            </a:extLst>
+          </p:cNvPr>
+          <p:cNvPicPr>
+            <a:picLocks noChangeAspect="1"/>
+          </p:cNvPicPr>
+          <p:nvPr/>
+        </p:nvPicPr>
+        <p:blipFill>
+          <a:blip r:embed="rId2"/>
+          <a:stretch>
+            <a:fillRect/>
+          </a:stretch>
+        </p:blipFill>
+        <p:spPr>
+          <a:xfrm>
+            <a:off x="2277987" y="1124744"/>
+            <a:ext cx="7719453" cy="4968552"/>
+          </a:xfrm>
+          <a:prstGeom prst="rect">
+            <a:avLst/>
+          </a:prstGeom>
+        </p:spPr>
+      </p:pic>
+      <p:sp>
+        <p:nvSpPr>
+          <p:cNvPr id="8" name="직사각형 7">
+            <a:extLst>
+              <a:ext uri="{FF2B5EF4-FFF2-40B4-BE49-F238E27FC236}">
+                <a16:creationId xmlns:a16="http://schemas.microsoft.com/office/drawing/2014/main" id="{887794CA-12A4-DEAA-75BE-6CB405CE5401}"/>
+              </a:ext>
+            </a:extLst>
+          </p:cNvPr>
+          <p:cNvSpPr/>
+          <p:nvPr/>
+        </p:nvSpPr>
+        <p:spPr>
+          <a:xfrm>
+            <a:off x="189756" y="338469"/>
+            <a:ext cx="4742067" cy="523220"/>
+          </a:xfrm>
+          <a:prstGeom prst="rect">
+            <a:avLst/>
+          </a:prstGeom>
+        </p:spPr>
+        <p:txBody>
+          <a:bodyPr wrap="none">
+            <a:spAutoFit/>
+          </a:bodyPr>
+          <a:lstStyle/>
+          <a:p>
+            <a:r>
+              <a:rPr lang="ko-KR" altLang="en-US" sz="2800" b="1" dirty="0">
+                <a:solidFill>
+                  <a:srgbClr val="313131"/>
+                </a:solidFill>
+                <a:latin typeface="PT Sans"/>
+              </a:rPr>
+              <a:t>확률변수</a:t>
+            </a:r>
+            <a:r>
+              <a:rPr lang="en-US" altLang="ko-KR" sz="2800" b="1" dirty="0">
+                <a:solidFill>
+                  <a:srgbClr val="313131"/>
+                </a:solidFill>
+                <a:latin typeface="PT Sans"/>
+              </a:rPr>
+              <a:t>(Random variable)</a:t>
+            </a:r>
+          </a:p>
+        </p:txBody>
+      </p:sp>
+    </p:spTree>
+    <p:extLst>
+      <p:ext uri="{BB962C8B-B14F-4D97-AF65-F5344CB8AC3E}">
+        <p14:creationId xmlns:p14="http://schemas.microsoft.com/office/powerpoint/2010/main" val="3682961625"/>
+      </p:ext>
+    </p:extLst>
+  </p:cSld>
+  <p:clrMapOvr>
+    <a:masterClrMapping/>
+  </p:clrMapOvr>
+  <mc:AlternateContent xmlns:mc="http://schemas.openxmlformats.org/markup-compatibility/2006" xmlns:p14="http://schemas.microsoft.com/office/powerpoint/2010/main">
+    <mc:Choice Requires="p14">
+      <p:transition spd="med" p14:dur="700">
+        <p:fade/>
+      </p:transition>
+    </mc:Choice>
+    <mc:Fallback xmlns="">
+      <p:transition spd="med">
+        <p:fade/>
+      </p:transition>
+    </mc:Fallback>
+  </mc:AlternateContent>
+</p:sld>
+</file>
+
+<file path=ppt/slides/slide40.xml><?xml version="1.0" encoding="utf-8"?>
+<p:sld xmlns:a="http://schemas.openxmlformats.org/drawingml/2006/main" xmlns:r="http://schemas.openxmlformats.org/officeDocument/2006/relationships" xmlns:p="http://schemas.openxmlformats.org/presentationml/2006/main">
+  <p:cSld>
+    <p:spTree>
+      <p:nvGrpSpPr>
+        <p:cNvPr id="1" name=""/>
+        <p:cNvGrpSpPr/>
+        <p:nvPr/>
+      </p:nvGrpSpPr>
+      <p:grpSpPr>
+        <a:xfrm>
+          <a:off x="0" y="0"/>
+          <a:ext cx="0" cy="0"/>
+          <a:chOff x="0" y="0"/>
+          <a:chExt cx="0" cy="0"/>
+        </a:xfrm>
+      </p:grpSpPr>
+      <p:sp>
+        <p:nvSpPr>
           <p:cNvPr id="8" name="슬라이드 번호 개체 틀 7"/>
           <p:cNvSpPr>
             <a:spLocks noGrp="1"/>
@@ -19256,7 +20590,7 @@
             <a:pPr rtl="0"/>
             <a:fld id="{A3F31473-23EB-4724-8B59-FE6D21D89FA4}" type="slidenum">
               <a:rPr lang="en-US" altLang="ko-KR" noProof="0" smtClean="0"/>
-              <a:t>38</a:t>
+              <a:t>40</a:t>
             </a:fld>
             <a:endParaRPr lang="en-US" altLang="ko-KR" noProof="0" dirty="0"/>
           </a:p>
@@ -19393,7 +20727,7 @@
 </p:sld>
 </file>
 
-<file path=ppt/slides/slide39.xml><?xml version="1.0" encoding="utf-8"?>
+<file path=ppt/slides/slide41.xml><?xml version="1.0" encoding="utf-8"?>
 <p:sld xmlns:a="http://schemas.openxmlformats.org/drawingml/2006/main" xmlns:r="http://schemas.openxmlformats.org/officeDocument/2006/relationships" xmlns:p="http://schemas.openxmlformats.org/presentationml/2006/main">
   <p:cSld>
     <p:spTree>
@@ -19428,7 +20762,7 @@
             <a:pPr rtl="0"/>
             <a:fld id="{A3F31473-23EB-4724-8B59-FE6D21D89FA4}" type="slidenum">
               <a:rPr lang="en-US" altLang="ko-KR" noProof="0" smtClean="0"/>
-              <a:t>39</a:t>
+              <a:t>41</a:t>
             </a:fld>
             <a:endParaRPr lang="en-US" altLang="ko-KR" noProof="0" dirty="0"/>
           </a:p>
@@ -19483,7 +20817,7 @@
 </p:sld>
 </file>
 
-<file path=ppt/slides/slide4.xml><?xml version="1.0" encoding="utf-8"?>
+<file path=ppt/slides/slide42.xml><?xml version="1.0" encoding="utf-8"?>
 <p:sld xmlns:a="http://schemas.openxmlformats.org/drawingml/2006/main" xmlns:r="http://schemas.openxmlformats.org/officeDocument/2006/relationships" xmlns:p="http://schemas.openxmlformats.org/presentationml/2006/main">
   <p:cSld>
     <p:spTree>
@@ -19502,156 +20836,6 @@
       </p:grpSpPr>
       <p:sp>
         <p:nvSpPr>
-          <p:cNvPr id="4" name="슬라이드 번호 개체 틀 3">
-            <a:extLst>
-              <a:ext uri="{FF2B5EF4-FFF2-40B4-BE49-F238E27FC236}">
-                <a16:creationId xmlns:a16="http://schemas.microsoft.com/office/drawing/2014/main" id="{60746B46-6FD0-13D0-FF25-E75F16257F7A}"/>
-              </a:ext>
-            </a:extLst>
-          </p:cNvPr>
-          <p:cNvSpPr>
-            <a:spLocks noGrp="1"/>
-          </p:cNvSpPr>
-          <p:nvPr>
-            <p:ph type="sldNum" sz="quarter" idx="12"/>
-          </p:nvPr>
-        </p:nvSpPr>
-        <p:spPr/>
-        <p:txBody>
-          <a:bodyPr/>
-          <a:lstStyle/>
-          <a:p>
-            <a:pPr rtl="0"/>
-            <a:fld id="{A3F31473-23EB-4724-8B59-FE6D21D89FA4}" type="slidenum">
-              <a:rPr lang="en-US" altLang="ko-KR" noProof="0" smtClean="0"/>
-              <a:t>4</a:t>
-            </a:fld>
-            <a:endParaRPr lang="en-US" altLang="ko-KR" noProof="0" dirty="0"/>
-          </a:p>
-        </p:txBody>
-      </p:sp>
-      <p:pic>
-        <p:nvPicPr>
-          <p:cNvPr id="7" name="그림 6">
-            <a:extLst>
-              <a:ext uri="{FF2B5EF4-FFF2-40B4-BE49-F238E27FC236}">
-                <a16:creationId xmlns:a16="http://schemas.microsoft.com/office/drawing/2014/main" id="{4EB6B37E-3E6C-5B69-5427-E7ED1A35857A}"/>
-              </a:ext>
-            </a:extLst>
-          </p:cNvPr>
-          <p:cNvPicPr>
-            <a:picLocks noChangeAspect="1"/>
-          </p:cNvPicPr>
-          <p:nvPr/>
-        </p:nvPicPr>
-        <p:blipFill>
-          <a:blip r:embed="rId2"/>
-          <a:stretch>
-            <a:fillRect/>
-          </a:stretch>
-        </p:blipFill>
-        <p:spPr>
-          <a:xfrm>
-            <a:off x="2277987" y="1124744"/>
-            <a:ext cx="7719453" cy="4968552"/>
-          </a:xfrm>
-          <a:prstGeom prst="rect">
-            <a:avLst/>
-          </a:prstGeom>
-        </p:spPr>
-      </p:pic>
-      <p:sp>
-        <p:nvSpPr>
-          <p:cNvPr id="8" name="직사각형 7">
-            <a:extLst>
-              <a:ext uri="{FF2B5EF4-FFF2-40B4-BE49-F238E27FC236}">
-                <a16:creationId xmlns:a16="http://schemas.microsoft.com/office/drawing/2014/main" id="{887794CA-12A4-DEAA-75BE-6CB405CE5401}"/>
-              </a:ext>
-            </a:extLst>
-          </p:cNvPr>
-          <p:cNvSpPr/>
-          <p:nvPr/>
-        </p:nvSpPr>
-        <p:spPr>
-          <a:xfrm>
-            <a:off x="189756" y="338469"/>
-            <a:ext cx="4742067" cy="523220"/>
-          </a:xfrm>
-          <a:prstGeom prst="rect">
-            <a:avLst/>
-          </a:prstGeom>
-        </p:spPr>
-        <p:txBody>
-          <a:bodyPr wrap="none">
-            <a:spAutoFit/>
-          </a:bodyPr>
-          <a:lstStyle/>
-          <a:p>
-            <a:r>
-              <a:rPr lang="ko-KR" altLang="en-US" sz="2800" b="1" dirty="0">
-                <a:solidFill>
-                  <a:srgbClr val="313131"/>
-                </a:solidFill>
-                <a:latin typeface="PT Sans"/>
-              </a:rPr>
-              <a:t>확률변수</a:t>
-            </a:r>
-            <a:r>
-              <a:rPr lang="en-US" altLang="ko-KR" sz="2800" b="1" dirty="0">
-                <a:solidFill>
-                  <a:srgbClr val="313131"/>
-                </a:solidFill>
-                <a:latin typeface="PT Sans"/>
-              </a:rPr>
-              <a:t>(Random variable)</a:t>
-            </a:r>
-          </a:p>
-        </p:txBody>
-      </p:sp>
-    </p:spTree>
-    <p:extLst>
-      <p:ext uri="{BB962C8B-B14F-4D97-AF65-F5344CB8AC3E}">
-        <p14:creationId xmlns:p14="http://schemas.microsoft.com/office/powerpoint/2010/main" val="3682961625"/>
-      </p:ext>
-    </p:extLst>
-  </p:cSld>
-  <p:clrMapOvr>
-    <a:masterClrMapping/>
-  </p:clrMapOvr>
-  <mc:AlternateContent xmlns:mc="http://schemas.openxmlformats.org/markup-compatibility/2006" xmlns:p14="http://schemas.microsoft.com/office/powerpoint/2010/main">
-    <mc:Choice Requires="p14">
-      <p:transition spd="med" p14:dur="700">
-        <p:fade/>
-      </p:transition>
-    </mc:Choice>
-    <mc:Fallback xmlns="">
-      <p:transition spd="med">
-        <p:fade/>
-      </p:transition>
-    </mc:Fallback>
-  </mc:AlternateContent>
-</p:sld>
-</file>
-
-<file path=ppt/slides/slide40.xml><?xml version="1.0" encoding="utf-8"?>
-<p:sld xmlns:a="http://schemas.openxmlformats.org/drawingml/2006/main" xmlns:r="http://schemas.openxmlformats.org/officeDocument/2006/relationships" xmlns:p="http://schemas.openxmlformats.org/presentationml/2006/main">
-  <p:cSld>
-    <p:spTree>
-      <p:nvGrpSpPr>
-        <p:cNvPr id="1" name=""/>
-        <p:cNvGrpSpPr/>
-        <p:nvPr/>
-      </p:nvGrpSpPr>
-      <p:grpSpPr>
-        <a:xfrm>
-          <a:off x="0" y="0"/>
-          <a:ext cx="0" cy="0"/>
-          <a:chOff x="0" y="0"/>
-          <a:chExt cx="0" cy="0"/>
-        </a:xfrm>
-      </p:grpSpPr>
-      <p:sp>
-        <p:nvSpPr>
           <p:cNvPr id="8" name="슬라이드 번호 개체 틀 7"/>
           <p:cNvSpPr>
             <a:spLocks noGrp="1"/>
@@ -19668,7 +20852,7 @@
             <a:pPr rtl="0"/>
             <a:fld id="{A3F31473-23EB-4724-8B59-FE6D21D89FA4}" type="slidenum">
               <a:rPr lang="en-US" altLang="ko-KR" noProof="0" smtClean="0"/>
-              <a:t>40</a:t>
+              <a:t>42</a:t>
             </a:fld>
             <a:endParaRPr lang="en-US" altLang="ko-KR" noProof="0" dirty="0"/>
           </a:p>
@@ -19723,7 +20907,7 @@
 </p:sld>
 </file>
 
-<file path=ppt/slides/slide41.xml><?xml version="1.0" encoding="utf-8"?>
+<file path=ppt/slides/slide43.xml><?xml version="1.0" encoding="utf-8"?>
 <p:sld xmlns:a="http://schemas.openxmlformats.org/drawingml/2006/main" xmlns:r="http://schemas.openxmlformats.org/officeDocument/2006/relationships" xmlns:p="http://schemas.openxmlformats.org/presentationml/2006/main">
   <p:cSld>
     <p:spTree>
@@ -19758,7 +20942,7 @@
             <a:pPr rtl="0"/>
             <a:fld id="{A3F31473-23EB-4724-8B59-FE6D21D89FA4}" type="slidenum">
               <a:rPr lang="en-US" altLang="ko-KR" noProof="0" smtClean="0"/>
-              <a:t>41</a:t>
+              <a:t>43</a:t>
             </a:fld>
             <a:endParaRPr lang="en-US" altLang="ko-KR" noProof="0" dirty="0"/>
           </a:p>
@@ -19813,7 +20997,7 @@
 </p:sld>
 </file>
 
-<file path=ppt/slides/slide42.xml><?xml version="1.0" encoding="utf-8"?>
+<file path=ppt/slides/slide44.xml><?xml version="1.0" encoding="utf-8"?>
 <p:sld xmlns:a="http://schemas.openxmlformats.org/drawingml/2006/main" xmlns:r="http://schemas.openxmlformats.org/officeDocument/2006/relationships" xmlns:p="http://schemas.openxmlformats.org/presentationml/2006/main">
   <p:cSld>
     <p:spTree>
@@ -19848,7 +21032,7 @@
             <a:pPr rtl="0"/>
             <a:fld id="{A3F31473-23EB-4724-8B59-FE6D21D89FA4}" type="slidenum">
               <a:rPr lang="en-US" altLang="ko-KR" noProof="0" smtClean="0"/>
-              <a:t>42</a:t>
+              <a:t>44</a:t>
             </a:fld>
             <a:endParaRPr lang="en-US" altLang="ko-KR" noProof="0" dirty="0"/>
           </a:p>
@@ -19956,7 +21140,7 @@
 </p:sld>
 </file>
 
-<file path=ppt/slides/slide43.xml><?xml version="1.0" encoding="utf-8"?>
+<file path=ppt/slides/slide45.xml><?xml version="1.0" encoding="utf-8"?>
 <p:sld xmlns:a="http://schemas.openxmlformats.org/drawingml/2006/main" xmlns:r="http://schemas.openxmlformats.org/officeDocument/2006/relationships" xmlns:p="http://schemas.openxmlformats.org/presentationml/2006/main">
   <p:cSld>
     <p:spTree>
@@ -20057,7 +21241,7 @@
             <a:pPr rtl="0"/>
             <a:fld id="{A3F31473-23EB-4724-8B59-FE6D21D89FA4}" type="slidenum">
               <a:rPr lang="en-US" altLang="ko-KR" noProof="0" smtClean="0"/>
-              <a:t>43</a:t>
+              <a:t>45</a:t>
             </a:fld>
             <a:endParaRPr lang="en-US" altLang="ko-KR" noProof="0" dirty="0"/>
           </a:p>
@@ -20405,7 +21589,7 @@
 </p:sld>
 </file>
 
-<file path=ppt/slides/slide44.xml><?xml version="1.0" encoding="utf-8"?>
+<file path=ppt/slides/slide46.xml><?xml version="1.0" encoding="utf-8"?>
 <p:sld xmlns:a="http://schemas.openxmlformats.org/drawingml/2006/main" xmlns:r="http://schemas.openxmlformats.org/officeDocument/2006/relationships" xmlns:p="http://schemas.openxmlformats.org/presentationml/2006/main">
   <p:cSld>
     <p:spTree>
@@ -20440,7 +21624,7 @@
             <a:pPr rtl="0"/>
             <a:fld id="{A3F31473-23EB-4724-8B59-FE6D21D89FA4}" type="slidenum">
               <a:rPr lang="en-US" altLang="ko-KR" noProof="0" smtClean="0"/>
-              <a:t>44</a:t>
+              <a:t>46</a:t>
             </a:fld>
             <a:endParaRPr lang="en-US" altLang="ko-KR" noProof="0" dirty="0"/>
           </a:p>
@@ -20650,7 +21834,7 @@
 </p:sld>
 </file>
 
-<file path=ppt/slides/slide45.xml><?xml version="1.0" encoding="utf-8"?>
+<file path=ppt/slides/slide47.xml><?xml version="1.0" encoding="utf-8"?>
 <p:sld xmlns:a="http://schemas.openxmlformats.org/drawingml/2006/main" xmlns:r="http://schemas.openxmlformats.org/officeDocument/2006/relationships" xmlns:p="http://schemas.openxmlformats.org/presentationml/2006/main">
   <p:cSld>
     <p:spTree>
@@ -20697,7 +21881,7 @@
             <a:pPr rtl="0"/>
             <a:fld id="{A3F31473-23EB-4724-8B59-FE6D21D89FA4}" type="slidenum">
               <a:rPr lang="en-US" altLang="ko-KR" noProof="0" smtClean="0"/>
-              <a:t>45</a:t>
+              <a:t>47</a:t>
             </a:fld>
             <a:endParaRPr lang="en-US" altLang="ko-KR" noProof="0" dirty="0"/>
           </a:p>
@@ -21024,7 +22208,7 @@
 </p:sld>
 </file>
 
-<file path=ppt/slides/slide46.xml><?xml version="1.0" encoding="utf-8"?>
+<file path=ppt/slides/slide48.xml><?xml version="1.0" encoding="utf-8"?>
 <p:sld xmlns:a="http://schemas.openxmlformats.org/drawingml/2006/main" xmlns:r="http://schemas.openxmlformats.org/officeDocument/2006/relationships" xmlns:p="http://schemas.openxmlformats.org/presentationml/2006/main">
   <p:cSld>
     <p:spTree>
@@ -21071,7 +22255,7 @@
             <a:pPr rtl="0"/>
             <a:fld id="{A3F31473-23EB-4724-8B59-FE6D21D89FA4}" type="slidenum">
               <a:rPr lang="en-US" altLang="ko-KR" noProof="0" smtClean="0"/>
-              <a:t>46</a:t>
+              <a:t>48</a:t>
             </a:fld>
             <a:endParaRPr lang="en-US" altLang="ko-KR" noProof="0" dirty="0"/>
           </a:p>
@@ -21484,7 +22668,7 @@
 </p:sld>
 </file>
 
-<file path=ppt/slides/slide47.xml><?xml version="1.0" encoding="utf-8"?>
+<file path=ppt/slides/slide49.xml><?xml version="1.0" encoding="utf-8"?>
 <p:sld xmlns:a="http://schemas.openxmlformats.org/drawingml/2006/main" xmlns:r="http://schemas.openxmlformats.org/officeDocument/2006/relationships" xmlns:p="http://schemas.openxmlformats.org/presentationml/2006/main">
   <p:cSld>
     <p:spTree>
@@ -21531,7 +22715,7 @@
             <a:pPr rtl="0"/>
             <a:fld id="{A3F31473-23EB-4724-8B59-FE6D21D89FA4}" type="slidenum">
               <a:rPr lang="en-US" altLang="ko-KR" noProof="0" smtClean="0"/>
-              <a:t>47</a:t>
+              <a:t>49</a:t>
             </a:fld>
             <a:endParaRPr lang="en-US" altLang="ko-KR" noProof="0" dirty="0"/>
           </a:p>
@@ -21798,7 +22982,314 @@
 </p:sld>
 </file>
 
-<file path=ppt/slides/slide48.xml><?xml version="1.0" encoding="utf-8"?>
+<file path=ppt/slides/slide5.xml><?xml version="1.0" encoding="utf-8"?>
+<p:sld xmlns:a="http://schemas.openxmlformats.org/drawingml/2006/main" xmlns:r="http://schemas.openxmlformats.org/officeDocument/2006/relationships" xmlns:p="http://schemas.openxmlformats.org/presentationml/2006/main">
+  <p:cSld>
+    <p:spTree>
+      <p:nvGrpSpPr>
+        <p:cNvPr id="1" name="">
+          <a:extLst>
+            <a:ext uri="{FF2B5EF4-FFF2-40B4-BE49-F238E27FC236}">
+              <a16:creationId xmlns:a16="http://schemas.microsoft.com/office/drawing/2014/main" id="{8F79E74E-A16C-1718-57CD-D7D3F76F72E3}"/>
+            </a:ext>
+          </a:extLst>
+        </p:cNvPr>
+        <p:cNvGrpSpPr/>
+        <p:nvPr/>
+      </p:nvGrpSpPr>
+      <p:grpSpPr>
+        <a:xfrm>
+          <a:off x="0" y="0"/>
+          <a:ext cx="0" cy="0"/>
+          <a:chOff x="0" y="0"/>
+          <a:chExt cx="0" cy="0"/>
+        </a:xfrm>
+      </p:grpSpPr>
+      <p:sp>
+        <p:nvSpPr>
+          <p:cNvPr id="2" name="슬라이드 번호 개체 틀 1">
+            <a:extLst>
+              <a:ext uri="{FF2B5EF4-FFF2-40B4-BE49-F238E27FC236}">
+                <a16:creationId xmlns:a16="http://schemas.microsoft.com/office/drawing/2014/main" id="{1F6EAA2F-CBE2-932B-4F5D-1CF918997B7A}"/>
+              </a:ext>
+            </a:extLst>
+          </p:cNvPr>
+          <p:cNvSpPr>
+            <a:spLocks noGrp="1"/>
+          </p:cNvSpPr>
+          <p:nvPr>
+            <p:ph type="sldNum" sz="quarter" idx="12"/>
+          </p:nvPr>
+        </p:nvSpPr>
+        <p:spPr/>
+        <p:txBody>
+          <a:bodyPr/>
+          <a:lstStyle/>
+          <a:p>
+            <a:pPr rtl="0"/>
+            <a:fld id="{A3F31473-23EB-4724-8B59-FE6D21D89FA4}" type="slidenum">
+              <a:rPr lang="en-US" altLang="ko-KR" noProof="0" smtClean="0"/>
+              <a:t>5</a:t>
+            </a:fld>
+            <a:endParaRPr lang="en-US" altLang="ko-KR" noProof="0" dirty="0"/>
+          </a:p>
+        </p:txBody>
+      </p:sp>
+      <p:sp>
+        <p:nvSpPr>
+          <p:cNvPr id="4" name="TextBox 3">
+            <a:extLst>
+              <a:ext uri="{FF2B5EF4-FFF2-40B4-BE49-F238E27FC236}">
+                <a16:creationId xmlns:a16="http://schemas.microsoft.com/office/drawing/2014/main" id="{E86563F3-94EF-9491-D44B-803618076A71}"/>
+              </a:ext>
+            </a:extLst>
+          </p:cNvPr>
+          <p:cNvSpPr txBox="1"/>
+          <p:nvPr/>
+        </p:nvSpPr>
+        <p:spPr>
+          <a:xfrm>
+            <a:off x="261764" y="1268760"/>
+            <a:ext cx="11161240" cy="1679370"/>
+          </a:xfrm>
+          <a:prstGeom prst="rect">
+            <a:avLst/>
+          </a:prstGeom>
+          <a:solidFill>
+            <a:schemeClr val="tx1">
+              <a:lumMod val="20000"/>
+              <a:lumOff val="80000"/>
+            </a:schemeClr>
+          </a:solidFill>
+        </p:spPr>
+        <p:txBody>
+          <a:bodyPr wrap="square" rtlCol="0">
+            <a:spAutoFit/>
+          </a:bodyPr>
+          <a:lstStyle/>
+          <a:p>
+            <a:pPr marL="285750" indent="-285750">
+              <a:lnSpc>
+                <a:spcPct val="200000"/>
+              </a:lnSpc>
+              <a:buFont typeface="Wingdings" panose="05000000000000000000" pitchFamily="2" charset="2"/>
+              <a:buChar char="v"/>
+            </a:pPr>
+            <a:r>
+              <a:rPr lang="en-US" altLang="ko-KR" dirty="0">
+                <a:latin typeface="휴먼모음T" panose="02030504000101010101" pitchFamily="18" charset="-127"/>
+                <a:ea typeface="휴먼모음T" panose="02030504000101010101" pitchFamily="18" charset="-127"/>
+              </a:rPr>
+              <a:t>1</a:t>
+            </a:r>
+            <a:r>
+              <a:rPr lang="ko-KR" altLang="en-US" dirty="0">
+                <a:latin typeface="휴먼모음T" panose="02030504000101010101" pitchFamily="18" charset="-127"/>
+                <a:ea typeface="휴먼모음T" panose="02030504000101010101" pitchFamily="18" charset="-127"/>
+              </a:rPr>
+              <a:t>개의 주사위 던지기 게임에서 </a:t>
+            </a:r>
+            <a:r>
+              <a:rPr lang="en-US" altLang="ko-KR" dirty="0">
+                <a:latin typeface="휴먼모음T" panose="02030504000101010101" pitchFamily="18" charset="-127"/>
+                <a:ea typeface="휴먼모음T" panose="02030504000101010101" pitchFamily="18" charset="-127"/>
+              </a:rPr>
+              <a:t>5</a:t>
+            </a:r>
+            <a:r>
+              <a:rPr lang="ko-KR" altLang="en-US" dirty="0">
+                <a:latin typeface="휴먼모음T" panose="02030504000101010101" pitchFamily="18" charset="-127"/>
+                <a:ea typeface="휴먼모음T" panose="02030504000101010101" pitchFamily="18" charset="-127"/>
+              </a:rPr>
+              <a:t>일 확률은</a:t>
+            </a:r>
+            <a:r>
+              <a:rPr lang="en-US" altLang="ko-KR" dirty="0">
+                <a:latin typeface="휴먼모음T" panose="02030504000101010101" pitchFamily="18" charset="-127"/>
+                <a:ea typeface="휴먼모음T" panose="02030504000101010101" pitchFamily="18" charset="-127"/>
+              </a:rPr>
+              <a:t>?</a:t>
+            </a:r>
+          </a:p>
+          <a:p>
+            <a:pPr marL="285750" indent="-285750">
+              <a:lnSpc>
+                <a:spcPct val="200000"/>
+              </a:lnSpc>
+              <a:buFont typeface="Wingdings" panose="05000000000000000000" pitchFamily="2" charset="2"/>
+              <a:buChar char="v"/>
+            </a:pPr>
+            <a:r>
+              <a:rPr lang="en-US" altLang="ko-KR" dirty="0">
+                <a:latin typeface="휴먼모음T" panose="02030504000101010101" pitchFamily="18" charset="-127"/>
+                <a:ea typeface="휴먼모음T" panose="02030504000101010101" pitchFamily="18" charset="-127"/>
+              </a:rPr>
+              <a:t>1</a:t>
+            </a:r>
+            <a:r>
+              <a:rPr lang="ko-KR" altLang="en-US" dirty="0">
+                <a:latin typeface="휴먼모음T" panose="02030504000101010101" pitchFamily="18" charset="-127"/>
+                <a:ea typeface="휴먼모음T" panose="02030504000101010101" pitchFamily="18" charset="-127"/>
+              </a:rPr>
+              <a:t>개의 주사위 던지기 게임에서 </a:t>
+            </a:r>
+            <a:r>
+              <a:rPr lang="en-US" altLang="ko-KR" dirty="0">
+                <a:latin typeface="휴먼모음T" panose="02030504000101010101" pitchFamily="18" charset="-127"/>
+                <a:ea typeface="휴먼모음T" panose="02030504000101010101" pitchFamily="18" charset="-127"/>
+              </a:rPr>
+              <a:t>5</a:t>
+            </a:r>
+            <a:r>
+              <a:rPr lang="ko-KR" altLang="en-US" dirty="0">
+                <a:latin typeface="휴먼모음T" panose="02030504000101010101" pitchFamily="18" charset="-127"/>
+                <a:ea typeface="휴먼모음T" panose="02030504000101010101" pitchFamily="18" charset="-127"/>
+              </a:rPr>
+              <a:t>이하가 될 확률</a:t>
+            </a:r>
+            <a:r>
+              <a:rPr lang="en-US" altLang="ko-KR" dirty="0">
+                <a:latin typeface="휴먼모음T" panose="02030504000101010101" pitchFamily="18" charset="-127"/>
+                <a:ea typeface="휴먼모음T" panose="02030504000101010101" pitchFamily="18" charset="-127"/>
+              </a:rPr>
+              <a:t>?</a:t>
+            </a:r>
+          </a:p>
+          <a:p>
+            <a:pPr marL="285750" indent="-285750">
+              <a:lnSpc>
+                <a:spcPct val="200000"/>
+              </a:lnSpc>
+              <a:buFont typeface="Wingdings" panose="05000000000000000000" pitchFamily="2" charset="2"/>
+              <a:buChar char="v"/>
+            </a:pPr>
+            <a:r>
+              <a:rPr lang="en-US" altLang="ko-KR" dirty="0">
+                <a:latin typeface="휴먼모음T" panose="02030504000101010101" pitchFamily="18" charset="-127"/>
+                <a:ea typeface="휴먼모음T" panose="02030504000101010101" pitchFamily="18" charset="-127"/>
+              </a:rPr>
+              <a:t>2</a:t>
+            </a:r>
+            <a:r>
+              <a:rPr lang="ko-KR" altLang="en-US" dirty="0">
+                <a:latin typeface="휴먼모음T" panose="02030504000101010101" pitchFamily="18" charset="-127"/>
+                <a:ea typeface="휴먼모음T" panose="02030504000101010101" pitchFamily="18" charset="-127"/>
+              </a:rPr>
+              <a:t>개의 주사기 던지기 게임에서 </a:t>
+            </a:r>
+            <a:r>
+              <a:rPr lang="en-US" altLang="ko-KR" dirty="0">
+                <a:latin typeface="휴먼모음T" panose="02030504000101010101" pitchFamily="18" charset="-127"/>
+                <a:ea typeface="휴먼모음T" panose="02030504000101010101" pitchFamily="18" charset="-127"/>
+              </a:rPr>
+              <a:t>2</a:t>
+            </a:r>
+            <a:r>
+              <a:rPr lang="ko-KR" altLang="en-US" dirty="0">
+                <a:latin typeface="휴먼모음T" panose="02030504000101010101" pitchFamily="18" charset="-127"/>
+                <a:ea typeface="휴먼모음T" panose="02030504000101010101" pitchFamily="18" charset="-127"/>
+              </a:rPr>
+              <a:t>개 주사위의 합이 </a:t>
+            </a:r>
+            <a:r>
+              <a:rPr lang="en-US" altLang="ko-KR" dirty="0">
+                <a:latin typeface="휴먼모음T" panose="02030504000101010101" pitchFamily="18" charset="-127"/>
+                <a:ea typeface="휴먼모음T" panose="02030504000101010101" pitchFamily="18" charset="-127"/>
+              </a:rPr>
+              <a:t>8</a:t>
+            </a:r>
+            <a:r>
+              <a:rPr lang="ko-KR" altLang="en-US" dirty="0">
+                <a:latin typeface="휴먼모음T" panose="02030504000101010101" pitchFamily="18" charset="-127"/>
+                <a:ea typeface="휴먼모음T" panose="02030504000101010101" pitchFamily="18" charset="-127"/>
+              </a:rPr>
+              <a:t>일 확률</a:t>
+            </a:r>
+            <a:r>
+              <a:rPr lang="en-US" altLang="ko-KR" dirty="0">
+                <a:latin typeface="휴먼모음T" panose="02030504000101010101" pitchFamily="18" charset="-127"/>
+                <a:ea typeface="휴먼모음T" panose="02030504000101010101" pitchFamily="18" charset="-127"/>
+              </a:rPr>
+              <a:t>? 10</a:t>
+            </a:r>
+            <a:r>
+              <a:rPr lang="ko-KR" altLang="en-US" dirty="0">
+                <a:latin typeface="휴먼모음T" panose="02030504000101010101" pitchFamily="18" charset="-127"/>
+                <a:ea typeface="휴먼모음T" panose="02030504000101010101" pitchFamily="18" charset="-127"/>
+              </a:rPr>
+              <a:t>이상일 확률</a:t>
+            </a:r>
+            <a:r>
+              <a:rPr lang="en-US" altLang="ko-KR" dirty="0">
+                <a:latin typeface="휴먼모음T" panose="02030504000101010101" pitchFamily="18" charset="-127"/>
+                <a:ea typeface="휴먼모음T" panose="02030504000101010101" pitchFamily="18" charset="-127"/>
+              </a:rPr>
+              <a:t>?</a:t>
+            </a:r>
+          </a:p>
+        </p:txBody>
+      </p:sp>
+      <p:sp>
+        <p:nvSpPr>
+          <p:cNvPr id="9" name="TextBox 8">
+            <a:extLst>
+              <a:ext uri="{FF2B5EF4-FFF2-40B4-BE49-F238E27FC236}">
+                <a16:creationId xmlns:a16="http://schemas.microsoft.com/office/drawing/2014/main" id="{F14569A8-2444-3755-61EB-DBEDF50AFA79}"/>
+              </a:ext>
+            </a:extLst>
+          </p:cNvPr>
+          <p:cNvSpPr txBox="1"/>
+          <p:nvPr/>
+        </p:nvSpPr>
+        <p:spPr>
+          <a:xfrm>
+            <a:off x="117748" y="260648"/>
+            <a:ext cx="2592288" cy="584775"/>
+          </a:xfrm>
+          <a:prstGeom prst="rect">
+            <a:avLst/>
+          </a:prstGeom>
+          <a:noFill/>
+        </p:spPr>
+        <p:txBody>
+          <a:bodyPr wrap="square" rtlCol="0">
+            <a:spAutoFit/>
+          </a:bodyPr>
+          <a:lstStyle/>
+          <a:p>
+            <a:r>
+              <a:rPr lang="ko-KR" altLang="en-US" sz="3200" b="1"/>
+              <a:t>문제 풀이</a:t>
+            </a:r>
+          </a:p>
+        </p:txBody>
+      </p:sp>
+    </p:spTree>
+    <p:extLst>
+      <p:ext uri="{BB962C8B-B14F-4D97-AF65-F5344CB8AC3E}">
+        <p14:creationId xmlns:p14="http://schemas.microsoft.com/office/powerpoint/2010/main" val="1507499348"/>
+      </p:ext>
+    </p:extLst>
+  </p:cSld>
+  <p:clrMapOvr>
+    <a:masterClrMapping/>
+  </p:clrMapOvr>
+  <mc:AlternateContent xmlns:mc="http://schemas.openxmlformats.org/markup-compatibility/2006" xmlns:p14="http://schemas.microsoft.com/office/powerpoint/2010/main">
+    <mc:Choice Requires="p14">
+      <p:transition spd="med" p14:dur="700">
+        <p:fade/>
+      </p:transition>
+    </mc:Choice>
+    <mc:Fallback xmlns="">
+      <p:transition spd="med">
+        <p:fade/>
+      </p:transition>
+    </mc:Fallback>
+  </mc:AlternateContent>
+</p:sld>
+</file>
+
+<file path=ppt/slides/slide50.xml><?xml version="1.0" encoding="utf-8"?>
 <p:sld xmlns:a="http://schemas.openxmlformats.org/drawingml/2006/main" xmlns:r="http://schemas.openxmlformats.org/officeDocument/2006/relationships" xmlns:p="http://schemas.openxmlformats.org/presentationml/2006/main">
   <p:cSld>
     <p:spTree>
@@ -21845,7 +23336,7 @@
             <a:pPr rtl="0"/>
             <a:fld id="{A3F31473-23EB-4724-8B59-FE6D21D89FA4}" type="slidenum">
               <a:rPr lang="en-US" altLang="ko-KR" noProof="0" smtClean="0"/>
-              <a:t>48</a:t>
+              <a:t>50</a:t>
             </a:fld>
             <a:endParaRPr lang="en-US" altLang="ko-KR" noProof="0" dirty="0"/>
           </a:p>
@@ -22102,7 +23593,7 @@
 </p:sld>
 </file>
 
-<file path=ppt/slides/slide49.xml><?xml version="1.0" encoding="utf-8"?>
+<file path=ppt/slides/slide51.xml><?xml version="1.0" encoding="utf-8"?>
 <p:sld xmlns:a="http://schemas.openxmlformats.org/drawingml/2006/main" xmlns:r="http://schemas.openxmlformats.org/officeDocument/2006/relationships" xmlns:p="http://schemas.openxmlformats.org/presentationml/2006/main">
   <p:cSld>
     <p:spTree>
@@ -22149,7 +23640,7 @@
             <a:pPr rtl="0"/>
             <a:fld id="{A3F31473-23EB-4724-8B59-FE6D21D89FA4}" type="slidenum">
               <a:rPr lang="en-US" altLang="ko-KR" noProof="0" smtClean="0"/>
-              <a:t>49</a:t>
+              <a:t>51</a:t>
             </a:fld>
             <a:endParaRPr lang="en-US" altLang="ko-KR" noProof="0" dirty="0"/>
           </a:p>
@@ -22276,314 +23767,7 @@
 </p:sld>
 </file>
 
-<file path=ppt/slides/slide5.xml><?xml version="1.0" encoding="utf-8"?>
-<p:sld xmlns:a="http://schemas.openxmlformats.org/drawingml/2006/main" xmlns:r="http://schemas.openxmlformats.org/officeDocument/2006/relationships" xmlns:p="http://schemas.openxmlformats.org/presentationml/2006/main">
-  <p:cSld>
-    <p:spTree>
-      <p:nvGrpSpPr>
-        <p:cNvPr id="1" name="">
-          <a:extLst>
-            <a:ext uri="{FF2B5EF4-FFF2-40B4-BE49-F238E27FC236}">
-              <a16:creationId xmlns:a16="http://schemas.microsoft.com/office/drawing/2014/main" id="{8F79E74E-A16C-1718-57CD-D7D3F76F72E3}"/>
-            </a:ext>
-          </a:extLst>
-        </p:cNvPr>
-        <p:cNvGrpSpPr/>
-        <p:nvPr/>
-      </p:nvGrpSpPr>
-      <p:grpSpPr>
-        <a:xfrm>
-          <a:off x="0" y="0"/>
-          <a:ext cx="0" cy="0"/>
-          <a:chOff x="0" y="0"/>
-          <a:chExt cx="0" cy="0"/>
-        </a:xfrm>
-      </p:grpSpPr>
-      <p:sp>
-        <p:nvSpPr>
-          <p:cNvPr id="2" name="슬라이드 번호 개체 틀 1">
-            <a:extLst>
-              <a:ext uri="{FF2B5EF4-FFF2-40B4-BE49-F238E27FC236}">
-                <a16:creationId xmlns:a16="http://schemas.microsoft.com/office/drawing/2014/main" id="{1F6EAA2F-CBE2-932B-4F5D-1CF918997B7A}"/>
-              </a:ext>
-            </a:extLst>
-          </p:cNvPr>
-          <p:cNvSpPr>
-            <a:spLocks noGrp="1"/>
-          </p:cNvSpPr>
-          <p:nvPr>
-            <p:ph type="sldNum" sz="quarter" idx="12"/>
-          </p:nvPr>
-        </p:nvSpPr>
-        <p:spPr/>
-        <p:txBody>
-          <a:bodyPr/>
-          <a:lstStyle/>
-          <a:p>
-            <a:pPr rtl="0"/>
-            <a:fld id="{A3F31473-23EB-4724-8B59-FE6D21D89FA4}" type="slidenum">
-              <a:rPr lang="en-US" altLang="ko-KR" noProof="0" smtClean="0"/>
-              <a:t>5</a:t>
-            </a:fld>
-            <a:endParaRPr lang="en-US" altLang="ko-KR" noProof="0" dirty="0"/>
-          </a:p>
-        </p:txBody>
-      </p:sp>
-      <p:sp>
-        <p:nvSpPr>
-          <p:cNvPr id="4" name="TextBox 3">
-            <a:extLst>
-              <a:ext uri="{FF2B5EF4-FFF2-40B4-BE49-F238E27FC236}">
-                <a16:creationId xmlns:a16="http://schemas.microsoft.com/office/drawing/2014/main" id="{E86563F3-94EF-9491-D44B-803618076A71}"/>
-              </a:ext>
-            </a:extLst>
-          </p:cNvPr>
-          <p:cNvSpPr txBox="1"/>
-          <p:nvPr/>
-        </p:nvSpPr>
-        <p:spPr>
-          <a:xfrm>
-            <a:off x="261764" y="1268760"/>
-            <a:ext cx="11161240" cy="1679370"/>
-          </a:xfrm>
-          <a:prstGeom prst="rect">
-            <a:avLst/>
-          </a:prstGeom>
-          <a:solidFill>
-            <a:schemeClr val="tx1">
-              <a:lumMod val="20000"/>
-              <a:lumOff val="80000"/>
-            </a:schemeClr>
-          </a:solidFill>
-        </p:spPr>
-        <p:txBody>
-          <a:bodyPr wrap="square" rtlCol="0">
-            <a:spAutoFit/>
-          </a:bodyPr>
-          <a:lstStyle/>
-          <a:p>
-            <a:pPr marL="285750" indent="-285750">
-              <a:lnSpc>
-                <a:spcPct val="200000"/>
-              </a:lnSpc>
-              <a:buFont typeface="Wingdings" panose="05000000000000000000" pitchFamily="2" charset="2"/>
-              <a:buChar char="v"/>
-            </a:pPr>
-            <a:r>
-              <a:rPr lang="en-US" altLang="ko-KR" dirty="0">
-                <a:latin typeface="휴먼모음T" panose="02030504000101010101" pitchFamily="18" charset="-127"/>
-                <a:ea typeface="휴먼모음T" panose="02030504000101010101" pitchFamily="18" charset="-127"/>
-              </a:rPr>
-              <a:t>1</a:t>
-            </a:r>
-            <a:r>
-              <a:rPr lang="ko-KR" altLang="en-US" dirty="0">
-                <a:latin typeface="휴먼모음T" panose="02030504000101010101" pitchFamily="18" charset="-127"/>
-                <a:ea typeface="휴먼모음T" panose="02030504000101010101" pitchFamily="18" charset="-127"/>
-              </a:rPr>
-              <a:t>개의 주사위 던지기 게임에서 </a:t>
-            </a:r>
-            <a:r>
-              <a:rPr lang="en-US" altLang="ko-KR" dirty="0">
-                <a:latin typeface="휴먼모음T" panose="02030504000101010101" pitchFamily="18" charset="-127"/>
-                <a:ea typeface="휴먼모음T" panose="02030504000101010101" pitchFamily="18" charset="-127"/>
-              </a:rPr>
-              <a:t>5</a:t>
-            </a:r>
-            <a:r>
-              <a:rPr lang="ko-KR" altLang="en-US" dirty="0">
-                <a:latin typeface="휴먼모음T" panose="02030504000101010101" pitchFamily="18" charset="-127"/>
-                <a:ea typeface="휴먼모음T" panose="02030504000101010101" pitchFamily="18" charset="-127"/>
-              </a:rPr>
-              <a:t>일 확률은</a:t>
-            </a:r>
-            <a:r>
-              <a:rPr lang="en-US" altLang="ko-KR" dirty="0">
-                <a:latin typeface="휴먼모음T" panose="02030504000101010101" pitchFamily="18" charset="-127"/>
-                <a:ea typeface="휴먼모음T" panose="02030504000101010101" pitchFamily="18" charset="-127"/>
-              </a:rPr>
-              <a:t>?</a:t>
-            </a:r>
-          </a:p>
-          <a:p>
-            <a:pPr marL="285750" indent="-285750">
-              <a:lnSpc>
-                <a:spcPct val="200000"/>
-              </a:lnSpc>
-              <a:buFont typeface="Wingdings" panose="05000000000000000000" pitchFamily="2" charset="2"/>
-              <a:buChar char="v"/>
-            </a:pPr>
-            <a:r>
-              <a:rPr lang="en-US" altLang="ko-KR" dirty="0">
-                <a:latin typeface="휴먼모음T" panose="02030504000101010101" pitchFamily="18" charset="-127"/>
-                <a:ea typeface="휴먼모음T" panose="02030504000101010101" pitchFamily="18" charset="-127"/>
-              </a:rPr>
-              <a:t>1</a:t>
-            </a:r>
-            <a:r>
-              <a:rPr lang="ko-KR" altLang="en-US" dirty="0">
-                <a:latin typeface="휴먼모음T" panose="02030504000101010101" pitchFamily="18" charset="-127"/>
-                <a:ea typeface="휴먼모음T" panose="02030504000101010101" pitchFamily="18" charset="-127"/>
-              </a:rPr>
-              <a:t>개의 주사위 던지기 게임에서 </a:t>
-            </a:r>
-            <a:r>
-              <a:rPr lang="en-US" altLang="ko-KR" dirty="0">
-                <a:latin typeface="휴먼모음T" panose="02030504000101010101" pitchFamily="18" charset="-127"/>
-                <a:ea typeface="휴먼모음T" panose="02030504000101010101" pitchFamily="18" charset="-127"/>
-              </a:rPr>
-              <a:t>5</a:t>
-            </a:r>
-            <a:r>
-              <a:rPr lang="ko-KR" altLang="en-US" dirty="0">
-                <a:latin typeface="휴먼모음T" panose="02030504000101010101" pitchFamily="18" charset="-127"/>
-                <a:ea typeface="휴먼모음T" panose="02030504000101010101" pitchFamily="18" charset="-127"/>
-              </a:rPr>
-              <a:t>이하가 될 확률</a:t>
-            </a:r>
-            <a:r>
-              <a:rPr lang="en-US" altLang="ko-KR" dirty="0">
-                <a:latin typeface="휴먼모음T" panose="02030504000101010101" pitchFamily="18" charset="-127"/>
-                <a:ea typeface="휴먼모음T" panose="02030504000101010101" pitchFamily="18" charset="-127"/>
-              </a:rPr>
-              <a:t>?</a:t>
-            </a:r>
-          </a:p>
-          <a:p>
-            <a:pPr marL="285750" indent="-285750">
-              <a:lnSpc>
-                <a:spcPct val="200000"/>
-              </a:lnSpc>
-              <a:buFont typeface="Wingdings" panose="05000000000000000000" pitchFamily="2" charset="2"/>
-              <a:buChar char="v"/>
-            </a:pPr>
-            <a:r>
-              <a:rPr lang="en-US" altLang="ko-KR" dirty="0">
-                <a:latin typeface="휴먼모음T" panose="02030504000101010101" pitchFamily="18" charset="-127"/>
-                <a:ea typeface="휴먼모음T" panose="02030504000101010101" pitchFamily="18" charset="-127"/>
-              </a:rPr>
-              <a:t>2</a:t>
-            </a:r>
-            <a:r>
-              <a:rPr lang="ko-KR" altLang="en-US" dirty="0">
-                <a:latin typeface="휴먼모음T" panose="02030504000101010101" pitchFamily="18" charset="-127"/>
-                <a:ea typeface="휴먼모음T" panose="02030504000101010101" pitchFamily="18" charset="-127"/>
-              </a:rPr>
-              <a:t>개의 주사기 던지기 게임에서 </a:t>
-            </a:r>
-            <a:r>
-              <a:rPr lang="en-US" altLang="ko-KR" dirty="0">
-                <a:latin typeface="휴먼모음T" panose="02030504000101010101" pitchFamily="18" charset="-127"/>
-                <a:ea typeface="휴먼모음T" panose="02030504000101010101" pitchFamily="18" charset="-127"/>
-              </a:rPr>
-              <a:t>2</a:t>
-            </a:r>
-            <a:r>
-              <a:rPr lang="ko-KR" altLang="en-US" dirty="0">
-                <a:latin typeface="휴먼모음T" panose="02030504000101010101" pitchFamily="18" charset="-127"/>
-                <a:ea typeface="휴먼모음T" panose="02030504000101010101" pitchFamily="18" charset="-127"/>
-              </a:rPr>
-              <a:t>개 주사위의 합이 </a:t>
-            </a:r>
-            <a:r>
-              <a:rPr lang="en-US" altLang="ko-KR" dirty="0">
-                <a:latin typeface="휴먼모음T" panose="02030504000101010101" pitchFamily="18" charset="-127"/>
-                <a:ea typeface="휴먼모음T" panose="02030504000101010101" pitchFamily="18" charset="-127"/>
-              </a:rPr>
-              <a:t>8</a:t>
-            </a:r>
-            <a:r>
-              <a:rPr lang="ko-KR" altLang="en-US" dirty="0">
-                <a:latin typeface="휴먼모음T" panose="02030504000101010101" pitchFamily="18" charset="-127"/>
-                <a:ea typeface="휴먼모음T" panose="02030504000101010101" pitchFamily="18" charset="-127"/>
-              </a:rPr>
-              <a:t>일 확률</a:t>
-            </a:r>
-            <a:r>
-              <a:rPr lang="en-US" altLang="ko-KR" dirty="0">
-                <a:latin typeface="휴먼모음T" panose="02030504000101010101" pitchFamily="18" charset="-127"/>
-                <a:ea typeface="휴먼모음T" panose="02030504000101010101" pitchFamily="18" charset="-127"/>
-              </a:rPr>
-              <a:t>? 10</a:t>
-            </a:r>
-            <a:r>
-              <a:rPr lang="ko-KR" altLang="en-US" dirty="0">
-                <a:latin typeface="휴먼모음T" panose="02030504000101010101" pitchFamily="18" charset="-127"/>
-                <a:ea typeface="휴먼모음T" panose="02030504000101010101" pitchFamily="18" charset="-127"/>
-              </a:rPr>
-              <a:t>이상일 확률</a:t>
-            </a:r>
-            <a:r>
-              <a:rPr lang="en-US" altLang="ko-KR" dirty="0">
-                <a:latin typeface="휴먼모음T" panose="02030504000101010101" pitchFamily="18" charset="-127"/>
-                <a:ea typeface="휴먼모음T" panose="02030504000101010101" pitchFamily="18" charset="-127"/>
-              </a:rPr>
-              <a:t>?</a:t>
-            </a:r>
-          </a:p>
-        </p:txBody>
-      </p:sp>
-      <p:sp>
-        <p:nvSpPr>
-          <p:cNvPr id="9" name="TextBox 8">
-            <a:extLst>
-              <a:ext uri="{FF2B5EF4-FFF2-40B4-BE49-F238E27FC236}">
-                <a16:creationId xmlns:a16="http://schemas.microsoft.com/office/drawing/2014/main" id="{F14569A8-2444-3755-61EB-DBEDF50AFA79}"/>
-              </a:ext>
-            </a:extLst>
-          </p:cNvPr>
-          <p:cNvSpPr txBox="1"/>
-          <p:nvPr/>
-        </p:nvSpPr>
-        <p:spPr>
-          <a:xfrm>
-            <a:off x="117748" y="260648"/>
-            <a:ext cx="2592288" cy="584775"/>
-          </a:xfrm>
-          <a:prstGeom prst="rect">
-            <a:avLst/>
-          </a:prstGeom>
-          <a:noFill/>
-        </p:spPr>
-        <p:txBody>
-          <a:bodyPr wrap="square" rtlCol="0">
-            <a:spAutoFit/>
-          </a:bodyPr>
-          <a:lstStyle/>
-          <a:p>
-            <a:r>
-              <a:rPr lang="ko-KR" altLang="en-US" sz="3200" b="1"/>
-              <a:t>문제 풀이</a:t>
-            </a:r>
-          </a:p>
-        </p:txBody>
-      </p:sp>
-    </p:spTree>
-    <p:extLst>
-      <p:ext uri="{BB962C8B-B14F-4D97-AF65-F5344CB8AC3E}">
-        <p14:creationId xmlns:p14="http://schemas.microsoft.com/office/powerpoint/2010/main" val="1507499348"/>
-      </p:ext>
-    </p:extLst>
-  </p:cSld>
-  <p:clrMapOvr>
-    <a:masterClrMapping/>
-  </p:clrMapOvr>
-  <mc:AlternateContent xmlns:mc="http://schemas.openxmlformats.org/markup-compatibility/2006" xmlns:p14="http://schemas.microsoft.com/office/powerpoint/2010/main">
-    <mc:Choice Requires="p14">
-      <p:transition spd="med" p14:dur="700">
-        <p:fade/>
-      </p:transition>
-    </mc:Choice>
-    <mc:Fallback xmlns="">
-      <p:transition spd="med">
-        <p:fade/>
-      </p:transition>
-    </mc:Fallback>
-  </mc:AlternateContent>
-</p:sld>
-</file>
-
-<file path=ppt/slides/slide50.xml><?xml version="1.0" encoding="utf-8"?>
+<file path=ppt/slides/slide52.xml><?xml version="1.0" encoding="utf-8"?>
 <p:sld xmlns:a="http://schemas.openxmlformats.org/drawingml/2006/main" xmlns:r="http://schemas.openxmlformats.org/officeDocument/2006/relationships" xmlns:p="http://schemas.openxmlformats.org/presentationml/2006/main">
   <p:cSld>
     <p:spTree>
@@ -22630,7 +23814,7 @@
             <a:pPr rtl="0"/>
             <a:fld id="{A3F31473-23EB-4724-8B59-FE6D21D89FA4}" type="slidenum">
               <a:rPr lang="en-US" altLang="ko-KR" noProof="0" smtClean="0"/>
-              <a:t>50</a:t>
+              <a:t>52</a:t>
             </a:fld>
             <a:endParaRPr lang="en-US" altLang="ko-KR" noProof="0" dirty="0"/>
           </a:p>
@@ -22854,7 +24038,7 @@
 </p:sld>
 </file>
 
-<file path=ppt/slides/slide51.xml><?xml version="1.0" encoding="utf-8"?>
+<file path=ppt/slides/slide53.xml><?xml version="1.0" encoding="utf-8"?>
 <p:sld xmlns:a="http://schemas.openxmlformats.org/drawingml/2006/main" xmlns:r="http://schemas.openxmlformats.org/officeDocument/2006/relationships" xmlns:p="http://schemas.openxmlformats.org/presentationml/2006/main">
   <p:cSld>
     <p:spTree>
@@ -22901,7 +24085,7 @@
             <a:pPr rtl="0"/>
             <a:fld id="{A3F31473-23EB-4724-8B59-FE6D21D89FA4}" type="slidenum">
               <a:rPr lang="en-US" altLang="ko-KR" noProof="0" smtClean="0"/>
-              <a:t>51</a:t>
+              <a:t>53</a:t>
             </a:fld>
             <a:endParaRPr lang="en-US" altLang="ko-KR" noProof="0" dirty="0"/>
           </a:p>
@@ -23787,6 +24971,833 @@
   <p:cSld>
     <p:spTree>
       <p:nvGrpSpPr>
+        <p:cNvPr id="1" name="">
+          <a:extLst>
+            <a:ext uri="{FF2B5EF4-FFF2-40B4-BE49-F238E27FC236}">
+              <a16:creationId xmlns:a16="http://schemas.microsoft.com/office/drawing/2014/main" id="{5D40B18E-31A8-3601-E7A2-1949493AFB76}"/>
+            </a:ext>
+          </a:extLst>
+        </p:cNvPr>
+        <p:cNvGrpSpPr/>
+        <p:nvPr/>
+      </p:nvGrpSpPr>
+      <p:grpSpPr>
+        <a:xfrm>
+          <a:off x="0" y="0"/>
+          <a:ext cx="0" cy="0"/>
+          <a:chOff x="0" y="0"/>
+          <a:chExt cx="0" cy="0"/>
+        </a:xfrm>
+      </p:grpSpPr>
+      <p:sp>
+        <p:nvSpPr>
+          <p:cNvPr id="2" name="슬라이드 번호 개체 틀 1">
+            <a:extLst>
+              <a:ext uri="{FF2B5EF4-FFF2-40B4-BE49-F238E27FC236}">
+                <a16:creationId xmlns:a16="http://schemas.microsoft.com/office/drawing/2014/main" id="{74014C26-A6A8-6228-9BB1-92D3E7081A67}"/>
+              </a:ext>
+            </a:extLst>
+          </p:cNvPr>
+          <p:cNvSpPr>
+            <a:spLocks noGrp="1"/>
+          </p:cNvSpPr>
+          <p:nvPr>
+            <p:ph type="sldNum" sz="quarter" idx="12"/>
+          </p:nvPr>
+        </p:nvSpPr>
+        <p:spPr/>
+        <p:txBody>
+          <a:bodyPr/>
+          <a:lstStyle/>
+          <a:p>
+            <a:pPr rtl="0"/>
+            <a:fld id="{A3F31473-23EB-4724-8B59-FE6D21D89FA4}" type="slidenum">
+              <a:rPr lang="en-US" altLang="ko-KR" noProof="0" smtClean="0"/>
+              <a:t>6</a:t>
+            </a:fld>
+            <a:endParaRPr lang="en-US" altLang="ko-KR" noProof="0" dirty="0"/>
+          </a:p>
+        </p:txBody>
+      </p:sp>
+      <p:sp>
+        <p:nvSpPr>
+          <p:cNvPr id="4" name="TextBox 3">
+            <a:extLst>
+              <a:ext uri="{FF2B5EF4-FFF2-40B4-BE49-F238E27FC236}">
+                <a16:creationId xmlns:a16="http://schemas.microsoft.com/office/drawing/2014/main" id="{06504074-B23E-0A42-B4B0-593C8F030385}"/>
+              </a:ext>
+            </a:extLst>
+          </p:cNvPr>
+          <p:cNvSpPr txBox="1"/>
+          <p:nvPr/>
+        </p:nvSpPr>
+        <p:spPr>
+          <a:xfrm>
+            <a:off x="333772" y="1124744"/>
+            <a:ext cx="11161240" cy="2752741"/>
+          </a:xfrm>
+          <a:prstGeom prst="rect">
+            <a:avLst/>
+          </a:prstGeom>
+          <a:solidFill>
+            <a:schemeClr val="tx1">
+              <a:lumMod val="20000"/>
+              <a:lumOff val="80000"/>
+            </a:schemeClr>
+          </a:solidFill>
+        </p:spPr>
+        <p:txBody>
+          <a:bodyPr wrap="square" rtlCol="0">
+            <a:spAutoFit/>
+          </a:bodyPr>
+          <a:lstStyle/>
+          <a:p>
+            <a:pPr marL="285750" indent="-285750">
+              <a:lnSpc>
+                <a:spcPct val="250000"/>
+              </a:lnSpc>
+              <a:buFont typeface="Wingdings" panose="05000000000000000000" pitchFamily="2" charset="2"/>
+              <a:buChar char="v"/>
+            </a:pPr>
+            <a:r>
+              <a:rPr lang="en-US" altLang="ko-KR" dirty="0">
+                <a:latin typeface="휴먼모음T" panose="02030504000101010101" pitchFamily="18" charset="-127"/>
+                <a:ea typeface="휴먼모음T" panose="02030504000101010101" pitchFamily="18" charset="-127"/>
+              </a:rPr>
+              <a:t>1</a:t>
+            </a:r>
+            <a:r>
+              <a:rPr lang="ko-KR" altLang="en-US" dirty="0">
+                <a:latin typeface="휴먼모음T" panose="02030504000101010101" pitchFamily="18" charset="-127"/>
+                <a:ea typeface="휴먼모음T" panose="02030504000101010101" pitchFamily="18" charset="-127"/>
+              </a:rPr>
+              <a:t>억의 상금이 걸린 게임이 있다</a:t>
+            </a:r>
+            <a:r>
+              <a:rPr lang="en-US" altLang="ko-KR" dirty="0">
+                <a:latin typeface="휴먼모음T" panose="02030504000101010101" pitchFamily="18" charset="-127"/>
+                <a:ea typeface="휴먼모음T" panose="02030504000101010101" pitchFamily="18" charset="-127"/>
+              </a:rPr>
+              <a:t>.</a:t>
+            </a:r>
+          </a:p>
+          <a:p>
+            <a:pPr marL="285750" indent="-285750">
+              <a:lnSpc>
+                <a:spcPct val="250000"/>
+              </a:lnSpc>
+              <a:buFont typeface="Wingdings" panose="05000000000000000000" pitchFamily="2" charset="2"/>
+              <a:buChar char="v"/>
+            </a:pPr>
+            <a:r>
+              <a:rPr lang="en-US" altLang="ko-KR" dirty="0">
+                <a:latin typeface="휴먼모음T" panose="02030504000101010101" pitchFamily="18" charset="-127"/>
+                <a:ea typeface="휴먼모음T" panose="02030504000101010101" pitchFamily="18" charset="-127"/>
+              </a:rPr>
+              <a:t>A, B </a:t>
+            </a:r>
+            <a:r>
+              <a:rPr lang="ko-KR" altLang="en-US" dirty="0">
+                <a:latin typeface="휴먼모음T" panose="02030504000101010101" pitchFamily="18" charset="-127"/>
+                <a:ea typeface="휴먼모음T" panose="02030504000101010101" pitchFamily="18" charset="-127"/>
+              </a:rPr>
+              <a:t>두 사람이 라운드마다 각각 </a:t>
+            </a:r>
+            <a:r>
+              <a:rPr lang="en-US" altLang="ko-KR" dirty="0">
+                <a:latin typeface="휴먼모음T" panose="02030504000101010101" pitchFamily="18" charset="-127"/>
+                <a:ea typeface="휴먼모음T" panose="02030504000101010101" pitchFamily="18" charset="-127"/>
+              </a:rPr>
+              <a:t>50% </a:t>
+            </a:r>
+            <a:r>
+              <a:rPr lang="ko-KR" altLang="en-US" dirty="0">
+                <a:latin typeface="휴먼모음T" panose="02030504000101010101" pitchFamily="18" charset="-127"/>
+                <a:ea typeface="휴먼모음T" panose="02030504000101010101" pitchFamily="18" charset="-127"/>
+              </a:rPr>
+              <a:t>확률로 승패 결과가 있는 경우</a:t>
+            </a:r>
+            <a:r>
+              <a:rPr lang="en-US" altLang="ko-KR" dirty="0">
+                <a:latin typeface="휴먼모음T" panose="02030504000101010101" pitchFamily="18" charset="-127"/>
+                <a:ea typeface="휴먼모음T" panose="02030504000101010101" pitchFamily="18" charset="-127"/>
+              </a:rPr>
+              <a:t>, </a:t>
+            </a:r>
+            <a:r>
+              <a:rPr lang="ko-KR" altLang="en-US" dirty="0">
+                <a:latin typeface="휴먼모음T" panose="02030504000101010101" pitchFamily="18" charset="-127"/>
+                <a:ea typeface="휴먼모음T" panose="02030504000101010101" pitchFamily="18" charset="-127"/>
+              </a:rPr>
+              <a:t>누구나 </a:t>
+            </a:r>
+            <a:r>
+              <a:rPr lang="en-US" altLang="ko-KR" dirty="0">
+                <a:latin typeface="휴먼모음T" panose="02030504000101010101" pitchFamily="18" charset="-127"/>
+                <a:ea typeface="휴먼모음T" panose="02030504000101010101" pitchFamily="18" charset="-127"/>
+              </a:rPr>
+              <a:t>6</a:t>
+            </a:r>
+            <a:r>
+              <a:rPr lang="ko-KR" altLang="en-US" dirty="0">
+                <a:latin typeface="휴먼모음T" panose="02030504000101010101" pitchFamily="18" charset="-127"/>
+                <a:ea typeface="휴먼모음T" panose="02030504000101010101" pitchFamily="18" charset="-127"/>
+              </a:rPr>
+              <a:t>번을 이기면 게임이 끝나게 된다</a:t>
+            </a:r>
+            <a:r>
+              <a:rPr lang="en-US" altLang="ko-KR" dirty="0">
+                <a:latin typeface="휴먼모음T" panose="02030504000101010101" pitchFamily="18" charset="-127"/>
+                <a:ea typeface="휴먼모음T" panose="02030504000101010101" pitchFamily="18" charset="-127"/>
+              </a:rPr>
+              <a:t>.</a:t>
+            </a:r>
+          </a:p>
+          <a:p>
+            <a:pPr marL="285750" indent="-285750">
+              <a:lnSpc>
+                <a:spcPct val="250000"/>
+              </a:lnSpc>
+              <a:buFont typeface="Wingdings" panose="05000000000000000000" pitchFamily="2" charset="2"/>
+              <a:buChar char="v"/>
+            </a:pPr>
+            <a:r>
+              <a:rPr lang="ko-KR" altLang="en-US" dirty="0">
+                <a:latin typeface="휴먼모음T" panose="02030504000101010101" pitchFamily="18" charset="-127"/>
+                <a:ea typeface="휴먼모음T" panose="02030504000101010101" pitchFamily="18" charset="-127"/>
+              </a:rPr>
+              <a:t>현재까지 </a:t>
+            </a:r>
+            <a:r>
+              <a:rPr lang="en-US" altLang="ko-KR" dirty="0">
+                <a:latin typeface="휴먼모음T" panose="02030504000101010101" pitchFamily="18" charset="-127"/>
+                <a:ea typeface="휴먼모음T" panose="02030504000101010101" pitchFamily="18" charset="-127"/>
+              </a:rPr>
+              <a:t>8</a:t>
+            </a:r>
+            <a:r>
+              <a:rPr lang="ko-KR" altLang="en-US" dirty="0">
+                <a:latin typeface="휴먼모음T" panose="02030504000101010101" pitchFamily="18" charset="-127"/>
+                <a:ea typeface="휴먼모음T" panose="02030504000101010101" pitchFamily="18" charset="-127"/>
+              </a:rPr>
+              <a:t>번의 라운드에서 </a:t>
+            </a:r>
+            <a:r>
+              <a:rPr lang="en-US" altLang="ko-KR" dirty="0">
+                <a:latin typeface="휴먼모음T" panose="02030504000101010101" pitchFamily="18" charset="-127"/>
+                <a:ea typeface="휴먼모음T" panose="02030504000101010101" pitchFamily="18" charset="-127"/>
+              </a:rPr>
+              <a:t>A</a:t>
+            </a:r>
+            <a:r>
+              <a:rPr lang="ko-KR" altLang="en-US" dirty="0">
+                <a:latin typeface="휴먼모음T" panose="02030504000101010101" pitchFamily="18" charset="-127"/>
+                <a:ea typeface="휴먼모음T" panose="02030504000101010101" pitchFamily="18" charset="-127"/>
+              </a:rPr>
+              <a:t>는 </a:t>
+            </a:r>
+            <a:r>
+              <a:rPr lang="en-US" altLang="ko-KR" dirty="0">
+                <a:latin typeface="휴먼모음T" panose="02030504000101010101" pitchFamily="18" charset="-127"/>
+                <a:ea typeface="휴먼모음T" panose="02030504000101010101" pitchFamily="18" charset="-127"/>
+              </a:rPr>
+              <a:t>5</a:t>
+            </a:r>
+            <a:r>
+              <a:rPr lang="ko-KR" altLang="en-US" dirty="0">
+                <a:latin typeface="휴먼모음T" panose="02030504000101010101" pitchFamily="18" charset="-127"/>
+                <a:ea typeface="휴먼모음T" panose="02030504000101010101" pitchFamily="18" charset="-127"/>
+              </a:rPr>
+              <a:t>번</a:t>
+            </a:r>
+            <a:r>
+              <a:rPr lang="en-US" altLang="ko-KR" dirty="0">
+                <a:latin typeface="휴먼모음T" panose="02030504000101010101" pitchFamily="18" charset="-127"/>
+                <a:ea typeface="휴먼모음T" panose="02030504000101010101" pitchFamily="18" charset="-127"/>
+              </a:rPr>
+              <a:t>, B</a:t>
+            </a:r>
+            <a:r>
+              <a:rPr lang="ko-KR" altLang="en-US" dirty="0">
+                <a:latin typeface="휴먼모음T" panose="02030504000101010101" pitchFamily="18" charset="-127"/>
+                <a:ea typeface="휴먼모음T" panose="02030504000101010101" pitchFamily="18" charset="-127"/>
+              </a:rPr>
+              <a:t>는 </a:t>
+            </a:r>
+            <a:r>
+              <a:rPr lang="en-US" altLang="ko-KR" dirty="0">
+                <a:latin typeface="휴먼모음T" panose="02030504000101010101" pitchFamily="18" charset="-127"/>
+                <a:ea typeface="휴먼모음T" panose="02030504000101010101" pitchFamily="18" charset="-127"/>
+              </a:rPr>
+              <a:t>3</a:t>
+            </a:r>
+            <a:r>
+              <a:rPr lang="ko-KR" altLang="en-US" dirty="0">
+                <a:latin typeface="휴먼모음T" panose="02030504000101010101" pitchFamily="18" charset="-127"/>
+                <a:ea typeface="휴먼모음T" panose="02030504000101010101" pitchFamily="18" charset="-127"/>
+              </a:rPr>
+              <a:t>번 이겼다</a:t>
+            </a:r>
+            <a:endParaRPr lang="en-US" altLang="ko-KR" dirty="0">
+              <a:latin typeface="휴먼모음T" panose="02030504000101010101" pitchFamily="18" charset="-127"/>
+              <a:ea typeface="휴먼모음T" panose="02030504000101010101" pitchFamily="18" charset="-127"/>
+            </a:endParaRPr>
+          </a:p>
+          <a:p>
+            <a:pPr marL="285750" indent="-285750">
+              <a:lnSpc>
+                <a:spcPct val="250000"/>
+              </a:lnSpc>
+              <a:buFont typeface="Wingdings" panose="05000000000000000000" pitchFamily="2" charset="2"/>
+              <a:buChar char="v"/>
+            </a:pPr>
+            <a:r>
+              <a:rPr lang="en-US" altLang="ko-KR" dirty="0">
+                <a:latin typeface="휴먼모음T" panose="02030504000101010101" pitchFamily="18" charset="-127"/>
+                <a:ea typeface="휴먼모음T" panose="02030504000101010101" pitchFamily="18" charset="-127"/>
+              </a:rPr>
+              <a:t>1</a:t>
+            </a:r>
+            <a:r>
+              <a:rPr lang="ko-KR" altLang="en-US" dirty="0">
+                <a:latin typeface="휴먼모음T" panose="02030504000101010101" pitchFamily="18" charset="-127"/>
+                <a:ea typeface="휴먼모음T" panose="02030504000101010101" pitchFamily="18" charset="-127"/>
+              </a:rPr>
+              <a:t>억 상금을 각각 공평하게 나누려면 얼마씩 배분하여야 하는가</a:t>
+            </a:r>
+            <a:r>
+              <a:rPr lang="en-US" altLang="ko-KR" dirty="0">
+                <a:latin typeface="휴먼모음T" panose="02030504000101010101" pitchFamily="18" charset="-127"/>
+                <a:ea typeface="휴먼모음T" panose="02030504000101010101" pitchFamily="18" charset="-127"/>
+              </a:rPr>
+              <a:t>? A,B</a:t>
+            </a:r>
+            <a:r>
+              <a:rPr lang="ko-KR" altLang="en-US" dirty="0">
+                <a:latin typeface="휴먼모음T" panose="02030504000101010101" pitchFamily="18" charset="-127"/>
+                <a:ea typeface="휴먼모음T" panose="02030504000101010101" pitchFamily="18" charset="-127"/>
+              </a:rPr>
+              <a:t>가 각각 이길 확률</a:t>
+            </a:r>
+            <a:r>
+              <a:rPr lang="en-US" altLang="ko-KR" dirty="0">
+                <a:latin typeface="휴먼모음T" panose="02030504000101010101" pitchFamily="18" charset="-127"/>
+                <a:ea typeface="휴먼모음T" panose="02030504000101010101" pitchFamily="18" charset="-127"/>
+              </a:rPr>
+              <a:t>?</a:t>
+            </a:r>
+            <a:r>
+              <a:rPr lang="ko-KR" altLang="en-US" dirty="0">
+                <a:latin typeface="휴먼모음T" panose="02030504000101010101" pitchFamily="18" charset="-127"/>
+                <a:ea typeface="휴먼모음T" panose="02030504000101010101" pitchFamily="18" charset="-127"/>
+              </a:rPr>
+              <a:t> </a:t>
+            </a:r>
+            <a:endParaRPr lang="en-US" altLang="ko-KR" dirty="0">
+              <a:latin typeface="휴먼모음T" panose="02030504000101010101" pitchFamily="18" charset="-127"/>
+              <a:ea typeface="휴먼모음T" panose="02030504000101010101" pitchFamily="18" charset="-127"/>
+            </a:endParaRPr>
+          </a:p>
+        </p:txBody>
+      </p:sp>
+      <p:sp>
+        <p:nvSpPr>
+          <p:cNvPr id="9" name="TextBox 8">
+            <a:extLst>
+              <a:ext uri="{FF2B5EF4-FFF2-40B4-BE49-F238E27FC236}">
+                <a16:creationId xmlns:a16="http://schemas.microsoft.com/office/drawing/2014/main" id="{3A35FE29-FE08-A648-1595-0410244C467F}"/>
+              </a:ext>
+            </a:extLst>
+          </p:cNvPr>
+          <p:cNvSpPr txBox="1"/>
+          <p:nvPr/>
+        </p:nvSpPr>
+        <p:spPr>
+          <a:xfrm>
+            <a:off x="117748" y="260648"/>
+            <a:ext cx="2592288" cy="584775"/>
+          </a:xfrm>
+          <a:prstGeom prst="rect">
+            <a:avLst/>
+          </a:prstGeom>
+          <a:noFill/>
+        </p:spPr>
+        <p:txBody>
+          <a:bodyPr wrap="square" rtlCol="0">
+            <a:spAutoFit/>
+          </a:bodyPr>
+          <a:lstStyle/>
+          <a:p>
+            <a:r>
+              <a:rPr lang="ko-KR" altLang="en-US" sz="3200" b="1"/>
+              <a:t>문제 풀이</a:t>
+            </a:r>
+          </a:p>
+        </p:txBody>
+      </p:sp>
+    </p:spTree>
+    <p:extLst>
+      <p:ext uri="{BB962C8B-B14F-4D97-AF65-F5344CB8AC3E}">
+        <p14:creationId xmlns:p14="http://schemas.microsoft.com/office/powerpoint/2010/main" val="1345622042"/>
+      </p:ext>
+    </p:extLst>
+  </p:cSld>
+  <p:clrMapOvr>
+    <a:masterClrMapping/>
+  </p:clrMapOvr>
+  <mc:AlternateContent xmlns:mc="http://schemas.openxmlformats.org/markup-compatibility/2006" xmlns:p14="http://schemas.microsoft.com/office/powerpoint/2010/main">
+    <mc:Choice Requires="p14">
+      <p:transition spd="med" p14:dur="700">
+        <p:fade/>
+      </p:transition>
+    </mc:Choice>
+    <mc:Fallback xmlns="">
+      <p:transition spd="med">
+        <p:fade/>
+      </p:transition>
+    </mc:Fallback>
+  </mc:AlternateContent>
+</p:sld>
+</file>
+
+<file path=ppt/slides/slide7.xml><?xml version="1.0" encoding="utf-8"?>
+<p:sld xmlns:a="http://schemas.openxmlformats.org/drawingml/2006/main" xmlns:r="http://schemas.openxmlformats.org/officeDocument/2006/relationships" xmlns:p="http://schemas.openxmlformats.org/presentationml/2006/main">
+  <p:cSld>
+    <p:spTree>
+      <p:nvGrpSpPr>
+        <p:cNvPr id="1" name="">
+          <a:extLst>
+            <a:ext uri="{FF2B5EF4-FFF2-40B4-BE49-F238E27FC236}">
+              <a16:creationId xmlns:a16="http://schemas.microsoft.com/office/drawing/2014/main" id="{E4EBF62E-E81B-9926-EE39-212E26B1D623}"/>
+            </a:ext>
+          </a:extLst>
+        </p:cNvPr>
+        <p:cNvGrpSpPr/>
+        <p:nvPr/>
+      </p:nvGrpSpPr>
+      <p:grpSpPr>
+        <a:xfrm>
+          <a:off x="0" y="0"/>
+          <a:ext cx="0" cy="0"/>
+          <a:chOff x="0" y="0"/>
+          <a:chExt cx="0" cy="0"/>
+        </a:xfrm>
+      </p:grpSpPr>
+      <p:sp>
+        <p:nvSpPr>
+          <p:cNvPr id="2" name="슬라이드 번호 개체 틀 1">
+            <a:extLst>
+              <a:ext uri="{FF2B5EF4-FFF2-40B4-BE49-F238E27FC236}">
+                <a16:creationId xmlns:a16="http://schemas.microsoft.com/office/drawing/2014/main" id="{C6C83D71-A537-5230-595B-3FB17D2090A6}"/>
+              </a:ext>
+            </a:extLst>
+          </p:cNvPr>
+          <p:cNvSpPr>
+            <a:spLocks noGrp="1"/>
+          </p:cNvSpPr>
+          <p:nvPr>
+            <p:ph type="sldNum" sz="quarter" idx="12"/>
+          </p:nvPr>
+        </p:nvSpPr>
+        <p:spPr/>
+        <p:txBody>
+          <a:bodyPr/>
+          <a:lstStyle/>
+          <a:p>
+            <a:pPr rtl="0"/>
+            <a:fld id="{A3F31473-23EB-4724-8B59-FE6D21D89FA4}" type="slidenum">
+              <a:rPr lang="en-US" altLang="ko-KR" noProof="0" smtClean="0"/>
+              <a:t>7</a:t>
+            </a:fld>
+            <a:endParaRPr lang="en-US" altLang="ko-KR" noProof="0" dirty="0"/>
+          </a:p>
+        </p:txBody>
+      </p:sp>
+      <p:sp>
+        <p:nvSpPr>
+          <p:cNvPr id="4" name="TextBox 3">
+            <a:extLst>
+              <a:ext uri="{FF2B5EF4-FFF2-40B4-BE49-F238E27FC236}">
+                <a16:creationId xmlns:a16="http://schemas.microsoft.com/office/drawing/2014/main" id="{57CC3755-3917-B5AD-AC51-02A04E516082}"/>
+              </a:ext>
+            </a:extLst>
+          </p:cNvPr>
+          <p:cNvSpPr txBox="1"/>
+          <p:nvPr/>
+        </p:nvSpPr>
+        <p:spPr>
+          <a:xfrm>
+            <a:off x="333772" y="1124744"/>
+            <a:ext cx="5544616" cy="3380477"/>
+          </a:xfrm>
+          <a:prstGeom prst="rect">
+            <a:avLst/>
+          </a:prstGeom>
+          <a:solidFill>
+            <a:schemeClr val="tx1">
+              <a:lumMod val="20000"/>
+              <a:lumOff val="80000"/>
+            </a:schemeClr>
+          </a:solidFill>
+        </p:spPr>
+        <p:txBody>
+          <a:bodyPr wrap="square" rtlCol="0">
+            <a:spAutoFit/>
+          </a:bodyPr>
+          <a:lstStyle/>
+          <a:p>
+            <a:pPr marL="285750" indent="-285750">
+              <a:lnSpc>
+                <a:spcPct val="250000"/>
+              </a:lnSpc>
+              <a:buFont typeface="Wingdings" panose="05000000000000000000" pitchFamily="2" charset="2"/>
+              <a:buChar char="v"/>
+            </a:pPr>
+            <a:r>
+              <a:rPr lang="en-US" altLang="ko-KR" sz="1600" dirty="0">
+                <a:latin typeface="휴먼모음T" panose="02030504000101010101" pitchFamily="18" charset="-127"/>
+                <a:ea typeface="휴먼모음T" panose="02030504000101010101" pitchFamily="18" charset="-127"/>
+              </a:rPr>
+              <a:t>Pascal(1623~1662)</a:t>
+            </a:r>
+          </a:p>
+          <a:p>
+            <a:pPr marL="742950" lvl="1" indent="-285750">
+              <a:lnSpc>
+                <a:spcPct val="250000"/>
+              </a:lnSpc>
+              <a:buFont typeface="Wingdings" panose="05000000000000000000" pitchFamily="2" charset="2"/>
+              <a:buChar char="v"/>
+            </a:pPr>
+            <a:r>
+              <a:rPr lang="en-US" altLang="ko-KR" sz="2000" dirty="0">
+                <a:latin typeface="휴먼모음T" panose="02030504000101010101" pitchFamily="18" charset="-127"/>
+                <a:ea typeface="휴먼모음T" panose="02030504000101010101" pitchFamily="18" charset="-127"/>
+              </a:rPr>
+              <a:t>½ + ½*½ + ½*½*½ </a:t>
+            </a:r>
+          </a:p>
+          <a:p>
+            <a:pPr marL="742950" lvl="1" indent="-285750">
+              <a:lnSpc>
+                <a:spcPct val="250000"/>
+              </a:lnSpc>
+              <a:buFont typeface="Wingdings" panose="05000000000000000000" pitchFamily="2" charset="2"/>
+              <a:buChar char="v"/>
+            </a:pPr>
+            <a:r>
+              <a:rPr lang="en-US" altLang="ko-KR" sz="2000" dirty="0">
+                <a:latin typeface="휴먼모음T" panose="02030504000101010101" pitchFamily="18" charset="-127"/>
+                <a:ea typeface="휴먼모음T" panose="02030504000101010101" pitchFamily="18" charset="-127"/>
+              </a:rPr>
+              <a:t>½*½*½</a:t>
+            </a:r>
+            <a:endParaRPr lang="en-US" altLang="ko-KR" sz="1600" dirty="0">
+              <a:latin typeface="휴먼모음T" panose="02030504000101010101" pitchFamily="18" charset="-127"/>
+              <a:ea typeface="휴먼모음T" panose="02030504000101010101" pitchFamily="18" charset="-127"/>
+            </a:endParaRPr>
+          </a:p>
+          <a:p>
+            <a:pPr marL="285750" indent="-285750">
+              <a:lnSpc>
+                <a:spcPct val="250000"/>
+              </a:lnSpc>
+              <a:buFont typeface="Wingdings" panose="05000000000000000000" pitchFamily="2" charset="2"/>
+              <a:buChar char="v"/>
+            </a:pPr>
+            <a:r>
+              <a:rPr lang="en-US" altLang="ko-KR" sz="1600" dirty="0">
+                <a:latin typeface="휴먼모음T" panose="02030504000101010101" pitchFamily="18" charset="-127"/>
+                <a:ea typeface="휴먼모음T" panose="02030504000101010101" pitchFamily="18" charset="-127"/>
+              </a:rPr>
+              <a:t>Ferma(1607~1665)</a:t>
+            </a:r>
+          </a:p>
+          <a:p>
+            <a:pPr marL="742950" lvl="1" indent="-285750">
+              <a:lnSpc>
+                <a:spcPct val="250000"/>
+              </a:lnSpc>
+              <a:buFont typeface="Wingdings" panose="05000000000000000000" pitchFamily="2" charset="2"/>
+              <a:buChar char="v"/>
+            </a:pPr>
+            <a:r>
+              <a:rPr lang="en-US" altLang="ko-KR" sz="1600" dirty="0">
+                <a:latin typeface="휴먼모음T" panose="02030504000101010101" pitchFamily="18" charset="-127"/>
+                <a:ea typeface="휴먼모음T" panose="02030504000101010101" pitchFamily="18" charset="-127"/>
+              </a:rPr>
+              <a:t>AAA,</a:t>
+            </a:r>
+            <a:r>
+              <a:rPr lang="ko-KR" altLang="en-US" sz="1600" dirty="0">
+                <a:latin typeface="휴먼모음T" panose="02030504000101010101" pitchFamily="18" charset="-127"/>
+                <a:ea typeface="휴먼모음T" panose="02030504000101010101" pitchFamily="18" charset="-127"/>
+              </a:rPr>
+              <a:t> </a:t>
+            </a:r>
+            <a:r>
+              <a:rPr lang="en-US" altLang="ko-KR" sz="1600" dirty="0">
+                <a:latin typeface="휴먼모음T" panose="02030504000101010101" pitchFamily="18" charset="-127"/>
+                <a:ea typeface="휴먼모음T" panose="02030504000101010101" pitchFamily="18" charset="-127"/>
+              </a:rPr>
+              <a:t>AAB, ABA, ABB, BAA, BAB, BBA, BBB  </a:t>
+            </a:r>
+          </a:p>
+        </p:txBody>
+      </p:sp>
+      <p:sp>
+        <p:nvSpPr>
+          <p:cNvPr id="9" name="TextBox 8">
+            <a:extLst>
+              <a:ext uri="{FF2B5EF4-FFF2-40B4-BE49-F238E27FC236}">
+                <a16:creationId xmlns:a16="http://schemas.microsoft.com/office/drawing/2014/main" id="{BC06BB00-60F3-FF70-19B2-65D76BA29A36}"/>
+              </a:ext>
+            </a:extLst>
+          </p:cNvPr>
+          <p:cNvSpPr txBox="1"/>
+          <p:nvPr/>
+        </p:nvSpPr>
+        <p:spPr>
+          <a:xfrm>
+            <a:off x="117748" y="260648"/>
+            <a:ext cx="2592288" cy="584775"/>
+          </a:xfrm>
+          <a:prstGeom prst="rect">
+            <a:avLst/>
+          </a:prstGeom>
+          <a:noFill/>
+        </p:spPr>
+        <p:txBody>
+          <a:bodyPr wrap="square" rtlCol="0">
+            <a:spAutoFit/>
+          </a:bodyPr>
+          <a:lstStyle/>
+          <a:p>
+            <a:r>
+              <a:rPr lang="ko-KR" altLang="en-US" sz="3200" b="1"/>
+              <a:t>문제 풀이</a:t>
+            </a:r>
+          </a:p>
+        </p:txBody>
+      </p:sp>
+      <p:pic>
+        <p:nvPicPr>
+          <p:cNvPr id="7" name="그림 6">
+            <a:extLst>
+              <a:ext uri="{FF2B5EF4-FFF2-40B4-BE49-F238E27FC236}">
+                <a16:creationId xmlns:a16="http://schemas.microsoft.com/office/drawing/2014/main" id="{F0F23058-6F96-959E-2647-25B488635157}"/>
+              </a:ext>
+            </a:extLst>
+          </p:cNvPr>
+          <p:cNvPicPr>
+            <a:picLocks noChangeAspect="1"/>
+          </p:cNvPicPr>
+          <p:nvPr/>
+        </p:nvPicPr>
+        <p:blipFill>
+          <a:blip r:embed="rId3"/>
+          <a:stretch>
+            <a:fillRect/>
+          </a:stretch>
+        </p:blipFill>
+        <p:spPr>
+          <a:xfrm>
+            <a:off x="6526459" y="1132710"/>
+            <a:ext cx="5475517" cy="4744562"/>
+          </a:xfrm>
+          <a:prstGeom prst="rect">
+            <a:avLst/>
+          </a:prstGeom>
+        </p:spPr>
+      </p:pic>
+      <p:pic>
+        <p:nvPicPr>
+          <p:cNvPr id="1026" name="Picture 2">
+            <a:extLst>
+              <a:ext uri="{FF2B5EF4-FFF2-40B4-BE49-F238E27FC236}">
+                <a16:creationId xmlns:a16="http://schemas.microsoft.com/office/drawing/2014/main" id="{8BE35038-E87C-73A9-D28B-6C2AF2FC9D7E}"/>
+              </a:ext>
+            </a:extLst>
+          </p:cNvPr>
+          <p:cNvPicPr>
+            <a:picLocks noChangeAspect="1" noChangeArrowheads="1"/>
+          </p:cNvPicPr>
+          <p:nvPr/>
+        </p:nvPicPr>
+        <p:blipFill>
+          <a:blip r:embed="rId4">
+            <a:extLst>
+              <a:ext uri="{28A0092B-C50C-407E-A947-70E740481C1C}">
+                <a14:useLocalDpi xmlns:a14="http://schemas.microsoft.com/office/drawing/2010/main" val="0"/>
+              </a:ext>
+            </a:extLst>
+          </a:blip>
+          <a:srcRect/>
+          <a:stretch>
+            <a:fillRect/>
+          </a:stretch>
+        </p:blipFill>
+        <p:spPr bwMode="auto">
+          <a:xfrm>
+            <a:off x="10449770" y="1196752"/>
+            <a:ext cx="1552206" cy="1850230"/>
+          </a:xfrm>
+          <a:prstGeom prst="rect">
+            <a:avLst/>
+          </a:prstGeom>
+          <a:noFill/>
+          <a:extLst>
+            <a:ext uri="{909E8E84-426E-40DD-AFC4-6F175D3DCCD1}">
+              <a14:hiddenFill xmlns:a14="http://schemas.microsoft.com/office/drawing/2010/main">
+                <a:solidFill>
+                  <a:srgbClr val="FFFFFF"/>
+                </a:solidFill>
+              </a14:hiddenFill>
+            </a:ext>
+          </a:extLst>
+        </p:spPr>
+      </p:pic>
+      <p:sp>
+        <p:nvSpPr>
+          <p:cNvPr id="3" name="AutoShape 2">
+            <a:extLst>
+              <a:ext uri="{FF2B5EF4-FFF2-40B4-BE49-F238E27FC236}">
+                <a16:creationId xmlns:a16="http://schemas.microsoft.com/office/drawing/2014/main" id="{58578B27-4E49-C70D-D8A8-F65A4BE5ED44}"/>
+              </a:ext>
+            </a:extLst>
+          </p:cNvPr>
+          <p:cNvSpPr>
+            <a:spLocks noChangeAspect="1" noChangeArrowheads="1"/>
+          </p:cNvSpPr>
+          <p:nvPr/>
+        </p:nvSpPr>
+        <p:spPr bwMode="auto">
+          <a:xfrm>
+            <a:off x="5942013" y="3276600"/>
+            <a:ext cx="304800" cy="304800"/>
+          </a:xfrm>
+          <a:prstGeom prst="rect">
+            <a:avLst/>
+          </a:prstGeom>
+          <a:noFill/>
+          <a:extLst>
+            <a:ext uri="{909E8E84-426E-40DD-AFC4-6F175D3DCCD1}">
+              <a14:hiddenFill xmlns:a14="http://schemas.microsoft.com/office/drawing/2010/main">
+                <a:solidFill>
+                  <a:srgbClr val="FFFFFF"/>
+                </a:solidFill>
+              </a14:hiddenFill>
+            </a:ext>
+          </a:extLst>
+        </p:spPr>
+        <p:txBody>
+          <a:bodyPr vert="horz" wrap="square" lIns="91440" tIns="45720" rIns="91440" bIns="45720" numCol="1" anchor="t" anchorCtr="0" compatLnSpc="1">
+            <a:prstTxWarp prst="textNoShape">
+              <a:avLst/>
+            </a:prstTxWarp>
+          </a:bodyPr>
+          <a:lstStyle/>
+          <a:p>
+            <a:endParaRPr lang="ko-KR" altLang="en-US"/>
+          </a:p>
+        </p:txBody>
+      </p:sp>
+      <p:pic>
+        <p:nvPicPr>
+          <p:cNvPr id="6" name="그림 5">
+            <a:extLst>
+              <a:ext uri="{FF2B5EF4-FFF2-40B4-BE49-F238E27FC236}">
+                <a16:creationId xmlns:a16="http://schemas.microsoft.com/office/drawing/2014/main" id="{88032C4B-915A-9F44-4FA5-B998EDC18D54}"/>
+              </a:ext>
+            </a:extLst>
+          </p:cNvPr>
+          <p:cNvPicPr>
+            <a:picLocks noChangeAspect="1"/>
+          </p:cNvPicPr>
+          <p:nvPr/>
+        </p:nvPicPr>
+        <p:blipFill>
+          <a:blip r:embed="rId5"/>
+          <a:stretch>
+            <a:fillRect/>
+          </a:stretch>
+        </p:blipFill>
+        <p:spPr>
+          <a:xfrm>
+            <a:off x="3286100" y="4505221"/>
+            <a:ext cx="1193308" cy="1512168"/>
+          </a:xfrm>
+          <a:prstGeom prst="rect">
+            <a:avLst/>
+          </a:prstGeom>
+        </p:spPr>
+      </p:pic>
+      <p:sp>
+        <p:nvSpPr>
+          <p:cNvPr id="10" name="TextBox 9">
+            <a:extLst>
+              <a:ext uri="{FF2B5EF4-FFF2-40B4-BE49-F238E27FC236}">
+                <a16:creationId xmlns:a16="http://schemas.microsoft.com/office/drawing/2014/main" id="{1B78E3EC-D771-756F-093A-AB7D963427E9}"/>
+              </a:ext>
+            </a:extLst>
+          </p:cNvPr>
+          <p:cNvSpPr txBox="1"/>
+          <p:nvPr/>
+        </p:nvSpPr>
+        <p:spPr>
+          <a:xfrm>
+            <a:off x="6526459" y="5958610"/>
+            <a:ext cx="5155404" cy="369332"/>
+          </a:xfrm>
+          <a:prstGeom prst="rect">
+            <a:avLst/>
+          </a:prstGeom>
+          <a:noFill/>
+        </p:spPr>
+        <p:txBody>
+          <a:bodyPr wrap="square">
+            <a:spAutoFit/>
+          </a:bodyPr>
+          <a:lstStyle/>
+          <a:p>
+            <a:r>
+              <a:rPr lang="en-US" altLang="ko-KR" b="1" dirty="0"/>
+              <a:t>Pascal Decision Tree</a:t>
+            </a:r>
+            <a:endParaRPr lang="ko-KR" altLang="en-US" b="1" dirty="0"/>
+          </a:p>
+        </p:txBody>
+      </p:sp>
+    </p:spTree>
+    <p:extLst>
+      <p:ext uri="{BB962C8B-B14F-4D97-AF65-F5344CB8AC3E}">
+        <p14:creationId xmlns:p14="http://schemas.microsoft.com/office/powerpoint/2010/main" val="2588958484"/>
+      </p:ext>
+    </p:extLst>
+  </p:cSld>
+  <p:clrMapOvr>
+    <a:masterClrMapping/>
+  </p:clrMapOvr>
+  <mc:AlternateContent xmlns:mc="http://schemas.openxmlformats.org/markup-compatibility/2006" xmlns:p14="http://schemas.microsoft.com/office/powerpoint/2010/main">
+    <mc:Choice Requires="p14">
+      <p:transition spd="med" p14:dur="700">
+        <p:fade/>
+      </p:transition>
+    </mc:Choice>
+    <mc:Fallback xmlns="">
+      <p:transition spd="med">
+        <p:fade/>
+      </p:transition>
+    </mc:Fallback>
+  </mc:AlternateContent>
+</p:sld>
+</file>
+
+<file path=ppt/slides/slide8.xml><?xml version="1.0" encoding="utf-8"?>
+<p:sld xmlns:a="http://schemas.openxmlformats.org/drawingml/2006/main" xmlns:r="http://schemas.openxmlformats.org/officeDocument/2006/relationships" xmlns:p="http://schemas.openxmlformats.org/presentationml/2006/main">
+  <p:cSld>
+    <p:spTree>
+      <p:nvGrpSpPr>
         <p:cNvPr id="1" name=""/>
         <p:cNvGrpSpPr/>
         <p:nvPr/>
@@ -23817,7 +25828,7 @@
             <a:pPr rtl="0"/>
             <a:fld id="{A3F31473-23EB-4724-8B59-FE6D21D89FA4}" type="slidenum">
               <a:rPr lang="en-US" altLang="ko-KR" noProof="0" smtClean="0"/>
-              <a:t>6</a:t>
+              <a:t>8</a:t>
             </a:fld>
             <a:endParaRPr lang="en-US" altLang="ko-KR" noProof="0" dirty="0"/>
           </a:p>
@@ -24865,7 +26876,7 @@
 </p:sld>
 </file>
 
-<file path=ppt/slides/slide7.xml><?xml version="1.0" encoding="utf-8"?>
+<file path=ppt/slides/slide9.xml><?xml version="1.0" encoding="utf-8"?>
 <p:sld xmlns:a="http://schemas.openxmlformats.org/drawingml/2006/main" xmlns:r="http://schemas.openxmlformats.org/officeDocument/2006/relationships" xmlns:p="http://schemas.openxmlformats.org/presentationml/2006/main">
   <p:cSld>
     <p:spTree>
@@ -24900,7 +26911,7 @@
             <a:pPr rtl="0"/>
             <a:fld id="{A3F31473-23EB-4724-8B59-FE6D21D89FA4}" type="slidenum">
               <a:rPr lang="en-US" altLang="ko-KR" noProof="0" smtClean="0"/>
-              <a:t>7</a:t>
+              <a:t>9</a:t>
             </a:fld>
             <a:endParaRPr lang="en-US" altLang="ko-KR" noProof="0" dirty="0"/>
           </a:p>
@@ -25723,921 +27734,6 @@
     <p:extLst>
       <p:ext uri="{BB962C8B-B14F-4D97-AF65-F5344CB8AC3E}">
         <p14:creationId xmlns:p14="http://schemas.microsoft.com/office/powerpoint/2010/main" val="3979171020"/>
-      </p:ext>
-    </p:extLst>
-  </p:cSld>
-  <p:clrMapOvr>
-    <a:masterClrMapping/>
-  </p:clrMapOvr>
-  <mc:AlternateContent xmlns:mc="http://schemas.openxmlformats.org/markup-compatibility/2006" xmlns:p14="http://schemas.microsoft.com/office/powerpoint/2010/main">
-    <mc:Choice Requires="p14">
-      <p:transition spd="med" p14:dur="700">
-        <p:fade/>
-      </p:transition>
-    </mc:Choice>
-    <mc:Fallback xmlns="">
-      <p:transition spd="med">
-        <p:fade/>
-      </p:transition>
-    </mc:Fallback>
-  </mc:AlternateContent>
-</p:sld>
-</file>
-
-<file path=ppt/slides/slide8.xml><?xml version="1.0" encoding="utf-8"?>
-<p:sld xmlns:a="http://schemas.openxmlformats.org/drawingml/2006/main" xmlns:r="http://schemas.openxmlformats.org/officeDocument/2006/relationships" xmlns:p="http://schemas.openxmlformats.org/presentationml/2006/main">
-  <p:cSld>
-    <p:spTree>
-      <p:nvGrpSpPr>
-        <p:cNvPr id="1" name=""/>
-        <p:cNvGrpSpPr/>
-        <p:nvPr/>
-      </p:nvGrpSpPr>
-      <p:grpSpPr>
-        <a:xfrm>
-          <a:off x="0" y="0"/>
-          <a:ext cx="0" cy="0"/>
-          <a:chOff x="0" y="0"/>
-          <a:chExt cx="0" cy="0"/>
-        </a:xfrm>
-      </p:grpSpPr>
-      <p:sp>
-        <p:nvSpPr>
-          <p:cNvPr id="8" name="슬라이드 번호 개체 틀 7"/>
-          <p:cNvSpPr>
-            <a:spLocks noGrp="1"/>
-          </p:cNvSpPr>
-          <p:nvPr>
-            <p:ph type="sldNum" sz="quarter" idx="12"/>
-          </p:nvPr>
-        </p:nvSpPr>
-        <p:spPr/>
-        <p:txBody>
-          <a:bodyPr/>
-          <a:lstStyle/>
-          <a:p>
-            <a:pPr rtl="0"/>
-            <a:fld id="{A3F31473-23EB-4724-8B59-FE6D21D89FA4}" type="slidenum">
-              <a:rPr lang="en-US" altLang="ko-KR" noProof="0" smtClean="0"/>
-              <a:t>8</a:t>
-            </a:fld>
-            <a:endParaRPr lang="en-US" altLang="ko-KR" noProof="0" dirty="0"/>
-          </a:p>
-        </p:txBody>
-      </p:sp>
-      <p:sp>
-        <p:nvSpPr>
-          <p:cNvPr id="2" name="직사각형 1"/>
-          <p:cNvSpPr/>
-          <p:nvPr/>
-        </p:nvSpPr>
-        <p:spPr>
-          <a:xfrm>
-            <a:off x="769168" y="1843950"/>
-            <a:ext cx="11017224" cy="3170099"/>
-          </a:xfrm>
-          <a:prstGeom prst="rect">
-            <a:avLst/>
-          </a:prstGeom>
-        </p:spPr>
-        <p:txBody>
-          <a:bodyPr wrap="square">
-            <a:spAutoFit/>
-          </a:bodyPr>
-          <a:lstStyle/>
-          <a:p>
-            <a:pPr marL="457200" indent="-457200">
-              <a:lnSpc>
-                <a:spcPct val="200000"/>
-              </a:lnSpc>
-              <a:buFont typeface="Wingdings" panose="05000000000000000000" pitchFamily="2" charset="2"/>
-              <a:buChar char="§"/>
-            </a:pPr>
-            <a:r>
-              <a:rPr lang="ko-KR" altLang="en-US" sz="2000" b="1" dirty="0">
-                <a:solidFill>
-                  <a:srgbClr val="313131"/>
-                </a:solidFill>
-                <a:latin typeface="PT Sans"/>
-              </a:rPr>
-              <a:t>확률변수</a:t>
-            </a:r>
-            <a:r>
-              <a:rPr lang="en-US" altLang="ko-KR" sz="2000" b="1" dirty="0">
-                <a:solidFill>
-                  <a:srgbClr val="313131"/>
-                </a:solidFill>
-                <a:latin typeface="PT Sans"/>
-              </a:rPr>
-              <a:t>(Random variable)</a:t>
-            </a:r>
-            <a:r>
-              <a:rPr lang="ko-KR" altLang="en-US" sz="2000" b="1" dirty="0">
-                <a:solidFill>
-                  <a:srgbClr val="313131"/>
-                </a:solidFill>
-                <a:latin typeface="PT Sans"/>
-              </a:rPr>
-              <a:t>의</a:t>
-            </a:r>
-            <a:r>
-              <a:rPr lang="en-US" altLang="ko-KR" sz="2000" b="1" dirty="0">
-                <a:solidFill>
-                  <a:srgbClr val="313131"/>
-                </a:solidFill>
-                <a:latin typeface="PT Sans"/>
-              </a:rPr>
-              <a:t> </a:t>
-            </a:r>
-            <a:r>
-              <a:rPr lang="ko-KR" altLang="en-US" sz="2000" b="1" dirty="0">
-                <a:solidFill>
-                  <a:srgbClr val="313131"/>
-                </a:solidFill>
-                <a:latin typeface="PT Sans"/>
-              </a:rPr>
-              <a:t>분포를 알 수 있다면 모든 것을 알 수 있다</a:t>
-            </a:r>
-            <a:r>
-              <a:rPr lang="en-US" altLang="ko-KR" sz="2000" b="1" dirty="0">
-                <a:solidFill>
-                  <a:srgbClr val="313131"/>
-                </a:solidFill>
-                <a:latin typeface="PT Sans"/>
-              </a:rPr>
-              <a:t>.</a:t>
-            </a:r>
-          </a:p>
-          <a:p>
-            <a:pPr marL="457200" indent="-457200">
-              <a:lnSpc>
-                <a:spcPct val="200000"/>
-              </a:lnSpc>
-              <a:buFont typeface="Wingdings" panose="05000000000000000000" pitchFamily="2" charset="2"/>
-              <a:buChar char="§"/>
-            </a:pPr>
-            <a:r>
-              <a:rPr lang="ko-KR" altLang="en-US" sz="2000" b="1" dirty="0">
-                <a:solidFill>
-                  <a:srgbClr val="313131"/>
-                </a:solidFill>
-                <a:latin typeface="PT Sans"/>
-              </a:rPr>
-              <a:t>우리는 모집단의 확률변수</a:t>
-            </a:r>
-            <a:r>
-              <a:rPr lang="en-US" altLang="ko-KR" sz="2000" b="1" dirty="0">
-                <a:solidFill>
-                  <a:srgbClr val="313131"/>
-                </a:solidFill>
-                <a:latin typeface="PT Sans"/>
-              </a:rPr>
-              <a:t>(</a:t>
-            </a:r>
-            <a:r>
-              <a:rPr lang="ko-KR" altLang="en-US" sz="2000" b="1" dirty="0">
-                <a:solidFill>
-                  <a:srgbClr val="313131"/>
-                </a:solidFill>
-                <a:latin typeface="PT Sans"/>
-              </a:rPr>
-              <a:t>키</a:t>
-            </a:r>
-            <a:r>
-              <a:rPr lang="en-US" altLang="ko-KR" sz="2000" b="1" dirty="0">
-                <a:solidFill>
-                  <a:srgbClr val="313131"/>
-                </a:solidFill>
-                <a:latin typeface="PT Sans"/>
-              </a:rPr>
-              <a:t>, </a:t>
-            </a:r>
-            <a:r>
-              <a:rPr lang="ko-KR" altLang="en-US" sz="2000" b="1" dirty="0">
-                <a:solidFill>
-                  <a:srgbClr val="313131"/>
-                </a:solidFill>
-                <a:latin typeface="PT Sans"/>
-              </a:rPr>
-              <a:t>나이</a:t>
-            </a:r>
-            <a:r>
-              <a:rPr lang="en-US" altLang="ko-KR" sz="2000" b="1" dirty="0">
-                <a:solidFill>
-                  <a:srgbClr val="313131"/>
-                </a:solidFill>
-                <a:latin typeface="PT Sans"/>
-              </a:rPr>
-              <a:t>, </a:t>
-            </a:r>
-            <a:r>
-              <a:rPr lang="ko-KR" altLang="en-US" sz="2000" b="1" dirty="0">
-                <a:solidFill>
-                  <a:srgbClr val="313131"/>
-                </a:solidFill>
-                <a:latin typeface="PT Sans"/>
-              </a:rPr>
-              <a:t>소득</a:t>
-            </a:r>
-            <a:r>
-              <a:rPr lang="en-US" altLang="ko-KR" sz="2000" b="1" dirty="0">
-                <a:solidFill>
-                  <a:srgbClr val="313131"/>
-                </a:solidFill>
-                <a:latin typeface="PT Sans"/>
-              </a:rPr>
-              <a:t>, </a:t>
-            </a:r>
-            <a:r>
-              <a:rPr lang="ko-KR" altLang="en-US" sz="2000" b="1" dirty="0">
-                <a:solidFill>
-                  <a:srgbClr val="313131"/>
-                </a:solidFill>
-                <a:latin typeface="PT Sans"/>
-              </a:rPr>
-              <a:t>등등의 </a:t>
-            </a:r>
-            <a:r>
-              <a:rPr lang="en-US" altLang="ko-KR" sz="2000" b="1" dirty="0">
-                <a:solidFill>
-                  <a:srgbClr val="313131"/>
-                </a:solidFill>
-                <a:latin typeface="PT Sans"/>
-              </a:rPr>
-              <a:t>parameter)</a:t>
-            </a:r>
-            <a:r>
-              <a:rPr lang="ko-KR" altLang="en-US" sz="2000" b="1" dirty="0">
-                <a:solidFill>
-                  <a:srgbClr val="313131"/>
-                </a:solidFill>
-                <a:latin typeface="PT Sans"/>
-              </a:rPr>
-              <a:t>의 분포를 전수조사를 하지 않으면 알 수가 없기 때문에 </a:t>
-            </a:r>
-            <a:r>
-              <a:rPr lang="en-US" altLang="ko-KR" sz="2000" b="1" dirty="0">
-                <a:solidFill>
-                  <a:srgbClr val="313131"/>
-                </a:solidFill>
-                <a:latin typeface="PT Sans"/>
-              </a:rPr>
-              <a:t>Sampling</a:t>
-            </a:r>
-            <a:r>
-              <a:rPr lang="ko-KR" altLang="en-US" sz="2000" b="1" dirty="0">
-                <a:solidFill>
-                  <a:srgbClr val="313131"/>
-                </a:solidFill>
-                <a:latin typeface="PT Sans"/>
-              </a:rPr>
-              <a:t>을 통해</a:t>
-            </a:r>
-            <a:r>
-              <a:rPr lang="en-US" altLang="ko-KR" sz="2000" b="1" dirty="0">
-                <a:solidFill>
-                  <a:srgbClr val="313131"/>
-                </a:solidFill>
-                <a:latin typeface="PT Sans"/>
-              </a:rPr>
-              <a:t>,</a:t>
-            </a:r>
-          </a:p>
-          <a:p>
-            <a:pPr marL="457200" indent="-457200">
-              <a:lnSpc>
-                <a:spcPct val="200000"/>
-              </a:lnSpc>
-              <a:buFont typeface="Wingdings" panose="05000000000000000000" pitchFamily="2" charset="2"/>
-              <a:buChar char="§"/>
-            </a:pPr>
-            <a:r>
-              <a:rPr lang="en-US" altLang="ko-KR" sz="2000" b="1" dirty="0">
-                <a:solidFill>
-                  <a:srgbClr val="313131"/>
-                </a:solidFill>
-                <a:latin typeface="PT Sans"/>
-              </a:rPr>
-              <a:t>Sample</a:t>
-            </a:r>
-            <a:r>
-              <a:rPr lang="ko-KR" altLang="en-US" sz="2000" b="1" dirty="0">
-                <a:solidFill>
-                  <a:srgbClr val="313131"/>
-                </a:solidFill>
-                <a:latin typeface="PT Sans"/>
-              </a:rPr>
-              <a:t>의 확률변수의 분포를 알고 모집단의 확률변수를 추정</a:t>
-            </a:r>
-            <a:r>
-              <a:rPr lang="en-US" altLang="ko-KR" sz="2000" b="1" dirty="0">
-                <a:solidFill>
-                  <a:srgbClr val="313131"/>
-                </a:solidFill>
-                <a:latin typeface="PT Sans"/>
-              </a:rPr>
-              <a:t>(Inference)</a:t>
-            </a:r>
-            <a:r>
-              <a:rPr lang="ko-KR" altLang="en-US" sz="2000" b="1" dirty="0">
-                <a:solidFill>
-                  <a:srgbClr val="313131"/>
-                </a:solidFill>
-                <a:latin typeface="PT Sans"/>
-              </a:rPr>
-              <a:t>할 뿐이다</a:t>
-            </a:r>
-            <a:r>
-              <a:rPr lang="en-US" altLang="ko-KR" sz="2000" b="1" dirty="0">
-                <a:solidFill>
-                  <a:srgbClr val="313131"/>
-                </a:solidFill>
-                <a:latin typeface="PT Sans"/>
-              </a:rPr>
-              <a:t>.</a:t>
-            </a:r>
-          </a:p>
-          <a:p>
-            <a:pPr marL="457200" indent="-457200">
-              <a:lnSpc>
-                <a:spcPct val="200000"/>
-              </a:lnSpc>
-              <a:buFont typeface="Wingdings" panose="05000000000000000000" pitchFamily="2" charset="2"/>
-              <a:buChar char="§"/>
-            </a:pPr>
-            <a:r>
-              <a:rPr lang="ko-KR" altLang="en-US" sz="2000" b="1" dirty="0">
-                <a:solidFill>
-                  <a:srgbClr val="313131"/>
-                </a:solidFill>
-                <a:latin typeface="PT Sans"/>
-              </a:rPr>
-              <a:t>따라서 확률 분포</a:t>
-            </a:r>
-            <a:r>
-              <a:rPr lang="en-US" altLang="ko-KR" sz="2000" b="1" dirty="0">
-                <a:solidFill>
-                  <a:srgbClr val="313131"/>
-                </a:solidFill>
-                <a:latin typeface="PT Sans"/>
-              </a:rPr>
-              <a:t>(Probability Distribution of random variable)</a:t>
-            </a:r>
-            <a:r>
-              <a:rPr lang="ko-KR" altLang="en-US" sz="2000" b="1" dirty="0">
-                <a:solidFill>
-                  <a:srgbClr val="313131"/>
-                </a:solidFill>
-                <a:latin typeface="PT Sans"/>
-              </a:rPr>
-              <a:t>의 종류</a:t>
-            </a:r>
-            <a:r>
-              <a:rPr lang="en-US" altLang="ko-KR" sz="2000" b="1" dirty="0">
-                <a:solidFill>
-                  <a:srgbClr val="313131"/>
-                </a:solidFill>
-                <a:latin typeface="PT Sans"/>
-              </a:rPr>
-              <a:t>?</a:t>
-            </a:r>
-          </a:p>
-        </p:txBody>
-      </p:sp>
-      <p:sp>
-        <p:nvSpPr>
-          <p:cNvPr id="3" name="직사각형 2">
-            <a:extLst>
-              <a:ext uri="{FF2B5EF4-FFF2-40B4-BE49-F238E27FC236}">
-                <a16:creationId xmlns:a16="http://schemas.microsoft.com/office/drawing/2014/main" id="{DD557313-FC0D-740B-56FB-FCDB49BCBF61}"/>
-              </a:ext>
-            </a:extLst>
-          </p:cNvPr>
-          <p:cNvSpPr/>
-          <p:nvPr/>
-        </p:nvSpPr>
-        <p:spPr>
-          <a:xfrm>
-            <a:off x="765820" y="764704"/>
-            <a:ext cx="3985386" cy="523220"/>
-          </a:xfrm>
-          <a:prstGeom prst="rect">
-            <a:avLst/>
-          </a:prstGeom>
-        </p:spPr>
-        <p:txBody>
-          <a:bodyPr wrap="none">
-            <a:spAutoFit/>
-          </a:bodyPr>
-          <a:lstStyle/>
-          <a:p>
-            <a:r>
-              <a:rPr lang="ko-KR" altLang="en-US" sz="2800" b="1" dirty="0">
-                <a:solidFill>
-                  <a:srgbClr val="313131"/>
-                </a:solidFill>
-                <a:latin typeface="PT Sans"/>
-              </a:rPr>
-              <a:t>확률변수를</a:t>
-            </a:r>
-            <a:r>
-              <a:rPr lang="en-US" altLang="ko-KR" sz="2800" b="1" dirty="0">
-                <a:solidFill>
-                  <a:srgbClr val="313131"/>
-                </a:solidFill>
-                <a:latin typeface="PT Sans"/>
-              </a:rPr>
-              <a:t> </a:t>
-            </a:r>
-            <a:r>
-              <a:rPr lang="ko-KR" altLang="en-US" sz="2800" b="1" dirty="0">
-                <a:solidFill>
-                  <a:srgbClr val="313131"/>
-                </a:solidFill>
-                <a:latin typeface="PT Sans"/>
-              </a:rPr>
-              <a:t>모두</a:t>
-            </a:r>
-            <a:r>
-              <a:rPr lang="en-US" altLang="ko-KR" sz="2800" b="1" dirty="0">
-                <a:solidFill>
-                  <a:srgbClr val="313131"/>
-                </a:solidFill>
-                <a:latin typeface="PT Sans"/>
-              </a:rPr>
-              <a:t> </a:t>
-            </a:r>
-            <a:r>
-              <a:rPr lang="ko-KR" altLang="en-US" sz="2800" b="1" dirty="0">
-                <a:solidFill>
-                  <a:srgbClr val="313131"/>
-                </a:solidFill>
-                <a:latin typeface="PT Sans"/>
-              </a:rPr>
-              <a:t>알려면</a:t>
-            </a:r>
-            <a:endParaRPr lang="en-US" altLang="ko-KR" sz="2800" b="1" dirty="0">
-              <a:solidFill>
-                <a:srgbClr val="313131"/>
-              </a:solidFill>
-              <a:latin typeface="PT Sans"/>
-            </a:endParaRPr>
-          </a:p>
-        </p:txBody>
-      </p:sp>
-    </p:spTree>
-    <p:extLst>
-      <p:ext uri="{BB962C8B-B14F-4D97-AF65-F5344CB8AC3E}">
-        <p14:creationId xmlns:p14="http://schemas.microsoft.com/office/powerpoint/2010/main" val="2486728205"/>
-      </p:ext>
-    </p:extLst>
-  </p:cSld>
-  <p:clrMapOvr>
-    <a:masterClrMapping/>
-  </p:clrMapOvr>
-  <mc:AlternateContent xmlns:mc="http://schemas.openxmlformats.org/markup-compatibility/2006" xmlns:p14="http://schemas.microsoft.com/office/powerpoint/2010/main">
-    <mc:Choice Requires="p14">
-      <p:transition spd="med" p14:dur="700">
-        <p:fade/>
-      </p:transition>
-    </mc:Choice>
-    <mc:Fallback xmlns="">
-      <p:transition spd="med">
-        <p:fade/>
-      </p:transition>
-    </mc:Fallback>
-  </mc:AlternateContent>
-</p:sld>
-</file>
-
-<file path=ppt/slides/slide9.xml><?xml version="1.0" encoding="utf-8"?>
-<p:sld xmlns:a="http://schemas.openxmlformats.org/drawingml/2006/main" xmlns:r="http://schemas.openxmlformats.org/officeDocument/2006/relationships" xmlns:p="http://schemas.openxmlformats.org/presentationml/2006/main">
-  <p:cSld>
-    <p:spTree>
-      <p:nvGrpSpPr>
-        <p:cNvPr id="1" name="">
-          <a:extLst>
-            <a:ext uri="{FF2B5EF4-FFF2-40B4-BE49-F238E27FC236}">
-              <a16:creationId xmlns:a16="http://schemas.microsoft.com/office/drawing/2014/main" id="{CC21F737-4D84-A348-6FE1-9D35471CA013}"/>
-            </a:ext>
-          </a:extLst>
-        </p:cNvPr>
-        <p:cNvGrpSpPr/>
-        <p:nvPr/>
-      </p:nvGrpSpPr>
-      <p:grpSpPr>
-        <a:xfrm>
-          <a:off x="0" y="0"/>
-          <a:ext cx="0" cy="0"/>
-          <a:chOff x="0" y="0"/>
-          <a:chExt cx="0" cy="0"/>
-        </a:xfrm>
-      </p:grpSpPr>
-      <p:sp>
-        <p:nvSpPr>
-          <p:cNvPr id="3" name="직사각형 2">
-            <a:extLst>
-              <a:ext uri="{FF2B5EF4-FFF2-40B4-BE49-F238E27FC236}">
-                <a16:creationId xmlns:a16="http://schemas.microsoft.com/office/drawing/2014/main" id="{ABF54B44-AEF4-5A91-28A0-B7F04F80476A}"/>
-              </a:ext>
-            </a:extLst>
-          </p:cNvPr>
-          <p:cNvSpPr/>
-          <p:nvPr/>
-        </p:nvSpPr>
-        <p:spPr>
-          <a:xfrm>
-            <a:off x="598421" y="2204864"/>
-            <a:ext cx="8136904" cy="674850"/>
-          </a:xfrm>
-          <a:prstGeom prst="rect">
-            <a:avLst/>
-          </a:prstGeom>
-          <a:solidFill>
-            <a:schemeClr val="bg1">
-              <a:lumMod val="85000"/>
-            </a:schemeClr>
-          </a:solidFill>
-          <a:ln>
-            <a:noFill/>
-          </a:ln>
-        </p:spPr>
-        <p:style>
-          <a:lnRef idx="2">
-            <a:schemeClr val="accent1">
-              <a:shade val="15000"/>
-            </a:schemeClr>
-          </a:lnRef>
-          <a:fillRef idx="1">
-            <a:schemeClr val="accent1"/>
-          </a:fillRef>
-          <a:effectRef idx="0">
-            <a:schemeClr val="accent1"/>
-          </a:effectRef>
-          <a:fontRef idx="minor">
-            <a:schemeClr val="lt1"/>
-          </a:fontRef>
-        </p:style>
-        <p:txBody>
-          <a:bodyPr rtlCol="0" anchor="ctr"/>
-          <a:lstStyle/>
-          <a:p>
-            <a:pPr algn="ctr"/>
-            <a:endParaRPr lang="ko-KR" altLang="en-US" dirty="0"/>
-          </a:p>
-        </p:txBody>
-      </p:sp>
-      <p:sp>
-        <p:nvSpPr>
-          <p:cNvPr id="8" name="슬라이드 번호 개체 틀 7">
-            <a:extLst>
-              <a:ext uri="{FF2B5EF4-FFF2-40B4-BE49-F238E27FC236}">
-                <a16:creationId xmlns:a16="http://schemas.microsoft.com/office/drawing/2014/main" id="{5419A402-6026-8725-BF04-5D3962A63264}"/>
-              </a:ext>
-            </a:extLst>
-          </p:cNvPr>
-          <p:cNvSpPr>
-            <a:spLocks noGrp="1"/>
-          </p:cNvSpPr>
-          <p:nvPr>
-            <p:ph type="sldNum" sz="quarter" idx="12"/>
-          </p:nvPr>
-        </p:nvSpPr>
-        <p:spPr/>
-        <p:txBody>
-          <a:bodyPr/>
-          <a:lstStyle/>
-          <a:p>
-            <a:pPr rtl="0"/>
-            <a:fld id="{A3F31473-23EB-4724-8B59-FE6D21D89FA4}" type="slidenum">
-              <a:rPr lang="en-US" altLang="ko-KR" noProof="0" smtClean="0"/>
-              <a:t>9</a:t>
-            </a:fld>
-            <a:endParaRPr lang="en-US" altLang="ko-KR" noProof="0" dirty="0"/>
-          </a:p>
-        </p:txBody>
-      </p:sp>
-      <p:sp>
-        <p:nvSpPr>
-          <p:cNvPr id="2" name="TextBox 1">
-            <a:extLst>
-              <a:ext uri="{FF2B5EF4-FFF2-40B4-BE49-F238E27FC236}">
-                <a16:creationId xmlns:a16="http://schemas.microsoft.com/office/drawing/2014/main" id="{566A1178-92B0-2653-5C2D-55676F0F0DEC}"/>
-              </a:ext>
-            </a:extLst>
-          </p:cNvPr>
-          <p:cNvSpPr txBox="1"/>
-          <p:nvPr/>
-        </p:nvSpPr>
-        <p:spPr>
-          <a:xfrm>
-            <a:off x="1629916" y="147612"/>
-            <a:ext cx="8928992" cy="5891998"/>
-          </a:xfrm>
-          <a:prstGeom prst="rect">
-            <a:avLst/>
-          </a:prstGeom>
-          <a:noFill/>
-        </p:spPr>
-        <p:txBody>
-          <a:bodyPr wrap="square" rtlCol="0">
-            <a:spAutoFit/>
-          </a:bodyPr>
-          <a:lstStyle/>
-          <a:p>
-            <a:pPr>
-              <a:lnSpc>
-                <a:spcPct val="200000"/>
-              </a:lnSpc>
-              <a:spcBef>
-                <a:spcPts val="600"/>
-              </a:spcBef>
-            </a:pPr>
-            <a:r>
-              <a:rPr lang="ko-KR" altLang="en-US" sz="4000" b="1" dirty="0">
-                <a:latin typeface="한컴 말랑말랑 Bold" panose="020F0803000000000000" pitchFamily="50" charset="-127"/>
-                <a:ea typeface="한컴 말랑말랑 Bold" panose="020F0803000000000000" pitchFamily="50" charset="-127"/>
-              </a:rPr>
-              <a:t>목차</a:t>
-            </a:r>
-            <a:endParaRPr lang="en-US" altLang="ko-KR" sz="4000" b="1" dirty="0">
-              <a:latin typeface="한컴 말랑말랑 Bold" panose="020F0803000000000000" pitchFamily="50" charset="-127"/>
-              <a:ea typeface="한컴 말랑말랑 Bold" panose="020F0803000000000000" pitchFamily="50" charset="-127"/>
-            </a:endParaRPr>
-          </a:p>
-          <a:p>
-            <a:pPr marL="514350" indent="-514350">
-              <a:lnSpc>
-                <a:spcPct val="200000"/>
-              </a:lnSpc>
-              <a:spcBef>
-                <a:spcPts val="600"/>
-              </a:spcBef>
-              <a:buAutoNum type="arabicPeriod"/>
-            </a:pPr>
-            <a:r>
-              <a:rPr lang="ko-KR" altLang="en-US" sz="2000" b="1" dirty="0">
-                <a:latin typeface="한컴 말랑말랑 Bold" panose="020F0803000000000000" pitchFamily="50" charset="-127"/>
-                <a:ea typeface="한컴 말랑말랑 Bold" panose="020F0803000000000000" pitchFamily="50" charset="-127"/>
-              </a:rPr>
-              <a:t>확률 변수</a:t>
-            </a:r>
-            <a:r>
-              <a:rPr lang="en-US" altLang="ko-KR" sz="2000" b="1" dirty="0">
-                <a:latin typeface="한컴 말랑말랑 Bold" panose="020F0803000000000000" pitchFamily="50" charset="-127"/>
-                <a:ea typeface="한컴 말랑말랑 Bold" panose="020F0803000000000000" pitchFamily="50" charset="-127"/>
-              </a:rPr>
-              <a:t>(Random Variable)</a:t>
-            </a:r>
-          </a:p>
-          <a:p>
-            <a:pPr marL="514350" indent="-514350">
-              <a:lnSpc>
-                <a:spcPct val="200000"/>
-              </a:lnSpc>
-              <a:spcBef>
-                <a:spcPts val="600"/>
-              </a:spcBef>
-              <a:buAutoNum type="arabicPeriod"/>
-            </a:pPr>
-            <a:r>
-              <a:rPr lang="ko-KR" altLang="en-US" b="1" dirty="0">
-                <a:latin typeface="한컴 말랑말랑 Bold" panose="020F0803000000000000" pitchFamily="50" charset="-127"/>
-                <a:ea typeface="한컴 말랑말랑 Bold" panose="020F0803000000000000" pitchFamily="50" charset="-127"/>
-              </a:rPr>
-              <a:t>이산형</a:t>
-            </a:r>
-            <a:r>
-              <a:rPr lang="en-US" altLang="ko-KR" b="1" dirty="0">
-                <a:latin typeface="한컴 말랑말랑 Bold" panose="020F0803000000000000" pitchFamily="50" charset="-127"/>
-                <a:ea typeface="한컴 말랑말랑 Bold" panose="020F0803000000000000" pitchFamily="50" charset="-127"/>
-              </a:rPr>
-              <a:t>(Discrete)</a:t>
-            </a:r>
-            <a:r>
-              <a:rPr lang="ko-KR" altLang="en-US" b="1" dirty="0">
-                <a:latin typeface="한컴 말랑말랑 Bold" panose="020F0803000000000000" pitchFamily="50" charset="-127"/>
-                <a:ea typeface="한컴 말랑말랑 Bold" panose="020F0803000000000000" pitchFamily="50" charset="-127"/>
-              </a:rPr>
-              <a:t>과 연속형</a:t>
-            </a:r>
-            <a:r>
-              <a:rPr lang="en-US" altLang="ko-KR" b="1" dirty="0">
-                <a:latin typeface="한컴 말랑말랑 Bold" panose="020F0803000000000000" pitchFamily="50" charset="-127"/>
-                <a:ea typeface="한컴 말랑말랑 Bold" panose="020F0803000000000000" pitchFamily="50" charset="-127"/>
-              </a:rPr>
-              <a:t>(Continuous) </a:t>
-            </a:r>
-            <a:r>
-              <a:rPr lang="ko-KR" altLang="en-US" b="1" dirty="0">
-                <a:latin typeface="한컴 말랑말랑 Bold" panose="020F0803000000000000" pitchFamily="50" charset="-127"/>
-                <a:ea typeface="한컴 말랑말랑 Bold" panose="020F0803000000000000" pitchFamily="50" charset="-127"/>
-              </a:rPr>
-              <a:t>확률변수</a:t>
-            </a:r>
-            <a:endParaRPr lang="en-US" altLang="ko-KR" b="1" dirty="0">
-              <a:latin typeface="한컴 말랑말랑 Bold" panose="020F0803000000000000" pitchFamily="50" charset="-127"/>
-              <a:ea typeface="한컴 말랑말랑 Bold" panose="020F0803000000000000" pitchFamily="50" charset="-127"/>
-            </a:endParaRPr>
-          </a:p>
-          <a:p>
-            <a:pPr marL="971550" lvl="1" indent="-514350">
-              <a:lnSpc>
-                <a:spcPct val="200000"/>
-              </a:lnSpc>
-              <a:spcBef>
-                <a:spcPts val="600"/>
-              </a:spcBef>
-              <a:buAutoNum type="arabicPeriod"/>
-            </a:pPr>
-            <a:r>
-              <a:rPr lang="ko-KR" altLang="en-US" b="1" dirty="0">
-                <a:latin typeface="한컴 말랑말랑 Bold" panose="020F0803000000000000" pitchFamily="50" charset="-127"/>
-                <a:ea typeface="한컴 말랑말랑 Bold" panose="020F0803000000000000" pitchFamily="50" charset="-127"/>
-              </a:rPr>
-              <a:t>분산과</a:t>
-            </a:r>
-            <a:r>
-              <a:rPr lang="en-US" altLang="ko-KR" b="1" dirty="0">
-                <a:latin typeface="한컴 말랑말랑 Bold" panose="020F0803000000000000" pitchFamily="50" charset="-127"/>
-                <a:ea typeface="한컴 말랑말랑 Bold" panose="020F0803000000000000" pitchFamily="50" charset="-127"/>
-              </a:rPr>
-              <a:t> </a:t>
-            </a:r>
-            <a:r>
-              <a:rPr lang="ko-KR" altLang="en-US" b="1" dirty="0">
-                <a:latin typeface="한컴 말랑말랑 Bold" panose="020F0803000000000000" pitchFamily="50" charset="-127"/>
-                <a:ea typeface="한컴 말랑말랑 Bold" panose="020F0803000000000000" pitchFamily="50" charset="-127"/>
-              </a:rPr>
-              <a:t>편향</a:t>
-            </a:r>
-            <a:r>
-              <a:rPr lang="en-US" altLang="ko-KR" b="1" dirty="0">
-                <a:latin typeface="한컴 말랑말랑 Bold" panose="020F0803000000000000" pitchFamily="50" charset="-127"/>
-                <a:ea typeface="한컴 말랑말랑 Bold" panose="020F0803000000000000" pitchFamily="50" charset="-127"/>
-              </a:rPr>
-              <a:t>(Variance &amp; Bias)</a:t>
-            </a:r>
-          </a:p>
-          <a:p>
-            <a:pPr marL="514350" indent="-514350">
-              <a:lnSpc>
-                <a:spcPct val="200000"/>
-              </a:lnSpc>
-              <a:spcBef>
-                <a:spcPts val="600"/>
-              </a:spcBef>
-              <a:buAutoNum type="arabicPeriod"/>
-            </a:pPr>
-            <a:r>
-              <a:rPr lang="ko-KR" altLang="en-US" sz="2000" b="1" dirty="0" err="1">
-                <a:latin typeface="한컴 말랑말랑 Bold" panose="020F0803000000000000" pitchFamily="50" charset="-127"/>
-                <a:ea typeface="한컴 말랑말랑 Bold" panose="020F0803000000000000" pitchFamily="50" charset="-127"/>
-              </a:rPr>
-              <a:t>기대값</a:t>
-            </a:r>
-            <a:r>
-              <a:rPr lang="en-US" altLang="ko-KR" sz="2000" b="1" dirty="0">
-                <a:latin typeface="한컴 말랑말랑 Bold" panose="020F0803000000000000" pitchFamily="50" charset="-127"/>
-                <a:ea typeface="한컴 말랑말랑 Bold" panose="020F0803000000000000" pitchFamily="50" charset="-127"/>
-              </a:rPr>
-              <a:t>(Expectation)</a:t>
-            </a:r>
-            <a:r>
-              <a:rPr lang="ko-KR" altLang="en-US" sz="2000" b="1" dirty="0">
-                <a:latin typeface="한컴 말랑말랑 Bold" panose="020F0803000000000000" pitchFamily="50" charset="-127"/>
-                <a:ea typeface="한컴 말랑말랑 Bold" panose="020F0803000000000000" pitchFamily="50" charset="-127"/>
-              </a:rPr>
-              <a:t>과 분산</a:t>
-            </a:r>
-            <a:r>
-              <a:rPr lang="en-US" altLang="ko-KR" sz="2000" b="1" dirty="0">
-                <a:latin typeface="한컴 말랑말랑 Bold" panose="020F0803000000000000" pitchFamily="50" charset="-127"/>
-                <a:ea typeface="한컴 말랑말랑 Bold" panose="020F0803000000000000" pitchFamily="50" charset="-127"/>
-              </a:rPr>
-              <a:t>(variance)</a:t>
-            </a:r>
-          </a:p>
-          <a:p>
-            <a:pPr marL="514350" indent="-514350">
-              <a:lnSpc>
-                <a:spcPct val="200000"/>
-              </a:lnSpc>
-              <a:spcBef>
-                <a:spcPts val="600"/>
-              </a:spcBef>
-              <a:buAutoNum type="arabicPeriod"/>
-            </a:pPr>
-            <a:r>
-              <a:rPr lang="ko-KR" altLang="en-US" sz="2000" b="1" dirty="0">
-                <a:latin typeface="한컴 말랑말랑 Bold" panose="020F0803000000000000" pitchFamily="50" charset="-127"/>
-                <a:ea typeface="한컴 말랑말랑 Bold" panose="020F0803000000000000" pitchFamily="50" charset="-127"/>
-              </a:rPr>
-              <a:t>확률</a:t>
-            </a:r>
-            <a:r>
-              <a:rPr lang="en-US" altLang="ko-KR" sz="2000" b="1" dirty="0">
-                <a:latin typeface="한컴 말랑말랑 Bold" panose="020F0803000000000000" pitchFamily="50" charset="-127"/>
-                <a:ea typeface="한컴 말랑말랑 Bold" panose="020F0803000000000000" pitchFamily="50" charset="-127"/>
-              </a:rPr>
-              <a:t> </a:t>
-            </a:r>
-            <a:r>
-              <a:rPr lang="ko-KR" altLang="en-US" sz="2000" b="1" dirty="0">
-                <a:latin typeface="한컴 말랑말랑 Bold" panose="020F0803000000000000" pitchFamily="50" charset="-127"/>
-                <a:ea typeface="한컴 말랑말랑 Bold" panose="020F0803000000000000" pitchFamily="50" charset="-127"/>
-              </a:rPr>
-              <a:t>분포</a:t>
-            </a:r>
-            <a:r>
-              <a:rPr lang="en-US" altLang="ko-KR" sz="2000" b="1" dirty="0">
-                <a:latin typeface="한컴 말랑말랑 Bold" panose="020F0803000000000000" pitchFamily="50" charset="-127"/>
-                <a:ea typeface="한컴 말랑말랑 Bold" panose="020F0803000000000000" pitchFamily="50" charset="-127"/>
-              </a:rPr>
-              <a:t>(Random Distribution)</a:t>
-            </a:r>
-          </a:p>
-          <a:p>
-            <a:pPr marL="971550" lvl="1" indent="-514350">
-              <a:lnSpc>
-                <a:spcPct val="200000"/>
-              </a:lnSpc>
-              <a:spcBef>
-                <a:spcPts val="600"/>
-              </a:spcBef>
-              <a:buAutoNum type="arabicPeriod"/>
-            </a:pPr>
-            <a:r>
-              <a:rPr lang="ko-KR" altLang="en-US" b="1" dirty="0">
-                <a:latin typeface="한컴 말랑말랑 Bold" panose="020F0803000000000000" pitchFamily="50" charset="-127"/>
-                <a:ea typeface="한컴 말랑말랑 Bold" panose="020F0803000000000000" pitchFamily="50" charset="-127"/>
-              </a:rPr>
-              <a:t>베르누이분포</a:t>
-            </a:r>
-            <a:r>
-              <a:rPr lang="en-US" altLang="ko-KR" b="1" dirty="0">
-                <a:latin typeface="한컴 말랑말랑 Bold" panose="020F0803000000000000" pitchFamily="50" charset="-127"/>
-                <a:ea typeface="한컴 말랑말랑 Bold" panose="020F0803000000000000" pitchFamily="50" charset="-127"/>
-              </a:rPr>
-              <a:t>, </a:t>
-            </a:r>
-            <a:r>
-              <a:rPr lang="ko-KR" altLang="en-US" b="1" dirty="0">
-                <a:latin typeface="한컴 말랑말랑 Bold" panose="020F0803000000000000" pitchFamily="50" charset="-127"/>
-                <a:ea typeface="한컴 말랑말랑 Bold" panose="020F0803000000000000" pitchFamily="50" charset="-127"/>
-              </a:rPr>
-              <a:t>이항분포</a:t>
-            </a:r>
-            <a:r>
-              <a:rPr lang="en-US" altLang="ko-KR" b="1" dirty="0">
-                <a:latin typeface="한컴 말랑말랑 Bold" panose="020F0803000000000000" pitchFamily="50" charset="-127"/>
-                <a:ea typeface="한컴 말랑말랑 Bold" panose="020F0803000000000000" pitchFamily="50" charset="-127"/>
-              </a:rPr>
-              <a:t>, </a:t>
-            </a:r>
-            <a:r>
-              <a:rPr lang="ko-KR" altLang="en-US" b="1" dirty="0">
-                <a:latin typeface="한컴 말랑말랑 Bold" panose="020F0803000000000000" pitchFamily="50" charset="-127"/>
-                <a:ea typeface="한컴 말랑말랑 Bold" panose="020F0803000000000000" pitchFamily="50" charset="-127"/>
-              </a:rPr>
-              <a:t>정규분포</a:t>
-            </a:r>
-            <a:endParaRPr lang="en-US" altLang="ko-KR" b="1" dirty="0">
-              <a:latin typeface="한컴 말랑말랑 Bold" panose="020F0803000000000000" pitchFamily="50" charset="-127"/>
-              <a:ea typeface="한컴 말랑말랑 Bold" panose="020F0803000000000000" pitchFamily="50" charset="-127"/>
-            </a:endParaRPr>
-          </a:p>
-          <a:p>
-            <a:pPr marL="514350" indent="-514350">
-              <a:lnSpc>
-                <a:spcPct val="200000"/>
-              </a:lnSpc>
-              <a:spcBef>
-                <a:spcPts val="600"/>
-              </a:spcBef>
-              <a:buAutoNum type="arabicPeriod"/>
-            </a:pPr>
-            <a:r>
-              <a:rPr lang="ko-KR" altLang="en-US" sz="2000" b="1" dirty="0">
-                <a:latin typeface="한컴 말랑말랑 Bold" panose="020F0803000000000000" pitchFamily="50" charset="-127"/>
-                <a:ea typeface="한컴 말랑말랑 Bold" panose="020F0803000000000000" pitchFamily="50" charset="-127"/>
-              </a:rPr>
-              <a:t>조건부 확률</a:t>
-            </a:r>
-            <a:r>
-              <a:rPr lang="en-US" altLang="ko-KR" sz="2000" b="1" dirty="0">
-                <a:latin typeface="한컴 말랑말랑 Bold" panose="020F0803000000000000" pitchFamily="50" charset="-127"/>
-                <a:ea typeface="한컴 말랑말랑 Bold" panose="020F0803000000000000" pitchFamily="50" charset="-127"/>
-              </a:rPr>
-              <a:t>(Conditional Probability)</a:t>
-            </a:r>
-          </a:p>
-        </p:txBody>
-      </p:sp>
-    </p:spTree>
-    <p:extLst>
-      <p:ext uri="{BB962C8B-B14F-4D97-AF65-F5344CB8AC3E}">
-        <p14:creationId xmlns:p14="http://schemas.microsoft.com/office/powerpoint/2010/main" val="1332821853"/>
       </p:ext>
     </p:extLst>
   </p:cSld>
@@ -27460,17 +28556,6 @@
 </file>
 
 <file path=customXml/item1.xml><?xml version="1.0" encoding="utf-8"?>
-<p:properties xmlns:p="http://schemas.microsoft.com/office/2006/metadata/properties" xmlns:xsi="http://www.w3.org/2001/XMLSchema-instance" xmlns:pc="http://schemas.microsoft.com/office/infopath/2007/PartnerControls">
-  <documentManagement>
-    <VSO_x0020_item_x0020_id xmlns="40262f94-9f35-4ac3-9a90-690165a166b7" xsi:nil="true"/>
-    <Assetid_x0020_ xmlns="40262f94-9f35-4ac3-9a90-690165a166b7" xsi:nil="true"/>
-    <Item_x0020_Details xmlns="40262f94-9f35-4ac3-9a90-690165a166b7" xsi:nil="true"/>
-    <Template_x0020_details xmlns="40262f94-9f35-4ac3-9a90-690165a166b7" xsi:nil="true"/>
-  </documentManagement>
-</p:properties>
-</file>
-
-<file path=customXml/item2.xml><?xml version="1.0" encoding="utf-8"?>
 <?mso-contentType ?>
 <FormTemplates xmlns="http://schemas.microsoft.com/sharepoint/v3/contenttype/forms">
   <Display>DocumentLibraryForm</Display>
@@ -27479,7 +28564,7 @@
 </FormTemplates>
 </file>
 
-<file path=customXml/item3.xml><?xml version="1.0" encoding="utf-8"?>
+<file path=customXml/item2.xml><?xml version="1.0" encoding="utf-8"?>
 <ct:contentTypeSchema xmlns:ct="http://schemas.microsoft.com/office/2006/metadata/contentType" xmlns:ma="http://schemas.microsoft.com/office/2006/metadata/properties/metaAttributes" ct:_="" ma:_="" ma:contentTypeName="Document" ma:contentTypeID="0x010100AA3F7D94069FF64A86F7DFF56D60E3BE" ma:contentTypeVersion="6" ma:contentTypeDescription="Create a new document." ma:contentTypeScope="" ma:versionID="c32302c77d4085ecf495bdddb7f5e889">
   <xsd:schema xmlns:xsd="http://www.w3.org/2001/XMLSchema" xmlns:xs="http://www.w3.org/2001/XMLSchema" xmlns:p="http://schemas.microsoft.com/office/2006/metadata/properties" xmlns:ns2="a4f35948-e619-41b3-aa29-22878b09cfd2" xmlns:ns3="40262f94-9f35-4ac3-9a90-690165a166b7" targetNamespace="http://schemas.microsoft.com/office/2006/metadata/properties" ma:root="true" ma:fieldsID="4ab5ae46be95f9d0be6107e8200be7a2" ns2:_="" ns3:_="">
     <xsd:import namespace="a4f35948-e619-41b3-aa29-22878b09cfd2"/>
@@ -27660,24 +28745,18 @@
 </ct:contentTypeSchema>
 </file>
 
-<file path=customXml/itemProps1.xml><?xml version="1.0" encoding="utf-8"?>
-<ds:datastoreItem xmlns:ds="http://schemas.openxmlformats.org/officeDocument/2006/customXml" ds:itemID="{50AACE6D-8EB6-447A-8DFD-C2C0C52916AC}">
-  <ds:schemaRefs>
-    <ds:schemaRef ds:uri="a4f35948-e619-41b3-aa29-22878b09cfd2"/>
-    <ds:schemaRef ds:uri="http://purl.org/dc/elements/1.1/"/>
-    <ds:schemaRef ds:uri="http://schemas.microsoft.com/office/infopath/2007/PartnerControls"/>
-    <ds:schemaRef ds:uri="40262f94-9f35-4ac3-9a90-690165a166b7"/>
-    <ds:schemaRef ds:uri="http://purl.org/dc/dcmitype/"/>
-    <ds:schemaRef ds:uri="http://schemas.microsoft.com/office/2006/documentManagement/types"/>
-    <ds:schemaRef ds:uri="http://schemas.microsoft.com/office/2006/metadata/properties"/>
-    <ds:schemaRef ds:uri="http://schemas.openxmlformats.org/package/2006/metadata/core-properties"/>
-    <ds:schemaRef ds:uri="http://www.w3.org/XML/1998/namespace"/>
-    <ds:schemaRef ds:uri="http://purl.org/dc/terms/"/>
-  </ds:schemaRefs>
-</ds:datastoreItem>
+<file path=customXml/item3.xml><?xml version="1.0" encoding="utf-8"?>
+<p:properties xmlns:p="http://schemas.microsoft.com/office/2006/metadata/properties" xmlns:xsi="http://www.w3.org/2001/XMLSchema-instance" xmlns:pc="http://schemas.microsoft.com/office/infopath/2007/PartnerControls">
+  <documentManagement>
+    <VSO_x0020_item_x0020_id xmlns="40262f94-9f35-4ac3-9a90-690165a166b7" xsi:nil="true"/>
+    <Assetid_x0020_ xmlns="40262f94-9f35-4ac3-9a90-690165a166b7" xsi:nil="true"/>
+    <Item_x0020_Details xmlns="40262f94-9f35-4ac3-9a90-690165a166b7" xsi:nil="true"/>
+    <Template_x0020_details xmlns="40262f94-9f35-4ac3-9a90-690165a166b7" xsi:nil="true"/>
+  </documentManagement>
+</p:properties>
 </file>
 
-<file path=customXml/itemProps2.xml><?xml version="1.0" encoding="utf-8"?>
+<file path=customXml/itemProps1.xml><?xml version="1.0" encoding="utf-8"?>
 <ds:datastoreItem xmlns:ds="http://schemas.openxmlformats.org/officeDocument/2006/customXml" ds:itemID="{7F9B8BCC-BF24-4800-92E1-9F891BBB27E6}">
   <ds:schemaRefs>
     <ds:schemaRef ds:uri="http://schemas.microsoft.com/sharepoint/v3/contenttype/forms"/>
@@ -27685,7 +28764,7 @@
 </ds:datastoreItem>
 </file>
 
-<file path=customXml/itemProps3.xml><?xml version="1.0" encoding="utf-8"?>
+<file path=customXml/itemProps2.xml><?xml version="1.0" encoding="utf-8"?>
 <ds:datastoreItem xmlns:ds="http://schemas.openxmlformats.org/officeDocument/2006/customXml" ds:itemID="{5CCB2C71-1ED8-4540-B003-293B5E75C71F}">
   <ds:schemaRefs>
     <ds:schemaRef ds:uri="http://schemas.microsoft.com/office/2006/metadata/contentType"/>
@@ -27702,4 +28781,21 @@
     <ds:schemaRef ds:uri="http://schemas.microsoft.com/internal/obd"/>
   </ds:schemaRefs>
 </ds:datastoreItem>
+</file>
+
+<file path=customXml/itemProps3.xml><?xml version="1.0" encoding="utf-8"?>
+<ds:datastoreItem xmlns:ds="http://schemas.openxmlformats.org/officeDocument/2006/customXml" ds:itemID="{50AACE6D-8EB6-447A-8DFD-C2C0C52916AC}">
+  <ds:schemaRefs>
+    <ds:schemaRef ds:uri="a4f35948-e619-41b3-aa29-22878b09cfd2"/>
+    <ds:schemaRef ds:uri="http://purl.org/dc/elements/1.1/"/>
+    <ds:schemaRef ds:uri="http://schemas.microsoft.com/office/infopath/2007/PartnerControls"/>
+    <ds:schemaRef ds:uri="40262f94-9f35-4ac3-9a90-690165a166b7"/>
+    <ds:schemaRef ds:uri="http://purl.org/dc/dcmitype/"/>
+    <ds:schemaRef ds:uri="http://schemas.microsoft.com/office/2006/documentManagement/types"/>
+    <ds:schemaRef ds:uri="http://schemas.microsoft.com/office/2006/metadata/properties"/>
+    <ds:schemaRef ds:uri="http://schemas.openxmlformats.org/package/2006/metadata/core-properties"/>
+    <ds:schemaRef ds:uri="http://www.w3.org/XML/1998/namespace"/>
+    <ds:schemaRef ds:uri="http://purl.org/dc/terms/"/>
+  </ds:schemaRefs>
+</ds:datastoreItem>
 </file>